--- a/public/downloads/praesentation/M20.pptx
+++ b/public/downloads/praesentation/M20.pptx
@@ -19,6 +19,17 @@
     <p:sldId id="267" r:id="rId18"/>
     <p:sldId id="268" r:id="rId19"/>
     <p:sldId id="269" r:id="rId20"/>
+    <p:sldId id="270" r:id="rId21"/>
+    <p:sldId id="271" r:id="rId22"/>
+    <p:sldId id="272" r:id="rId23"/>
+    <p:sldId id="273" r:id="rId24"/>
+    <p:sldId id="274" r:id="rId25"/>
+    <p:sldId id="275" r:id="rId26"/>
+    <p:sldId id="276" r:id="rId27"/>
+    <p:sldId id="277" r:id="rId28"/>
+    <p:sldId id="278" r:id="rId29"/>
+    <p:sldId id="279" r:id="rId30"/>
+    <p:sldId id="280" r:id="rId31"/>
   </p:sldIdLst>
   <p:sldSz cx="12188952" cy="6858000" type="screen4x3"/>
   <p:notesSz cx="6858000" cy="9144000"/>
@@ -3160,8 +3171,8 @@
         </p:nvSpPr>
         <p:spPr>
           <a:xfrm>
-            <a:off x="365760" y="365760"/>
-            <a:ext cx="11430000" cy="457200"/>
+            <a:off x="365760" y="320040"/>
+            <a:ext cx="11430000" cy="411480"/>
           </a:xfrm>
           <a:prstGeom prst="rect">
             <a:avLst/>
@@ -3176,13 +3187,13 @@
           <a:p>
             <a:pPr algn="l"/>
             <a:r>
-              <a:rPr sz="1100" b="0">
-                <a:solidFill>
-                  <a:srgbClr val="FFFFFF"/>
+              <a:rPr sz="1100" b="0" i="0">
+                <a:solidFill>
+                  <a:srgbClr val="BBCCEE"/>
                 </a:solidFill>
                 <a:latin typeface="Arial"/>
               </a:rPr>
-              <a:t>M20  ·  K-06 Führung &amp; Entwicklung  ·  Stratege  ·  90 Min.</a:t>
+              <a:t>M20  ·  K-06 Führung &amp; Entwicklung  ·  Zielstufe: Stratege  ·  90 Min.</a:t>
             </a:r>
           </a:p>
         </p:txBody>
@@ -3195,14 +3206,14 @@
         </p:nvSpPr>
         <p:spPr>
           <a:xfrm>
-            <a:off x="365760" y="868680"/>
-            <a:ext cx="7315200" cy="27432"/>
+            <a:off x="365760" y="804672"/>
+            <a:ext cx="8229600" cy="22860"/>
           </a:xfrm>
           <a:prstGeom prst="rect">
             <a:avLst/>
           </a:prstGeom>
           <a:solidFill>
-            <a:srgbClr val="FFFFFF"/>
+            <a:srgbClr val="335CC0"/>
           </a:solidFill>
           <a:ln>
             <a:noFill/>
@@ -3238,8 +3249,8 @@
         </p:nvSpPr>
         <p:spPr>
           <a:xfrm>
-            <a:off x="365760" y="1097280"/>
-            <a:ext cx="11430000" cy="2286000"/>
+            <a:off x="365760" y="1005840"/>
+            <a:ext cx="11430000" cy="2560320"/>
           </a:xfrm>
           <a:prstGeom prst="rect">
             <a:avLst/>
@@ -3254,7 +3265,7 @@
           <a:p>
             <a:pPr algn="l"/>
             <a:r>
-              <a:rPr sz="4000" b="1">
+              <a:rPr sz="4200" b="1" i="0">
                 <a:solidFill>
                   <a:srgbClr val="FFFFFF"/>
                 </a:solidFill>
@@ -3273,8 +3284,8 @@
         </p:nvSpPr>
         <p:spPr>
           <a:xfrm>
-            <a:off x="365760" y="3200400"/>
-            <a:ext cx="9144000" cy="914400"/>
+            <a:off x="365760" y="3383280"/>
+            <a:ext cx="10058400" cy="822960"/>
           </a:xfrm>
           <a:prstGeom prst="rect">
             <a:avLst/>
@@ -3289,7 +3300,7 @@
           <a:p>
             <a:pPr algn="l"/>
             <a:r>
-              <a:rPr sz="2000" b="0">
+              <a:rPr sz="2000" b="0" i="1">
                 <a:solidFill>
                   <a:srgbClr val="CCD6F0"/>
                 </a:solidFill>
@@ -3308,8 +3319,8 @@
         </p:nvSpPr>
         <p:spPr>
           <a:xfrm>
-            <a:off x="365760" y="6217920"/>
-            <a:ext cx="11430000" cy="457200"/>
+            <a:off x="365760" y="6309360"/>
+            <a:ext cx="11430000" cy="365760"/>
           </a:xfrm>
           <a:prstGeom prst="rect">
             <a:avLst/>
@@ -3324,9 +3335,9 @@
           <a:p>
             <a:pPr algn="l"/>
             <a:r>
-              <a:rPr sz="1000" b="0">
-                <a:solidFill>
-                  <a:srgbClr val="99AACC"/>
+              <a:rPr sz="900" b="0" i="0">
+                <a:solidFill>
+                  <a:srgbClr val="889ACC"/>
                 </a:solidFill>
                 <a:latin typeface="Arial"/>
               </a:rPr>
@@ -3349,7 +3360,7 @@
     <p:bg>
       <p:bgPr>
         <a:solidFill>
-          <a:srgbClr val="1A1A1A"/>
+          <a:srgbClr val="FFFFFF"/>
         </a:solidFill>
         <a:effectLst/>
       </p:bgPr>
@@ -3376,7 +3387,7 @@
             <a:avLst/>
           </a:prstGeom>
           <a:solidFill>
-            <a:srgbClr val="E05B00"/>
+            <a:srgbClr val="003DA5"/>
           </a:solidFill>
           <a:ln>
             <a:noFill/>
@@ -3412,8 +3423,8 @@
         </p:nvSpPr>
         <p:spPr>
           <a:xfrm>
-            <a:off x="365760" y="2286000"/>
-            <a:ext cx="11430000" cy="1828800"/>
+            <a:off x="228600" y="182880"/>
+            <a:ext cx="11430000" cy="320040"/>
           </a:xfrm>
           <a:prstGeom prst="rect">
             <a:avLst/>
@@ -3428,17 +3439,843 @@
           <a:p>
             <a:pPr algn="l"/>
             <a:r>
-              <a:rPr sz="3600" b="1">
-                <a:solidFill>
-                  <a:srgbClr val="FFFFFF"/>
+              <a:rPr sz="900" b="0" i="0">
+                <a:solidFill>
+                  <a:srgbClr val="556575"/>
                 </a:solidFill>
                 <a:latin typeface="Arial"/>
               </a:rPr>
-              <a:t>Format 4: Digitale Sichtbarkeit (nachrangig, selektiv)</a:t>
-            </a:r>
-          </a:p>
-        </p:txBody>
-      </p:sp>
+              <a:t>M20 · 4.3 Netzwerkanalyse: Den eigenen Status realistisch einschätzen</a:t>
+            </a:r>
+          </a:p>
+        </p:txBody>
+      </p:sp>
+      <p:sp>
+        <p:nvSpPr>
+          <p:cNvPr id="4" name="TextBox 3"/>
+          <p:cNvSpPr txBox="1"/>
+          <p:nvPr/>
+        </p:nvSpPr>
+        <p:spPr>
+          <a:xfrm>
+            <a:off x="365760" y="274320"/>
+            <a:ext cx="11430000" cy="777240"/>
+          </a:xfrm>
+          <a:prstGeom prst="rect">
+            <a:avLst/>
+          </a:prstGeom>
+          <a:noFill/>
+        </p:spPr>
+        <p:txBody>
+          <a:bodyPr wrap="square">
+            <a:spAutoFit/>
+          </a:bodyPr>
+          <a:lstStyle/>
+          <a:p>
+            <a:pPr algn="l"/>
+            <a:r>
+              <a:rPr sz="2200" b="1" i="0">
+                <a:solidFill>
+                  <a:srgbClr val="003DA5"/>
+                </a:solidFill>
+                <a:latin typeface="Arial"/>
+              </a:rPr>
+              <a:t>Das Netzwerk-Audit (3 Fragen)</a:t>
+            </a:r>
+          </a:p>
+        </p:txBody>
+      </p:sp>
+      <p:sp>
+        <p:nvSpPr>
+          <p:cNvPr id="5" name="Rectangle 4"/>
+          <p:cNvSpPr/>
+          <p:nvPr/>
+        </p:nvSpPr>
+        <p:spPr>
+          <a:xfrm>
+            <a:off x="365760" y="1005840"/>
+            <a:ext cx="11430000" cy="27432"/>
+          </a:xfrm>
+          <a:prstGeom prst="rect">
+            <a:avLst/>
+          </a:prstGeom>
+          <a:solidFill>
+            <a:srgbClr val="D1D5DB"/>
+          </a:solidFill>
+          <a:ln>
+            <a:noFill/>
+          </a:ln>
+        </p:spPr>
+        <p:style>
+          <a:lnRef idx="1">
+            <a:schemeClr val="accent1"/>
+          </a:lnRef>
+          <a:fillRef idx="3">
+            <a:schemeClr val="accent1"/>
+          </a:fillRef>
+          <a:effectRef idx="2">
+            <a:schemeClr val="accent1"/>
+          </a:effectRef>
+          <a:fontRef idx="minor">
+            <a:schemeClr val="lt1"/>
+          </a:fontRef>
+        </p:style>
+        <p:txBody>
+          <a:bodyPr rtlCol="0" anchor="ctr"/>
+          <a:lstStyle/>
+          <a:p>
+            <a:pPr algn="ctr"/>
+          </a:p>
+        </p:txBody>
+      </p:sp>
+      <p:graphicFrame>
+        <p:nvGraphicFramePr>
+          <p:cNvPr id="6" name="Table 5"/>
+          <p:cNvGraphicFramePr>
+            <a:graphicFrameLocks noGrp="1"/>
+          </p:cNvGraphicFramePr>
+          <p:nvPr/>
+        </p:nvGraphicFramePr>
+        <p:xfrm>
+          <a:off x="365760" y="1143000"/>
+          <a:ext cx="11430000" cy="3803904"/>
+        </p:xfrm>
+        <a:graphic>
+          <a:graphicData uri="http://schemas.openxmlformats.org/drawingml/2006/table">
+            <a:tbl>
+              <a:tblPr firstRow="1" bandRow="1">
+                <a:tableStyleId>{5C22544A-7EE6-4342-B048-85BDC9FD1C3A}</a:tableStyleId>
+              </a:tblPr>
+              <a:tblGrid>
+                <a:gridCol w="2857500"/>
+                <a:gridCol w="2857500"/>
+                <a:gridCol w="2857500"/>
+                <a:gridCol w="2857500"/>
+              </a:tblGrid>
+              <a:tr h="475488">
+                <a:tc>
+                  <a:txBody>
+                    <a:bodyPr wrap="square"/>
+                    <a:lstStyle/>
+                    <a:p>
+                      <a:r>
+                        <a:rPr sz="1100" b="1">
+                          <a:solidFill>
+                            <a:srgbClr val="FFFFFF"/>
+                          </a:solidFill>
+                          <a:latin typeface="Arial"/>
+                        </a:rPr>
+                        <a:t>Kontakttyp</a:t>
+                      </a:r>
+                    </a:p>
+                  </a:txBody>
+                  <a:tcPr>
+                    <a:solidFill>
+                      <a:srgbClr val="003DA5"/>
+                    </a:solidFill>
+                  </a:tcPr>
+                </a:tc>
+                <a:tc>
+                  <a:txBody>
+                    <a:bodyPr wrap="square"/>
+                    <a:lstStyle/>
+                    <a:p>
+                      <a:r>
+                        <a:rPr sz="1100" b="1">
+                          <a:solidFill>
+                            <a:srgbClr val="FFFFFF"/>
+                          </a:solidFill>
+                          <a:latin typeface="Arial"/>
+                        </a:rPr>
+                        <a:t>Anzahl (ca.)</a:t>
+                      </a:r>
+                    </a:p>
+                  </a:txBody>
+                  <a:tcPr>
+                    <a:solidFill>
+                      <a:srgbClr val="003DA5"/>
+                    </a:solidFill>
+                  </a:tcPr>
+                </a:tc>
+                <a:tc>
+                  <a:txBody>
+                    <a:bodyPr wrap="square"/>
+                    <a:lstStyle/>
+                    <a:p>
+                      <a:r>
+                        <a:rPr sz="1100" b="1">
+                          <a:solidFill>
+                            <a:srgbClr val="FFFFFF"/>
+                          </a:solidFill>
+                          <a:latin typeface="Arial"/>
+                        </a:rPr>
+                        <a:t>Qualität (1–5)</a:t>
+                      </a:r>
+                    </a:p>
+                  </a:txBody>
+                  <a:tcPr>
+                    <a:solidFill>
+                      <a:srgbClr val="003DA5"/>
+                    </a:solidFill>
+                  </a:tcPr>
+                </a:tc>
+                <a:tc>
+                  <a:txBody>
+                    <a:bodyPr wrap="square"/>
+                    <a:lstStyle/>
+                    <a:p>
+                      <a:r>
+                        <a:rPr sz="1100" b="1">
+                          <a:solidFill>
+                            <a:srgbClr val="FFFFFF"/>
+                          </a:solidFill>
+                          <a:latin typeface="Arial"/>
+                        </a:rPr>
+                        <a:t>Zuletzt aktiv</a:t>
+                      </a:r>
+                    </a:p>
+                  </a:txBody>
+                  <a:tcPr>
+                    <a:solidFill>
+                      <a:srgbClr val="003DA5"/>
+                    </a:solidFill>
+                  </a:tcPr>
+                </a:tc>
+              </a:tr>
+              <a:tr h="475488">
+                <a:tc>
+                  <a:txBody>
+                    <a:bodyPr wrap="square"/>
+                    <a:lstStyle/>
+                    <a:p>
+                      <a:r>
+                        <a:rPr sz="1100" b="0">
+                          <a:solidFill>
+                            <a:srgbClr val="1A1A1A"/>
+                          </a:solidFill>
+                          <a:latin typeface="Arial"/>
+                        </a:rPr>
+                        <a:t>Interne Kollegen (FK-Team)</a:t>
+                      </a:r>
+                    </a:p>
+                  </a:txBody>
+                  <a:tcPr>
+                    <a:solidFill>
+                      <a:srgbClr val="FFFFFF"/>
+                    </a:solidFill>
+                  </a:tcPr>
+                </a:tc>
+                <a:tc>
+                  <a:txBody>
+                    <a:bodyPr wrap="square"/>
+                    <a:lstStyle/>
+                    <a:p>
+                      <a:r>
+                        <a:rPr sz="1100" b="0">
+                          <a:solidFill>
+                            <a:srgbClr val="1A1A1A"/>
+                          </a:solidFill>
+                          <a:latin typeface="Arial"/>
+                        </a:rPr>
+                        <a:t/>
+                      </a:r>
+                    </a:p>
+                  </a:txBody>
+                  <a:tcPr>
+                    <a:solidFill>
+                      <a:srgbClr val="FFFFFF"/>
+                    </a:solidFill>
+                  </a:tcPr>
+                </a:tc>
+                <a:tc>
+                  <a:txBody>
+                    <a:bodyPr wrap="square"/>
+                    <a:lstStyle/>
+                    <a:p>
+                      <a:r>
+                        <a:rPr sz="1100" b="0">
+                          <a:solidFill>
+                            <a:srgbClr val="1A1A1A"/>
+                          </a:solidFill>
+                          <a:latin typeface="Arial"/>
+                        </a:rPr>
+                        <a:t/>
+                      </a:r>
+                    </a:p>
+                  </a:txBody>
+                  <a:tcPr>
+                    <a:solidFill>
+                      <a:srgbClr val="FFFFFF"/>
+                    </a:solidFill>
+                  </a:tcPr>
+                </a:tc>
+                <a:tc>
+                  <a:txBody>
+                    <a:bodyPr wrap="square"/>
+                    <a:lstStyle/>
+                    <a:p>
+                      <a:r>
+                        <a:rPr sz="1100" b="0">
+                          <a:solidFill>
+                            <a:srgbClr val="1A1A1A"/>
+                          </a:solidFill>
+                          <a:latin typeface="Arial"/>
+                        </a:rPr>
+                        <a:t/>
+                      </a:r>
+                    </a:p>
+                  </a:txBody>
+                  <a:tcPr>
+                    <a:solidFill>
+                      <a:srgbClr val="FFFFFF"/>
+                    </a:solidFill>
+                  </a:tcPr>
+                </a:tc>
+              </a:tr>
+              <a:tr h="475488">
+                <a:tc>
+                  <a:txBody>
+                    <a:bodyPr wrap="square"/>
+                    <a:lstStyle/>
+                    <a:p>
+                      <a:r>
+                        <a:rPr sz="1100" b="0">
+                          <a:solidFill>
+                            <a:srgbClr val="1A1A1A"/>
+                          </a:solidFill>
+                          <a:latin typeface="Arial"/>
+                        </a:rPr>
+                        <a:t>Verbundpartner-Kontakte</a:t>
+                      </a:r>
+                    </a:p>
+                  </a:txBody>
+                  <a:tcPr>
+                    <a:solidFill>
+                      <a:srgbClr val="F4F6FA"/>
+                    </a:solidFill>
+                  </a:tcPr>
+                </a:tc>
+                <a:tc>
+                  <a:txBody>
+                    <a:bodyPr wrap="square"/>
+                    <a:lstStyle/>
+                    <a:p>
+                      <a:r>
+                        <a:rPr sz="1100" b="0">
+                          <a:solidFill>
+                            <a:srgbClr val="1A1A1A"/>
+                          </a:solidFill>
+                          <a:latin typeface="Arial"/>
+                        </a:rPr>
+                        <a:t/>
+                      </a:r>
+                    </a:p>
+                  </a:txBody>
+                  <a:tcPr>
+                    <a:solidFill>
+                      <a:srgbClr val="F4F6FA"/>
+                    </a:solidFill>
+                  </a:tcPr>
+                </a:tc>
+                <a:tc>
+                  <a:txBody>
+                    <a:bodyPr wrap="square"/>
+                    <a:lstStyle/>
+                    <a:p>
+                      <a:r>
+                        <a:rPr sz="1100" b="0">
+                          <a:solidFill>
+                            <a:srgbClr val="1A1A1A"/>
+                          </a:solidFill>
+                          <a:latin typeface="Arial"/>
+                        </a:rPr>
+                        <a:t/>
+                      </a:r>
+                    </a:p>
+                  </a:txBody>
+                  <a:tcPr>
+                    <a:solidFill>
+                      <a:srgbClr val="F4F6FA"/>
+                    </a:solidFill>
+                  </a:tcPr>
+                </a:tc>
+                <a:tc>
+                  <a:txBody>
+                    <a:bodyPr wrap="square"/>
+                    <a:lstStyle/>
+                    <a:p>
+                      <a:r>
+                        <a:rPr sz="1100" b="0">
+                          <a:solidFill>
+                            <a:srgbClr val="1A1A1A"/>
+                          </a:solidFill>
+                          <a:latin typeface="Arial"/>
+                        </a:rPr>
+                        <a:t/>
+                      </a:r>
+                    </a:p>
+                  </a:txBody>
+                  <a:tcPr>
+                    <a:solidFill>
+                      <a:srgbClr val="F4F6FA"/>
+                    </a:solidFill>
+                  </a:tcPr>
+                </a:tc>
+              </a:tr>
+              <a:tr h="475488">
+                <a:tc>
+                  <a:txBody>
+                    <a:bodyPr wrap="square"/>
+                    <a:lstStyle/>
+                    <a:p>
+                      <a:r>
+                        <a:rPr sz="1100" b="0">
+                          <a:solidFill>
+                            <a:srgbClr val="1A1A1A"/>
+                          </a:solidFill>
+                          <a:latin typeface="Arial"/>
+                        </a:rPr>
+                        <a:t>Steuerberater / WP in der Region</a:t>
+                      </a:r>
+                    </a:p>
+                  </a:txBody>
+                  <a:tcPr>
+                    <a:solidFill>
+                      <a:srgbClr val="FFFFFF"/>
+                    </a:solidFill>
+                  </a:tcPr>
+                </a:tc>
+                <a:tc>
+                  <a:txBody>
+                    <a:bodyPr wrap="square"/>
+                    <a:lstStyle/>
+                    <a:p>
+                      <a:r>
+                        <a:rPr sz="1100" b="0">
+                          <a:solidFill>
+                            <a:srgbClr val="1A1A1A"/>
+                          </a:solidFill>
+                          <a:latin typeface="Arial"/>
+                        </a:rPr>
+                        <a:t/>
+                      </a:r>
+                    </a:p>
+                  </a:txBody>
+                  <a:tcPr>
+                    <a:solidFill>
+                      <a:srgbClr val="FFFFFF"/>
+                    </a:solidFill>
+                  </a:tcPr>
+                </a:tc>
+                <a:tc>
+                  <a:txBody>
+                    <a:bodyPr wrap="square"/>
+                    <a:lstStyle/>
+                    <a:p>
+                      <a:r>
+                        <a:rPr sz="1100" b="0">
+                          <a:solidFill>
+                            <a:srgbClr val="1A1A1A"/>
+                          </a:solidFill>
+                          <a:latin typeface="Arial"/>
+                        </a:rPr>
+                        <a:t/>
+                      </a:r>
+                    </a:p>
+                  </a:txBody>
+                  <a:tcPr>
+                    <a:solidFill>
+                      <a:srgbClr val="FFFFFF"/>
+                    </a:solidFill>
+                  </a:tcPr>
+                </a:tc>
+                <a:tc>
+                  <a:txBody>
+                    <a:bodyPr wrap="square"/>
+                    <a:lstStyle/>
+                    <a:p>
+                      <a:r>
+                        <a:rPr sz="1100" b="0">
+                          <a:solidFill>
+                            <a:srgbClr val="1A1A1A"/>
+                          </a:solidFill>
+                          <a:latin typeface="Arial"/>
+                        </a:rPr>
+                        <a:t/>
+                      </a:r>
+                    </a:p>
+                  </a:txBody>
+                  <a:tcPr>
+                    <a:solidFill>
+                      <a:srgbClr val="FFFFFF"/>
+                    </a:solidFill>
+                  </a:tcPr>
+                </a:tc>
+              </a:tr>
+              <a:tr h="475488">
+                <a:tc>
+                  <a:txBody>
+                    <a:bodyPr wrap="square"/>
+                    <a:lstStyle/>
+                    <a:p>
+                      <a:r>
+                        <a:rPr sz="1100" b="0">
+                          <a:solidFill>
+                            <a:srgbClr val="1A1A1A"/>
+                          </a:solidFill>
+                          <a:latin typeface="Arial"/>
+                        </a:rPr>
+                        <a:t>Branchenverband-Kontakte</a:t>
+                      </a:r>
+                    </a:p>
+                  </a:txBody>
+                  <a:tcPr>
+                    <a:solidFill>
+                      <a:srgbClr val="F4F6FA"/>
+                    </a:solidFill>
+                  </a:tcPr>
+                </a:tc>
+                <a:tc>
+                  <a:txBody>
+                    <a:bodyPr wrap="square"/>
+                    <a:lstStyle/>
+                    <a:p>
+                      <a:r>
+                        <a:rPr sz="1100" b="0">
+                          <a:solidFill>
+                            <a:srgbClr val="1A1A1A"/>
+                          </a:solidFill>
+                          <a:latin typeface="Arial"/>
+                        </a:rPr>
+                        <a:t/>
+                      </a:r>
+                    </a:p>
+                  </a:txBody>
+                  <a:tcPr>
+                    <a:solidFill>
+                      <a:srgbClr val="F4F6FA"/>
+                    </a:solidFill>
+                  </a:tcPr>
+                </a:tc>
+                <a:tc>
+                  <a:txBody>
+                    <a:bodyPr wrap="square"/>
+                    <a:lstStyle/>
+                    <a:p>
+                      <a:r>
+                        <a:rPr sz="1100" b="0">
+                          <a:solidFill>
+                            <a:srgbClr val="1A1A1A"/>
+                          </a:solidFill>
+                          <a:latin typeface="Arial"/>
+                        </a:rPr>
+                        <a:t/>
+                      </a:r>
+                    </a:p>
+                  </a:txBody>
+                  <a:tcPr>
+                    <a:solidFill>
+                      <a:srgbClr val="F4F6FA"/>
+                    </a:solidFill>
+                  </a:tcPr>
+                </a:tc>
+                <a:tc>
+                  <a:txBody>
+                    <a:bodyPr wrap="square"/>
+                    <a:lstStyle/>
+                    <a:p>
+                      <a:r>
+                        <a:rPr sz="1100" b="0">
+                          <a:solidFill>
+                            <a:srgbClr val="1A1A1A"/>
+                          </a:solidFill>
+                          <a:latin typeface="Arial"/>
+                        </a:rPr>
+                        <a:t/>
+                      </a:r>
+                    </a:p>
+                  </a:txBody>
+                  <a:tcPr>
+                    <a:solidFill>
+                      <a:srgbClr val="F4F6FA"/>
+                    </a:solidFill>
+                  </a:tcPr>
+                </a:tc>
+              </a:tr>
+              <a:tr h="475488">
+                <a:tc>
+                  <a:txBody>
+                    <a:bodyPr wrap="square"/>
+                    <a:lstStyle/>
+                    <a:p>
+                      <a:r>
+                        <a:rPr sz="1100" b="0">
+                          <a:solidFill>
+                            <a:srgbClr val="1A1A1A"/>
+                          </a:solidFill>
+                          <a:latin typeface="Arial"/>
+                        </a:rPr>
+                        <a:t>Formelle Kammermitgliedschaften / Ausschüsse (IHK, HWK)</a:t>
+                      </a:r>
+                    </a:p>
+                  </a:txBody>
+                  <a:tcPr>
+                    <a:solidFill>
+                      <a:srgbClr val="FFFFFF"/>
+                    </a:solidFill>
+                  </a:tcPr>
+                </a:tc>
+                <a:tc>
+                  <a:txBody>
+                    <a:bodyPr wrap="square"/>
+                    <a:lstStyle/>
+                    <a:p>
+                      <a:r>
+                        <a:rPr sz="1100" b="0">
+                          <a:solidFill>
+                            <a:srgbClr val="1A1A1A"/>
+                          </a:solidFill>
+                          <a:latin typeface="Arial"/>
+                        </a:rPr>
+                        <a:t/>
+                      </a:r>
+                    </a:p>
+                  </a:txBody>
+                  <a:tcPr>
+                    <a:solidFill>
+                      <a:srgbClr val="FFFFFF"/>
+                    </a:solidFill>
+                  </a:tcPr>
+                </a:tc>
+                <a:tc>
+                  <a:txBody>
+                    <a:bodyPr wrap="square"/>
+                    <a:lstStyle/>
+                    <a:p>
+                      <a:r>
+                        <a:rPr sz="1100" b="0">
+                          <a:solidFill>
+                            <a:srgbClr val="1A1A1A"/>
+                          </a:solidFill>
+                          <a:latin typeface="Arial"/>
+                        </a:rPr>
+                        <a:t/>
+                      </a:r>
+                    </a:p>
+                  </a:txBody>
+                  <a:tcPr>
+                    <a:solidFill>
+                      <a:srgbClr val="FFFFFF"/>
+                    </a:solidFill>
+                  </a:tcPr>
+                </a:tc>
+                <a:tc>
+                  <a:txBody>
+                    <a:bodyPr wrap="square"/>
+                    <a:lstStyle/>
+                    <a:p>
+                      <a:r>
+                        <a:rPr sz="1100" b="0">
+                          <a:solidFill>
+                            <a:srgbClr val="1A1A1A"/>
+                          </a:solidFill>
+                          <a:latin typeface="Arial"/>
+                        </a:rPr>
+                        <a:t/>
+                      </a:r>
+                    </a:p>
+                  </a:txBody>
+                  <a:tcPr>
+                    <a:solidFill>
+                      <a:srgbClr val="FFFFFF"/>
+                    </a:solidFill>
+                  </a:tcPr>
+                </a:tc>
+              </a:tr>
+              <a:tr h="475488">
+                <a:tc>
+                  <a:txBody>
+                    <a:bodyPr wrap="square"/>
+                    <a:lstStyle/>
+                    <a:p>
+                      <a:r>
+                        <a:rPr sz="1100" b="0">
+                          <a:solidFill>
+                            <a:srgbClr val="1A1A1A"/>
+                          </a:solidFill>
+                          <a:latin typeface="Arial"/>
+                        </a:rPr>
+                        <a:t>Persönliche Unternehmerclubs / Runde Tische (Rotary, Lions, WJ, BNI, Maschinenring, BDS)</a:t>
+                      </a:r>
+                    </a:p>
+                  </a:txBody>
+                  <a:tcPr>
+                    <a:solidFill>
+                      <a:srgbClr val="F4F6FA"/>
+                    </a:solidFill>
+                  </a:tcPr>
+                </a:tc>
+                <a:tc>
+                  <a:txBody>
+                    <a:bodyPr wrap="square"/>
+                    <a:lstStyle/>
+                    <a:p>
+                      <a:r>
+                        <a:rPr sz="1100" b="0">
+                          <a:solidFill>
+                            <a:srgbClr val="1A1A1A"/>
+                          </a:solidFill>
+                          <a:latin typeface="Arial"/>
+                        </a:rPr>
+                        <a:t/>
+                      </a:r>
+                    </a:p>
+                  </a:txBody>
+                  <a:tcPr>
+                    <a:solidFill>
+                      <a:srgbClr val="F4F6FA"/>
+                    </a:solidFill>
+                  </a:tcPr>
+                </a:tc>
+                <a:tc>
+                  <a:txBody>
+                    <a:bodyPr wrap="square"/>
+                    <a:lstStyle/>
+                    <a:p>
+                      <a:r>
+                        <a:rPr sz="1100" b="0">
+                          <a:solidFill>
+                            <a:srgbClr val="1A1A1A"/>
+                          </a:solidFill>
+                          <a:latin typeface="Arial"/>
+                        </a:rPr>
+                        <a:t/>
+                      </a:r>
+                    </a:p>
+                  </a:txBody>
+                  <a:tcPr>
+                    <a:solidFill>
+                      <a:srgbClr val="F4F6FA"/>
+                    </a:solidFill>
+                  </a:tcPr>
+                </a:tc>
+                <a:tc>
+                  <a:txBody>
+                    <a:bodyPr wrap="square"/>
+                    <a:lstStyle/>
+                    <a:p>
+                      <a:r>
+                        <a:rPr sz="1100" b="0">
+                          <a:solidFill>
+                            <a:srgbClr val="1A1A1A"/>
+                          </a:solidFill>
+                          <a:latin typeface="Arial"/>
+                        </a:rPr>
+                        <a:t/>
+                      </a:r>
+                    </a:p>
+                  </a:txBody>
+                  <a:tcPr>
+                    <a:solidFill>
+                      <a:srgbClr val="F4F6FA"/>
+                    </a:solidFill>
+                  </a:tcPr>
+                </a:tc>
+              </a:tr>
+              <a:tr h="475488">
+                <a:tc>
+                  <a:txBody>
+                    <a:bodyPr wrap="square"/>
+                    <a:lstStyle/>
+                    <a:p>
+                      <a:r>
+                        <a:rPr sz="1100" b="0">
+                          <a:solidFill>
+                            <a:srgbClr val="1A1A1A"/>
+                          </a:solidFill>
+                          <a:latin typeface="Arial"/>
+                        </a:rPr>
+                        <a:t>Digitale Kontakte (LinkedIn – nur nach Compliance-Freigabe)</a:t>
+                      </a:r>
+                    </a:p>
+                  </a:txBody>
+                  <a:tcPr>
+                    <a:solidFill>
+                      <a:srgbClr val="FFFFFF"/>
+                    </a:solidFill>
+                  </a:tcPr>
+                </a:tc>
+                <a:tc>
+                  <a:txBody>
+                    <a:bodyPr wrap="square"/>
+                    <a:lstStyle/>
+                    <a:p>
+                      <a:r>
+                        <a:rPr sz="1100" b="0">
+                          <a:solidFill>
+                            <a:srgbClr val="1A1A1A"/>
+                          </a:solidFill>
+                          <a:latin typeface="Arial"/>
+                        </a:rPr>
+                        <a:t/>
+                      </a:r>
+                    </a:p>
+                  </a:txBody>
+                  <a:tcPr>
+                    <a:solidFill>
+                      <a:srgbClr val="FFFFFF"/>
+                    </a:solidFill>
+                  </a:tcPr>
+                </a:tc>
+                <a:tc>
+                  <a:txBody>
+                    <a:bodyPr wrap="square"/>
+                    <a:lstStyle/>
+                    <a:p>
+                      <a:r>
+                        <a:rPr sz="1100" b="0">
+                          <a:solidFill>
+                            <a:srgbClr val="1A1A1A"/>
+                          </a:solidFill>
+                          <a:latin typeface="Arial"/>
+                        </a:rPr>
+                        <a:t/>
+                      </a:r>
+                    </a:p>
+                  </a:txBody>
+                  <a:tcPr>
+                    <a:solidFill>
+                      <a:srgbClr val="FFFFFF"/>
+                    </a:solidFill>
+                  </a:tcPr>
+                </a:tc>
+                <a:tc>
+                  <a:txBody>
+                    <a:bodyPr wrap="square"/>
+                    <a:lstStyle/>
+                    <a:p>
+                      <a:r>
+                        <a:rPr sz="1100" b="0">
+                          <a:solidFill>
+                            <a:srgbClr val="1A1A1A"/>
+                          </a:solidFill>
+                          <a:latin typeface="Arial"/>
+                        </a:rPr>
+                        <a:t/>
+                      </a:r>
+                    </a:p>
+                  </a:txBody>
+                  <a:tcPr>
+                    <a:solidFill>
+                      <a:srgbClr val="FFFFFF"/>
+                    </a:solidFill>
+                  </a:tcPr>
+                </a:tc>
+              </a:tr>
+            </a:tbl>
+          </a:graphicData>
+        </a:graphic>
+      </p:graphicFrame>
     </p:spTree>
   </p:cSld>
   <p:clrMapOvr>
@@ -3516,8 +4353,8 @@
         </p:nvSpPr>
         <p:spPr>
           <a:xfrm>
-            <a:off x="365760" y="2286000"/>
-            <a:ext cx="11430000" cy="1828800"/>
+            <a:off x="365760" y="2011680"/>
+            <a:ext cx="11430000" cy="2011680"/>
           </a:xfrm>
           <a:prstGeom prst="rect">
             <a:avLst/>
@@ -3532,13 +4369,13 @@
           <a:p>
             <a:pPr algn="l"/>
             <a:r>
-              <a:rPr sz="3600" b="1">
+              <a:rPr sz="3600" b="1" i="0">
                 <a:solidFill>
                   <a:srgbClr val="FFFFFF"/>
                 </a:solidFill>
                 <a:latin typeface="Arial"/>
               </a:rPr>
-              <a:t>Arbeitsblatt 1: Persönliche Netzwerkkarte</a:t>
+              <a:t>Format 1: Fachbeiträge und Impulse</a:t>
             </a:r>
           </a:p>
         </p:txBody>
@@ -3557,7 +4394,7 @@
     <p:bg>
       <p:bgPr>
         <a:solidFill>
-          <a:srgbClr val="1A1A1A"/>
+          <a:srgbClr val="FFFFFF"/>
         </a:solidFill>
         <a:effectLst/>
       </p:bgPr>
@@ -3584,7 +4421,7 @@
             <a:avLst/>
           </a:prstGeom>
           <a:solidFill>
-            <a:srgbClr val="E05B00"/>
+            <a:srgbClr val="003DA5"/>
           </a:solidFill>
           <a:ln>
             <a:noFill/>
@@ -3620,8 +4457,8 @@
         </p:nvSpPr>
         <p:spPr>
           <a:xfrm>
-            <a:off x="365760" y="2286000"/>
-            <a:ext cx="11430000" cy="1828800"/>
+            <a:off x="228600" y="182880"/>
+            <a:ext cx="11430000" cy="320040"/>
           </a:xfrm>
           <a:prstGeom prst="rect">
             <a:avLst/>
@@ -3636,13 +4473,182 @@
           <a:p>
             <a:pPr algn="l"/>
             <a:r>
-              <a:rPr sz="3600" b="1">
-                <a:solidFill>
-                  <a:srgbClr val="FFFFFF"/>
+              <a:rPr sz="900" b="0" i="0">
+                <a:solidFill>
+                  <a:srgbClr val="556575"/>
                 </a:solidFill>
                 <a:latin typeface="Arial"/>
               </a:rPr>
-              <a:t>Arbeitsblatt 2: Lückenanalyse</a:t>
+              <a:t>M20 · 4.4 Sichtbarkeit: Expertise sichtbar machen ohne Eigenwerbung</a:t>
+            </a:r>
+          </a:p>
+        </p:txBody>
+      </p:sp>
+      <p:sp>
+        <p:nvSpPr>
+          <p:cNvPr id="4" name="TextBox 3"/>
+          <p:cNvSpPr txBox="1"/>
+          <p:nvPr/>
+        </p:nvSpPr>
+        <p:spPr>
+          <a:xfrm>
+            <a:off x="365760" y="274320"/>
+            <a:ext cx="11430000" cy="777240"/>
+          </a:xfrm>
+          <a:prstGeom prst="rect">
+            <a:avLst/>
+          </a:prstGeom>
+          <a:noFill/>
+        </p:spPr>
+        <p:txBody>
+          <a:bodyPr wrap="square">
+            <a:spAutoFit/>
+          </a:bodyPr>
+          <a:lstStyle/>
+          <a:p>
+            <a:pPr algn="l"/>
+            <a:r>
+              <a:rPr sz="2200" b="1" i="0">
+                <a:solidFill>
+                  <a:srgbClr val="003DA5"/>
+                </a:solidFill>
+                <a:latin typeface="Arial"/>
+              </a:rPr>
+              <a:t>Format 1: Fachbeiträge und Impulse</a:t>
+            </a:r>
+          </a:p>
+        </p:txBody>
+      </p:sp>
+      <p:sp>
+        <p:nvSpPr>
+          <p:cNvPr id="5" name="Rectangle 4"/>
+          <p:cNvSpPr/>
+          <p:nvPr/>
+        </p:nvSpPr>
+        <p:spPr>
+          <a:xfrm>
+            <a:off x="365760" y="1005840"/>
+            <a:ext cx="11430000" cy="27432"/>
+          </a:xfrm>
+          <a:prstGeom prst="rect">
+            <a:avLst/>
+          </a:prstGeom>
+          <a:solidFill>
+            <a:srgbClr val="D1D5DB"/>
+          </a:solidFill>
+          <a:ln>
+            <a:noFill/>
+          </a:ln>
+        </p:spPr>
+        <p:style>
+          <a:lnRef idx="1">
+            <a:schemeClr val="accent1"/>
+          </a:lnRef>
+          <a:fillRef idx="3">
+            <a:schemeClr val="accent1"/>
+          </a:fillRef>
+          <a:effectRef idx="2">
+            <a:schemeClr val="accent1"/>
+          </a:effectRef>
+          <a:fontRef idx="minor">
+            <a:schemeClr val="lt1"/>
+          </a:fontRef>
+        </p:style>
+        <p:txBody>
+          <a:bodyPr rtlCol="0" anchor="ctr"/>
+          <a:lstStyle/>
+          <a:p>
+            <a:pPr algn="ctr"/>
+          </a:p>
+        </p:txBody>
+      </p:sp>
+      <p:sp>
+        <p:nvSpPr>
+          <p:cNvPr id="6" name="TextBox 5"/>
+          <p:cNvSpPr txBox="1"/>
+          <p:nvPr/>
+        </p:nvSpPr>
+        <p:spPr>
+          <a:xfrm>
+            <a:off x="365760" y="1143000"/>
+            <a:ext cx="11430000" cy="5212080"/>
+          </a:xfrm>
+          <a:prstGeom prst="rect">
+            <a:avLst/>
+          </a:prstGeom>
+          <a:noFill/>
+        </p:spPr>
+        <p:txBody>
+          <a:bodyPr wrap="square">
+            <a:spAutoFit/>
+          </a:bodyPr>
+          <a:lstStyle/>
+          <a:p>
+            <a:pPr>
+              <a:spcBef>
+                <a:spcPts val="500"/>
+              </a:spcBef>
+            </a:pPr>
+            <a:r>
+              <a:rPr sz="1500">
+                <a:solidFill>
+                  <a:srgbClr val="003DA5"/>
+                </a:solidFill>
+                <a:latin typeface="Arial"/>
+              </a:rPr>
+              <a:t>▪  </a:t>
+            </a:r>
+            <a:r>
+              <a:rPr sz="1700" b="1">
+                <a:solidFill>
+                  <a:srgbClr val="003DA5"/>
+                </a:solidFill>
+                <a:latin typeface="Arial"/>
+              </a:rPr>
+              <a:t>Was: </a:t>
+            </a:r>
+            <a:r>
+              <a:rPr sz="1700">
+                <a:solidFill>
+                  <a:srgbClr val="1A1A1A"/>
+                </a:solidFill>
+                <a:latin typeface="Arial"/>
+              </a:rPr>
+              <a:t>Kurze, prägnante Wissensimpulse – nicht als Werbung, sondern als echten Mehrwert für Netzwerkkontakte.</a:t>
+            </a:r>
+          </a:p>
+          <a:p>
+            <a:pPr>
+              <a:spcBef>
+                <a:spcPts val="500"/>
+              </a:spcBef>
+            </a:pPr>
+            <a:r>
+              <a:rPr sz="1500">
+                <a:solidFill>
+                  <a:srgbClr val="003DA5"/>
+                </a:solidFill>
+                <a:latin typeface="Arial"/>
+              </a:rPr>
+              <a:t>▪  </a:t>
+            </a:r>
+            <a:r>
+              <a:rPr sz="1700" b="1">
+                <a:solidFill>
+                  <a:srgbClr val="003DA5"/>
+                </a:solidFill>
+                <a:latin typeface="Arial"/>
+              </a:rPr>
+              <a:t>Beispiele: </a:t>
+            </a:r>
+            <a:r>
+              <a:rPr sz="1700">
+                <a:solidFill>
+                  <a:srgbClr val="1A1A1A"/>
+                </a:solidFill>
+                <a:latin typeface="Arial"/>
+              </a:rPr>
+              <a:t>- Monatliche E-Mail an 5–10 Steuerberater mit einem aktuellen Branchenhinweis: „Für Ihre Mandanten in der Landwirtschaft: GAP-Änderungen ab Q3 2026 – was das für…</a:t>
             </a:r>
           </a:p>
         </p:txBody>
@@ -3724,8 +4730,8 @@
         </p:nvSpPr>
         <p:spPr>
           <a:xfrm>
-            <a:off x="365760" y="2286000"/>
-            <a:ext cx="11430000" cy="1828800"/>
+            <a:off x="365760" y="2011680"/>
+            <a:ext cx="11430000" cy="2011680"/>
           </a:xfrm>
           <a:prstGeom prst="rect">
             <a:avLst/>
@@ -3740,13 +4746,13 @@
           <a:p>
             <a:pPr algn="l"/>
             <a:r>
-              <a:rPr sz="3600" b="1">
+              <a:rPr sz="3600" b="1" i="0">
                 <a:solidFill>
                   <a:srgbClr val="FFFFFF"/>
                 </a:solidFill>
                 <a:latin typeface="Arial"/>
               </a:rPr>
-              <a:t>Arbeitsblatt 3: 90-Tage-Aktionsplan</a:t>
+              <a:t>Format 2: Empfehlungen geben, bevor man welche bekommt</a:t>
             </a:r>
           </a:p>
         </p:txBody>
@@ -3760,6 +4766,4844 @@
 </file>
 
 <file path=ppt/slides/slide14.xml><?xml version="1.0" encoding="utf-8"?>
+<p:sld xmlns:a="http://schemas.openxmlformats.org/drawingml/2006/main" xmlns:p="http://schemas.openxmlformats.org/presentationml/2006/main" xmlns:r="http://schemas.openxmlformats.org/officeDocument/2006/relationships">
+  <p:cSld>
+    <p:bg>
+      <p:bgPr>
+        <a:solidFill>
+          <a:srgbClr val="FFFFFF"/>
+        </a:solidFill>
+        <a:effectLst/>
+      </p:bgPr>
+    </p:bg>
+    <p:spTree>
+      <p:nvGrpSpPr>
+        <p:cNvPr id="1" name=""/>
+        <p:cNvGrpSpPr/>
+        <p:nvPr/>
+      </p:nvGrpSpPr>
+      <p:grpSpPr/>
+      <p:sp>
+        <p:nvSpPr>
+          <p:cNvPr id="2" name="Rectangle 1"/>
+          <p:cNvSpPr/>
+          <p:nvPr/>
+        </p:nvSpPr>
+        <p:spPr>
+          <a:xfrm>
+            <a:off x="0" y="0"/>
+            <a:ext cx="73152" cy="6858000"/>
+          </a:xfrm>
+          <a:prstGeom prst="rect">
+            <a:avLst/>
+          </a:prstGeom>
+          <a:solidFill>
+            <a:srgbClr val="003DA5"/>
+          </a:solidFill>
+          <a:ln>
+            <a:noFill/>
+          </a:ln>
+        </p:spPr>
+        <p:style>
+          <a:lnRef idx="1">
+            <a:schemeClr val="accent1"/>
+          </a:lnRef>
+          <a:fillRef idx="3">
+            <a:schemeClr val="accent1"/>
+          </a:fillRef>
+          <a:effectRef idx="2">
+            <a:schemeClr val="accent1"/>
+          </a:effectRef>
+          <a:fontRef idx="minor">
+            <a:schemeClr val="lt1"/>
+          </a:fontRef>
+        </p:style>
+        <p:txBody>
+          <a:bodyPr rtlCol="0" anchor="ctr"/>
+          <a:lstStyle/>
+          <a:p>
+            <a:pPr algn="ctr"/>
+          </a:p>
+        </p:txBody>
+      </p:sp>
+      <p:sp>
+        <p:nvSpPr>
+          <p:cNvPr id="3" name="TextBox 2"/>
+          <p:cNvSpPr txBox="1"/>
+          <p:nvPr/>
+        </p:nvSpPr>
+        <p:spPr>
+          <a:xfrm>
+            <a:off x="228600" y="182880"/>
+            <a:ext cx="11430000" cy="320040"/>
+          </a:xfrm>
+          <a:prstGeom prst="rect">
+            <a:avLst/>
+          </a:prstGeom>
+          <a:noFill/>
+        </p:spPr>
+        <p:txBody>
+          <a:bodyPr wrap="square">
+            <a:spAutoFit/>
+          </a:bodyPr>
+          <a:lstStyle/>
+          <a:p>
+            <a:pPr algn="l"/>
+            <a:r>
+              <a:rPr sz="900" b="0" i="0">
+                <a:solidFill>
+                  <a:srgbClr val="556575"/>
+                </a:solidFill>
+                <a:latin typeface="Arial"/>
+              </a:rPr>
+              <a:t>M20 · 4.4 Sichtbarkeit: Expertise sichtbar machen ohne Eigenwerbung</a:t>
+            </a:r>
+          </a:p>
+        </p:txBody>
+      </p:sp>
+      <p:sp>
+        <p:nvSpPr>
+          <p:cNvPr id="4" name="TextBox 3"/>
+          <p:cNvSpPr txBox="1"/>
+          <p:nvPr/>
+        </p:nvSpPr>
+        <p:spPr>
+          <a:xfrm>
+            <a:off x="365760" y="274320"/>
+            <a:ext cx="11430000" cy="777240"/>
+          </a:xfrm>
+          <a:prstGeom prst="rect">
+            <a:avLst/>
+          </a:prstGeom>
+          <a:noFill/>
+        </p:spPr>
+        <p:txBody>
+          <a:bodyPr wrap="square">
+            <a:spAutoFit/>
+          </a:bodyPr>
+          <a:lstStyle/>
+          <a:p>
+            <a:pPr algn="l"/>
+            <a:r>
+              <a:rPr sz="2200" b="1" i="0">
+                <a:solidFill>
+                  <a:srgbClr val="003DA5"/>
+                </a:solidFill>
+                <a:latin typeface="Arial"/>
+              </a:rPr>
+              <a:t>Format 2: Empfehlungen geben, bevor man welche bekommt</a:t>
+            </a:r>
+          </a:p>
+        </p:txBody>
+      </p:sp>
+      <p:sp>
+        <p:nvSpPr>
+          <p:cNvPr id="5" name="Rectangle 4"/>
+          <p:cNvSpPr/>
+          <p:nvPr/>
+        </p:nvSpPr>
+        <p:spPr>
+          <a:xfrm>
+            <a:off x="365760" y="1005840"/>
+            <a:ext cx="11430000" cy="27432"/>
+          </a:xfrm>
+          <a:prstGeom prst="rect">
+            <a:avLst/>
+          </a:prstGeom>
+          <a:solidFill>
+            <a:srgbClr val="D1D5DB"/>
+          </a:solidFill>
+          <a:ln>
+            <a:noFill/>
+          </a:ln>
+        </p:spPr>
+        <p:style>
+          <a:lnRef idx="1">
+            <a:schemeClr val="accent1"/>
+          </a:lnRef>
+          <a:fillRef idx="3">
+            <a:schemeClr val="accent1"/>
+          </a:fillRef>
+          <a:effectRef idx="2">
+            <a:schemeClr val="accent1"/>
+          </a:effectRef>
+          <a:fontRef idx="minor">
+            <a:schemeClr val="lt1"/>
+          </a:fontRef>
+        </p:style>
+        <p:txBody>
+          <a:bodyPr rtlCol="0" anchor="ctr"/>
+          <a:lstStyle/>
+          <a:p>
+            <a:pPr algn="ctr"/>
+          </a:p>
+        </p:txBody>
+      </p:sp>
+      <p:sp>
+        <p:nvSpPr>
+          <p:cNvPr id="6" name="TextBox 5"/>
+          <p:cNvSpPr txBox="1"/>
+          <p:nvPr/>
+        </p:nvSpPr>
+        <p:spPr>
+          <a:xfrm>
+            <a:off x="365760" y="1143000"/>
+            <a:ext cx="11430000" cy="5212080"/>
+          </a:xfrm>
+          <a:prstGeom prst="rect">
+            <a:avLst/>
+          </a:prstGeom>
+          <a:noFill/>
+        </p:spPr>
+        <p:txBody>
+          <a:bodyPr wrap="square">
+            <a:spAutoFit/>
+          </a:bodyPr>
+          <a:lstStyle/>
+          <a:p>
+            <a:pPr>
+              <a:spcBef>
+                <a:spcPts val="500"/>
+              </a:spcBef>
+            </a:pPr>
+            <a:r>
+              <a:rPr sz="1500">
+                <a:solidFill>
+                  <a:srgbClr val="003DA5"/>
+                </a:solidFill>
+                <a:latin typeface="Arial"/>
+              </a:rPr>
+              <a:t>▪  </a:t>
+            </a:r>
+            <a:r>
+              <a:rPr sz="1700">
+                <a:solidFill>
+                  <a:srgbClr val="1A1A1A"/>
+                </a:solidFill>
+                <a:latin typeface="Arial"/>
+              </a:rPr>
+              <a:t>Das Prinzip des Vorlaufs (Cialdini, 2001, Reziprozität): Wer zuerst gibt, erhält. Ein Berater, der seinem Steuerberater-Netzwerk aktiv Unternehmerkunden…</a:t>
+            </a:r>
+          </a:p>
+          <a:p>
+            <a:pPr>
+              <a:spcBef>
+                <a:spcPts val="500"/>
+              </a:spcBef>
+            </a:pPr>
+            <a:r>
+              <a:rPr sz="1500">
+                <a:solidFill>
+                  <a:srgbClr val="003DA5"/>
+                </a:solidFill>
+                <a:latin typeface="Arial"/>
+              </a:rPr>
+              <a:t>▪  </a:t>
+            </a:r>
+            <a:r>
+              <a:rPr sz="1700">
+                <a:solidFill>
+                  <a:srgbClr val="1A1A1A"/>
+                </a:solidFill>
+                <a:latin typeface="Arial"/>
+              </a:rPr>
+              <a:t>Praxisregel: „Ein guter Netzwerkpartner merkt, dass er zu mir gehört, bevor er das erste Mal mit mir gearbeitet hat."</a:t>
+            </a:r>
+          </a:p>
+        </p:txBody>
+      </p:sp>
+    </p:spTree>
+  </p:cSld>
+  <p:clrMapOvr>
+    <a:masterClrMapping/>
+  </p:clrMapOvr>
+</p:sld>
+</file>
+
+<file path=ppt/slides/slide15.xml><?xml version="1.0" encoding="utf-8"?>
+<p:sld xmlns:a="http://schemas.openxmlformats.org/drawingml/2006/main" xmlns:p="http://schemas.openxmlformats.org/presentationml/2006/main" xmlns:r="http://schemas.openxmlformats.org/officeDocument/2006/relationships">
+  <p:cSld>
+    <p:bg>
+      <p:bgPr>
+        <a:solidFill>
+          <a:srgbClr val="1A1A1A"/>
+        </a:solidFill>
+        <a:effectLst/>
+      </p:bgPr>
+    </p:bg>
+    <p:spTree>
+      <p:nvGrpSpPr>
+        <p:cNvPr id="1" name=""/>
+        <p:cNvGrpSpPr/>
+        <p:nvPr/>
+      </p:nvGrpSpPr>
+      <p:grpSpPr/>
+      <p:sp>
+        <p:nvSpPr>
+          <p:cNvPr id="2" name="Rectangle 1"/>
+          <p:cNvSpPr/>
+          <p:nvPr/>
+        </p:nvSpPr>
+        <p:spPr>
+          <a:xfrm>
+            <a:off x="0" y="0"/>
+            <a:ext cx="73152" cy="6858000"/>
+          </a:xfrm>
+          <a:prstGeom prst="rect">
+            <a:avLst/>
+          </a:prstGeom>
+          <a:solidFill>
+            <a:srgbClr val="E05B00"/>
+          </a:solidFill>
+          <a:ln>
+            <a:noFill/>
+          </a:ln>
+        </p:spPr>
+        <p:style>
+          <a:lnRef idx="1">
+            <a:schemeClr val="accent1"/>
+          </a:lnRef>
+          <a:fillRef idx="3">
+            <a:schemeClr val="accent1"/>
+          </a:fillRef>
+          <a:effectRef idx="2">
+            <a:schemeClr val="accent1"/>
+          </a:effectRef>
+          <a:fontRef idx="minor">
+            <a:schemeClr val="lt1"/>
+          </a:fontRef>
+        </p:style>
+        <p:txBody>
+          <a:bodyPr rtlCol="0" anchor="ctr"/>
+          <a:lstStyle/>
+          <a:p>
+            <a:pPr algn="ctr"/>
+          </a:p>
+        </p:txBody>
+      </p:sp>
+      <p:sp>
+        <p:nvSpPr>
+          <p:cNvPr id="3" name="TextBox 2"/>
+          <p:cNvSpPr txBox="1"/>
+          <p:nvPr/>
+        </p:nvSpPr>
+        <p:spPr>
+          <a:xfrm>
+            <a:off x="365760" y="2011680"/>
+            <a:ext cx="11430000" cy="2011680"/>
+          </a:xfrm>
+          <a:prstGeom prst="rect">
+            <a:avLst/>
+          </a:prstGeom>
+          <a:noFill/>
+        </p:spPr>
+        <p:txBody>
+          <a:bodyPr wrap="square">
+            <a:spAutoFit/>
+          </a:bodyPr>
+          <a:lstStyle/>
+          <a:p>
+            <a:pPr algn="l"/>
+            <a:r>
+              <a:rPr sz="3600" b="1" i="0">
+                <a:solidFill>
+                  <a:srgbClr val="FFFFFF"/>
+                </a:solidFill>
+                <a:latin typeface="Arial"/>
+              </a:rPr>
+              <a:t>Format 3: Präsenz in Gremien und Verbänden</a:t>
+            </a:r>
+          </a:p>
+        </p:txBody>
+      </p:sp>
+    </p:spTree>
+  </p:cSld>
+  <p:clrMapOvr>
+    <a:masterClrMapping/>
+  </p:clrMapOvr>
+</p:sld>
+</file>
+
+<file path=ppt/slides/slide16.xml><?xml version="1.0" encoding="utf-8"?>
+<p:sld xmlns:a="http://schemas.openxmlformats.org/drawingml/2006/main" xmlns:p="http://schemas.openxmlformats.org/presentationml/2006/main" xmlns:r="http://schemas.openxmlformats.org/officeDocument/2006/relationships">
+  <p:cSld>
+    <p:bg>
+      <p:bgPr>
+        <a:solidFill>
+          <a:srgbClr val="FFFFFF"/>
+        </a:solidFill>
+        <a:effectLst/>
+      </p:bgPr>
+    </p:bg>
+    <p:spTree>
+      <p:nvGrpSpPr>
+        <p:cNvPr id="1" name=""/>
+        <p:cNvGrpSpPr/>
+        <p:nvPr/>
+      </p:nvGrpSpPr>
+      <p:grpSpPr/>
+      <p:sp>
+        <p:nvSpPr>
+          <p:cNvPr id="2" name="Rectangle 1"/>
+          <p:cNvSpPr/>
+          <p:nvPr/>
+        </p:nvSpPr>
+        <p:spPr>
+          <a:xfrm>
+            <a:off x="0" y="0"/>
+            <a:ext cx="73152" cy="6858000"/>
+          </a:xfrm>
+          <a:prstGeom prst="rect">
+            <a:avLst/>
+          </a:prstGeom>
+          <a:solidFill>
+            <a:srgbClr val="003DA5"/>
+          </a:solidFill>
+          <a:ln>
+            <a:noFill/>
+          </a:ln>
+        </p:spPr>
+        <p:style>
+          <a:lnRef idx="1">
+            <a:schemeClr val="accent1"/>
+          </a:lnRef>
+          <a:fillRef idx="3">
+            <a:schemeClr val="accent1"/>
+          </a:fillRef>
+          <a:effectRef idx="2">
+            <a:schemeClr val="accent1"/>
+          </a:effectRef>
+          <a:fontRef idx="minor">
+            <a:schemeClr val="lt1"/>
+          </a:fontRef>
+        </p:style>
+        <p:txBody>
+          <a:bodyPr rtlCol="0" anchor="ctr"/>
+          <a:lstStyle/>
+          <a:p>
+            <a:pPr algn="ctr"/>
+          </a:p>
+        </p:txBody>
+      </p:sp>
+      <p:sp>
+        <p:nvSpPr>
+          <p:cNvPr id="3" name="TextBox 2"/>
+          <p:cNvSpPr txBox="1"/>
+          <p:nvPr/>
+        </p:nvSpPr>
+        <p:spPr>
+          <a:xfrm>
+            <a:off x="228600" y="182880"/>
+            <a:ext cx="11430000" cy="320040"/>
+          </a:xfrm>
+          <a:prstGeom prst="rect">
+            <a:avLst/>
+          </a:prstGeom>
+          <a:noFill/>
+        </p:spPr>
+        <p:txBody>
+          <a:bodyPr wrap="square">
+            <a:spAutoFit/>
+          </a:bodyPr>
+          <a:lstStyle/>
+          <a:p>
+            <a:pPr algn="l"/>
+            <a:r>
+              <a:rPr sz="900" b="0" i="0">
+                <a:solidFill>
+                  <a:srgbClr val="556575"/>
+                </a:solidFill>
+                <a:latin typeface="Arial"/>
+              </a:rPr>
+              <a:t>M20 · 4.4 Sichtbarkeit: Expertise sichtbar machen ohne Eigenwerbung</a:t>
+            </a:r>
+          </a:p>
+        </p:txBody>
+      </p:sp>
+      <p:sp>
+        <p:nvSpPr>
+          <p:cNvPr id="4" name="TextBox 3"/>
+          <p:cNvSpPr txBox="1"/>
+          <p:nvPr/>
+        </p:nvSpPr>
+        <p:spPr>
+          <a:xfrm>
+            <a:off x="365760" y="274320"/>
+            <a:ext cx="11430000" cy="777240"/>
+          </a:xfrm>
+          <a:prstGeom prst="rect">
+            <a:avLst/>
+          </a:prstGeom>
+          <a:noFill/>
+        </p:spPr>
+        <p:txBody>
+          <a:bodyPr wrap="square">
+            <a:spAutoFit/>
+          </a:bodyPr>
+          <a:lstStyle/>
+          <a:p>
+            <a:pPr algn="l"/>
+            <a:r>
+              <a:rPr sz="2200" b="1" i="0">
+                <a:solidFill>
+                  <a:srgbClr val="003DA5"/>
+                </a:solidFill>
+                <a:latin typeface="Arial"/>
+              </a:rPr>
+              <a:t>Format 3: Präsenz in Gremien und Verbänden</a:t>
+            </a:r>
+          </a:p>
+        </p:txBody>
+      </p:sp>
+      <p:sp>
+        <p:nvSpPr>
+          <p:cNvPr id="5" name="Rectangle 4"/>
+          <p:cNvSpPr/>
+          <p:nvPr/>
+        </p:nvSpPr>
+        <p:spPr>
+          <a:xfrm>
+            <a:off x="365760" y="1005840"/>
+            <a:ext cx="11430000" cy="27432"/>
+          </a:xfrm>
+          <a:prstGeom prst="rect">
+            <a:avLst/>
+          </a:prstGeom>
+          <a:solidFill>
+            <a:srgbClr val="D1D5DB"/>
+          </a:solidFill>
+          <a:ln>
+            <a:noFill/>
+          </a:ln>
+        </p:spPr>
+        <p:style>
+          <a:lnRef idx="1">
+            <a:schemeClr val="accent1"/>
+          </a:lnRef>
+          <a:fillRef idx="3">
+            <a:schemeClr val="accent1"/>
+          </a:fillRef>
+          <a:effectRef idx="2">
+            <a:schemeClr val="accent1"/>
+          </a:effectRef>
+          <a:fontRef idx="minor">
+            <a:schemeClr val="lt1"/>
+          </a:fontRef>
+        </p:style>
+        <p:txBody>
+          <a:bodyPr rtlCol="0" anchor="ctr"/>
+          <a:lstStyle/>
+          <a:p>
+            <a:pPr algn="ctr"/>
+          </a:p>
+        </p:txBody>
+      </p:sp>
+      <p:graphicFrame>
+        <p:nvGraphicFramePr>
+          <p:cNvPr id="6" name="Table 5"/>
+          <p:cNvGraphicFramePr>
+            <a:graphicFrameLocks noGrp="1"/>
+          </p:cNvGraphicFramePr>
+          <p:nvPr/>
+        </p:nvGraphicFramePr>
+        <p:xfrm>
+          <a:off x="365760" y="1143000"/>
+          <a:ext cx="11430000" cy="3803904"/>
+        </p:xfrm>
+        <a:graphic>
+          <a:graphicData uri="http://schemas.openxmlformats.org/drawingml/2006/table">
+            <a:tbl>
+              <a:tblPr firstRow="1" bandRow="1">
+                <a:tableStyleId>{5C22544A-7EE6-4342-B048-85BDC9FD1C3A}</a:tableStyleId>
+              </a:tblPr>
+              <a:tblGrid>
+                <a:gridCol w="2857500"/>
+                <a:gridCol w="2857500"/>
+                <a:gridCol w="2857500"/>
+                <a:gridCol w="2857500"/>
+              </a:tblGrid>
+              <a:tr h="475488">
+                <a:tc>
+                  <a:txBody>
+                    <a:bodyPr wrap="square"/>
+                    <a:lstStyle/>
+                    <a:p>
+                      <a:r>
+                        <a:rPr sz="1100" b="1">
+                          <a:solidFill>
+                            <a:srgbClr val="FFFFFF"/>
+                          </a:solidFill>
+                          <a:latin typeface="Arial"/>
+                        </a:rPr>
+                        <a:t>Format</a:t>
+                      </a:r>
+                    </a:p>
+                  </a:txBody>
+                  <a:tcPr>
+                    <a:solidFill>
+                      <a:srgbClr val="003DA5"/>
+                    </a:solidFill>
+                  </a:tcPr>
+                </a:tc>
+                <a:tc>
+                  <a:txBody>
+                    <a:bodyPr wrap="square"/>
+                    <a:lstStyle/>
+                    <a:p>
+                      <a:r>
+                        <a:rPr sz="1100" b="1">
+                          <a:solidFill>
+                            <a:srgbClr val="FFFFFF"/>
+                          </a:solidFill>
+                          <a:latin typeface="Arial"/>
+                        </a:rPr>
+                        <a:t>Zielgruppe</a:t>
+                      </a:r>
+                    </a:p>
+                  </a:txBody>
+                  <a:tcPr>
+                    <a:solidFill>
+                      <a:srgbClr val="003DA5"/>
+                    </a:solidFill>
+                  </a:tcPr>
+                </a:tc>
+                <a:tc>
+                  <a:txBody>
+                    <a:bodyPr wrap="square"/>
+                    <a:lstStyle/>
+                    <a:p>
+                      <a:r>
+                        <a:rPr sz="1100" b="1">
+                          <a:solidFill>
+                            <a:srgbClr val="FFFFFF"/>
+                          </a:solidFill>
+                          <a:latin typeface="Arial"/>
+                        </a:rPr>
+                        <a:t>Zeitaufwand</a:t>
+                      </a:r>
+                    </a:p>
+                  </a:txBody>
+                  <a:tcPr>
+                    <a:solidFill>
+                      <a:srgbClr val="003DA5"/>
+                    </a:solidFill>
+                  </a:tcPr>
+                </a:tc>
+                <a:tc>
+                  <a:txBody>
+                    <a:bodyPr wrap="square"/>
+                    <a:lstStyle/>
+                    <a:p>
+                      <a:r>
+                        <a:rPr sz="1100" b="1">
+                          <a:solidFill>
+                            <a:srgbClr val="FFFFFF"/>
+                          </a:solidFill>
+                          <a:latin typeface="Arial"/>
+                        </a:rPr>
+                        <a:t>Zugangshürde</a:t>
+                      </a:r>
+                    </a:p>
+                  </a:txBody>
+                  <a:tcPr>
+                    <a:solidFill>
+                      <a:srgbClr val="003DA5"/>
+                    </a:solidFill>
+                  </a:tcPr>
+                </a:tc>
+              </a:tr>
+              <a:tr h="475488">
+                <a:tc>
+                  <a:txBody>
+                    <a:bodyPr wrap="square"/>
+                    <a:lstStyle/>
+                    <a:p>
+                      <a:r>
+                        <a:rPr sz="1100" b="0">
+                          <a:solidFill>
+                            <a:srgbClr val="1A1A1A"/>
+                          </a:solidFill>
+                          <a:latin typeface="Arial"/>
+                        </a:rPr>
+                        <a:t>Wirtschaftsjunioren (WJ)</a:t>
+                      </a:r>
+                    </a:p>
+                  </a:txBody>
+                  <a:tcPr>
+                    <a:solidFill>
+                      <a:srgbClr val="FFFFFF"/>
+                    </a:solidFill>
+                  </a:tcPr>
+                </a:tc>
+                <a:tc>
+                  <a:txBody>
+                    <a:bodyPr wrap="square"/>
+                    <a:lstStyle/>
+                    <a:p>
+                      <a:r>
+                        <a:rPr sz="1100" b="0">
+                          <a:solidFill>
+                            <a:srgbClr val="1A1A1A"/>
+                          </a:solidFill>
+                          <a:latin typeface="Arial"/>
+                        </a:rPr>
+                        <a:t>Junge Unternehmer, Nachfolger (&lt; 40 J.)</a:t>
+                      </a:r>
+                    </a:p>
+                  </a:txBody>
+                  <a:tcPr>
+                    <a:solidFill>
+                      <a:srgbClr val="FFFFFF"/>
+                    </a:solidFill>
+                  </a:tcPr>
+                </a:tc>
+                <a:tc>
+                  <a:txBody>
+                    <a:bodyPr wrap="square"/>
+                    <a:lstStyle/>
+                    <a:p>
+                      <a:r>
+                        <a:rPr sz="1100" b="0">
+                          <a:solidFill>
+                            <a:srgbClr val="1A1A1A"/>
+                          </a:solidFill>
+                          <a:latin typeface="Arial"/>
+                        </a:rPr>
+                        <a:t>4–6 h/Monat</a:t>
+                      </a:r>
+                    </a:p>
+                  </a:txBody>
+                  <a:tcPr>
+                    <a:solidFill>
+                      <a:srgbClr val="FFFFFF"/>
+                    </a:solidFill>
+                  </a:tcPr>
+                </a:tc>
+                <a:tc>
+                  <a:txBody>
+                    <a:bodyPr wrap="square"/>
+                    <a:lstStyle/>
+                    <a:p>
+                      <a:r>
+                        <a:rPr sz="1100" b="0">
+                          <a:solidFill>
+                            <a:srgbClr val="1A1A1A"/>
+                          </a:solidFill>
+                          <a:latin typeface="Arial"/>
+                        </a:rPr>
+                        <a:t>Niedrig – offen für Bewerber</a:t>
+                      </a:r>
+                    </a:p>
+                  </a:txBody>
+                  <a:tcPr>
+                    <a:solidFill>
+                      <a:srgbClr val="FFFFFF"/>
+                    </a:solidFill>
+                  </a:tcPr>
+                </a:tc>
+              </a:tr>
+              <a:tr h="475488">
+                <a:tc>
+                  <a:txBody>
+                    <a:bodyPr wrap="square"/>
+                    <a:lstStyle/>
+                    <a:p>
+                      <a:r>
+                        <a:rPr sz="1100" b="0">
+                          <a:solidFill>
+                            <a:srgbClr val="1A1A1A"/>
+                          </a:solidFill>
+                          <a:latin typeface="Arial"/>
+                        </a:rPr>
+                        <a:t>IHK-Ausschüsse (Kreditwirtschaft, Unternehmensfinanzierung)</a:t>
+                      </a:r>
+                    </a:p>
+                  </a:txBody>
+                  <a:tcPr>
+                    <a:solidFill>
+                      <a:srgbClr val="F4F6FA"/>
+                    </a:solidFill>
+                  </a:tcPr>
+                </a:tc>
+                <a:tc>
+                  <a:txBody>
+                    <a:bodyPr wrap="square"/>
+                    <a:lstStyle/>
+                    <a:p>
+                      <a:r>
+                        <a:rPr sz="1100" b="0">
+                          <a:solidFill>
+                            <a:srgbClr val="1A1A1A"/>
+                          </a:solidFill>
+                          <a:latin typeface="Arial"/>
+                        </a:rPr>
+                        <a:t>Etablierte Unternehmer, Berater, Verbandsvertreter</a:t>
+                      </a:r>
+                    </a:p>
+                  </a:txBody>
+                  <a:tcPr>
+                    <a:solidFill>
+                      <a:srgbClr val="F4F6FA"/>
+                    </a:solidFill>
+                  </a:tcPr>
+                </a:tc>
+                <a:tc>
+                  <a:txBody>
+                    <a:bodyPr wrap="square"/>
+                    <a:lstStyle/>
+                    <a:p>
+                      <a:r>
+                        <a:rPr sz="1100" b="0">
+                          <a:solidFill>
+                            <a:srgbClr val="1A1A1A"/>
+                          </a:solidFill>
+                          <a:latin typeface="Arial"/>
+                        </a:rPr>
+                        <a:t>4–8 Sitzungen/Jahr</a:t>
+                      </a:r>
+                    </a:p>
+                  </a:txBody>
+                  <a:tcPr>
+                    <a:solidFill>
+                      <a:srgbClr val="F4F6FA"/>
+                    </a:solidFill>
+                  </a:tcPr>
+                </a:tc>
+                <a:tc>
+                  <a:txBody>
+                    <a:bodyPr wrap="square"/>
+                    <a:lstStyle/>
+                    <a:p>
+                      <a:r>
+                        <a:rPr sz="1100" b="0">
+                          <a:solidFill>
+                            <a:srgbClr val="1A1A1A"/>
+                          </a:solidFill>
+                          <a:latin typeface="Arial"/>
+                        </a:rPr>
+                        <a:t>Mittel – Bewerbung erforderlich</a:t>
+                      </a:r>
+                    </a:p>
+                  </a:txBody>
+                  <a:tcPr>
+                    <a:solidFill>
+                      <a:srgbClr val="F4F6FA"/>
+                    </a:solidFill>
+                  </a:tcPr>
+                </a:tc>
+              </a:tr>
+              <a:tr h="475488">
+                <a:tc>
+                  <a:txBody>
+                    <a:bodyPr wrap="square"/>
+                    <a:lstStyle/>
+                    <a:p>
+                      <a:r>
+                        <a:rPr sz="1100" b="0">
+                          <a:solidFill>
+                            <a:srgbClr val="1A1A1A"/>
+                          </a:solidFill>
+                          <a:latin typeface="Arial"/>
+                        </a:rPr>
+                        <a:t>Handwerkskammer-Netzwerke / HWK-Ausschüsse</a:t>
+                      </a:r>
+                    </a:p>
+                  </a:txBody>
+                  <a:tcPr>
+                    <a:solidFill>
+                      <a:srgbClr val="FFFFFF"/>
+                    </a:solidFill>
+                  </a:tcPr>
+                </a:tc>
+                <a:tc>
+                  <a:txBody>
+                    <a:bodyPr wrap="square"/>
+                    <a:lstStyle/>
+                    <a:p>
+                      <a:r>
+                        <a:rPr sz="1100" b="0">
+                          <a:solidFill>
+                            <a:srgbClr val="1A1A1A"/>
+                          </a:solidFill>
+                          <a:latin typeface="Arial"/>
+                        </a:rPr>
+                        <a:t>Handwerksmeister, Innungen</a:t>
+                      </a:r>
+                    </a:p>
+                  </a:txBody>
+                  <a:tcPr>
+                    <a:solidFill>
+                      <a:srgbClr val="FFFFFF"/>
+                    </a:solidFill>
+                  </a:tcPr>
+                </a:tc>
+                <a:tc>
+                  <a:txBody>
+                    <a:bodyPr wrap="square"/>
+                    <a:lstStyle/>
+                    <a:p>
+                      <a:r>
+                        <a:rPr sz="1100" b="0">
+                          <a:solidFill>
+                            <a:srgbClr val="1A1A1A"/>
+                          </a:solidFill>
+                          <a:latin typeface="Arial"/>
+                        </a:rPr>
+                        <a:t>3–5 Veranstaltungen/Jahr</a:t>
+                      </a:r>
+                    </a:p>
+                  </a:txBody>
+                  <a:tcPr>
+                    <a:solidFill>
+                      <a:srgbClr val="FFFFFF"/>
+                    </a:solidFill>
+                  </a:tcPr>
+                </a:tc>
+                <a:tc>
+                  <a:txBody>
+                    <a:bodyPr wrap="square"/>
+                    <a:lstStyle/>
+                    <a:p>
+                      <a:r>
+                        <a:rPr sz="1100" b="0">
+                          <a:solidFill>
+                            <a:srgbClr val="1A1A1A"/>
+                          </a:solidFill>
+                          <a:latin typeface="Arial"/>
+                        </a:rPr>
+                        <a:t>Niedrig</a:t>
+                      </a:r>
+                    </a:p>
+                  </a:txBody>
+                  <a:tcPr>
+                    <a:solidFill>
+                      <a:srgbClr val="FFFFFF"/>
+                    </a:solidFill>
+                  </a:tcPr>
+                </a:tc>
+              </a:tr>
+              <a:tr h="475488">
+                <a:tc>
+                  <a:txBody>
+                    <a:bodyPr wrap="square"/>
+                    <a:lstStyle/>
+                    <a:p>
+                      <a:r>
+                        <a:rPr sz="1100" b="0">
+                          <a:solidFill>
+                            <a:srgbClr val="1A1A1A"/>
+                          </a:solidFill>
+                          <a:latin typeface="Arial"/>
+                        </a:rPr>
+                        <a:t>Maschinenringe (v.a. Allgäu, Oberbayern, Schwaben)</a:t>
+                      </a:r>
+                    </a:p>
+                  </a:txBody>
+                  <a:tcPr>
+                    <a:solidFill>
+                      <a:srgbClr val="F4F6FA"/>
+                    </a:solidFill>
+                  </a:tcPr>
+                </a:tc>
+                <a:tc>
+                  <a:txBody>
+                    <a:bodyPr wrap="square"/>
+                    <a:lstStyle/>
+                    <a:p>
+                      <a:r>
+                        <a:rPr sz="1100" b="0">
+                          <a:solidFill>
+                            <a:srgbClr val="1A1A1A"/>
+                          </a:solidFill>
+                          <a:latin typeface="Arial"/>
+                        </a:rPr>
+                        <a:t>Landwirte, Forstbetriebe – Schlüsselmultiplikatoren im Agrar</a:t>
+                      </a:r>
+                    </a:p>
+                  </a:txBody>
+                  <a:tcPr>
+                    <a:solidFill>
+                      <a:srgbClr val="F4F6FA"/>
+                    </a:solidFill>
+                  </a:tcPr>
+                </a:tc>
+                <a:tc>
+                  <a:txBody>
+                    <a:bodyPr wrap="square"/>
+                    <a:lstStyle/>
+                    <a:p>
+                      <a:r>
+                        <a:rPr sz="1100" b="0">
+                          <a:solidFill>
+                            <a:srgbClr val="1A1A1A"/>
+                          </a:solidFill>
+                          <a:latin typeface="Arial"/>
+                        </a:rPr>
+                        <a:t>2–4 Events/Jahr</a:t>
+                      </a:r>
+                    </a:p>
+                  </a:txBody>
+                  <a:tcPr>
+                    <a:solidFill>
+                      <a:srgbClr val="F4F6FA"/>
+                    </a:solidFill>
+                  </a:tcPr>
+                </a:tc>
+                <a:tc>
+                  <a:txBody>
+                    <a:bodyPr wrap="square"/>
+                    <a:lstStyle/>
+                    <a:p>
+                      <a:r>
+                        <a:rPr sz="1100" b="0">
+                          <a:solidFill>
+                            <a:srgbClr val="1A1A1A"/>
+                          </a:solidFill>
+                          <a:latin typeface="Arial"/>
+                        </a:rPr>
+                        <a:t>Niedrig – Empfehlung durch Bestandskunde ideal</a:t>
+                      </a:r>
+                    </a:p>
+                  </a:txBody>
+                  <a:tcPr>
+                    <a:solidFill>
+                      <a:srgbClr val="F4F6FA"/>
+                    </a:solidFill>
+                  </a:tcPr>
+                </a:tc>
+              </a:tr>
+              <a:tr h="475488">
+                <a:tc>
+                  <a:txBody>
+                    <a:bodyPr wrap="square"/>
+                    <a:lstStyle/>
+                    <a:p>
+                      <a:r>
+                        <a:rPr sz="1100" b="0">
+                          <a:solidFill>
+                            <a:srgbClr val="1A1A1A"/>
+                          </a:solidFill>
+                          <a:latin typeface="Arial"/>
+                        </a:rPr>
+                        <a:t>BDS (Bund der Selbständigen)</a:t>
+                      </a:r>
+                    </a:p>
+                  </a:txBody>
+                  <a:tcPr>
+                    <a:solidFill>
+                      <a:srgbClr val="FFFFFF"/>
+                    </a:solidFill>
+                  </a:tcPr>
+                </a:tc>
+                <a:tc>
+                  <a:txBody>
+                    <a:bodyPr wrap="square"/>
+                    <a:lstStyle/>
+                    <a:p>
+                      <a:r>
+                        <a:rPr sz="1100" b="0">
+                          <a:solidFill>
+                            <a:srgbClr val="1A1A1A"/>
+                          </a:solidFill>
+                          <a:latin typeface="Arial"/>
+                        </a:rPr>
+                        <a:t>Kleinstunternehmer, Freiberufler</a:t>
+                      </a:r>
+                    </a:p>
+                  </a:txBody>
+                  <a:tcPr>
+                    <a:solidFill>
+                      <a:srgbClr val="FFFFFF"/>
+                    </a:solidFill>
+                  </a:tcPr>
+                </a:tc>
+                <a:tc>
+                  <a:txBody>
+                    <a:bodyPr wrap="square"/>
+                    <a:lstStyle/>
+                    <a:p>
+                      <a:r>
+                        <a:rPr sz="1100" b="0">
+                          <a:solidFill>
+                            <a:srgbClr val="1A1A1A"/>
+                          </a:solidFill>
+                          <a:latin typeface="Arial"/>
+                        </a:rPr>
+                        <a:t>4–6 Treffen/Jahr</a:t>
+                      </a:r>
+                    </a:p>
+                  </a:txBody>
+                  <a:tcPr>
+                    <a:solidFill>
+                      <a:srgbClr val="FFFFFF"/>
+                    </a:solidFill>
+                  </a:tcPr>
+                </a:tc>
+                <a:tc>
+                  <a:txBody>
+                    <a:bodyPr wrap="square"/>
+                    <a:lstStyle/>
+                    <a:p>
+                      <a:r>
+                        <a:rPr sz="1100" b="0">
+                          <a:solidFill>
+                            <a:srgbClr val="1A1A1A"/>
+                          </a:solidFill>
+                          <a:latin typeface="Arial"/>
+                        </a:rPr>
+                        <a:t>Niedrig</a:t>
+                      </a:r>
+                    </a:p>
+                  </a:txBody>
+                  <a:tcPr>
+                    <a:solidFill>
+                      <a:srgbClr val="FFFFFF"/>
+                    </a:solidFill>
+                  </a:tcPr>
+                </a:tc>
+              </a:tr>
+              <a:tr h="475488">
+                <a:tc>
+                  <a:txBody>
+                    <a:bodyPr wrap="square"/>
+                    <a:lstStyle/>
+                    <a:p>
+                      <a:r>
+                        <a:rPr sz="1100" b="0">
+                          <a:solidFill>
+                            <a:srgbClr val="1A1A1A"/>
+                          </a:solidFill>
+                          <a:latin typeface="Arial"/>
+                        </a:rPr>
+                        <a:t>Rotary / Lions</a:t>
+                      </a:r>
+                    </a:p>
+                  </a:txBody>
+                  <a:tcPr>
+                    <a:solidFill>
+                      <a:srgbClr val="F4F6FA"/>
+                    </a:solidFill>
+                  </a:tcPr>
+                </a:tc>
+                <a:tc>
+                  <a:txBody>
+                    <a:bodyPr wrap="square"/>
+                    <a:lstStyle/>
+                    <a:p>
+                      <a:r>
+                        <a:rPr sz="1100" b="0">
+                          <a:solidFill>
+                            <a:srgbClr val="1A1A1A"/>
+                          </a:solidFill>
+                          <a:latin typeface="Arial"/>
+                        </a:rPr>
+                        <a:t>Etablierte Unternehmer 50+</a:t>
+                      </a:r>
+                    </a:p>
+                  </a:txBody>
+                  <a:tcPr>
+                    <a:solidFill>
+                      <a:srgbClr val="F4F6FA"/>
+                    </a:solidFill>
+                  </a:tcPr>
+                </a:tc>
+                <a:tc>
+                  <a:txBody>
+                    <a:bodyPr wrap="square"/>
+                    <a:lstStyle/>
+                    <a:p>
+                      <a:r>
+                        <a:rPr sz="1100" b="0">
+                          <a:solidFill>
+                            <a:srgbClr val="1A1A1A"/>
+                          </a:solidFill>
+                          <a:latin typeface="Arial"/>
+                        </a:rPr>
+                        <a:t>gering (monatlich)</a:t>
+                      </a:r>
+                    </a:p>
+                  </a:txBody>
+                  <a:tcPr>
+                    <a:solidFill>
+                      <a:srgbClr val="F4F6FA"/>
+                    </a:solidFill>
+                  </a:tcPr>
+                </a:tc>
+                <a:tc>
+                  <a:txBody>
+                    <a:bodyPr wrap="square"/>
+                    <a:lstStyle/>
+                    <a:p>
+                      <a:r>
+                        <a:rPr sz="1100" b="0">
+                          <a:solidFill>
+                            <a:srgbClr val="1A1A1A"/>
+                          </a:solidFill>
+                          <a:latin typeface="Arial"/>
+                        </a:rPr>
+                        <a:t>Hoch – nur durch Empfehlung; Gästeabende als Einstieg</a:t>
+                      </a:r>
+                    </a:p>
+                  </a:txBody>
+                  <a:tcPr>
+                    <a:solidFill>
+                      <a:srgbClr val="F4F6FA"/>
+                    </a:solidFill>
+                  </a:tcPr>
+                </a:tc>
+              </a:tr>
+              <a:tr h="475488">
+                <a:tc>
+                  <a:txBody>
+                    <a:bodyPr wrap="square"/>
+                    <a:lstStyle/>
+                    <a:p>
+                      <a:r>
+                        <a:rPr sz="1100" b="0">
+                          <a:solidFill>
+                            <a:srgbClr val="1A1A1A"/>
+                          </a:solidFill>
+                          <a:latin typeface="Arial"/>
+                        </a:rPr>
+                        <a:t>BNI (Business Network International)</a:t>
+                      </a:r>
+                    </a:p>
+                  </a:txBody>
+                  <a:tcPr>
+                    <a:solidFill>
+                      <a:srgbClr val="FFFFFF"/>
+                    </a:solidFill>
+                  </a:tcPr>
+                </a:tc>
+                <a:tc>
+                  <a:txBody>
+                    <a:bodyPr wrap="square"/>
+                    <a:lstStyle/>
+                    <a:p>
+                      <a:r>
+                        <a:rPr sz="1100" b="0">
+                          <a:solidFill>
+                            <a:srgbClr val="1A1A1A"/>
+                          </a:solidFill>
+                          <a:latin typeface="Arial"/>
+                        </a:rPr>
+                        <a:t>Alle Branchen, Empfehlungsnetzwerk</a:t>
+                      </a:r>
+                    </a:p>
+                  </a:txBody>
+                  <a:tcPr>
+                    <a:solidFill>
+                      <a:srgbClr val="FFFFFF"/>
+                    </a:solidFill>
+                  </a:tcPr>
+                </a:tc>
+                <a:tc>
+                  <a:txBody>
+                    <a:bodyPr wrap="square"/>
+                    <a:lstStyle/>
+                    <a:p>
+                      <a:r>
+                        <a:rPr sz="1100" b="0">
+                          <a:solidFill>
+                            <a:srgbClr val="1A1A1A"/>
+                          </a:solidFill>
+                          <a:latin typeface="Arial"/>
+                        </a:rPr>
+                        <a:t>Hoch (wöchentlich!)</a:t>
+                      </a:r>
+                    </a:p>
+                  </a:txBody>
+                  <a:tcPr>
+                    <a:solidFill>
+                      <a:srgbClr val="FFFFFF"/>
+                    </a:solidFill>
+                  </a:tcPr>
+                </a:tc>
+                <a:tc>
+                  <a:txBody>
+                    <a:bodyPr wrap="square"/>
+                    <a:lstStyle/>
+                    <a:p>
+                      <a:r>
+                        <a:rPr sz="1100" b="0">
+                          <a:solidFill>
+                            <a:srgbClr val="1A1A1A"/>
+                          </a:solidFill>
+                          <a:latin typeface="Arial"/>
+                        </a:rPr>
+                        <a:t>Mittel – Aufwand vorab prüfen</a:t>
+                      </a:r>
+                    </a:p>
+                  </a:txBody>
+                  <a:tcPr>
+                    <a:solidFill>
+                      <a:srgbClr val="FFFFFF"/>
+                    </a:solidFill>
+                  </a:tcPr>
+                </a:tc>
+              </a:tr>
+            </a:tbl>
+          </a:graphicData>
+        </a:graphic>
+      </p:graphicFrame>
+    </p:spTree>
+  </p:cSld>
+  <p:clrMapOvr>
+    <a:masterClrMapping/>
+  </p:clrMapOvr>
+</p:sld>
+</file>
+
+<file path=ppt/slides/slide17.xml><?xml version="1.0" encoding="utf-8"?>
+<p:sld xmlns:a="http://schemas.openxmlformats.org/drawingml/2006/main" xmlns:p="http://schemas.openxmlformats.org/presentationml/2006/main" xmlns:r="http://schemas.openxmlformats.org/officeDocument/2006/relationships">
+  <p:cSld>
+    <p:bg>
+      <p:bgPr>
+        <a:solidFill>
+          <a:srgbClr val="1A1A1A"/>
+        </a:solidFill>
+        <a:effectLst/>
+      </p:bgPr>
+    </p:bg>
+    <p:spTree>
+      <p:nvGrpSpPr>
+        <p:cNvPr id="1" name=""/>
+        <p:cNvGrpSpPr/>
+        <p:nvPr/>
+      </p:nvGrpSpPr>
+      <p:grpSpPr/>
+      <p:sp>
+        <p:nvSpPr>
+          <p:cNvPr id="2" name="Rectangle 1"/>
+          <p:cNvSpPr/>
+          <p:nvPr/>
+        </p:nvSpPr>
+        <p:spPr>
+          <a:xfrm>
+            <a:off x="0" y="0"/>
+            <a:ext cx="73152" cy="6858000"/>
+          </a:xfrm>
+          <a:prstGeom prst="rect">
+            <a:avLst/>
+          </a:prstGeom>
+          <a:solidFill>
+            <a:srgbClr val="E05B00"/>
+          </a:solidFill>
+          <a:ln>
+            <a:noFill/>
+          </a:ln>
+        </p:spPr>
+        <p:style>
+          <a:lnRef idx="1">
+            <a:schemeClr val="accent1"/>
+          </a:lnRef>
+          <a:fillRef idx="3">
+            <a:schemeClr val="accent1"/>
+          </a:fillRef>
+          <a:effectRef idx="2">
+            <a:schemeClr val="accent1"/>
+          </a:effectRef>
+          <a:fontRef idx="minor">
+            <a:schemeClr val="lt1"/>
+          </a:fontRef>
+        </p:style>
+        <p:txBody>
+          <a:bodyPr rtlCol="0" anchor="ctr"/>
+          <a:lstStyle/>
+          <a:p>
+            <a:pPr algn="ctr"/>
+          </a:p>
+        </p:txBody>
+      </p:sp>
+      <p:sp>
+        <p:nvSpPr>
+          <p:cNvPr id="3" name="TextBox 2"/>
+          <p:cNvSpPr txBox="1"/>
+          <p:nvPr/>
+        </p:nvSpPr>
+        <p:spPr>
+          <a:xfrm>
+            <a:off x="365760" y="2011680"/>
+            <a:ext cx="11430000" cy="2011680"/>
+          </a:xfrm>
+          <a:prstGeom prst="rect">
+            <a:avLst/>
+          </a:prstGeom>
+          <a:noFill/>
+        </p:spPr>
+        <p:txBody>
+          <a:bodyPr wrap="square">
+            <a:spAutoFit/>
+          </a:bodyPr>
+          <a:lstStyle/>
+          <a:p>
+            <a:pPr algn="l"/>
+            <a:r>
+              <a:rPr sz="3600" b="1" i="0">
+                <a:solidFill>
+                  <a:srgbClr val="FFFFFF"/>
+                </a:solidFill>
+                <a:latin typeface="Arial"/>
+              </a:rPr>
+              <a:t>Format 4: Digitale Sichtbarkeit (nachrangig, selektiv)</a:t>
+            </a:r>
+          </a:p>
+        </p:txBody>
+      </p:sp>
+    </p:spTree>
+  </p:cSld>
+  <p:clrMapOvr>
+    <a:masterClrMapping/>
+  </p:clrMapOvr>
+</p:sld>
+</file>
+
+<file path=ppt/slides/slide18.xml><?xml version="1.0" encoding="utf-8"?>
+<p:sld xmlns:a="http://schemas.openxmlformats.org/drawingml/2006/main" xmlns:p="http://schemas.openxmlformats.org/presentationml/2006/main" xmlns:r="http://schemas.openxmlformats.org/officeDocument/2006/relationships">
+  <p:cSld>
+    <p:bg>
+      <p:bgPr>
+        <a:solidFill>
+          <a:srgbClr val="FFFFFF"/>
+        </a:solidFill>
+        <a:effectLst/>
+      </p:bgPr>
+    </p:bg>
+    <p:spTree>
+      <p:nvGrpSpPr>
+        <p:cNvPr id="1" name=""/>
+        <p:cNvGrpSpPr/>
+        <p:nvPr/>
+      </p:nvGrpSpPr>
+      <p:grpSpPr/>
+      <p:sp>
+        <p:nvSpPr>
+          <p:cNvPr id="2" name="Rectangle 1"/>
+          <p:cNvSpPr/>
+          <p:nvPr/>
+        </p:nvSpPr>
+        <p:spPr>
+          <a:xfrm>
+            <a:off x="0" y="0"/>
+            <a:ext cx="73152" cy="6858000"/>
+          </a:xfrm>
+          <a:prstGeom prst="rect">
+            <a:avLst/>
+          </a:prstGeom>
+          <a:solidFill>
+            <a:srgbClr val="003DA5"/>
+          </a:solidFill>
+          <a:ln>
+            <a:noFill/>
+          </a:ln>
+        </p:spPr>
+        <p:style>
+          <a:lnRef idx="1">
+            <a:schemeClr val="accent1"/>
+          </a:lnRef>
+          <a:fillRef idx="3">
+            <a:schemeClr val="accent1"/>
+          </a:fillRef>
+          <a:effectRef idx="2">
+            <a:schemeClr val="accent1"/>
+          </a:effectRef>
+          <a:fontRef idx="minor">
+            <a:schemeClr val="lt1"/>
+          </a:fontRef>
+        </p:style>
+        <p:txBody>
+          <a:bodyPr rtlCol="0" anchor="ctr"/>
+          <a:lstStyle/>
+          <a:p>
+            <a:pPr algn="ctr"/>
+          </a:p>
+        </p:txBody>
+      </p:sp>
+      <p:sp>
+        <p:nvSpPr>
+          <p:cNvPr id="3" name="TextBox 2"/>
+          <p:cNvSpPr txBox="1"/>
+          <p:nvPr/>
+        </p:nvSpPr>
+        <p:spPr>
+          <a:xfrm>
+            <a:off x="228600" y="182880"/>
+            <a:ext cx="11430000" cy="320040"/>
+          </a:xfrm>
+          <a:prstGeom prst="rect">
+            <a:avLst/>
+          </a:prstGeom>
+          <a:noFill/>
+        </p:spPr>
+        <p:txBody>
+          <a:bodyPr wrap="square">
+            <a:spAutoFit/>
+          </a:bodyPr>
+          <a:lstStyle/>
+          <a:p>
+            <a:pPr algn="l"/>
+            <a:r>
+              <a:rPr sz="900" b="0" i="0">
+                <a:solidFill>
+                  <a:srgbClr val="556575"/>
+                </a:solidFill>
+                <a:latin typeface="Arial"/>
+              </a:rPr>
+              <a:t>M20 · 4.4 Sichtbarkeit: Expertise sichtbar machen ohne Eigenwerbung</a:t>
+            </a:r>
+          </a:p>
+        </p:txBody>
+      </p:sp>
+      <p:sp>
+        <p:nvSpPr>
+          <p:cNvPr id="4" name="TextBox 3"/>
+          <p:cNvSpPr txBox="1"/>
+          <p:nvPr/>
+        </p:nvSpPr>
+        <p:spPr>
+          <a:xfrm>
+            <a:off x="365760" y="274320"/>
+            <a:ext cx="11430000" cy="777240"/>
+          </a:xfrm>
+          <a:prstGeom prst="rect">
+            <a:avLst/>
+          </a:prstGeom>
+          <a:noFill/>
+        </p:spPr>
+        <p:txBody>
+          <a:bodyPr wrap="square">
+            <a:spAutoFit/>
+          </a:bodyPr>
+          <a:lstStyle/>
+          <a:p>
+            <a:pPr algn="l"/>
+            <a:r>
+              <a:rPr sz="2200" b="1" i="0">
+                <a:solidFill>
+                  <a:srgbClr val="003DA5"/>
+                </a:solidFill>
+                <a:latin typeface="Arial"/>
+              </a:rPr>
+              <a:t>Format 4: Digitale Sichtbarkeit (nachrangig, selektiv)</a:t>
+            </a:r>
+          </a:p>
+        </p:txBody>
+      </p:sp>
+      <p:sp>
+        <p:nvSpPr>
+          <p:cNvPr id="5" name="Rectangle 4"/>
+          <p:cNvSpPr/>
+          <p:nvPr/>
+        </p:nvSpPr>
+        <p:spPr>
+          <a:xfrm>
+            <a:off x="365760" y="1005840"/>
+            <a:ext cx="11430000" cy="27432"/>
+          </a:xfrm>
+          <a:prstGeom prst="rect">
+            <a:avLst/>
+          </a:prstGeom>
+          <a:solidFill>
+            <a:srgbClr val="D1D5DB"/>
+          </a:solidFill>
+          <a:ln>
+            <a:noFill/>
+          </a:ln>
+        </p:spPr>
+        <p:style>
+          <a:lnRef idx="1">
+            <a:schemeClr val="accent1"/>
+          </a:lnRef>
+          <a:fillRef idx="3">
+            <a:schemeClr val="accent1"/>
+          </a:fillRef>
+          <a:effectRef idx="2">
+            <a:schemeClr val="accent1"/>
+          </a:effectRef>
+          <a:fontRef idx="minor">
+            <a:schemeClr val="lt1"/>
+          </a:fontRef>
+        </p:style>
+        <p:txBody>
+          <a:bodyPr rtlCol="0" anchor="ctr"/>
+          <a:lstStyle/>
+          <a:p>
+            <a:pPr algn="ctr"/>
+          </a:p>
+        </p:txBody>
+      </p:sp>
+      <p:sp>
+        <p:nvSpPr>
+          <p:cNvPr id="6" name="TextBox 5"/>
+          <p:cNvSpPr txBox="1"/>
+          <p:nvPr/>
+        </p:nvSpPr>
+        <p:spPr>
+          <a:xfrm>
+            <a:off x="365760" y="1143000"/>
+            <a:ext cx="11430000" cy="5212080"/>
+          </a:xfrm>
+          <a:prstGeom prst="rect">
+            <a:avLst/>
+          </a:prstGeom>
+          <a:noFill/>
+        </p:spPr>
+        <p:txBody>
+          <a:bodyPr wrap="square">
+            <a:spAutoFit/>
+          </a:bodyPr>
+          <a:lstStyle/>
+          <a:p>
+            <a:pPr>
+              <a:spcBef>
+                <a:spcPts val="500"/>
+              </a:spcBef>
+            </a:pPr>
+            <a:r>
+              <a:rPr sz="1500">
+                <a:solidFill>
+                  <a:srgbClr val="003DA5"/>
+                </a:solidFill>
+                <a:latin typeface="Arial"/>
+              </a:rPr>
+              <a:t>▪  </a:t>
+            </a:r>
+            <a:r>
+              <a:rPr sz="1700" b="1">
+                <a:solidFill>
+                  <a:srgbClr val="003DA5"/>
+                </a:solidFill>
+                <a:latin typeface="Arial"/>
+              </a:rPr>
+              <a:t>kein primärer Akquise-Kanal: </a:t>
+            </a:r>
+            <a:r>
+              <a:rPr sz="1700">
+                <a:solidFill>
+                  <a:srgbClr val="1A1A1A"/>
+                </a:solidFill>
+                <a:latin typeface="Arial"/>
+              </a:rPr>
+              <a:t>– Handwerker, Landwirte und klassische Mittelständler suchen Bankberater nicht über LinkedIn. Die Energie ist beim persönlichen Kontakt (Kammerfrühstück, Verbandstreffen) deutlich…</a:t>
+            </a:r>
+          </a:p>
+          <a:p>
+            <a:pPr>
+              <a:spcBef>
+                <a:spcPts val="500"/>
+              </a:spcBef>
+            </a:pPr>
+            <a:r>
+              <a:rPr sz="1500">
+                <a:solidFill>
+                  <a:srgbClr val="003DA5"/>
+                </a:solidFill>
+                <a:latin typeface="Arial"/>
+              </a:rPr>
+              <a:t>▪  </a:t>
+            </a:r>
+            <a:r>
+              <a:rPr sz="1700" b="1">
+                <a:solidFill>
+                  <a:srgbClr val="003DA5"/>
+                </a:solidFill>
+                <a:latin typeface="Arial"/>
+              </a:rPr>
+              <a:t>Sinnvoller Einsatz von LinkedIn: </a:t>
+            </a:r>
+            <a:r>
+              <a:rPr sz="1700">
+                <a:solidFill>
+                  <a:srgbClr val="1A1A1A"/>
+                </a:solidFill>
+                <a:latin typeface="Arial"/>
+              </a:rPr>
+              <a:t>Nachbereitung und Pflege von Kontakten, die bereits persönlich entstanden sind – nicht als eigenständiger Erstkontakt-Kanal. LinkedIn eignet sich auch für Verbundpartner-…</a:t>
+            </a:r>
+          </a:p>
+          <a:p>
+            <a:pPr>
+              <a:spcBef>
+                <a:spcPts val="500"/>
+              </a:spcBef>
+            </a:pPr>
+            <a:r>
+              <a:rPr sz="1500">
+                <a:solidFill>
+                  <a:srgbClr val="003DA5"/>
+                </a:solidFill>
+                <a:latin typeface="Arial"/>
+              </a:rPr>
+              <a:t>▪  </a:t>
+            </a:r>
+            <a:r>
+              <a:rPr sz="1700" b="1">
+                <a:solidFill>
+                  <a:srgbClr val="003DA5"/>
+                </a:solidFill>
+                <a:latin typeface="Arial"/>
+              </a:rPr>
+              <a:t>Compliance-Pflicht: </a:t>
+            </a:r>
+            <a:r>
+              <a:rPr sz="1700">
+                <a:solidFill>
+                  <a:srgbClr val="1A1A1A"/>
+                </a:solidFill>
+                <a:latin typeface="Arial"/>
+              </a:rPr>
+              <a:t>Vor dem Start jeglicher LinkedIn-Aktivität (Posts, Kommentare, Beiträge mit Bankbezug) ist die</a:t>
+            </a:r>
+          </a:p>
+          <a:p>
+            <a:pPr>
+              <a:spcBef>
+                <a:spcPts val="500"/>
+              </a:spcBef>
+            </a:pPr>
+            <a:r>
+              <a:rPr sz="1500">
+                <a:solidFill>
+                  <a:srgbClr val="003DA5"/>
+                </a:solidFill>
+                <a:latin typeface="Arial"/>
+              </a:rPr>
+              <a:t>▪  </a:t>
+            </a:r>
+            <a:r>
+              <a:rPr sz="1700" b="1">
+                <a:solidFill>
+                  <a:srgbClr val="003DA5"/>
+                </a:solidFill>
+                <a:latin typeface="Arial"/>
+              </a:rPr>
+              <a:t>Freigabe durch die Compliance-Abteilung der eigenen Bank: </a:t>
+            </a:r>
+            <a:r>
+              <a:rPr sz="1700">
+                <a:solidFill>
+                  <a:srgbClr val="1A1A1A"/>
+                </a:solidFill>
+                <a:latin typeface="Arial"/>
+              </a:rPr>
+              <a:t>einzuholen. Viele VR-Banken haben dafür eigene Social-Media-Richtlinien – holen Sie diese vorab ein. Ungeklärte LinkedIn-Aktivitäten können regulatorische und reputationsbezogene…</a:t>
+            </a:r>
+          </a:p>
+          <a:p>
+            <a:pPr>
+              <a:spcBef>
+                <a:spcPts val="500"/>
+              </a:spcBef>
+            </a:pPr>
+            <a:r>
+              <a:rPr sz="1500">
+                <a:solidFill>
+                  <a:srgbClr val="003DA5"/>
+                </a:solidFill>
+                <a:latin typeface="Arial"/>
+              </a:rPr>
+              <a:t>▪  </a:t>
+            </a:r>
+            <a:r>
+              <a:rPr sz="1700" b="1">
+                <a:solidFill>
+                  <a:srgbClr val="003DA5"/>
+                </a:solidFill>
+                <a:latin typeface="Arial"/>
+              </a:rPr>
+              <a:t>Minimalstandard (nach Compliance-Freigabe): </a:t>
+            </a:r>
+            <a:r>
+              <a:rPr sz="1700">
+                <a:solidFill>
+                  <a:srgbClr val="1A1A1A"/>
+                </a:solidFill>
+                <a:latin typeface="Arial"/>
+              </a:rPr>
+              <a:t>Vollständiges Profil mit klarem Beratungsfeld, Verbindungen mit bestehenden Netzwerkkontakten pflegen – Posts als optionale Ergänzung, nicht als Pflicht.</a:t>
+            </a:r>
+          </a:p>
+        </p:txBody>
+      </p:sp>
+    </p:spTree>
+  </p:cSld>
+  <p:clrMapOvr>
+    <a:masterClrMapping/>
+  </p:clrMapOvr>
+</p:sld>
+</file>
+
+<file path=ppt/slides/slide19.xml><?xml version="1.0" encoding="utf-8"?>
+<p:sld xmlns:a="http://schemas.openxmlformats.org/drawingml/2006/main" xmlns:p="http://schemas.openxmlformats.org/presentationml/2006/main" xmlns:r="http://schemas.openxmlformats.org/officeDocument/2006/relationships">
+  <p:cSld>
+    <p:bg>
+      <p:bgPr>
+        <a:solidFill>
+          <a:srgbClr val="1A1A1A"/>
+        </a:solidFill>
+        <a:effectLst/>
+      </p:bgPr>
+    </p:bg>
+    <p:spTree>
+      <p:nvGrpSpPr>
+        <p:cNvPr id="1" name=""/>
+        <p:cNvGrpSpPr/>
+        <p:nvPr/>
+      </p:nvGrpSpPr>
+      <p:grpSpPr/>
+      <p:sp>
+        <p:nvSpPr>
+          <p:cNvPr id="2" name="Rectangle 1"/>
+          <p:cNvSpPr/>
+          <p:nvPr/>
+        </p:nvSpPr>
+        <p:spPr>
+          <a:xfrm>
+            <a:off x="0" y="0"/>
+            <a:ext cx="73152" cy="6858000"/>
+          </a:xfrm>
+          <a:prstGeom prst="rect">
+            <a:avLst/>
+          </a:prstGeom>
+          <a:solidFill>
+            <a:srgbClr val="E05B00"/>
+          </a:solidFill>
+          <a:ln>
+            <a:noFill/>
+          </a:ln>
+        </p:spPr>
+        <p:style>
+          <a:lnRef idx="1">
+            <a:schemeClr val="accent1"/>
+          </a:lnRef>
+          <a:fillRef idx="3">
+            <a:schemeClr val="accent1"/>
+          </a:fillRef>
+          <a:effectRef idx="2">
+            <a:schemeClr val="accent1"/>
+          </a:effectRef>
+          <a:fontRef idx="minor">
+            <a:schemeClr val="lt1"/>
+          </a:fontRef>
+        </p:style>
+        <p:txBody>
+          <a:bodyPr rtlCol="0" anchor="ctr"/>
+          <a:lstStyle/>
+          <a:p>
+            <a:pPr algn="ctr"/>
+          </a:p>
+        </p:txBody>
+      </p:sp>
+      <p:sp>
+        <p:nvSpPr>
+          <p:cNvPr id="3" name="TextBox 2"/>
+          <p:cNvSpPr txBox="1"/>
+          <p:nvPr/>
+        </p:nvSpPr>
+        <p:spPr>
+          <a:xfrm>
+            <a:off x="365760" y="2011680"/>
+            <a:ext cx="11430000" cy="2011680"/>
+          </a:xfrm>
+          <a:prstGeom prst="rect">
+            <a:avLst/>
+          </a:prstGeom>
+          <a:noFill/>
+        </p:spPr>
+        <p:txBody>
+          <a:bodyPr wrap="square">
+            <a:spAutoFit/>
+          </a:bodyPr>
+          <a:lstStyle/>
+          <a:p>
+            <a:pPr algn="l"/>
+            <a:r>
+              <a:rPr sz="3600" b="1" i="0">
+                <a:solidFill>
+                  <a:srgbClr val="FFFFFF"/>
+                </a:solidFill>
+                <a:latin typeface="Arial"/>
+              </a:rPr>
+              <a:t>Arbeitsblatt 1: Persönliche Netzwerkkarte</a:t>
+            </a:r>
+          </a:p>
+        </p:txBody>
+      </p:sp>
+    </p:spTree>
+  </p:cSld>
+  <p:clrMapOvr>
+    <a:masterClrMapping/>
+  </p:clrMapOvr>
+</p:sld>
+</file>
+
+<file path=ppt/slides/slide2.xml><?xml version="1.0" encoding="utf-8"?>
+<p:sld xmlns:a="http://schemas.openxmlformats.org/drawingml/2006/main" xmlns:p="http://schemas.openxmlformats.org/presentationml/2006/main" xmlns:r="http://schemas.openxmlformats.org/officeDocument/2006/relationships">
+  <p:cSld>
+    <p:bg>
+      <p:bgPr>
+        <a:solidFill>
+          <a:srgbClr val="F4F6FA"/>
+        </a:solidFill>
+        <a:effectLst/>
+      </p:bgPr>
+    </p:bg>
+    <p:spTree>
+      <p:nvGrpSpPr>
+        <p:cNvPr id="1" name=""/>
+        <p:cNvGrpSpPr/>
+        <p:nvPr/>
+      </p:nvGrpSpPr>
+      <p:grpSpPr/>
+      <p:sp>
+        <p:nvSpPr>
+          <p:cNvPr id="2" name="Rectangle 1"/>
+          <p:cNvSpPr/>
+          <p:nvPr/>
+        </p:nvSpPr>
+        <p:spPr>
+          <a:xfrm>
+            <a:off x="0" y="0"/>
+            <a:ext cx="73152" cy="6858000"/>
+          </a:xfrm>
+          <a:prstGeom prst="rect">
+            <a:avLst/>
+          </a:prstGeom>
+          <a:solidFill>
+            <a:srgbClr val="003DA5"/>
+          </a:solidFill>
+          <a:ln>
+            <a:noFill/>
+          </a:ln>
+        </p:spPr>
+        <p:style>
+          <a:lnRef idx="1">
+            <a:schemeClr val="accent1"/>
+          </a:lnRef>
+          <a:fillRef idx="3">
+            <a:schemeClr val="accent1"/>
+          </a:fillRef>
+          <a:effectRef idx="2">
+            <a:schemeClr val="accent1"/>
+          </a:effectRef>
+          <a:fontRef idx="minor">
+            <a:schemeClr val="lt1"/>
+          </a:fontRef>
+        </p:style>
+        <p:txBody>
+          <a:bodyPr rtlCol="0" anchor="ctr"/>
+          <a:lstStyle/>
+          <a:p>
+            <a:pPr algn="ctr"/>
+          </a:p>
+        </p:txBody>
+      </p:sp>
+      <p:sp>
+        <p:nvSpPr>
+          <p:cNvPr id="3" name="Rectangle 2"/>
+          <p:cNvSpPr/>
+          <p:nvPr/>
+        </p:nvSpPr>
+        <p:spPr>
+          <a:xfrm>
+            <a:off x="228600" y="804672"/>
+            <a:ext cx="11612880" cy="22860"/>
+          </a:xfrm>
+          <a:prstGeom prst="rect">
+            <a:avLst/>
+          </a:prstGeom>
+          <a:solidFill>
+            <a:srgbClr val="D1D5DB"/>
+          </a:solidFill>
+          <a:ln>
+            <a:noFill/>
+          </a:ln>
+        </p:spPr>
+        <p:style>
+          <a:lnRef idx="1">
+            <a:schemeClr val="accent1"/>
+          </a:lnRef>
+          <a:fillRef idx="3">
+            <a:schemeClr val="accent1"/>
+          </a:fillRef>
+          <a:effectRef idx="2">
+            <a:schemeClr val="accent1"/>
+          </a:effectRef>
+          <a:fontRef idx="minor">
+            <a:schemeClr val="lt1"/>
+          </a:fontRef>
+        </p:style>
+        <p:txBody>
+          <a:bodyPr rtlCol="0" anchor="ctr"/>
+          <a:lstStyle/>
+          <a:p>
+            <a:pPr algn="ctr"/>
+          </a:p>
+        </p:txBody>
+      </p:sp>
+      <p:sp>
+        <p:nvSpPr>
+          <p:cNvPr id="4" name="TextBox 3"/>
+          <p:cNvSpPr txBox="1"/>
+          <p:nvPr/>
+        </p:nvSpPr>
+        <p:spPr>
+          <a:xfrm>
+            <a:off x="365760" y="320040"/>
+            <a:ext cx="4572000" cy="347472"/>
+          </a:xfrm>
+          <a:prstGeom prst="rect">
+            <a:avLst/>
+          </a:prstGeom>
+          <a:noFill/>
+        </p:spPr>
+        <p:txBody>
+          <a:bodyPr wrap="square">
+            <a:spAutoFit/>
+          </a:bodyPr>
+          <a:lstStyle/>
+          <a:p>
+            <a:pPr algn="l"/>
+            <a:r>
+              <a:rPr sz="900" b="1" i="0">
+                <a:solidFill>
+                  <a:srgbClr val="003DA5"/>
+                </a:solidFill>
+                <a:latin typeface="Arial"/>
+              </a:rPr>
+              <a:t>LERNZIELE</a:t>
+            </a:r>
+          </a:p>
+        </p:txBody>
+      </p:sp>
+      <p:sp>
+        <p:nvSpPr>
+          <p:cNvPr id="5" name="TextBox 4"/>
+          <p:cNvSpPr txBox="1"/>
+          <p:nvPr/>
+        </p:nvSpPr>
+        <p:spPr>
+          <a:xfrm>
+            <a:off x="365760" y="502920"/>
+            <a:ext cx="10058400" cy="640080"/>
+          </a:xfrm>
+          <a:prstGeom prst="rect">
+            <a:avLst/>
+          </a:prstGeom>
+          <a:noFill/>
+        </p:spPr>
+        <p:txBody>
+          <a:bodyPr wrap="square">
+            <a:spAutoFit/>
+          </a:bodyPr>
+          <a:lstStyle/>
+          <a:p>
+            <a:pPr algn="l"/>
+            <a:r>
+              <a:rPr sz="2400" b="1" i="0">
+                <a:solidFill>
+                  <a:srgbClr val="1A1A1A"/>
+                </a:solidFill>
+                <a:latin typeface="Arial"/>
+              </a:rPr>
+              <a:t>Was Sie nach diesem Modul können.</a:t>
+            </a:r>
+          </a:p>
+        </p:txBody>
+      </p:sp>
+      <p:sp>
+        <p:nvSpPr>
+          <p:cNvPr id="6" name="TextBox 5"/>
+          <p:cNvSpPr txBox="1"/>
+          <p:nvPr/>
+        </p:nvSpPr>
+        <p:spPr>
+          <a:xfrm>
+            <a:off x="365760" y="1234440"/>
+            <a:ext cx="11430000" cy="5303520"/>
+          </a:xfrm>
+          <a:prstGeom prst="rect">
+            <a:avLst/>
+          </a:prstGeom>
+          <a:noFill/>
+        </p:spPr>
+        <p:txBody>
+          <a:bodyPr wrap="square">
+            <a:spAutoFit/>
+          </a:bodyPr>
+          <a:lstStyle/>
+          <a:p>
+            <a:pPr>
+              <a:spcBef>
+                <a:spcPts val="500"/>
+              </a:spcBef>
+            </a:pPr>
+            <a:r>
+              <a:rPr sz="1500">
+                <a:solidFill>
+                  <a:srgbClr val="003DA5"/>
+                </a:solidFill>
+                <a:latin typeface="Arial"/>
+              </a:rPr>
+              <a:t>▪  </a:t>
+            </a:r>
+            <a:r>
+              <a:rPr sz="1700">
+                <a:solidFill>
+                  <a:srgbClr val="1A1A1A"/>
+                </a:solidFill>
+                <a:latin typeface="Arial"/>
+              </a:rPr>
+              <a:t>Eigenes Netzwerk nach Stärke, Brücken und Lücken analysieren und Erweiterungsstrategie ableiten</a:t>
+            </a:r>
+          </a:p>
+          <a:p>
+            <a:pPr>
+              <a:spcBef>
+                <a:spcPts val="500"/>
+              </a:spcBef>
+            </a:pPr>
+            <a:r>
+              <a:rPr sz="1500">
+                <a:solidFill>
+                  <a:srgbClr val="003DA5"/>
+                </a:solidFill>
+                <a:latin typeface="Arial"/>
+              </a:rPr>
+              <a:t>▪  </a:t>
+            </a:r>
+            <a:r>
+              <a:rPr sz="1700">
+                <a:solidFill>
+                  <a:srgbClr val="1A1A1A"/>
+                </a:solidFill>
+                <a:latin typeface="Arial"/>
+              </a:rPr>
+              <a:t>Verschiedene Netzwerk-Kanäle nach strategischer Eignung bewerten</a:t>
+            </a:r>
+          </a:p>
+          <a:p>
+            <a:pPr>
+              <a:spcBef>
+                <a:spcPts val="500"/>
+              </a:spcBef>
+            </a:pPr>
+            <a:r>
+              <a:rPr sz="1500">
+                <a:solidFill>
+                  <a:srgbClr val="003DA5"/>
+                </a:solidFill>
+                <a:latin typeface="Arial"/>
+              </a:rPr>
+              <a:t>▪  </a:t>
+            </a:r>
+            <a:r>
+              <a:rPr sz="1700">
+                <a:solidFill>
+                  <a:srgbClr val="1A1A1A"/>
+                </a:solidFill>
+                <a:latin typeface="Arial"/>
+              </a:rPr>
+              <a:t>Persönliche Sichtbarkeitsstrategie entwickeln</a:t>
+            </a:r>
+          </a:p>
+          <a:p>
+            <a:pPr>
+              <a:spcBef>
+                <a:spcPts val="500"/>
+              </a:spcBef>
+            </a:pPr>
+            <a:r>
+              <a:rPr sz="1500">
+                <a:solidFill>
+                  <a:srgbClr val="003DA5"/>
+                </a:solidFill>
+                <a:latin typeface="Arial"/>
+              </a:rPr>
+              <a:t>▪  </a:t>
+            </a:r>
+            <a:r>
+              <a:rPr sz="1700">
+                <a:solidFill>
+                  <a:srgbClr val="1A1A1A"/>
+                </a:solidFill>
+                <a:latin typeface="Arial"/>
+              </a:rPr>
+              <a:t>90-Tage-Netzwerkstrategie mit konkreten Aktivitäten gestalten</a:t>
+            </a:r>
+          </a:p>
+          <a:p>
+            <a:pPr>
+              <a:spcBef>
+                <a:spcPts val="500"/>
+              </a:spcBef>
+            </a:pPr>
+            <a:r>
+              <a:rPr sz="1500">
+                <a:solidFill>
+                  <a:srgbClr val="003DA5"/>
+                </a:solidFill>
+                <a:latin typeface="Arial"/>
+              </a:rPr>
+              <a:t>▪  </a:t>
+            </a:r>
+            <a:r>
+              <a:rPr sz="1700">
+                <a:solidFill>
+                  <a:srgbClr val="1A1A1A"/>
+                </a:solidFill>
+                <a:latin typeface="Arial"/>
+              </a:rPr>
+              <a:t>Operative Netzwerkpflege von strategischem Beziehungsaufbau unterscheiden</a:t>
+            </a:r>
+          </a:p>
+        </p:txBody>
+      </p:sp>
+    </p:spTree>
+  </p:cSld>
+  <p:clrMapOvr>
+    <a:masterClrMapping/>
+  </p:clrMapOvr>
+</p:sld>
+</file>
+
+<file path=ppt/slides/slide20.xml><?xml version="1.0" encoding="utf-8"?>
+<p:sld xmlns:a="http://schemas.openxmlformats.org/drawingml/2006/main" xmlns:p="http://schemas.openxmlformats.org/presentationml/2006/main" xmlns:r="http://schemas.openxmlformats.org/officeDocument/2006/relationships">
+  <p:cSld>
+    <p:bg>
+      <p:bgPr>
+        <a:solidFill>
+          <a:srgbClr val="FFFFFF"/>
+        </a:solidFill>
+        <a:effectLst/>
+      </p:bgPr>
+    </p:bg>
+    <p:spTree>
+      <p:nvGrpSpPr>
+        <p:cNvPr id="1" name=""/>
+        <p:cNvGrpSpPr/>
+        <p:nvPr/>
+      </p:nvGrpSpPr>
+      <p:grpSpPr/>
+      <p:sp>
+        <p:nvSpPr>
+          <p:cNvPr id="2" name="Rectangle 1"/>
+          <p:cNvSpPr/>
+          <p:nvPr/>
+        </p:nvSpPr>
+        <p:spPr>
+          <a:xfrm>
+            <a:off x="0" y="0"/>
+            <a:ext cx="73152" cy="6858000"/>
+          </a:xfrm>
+          <a:prstGeom prst="rect">
+            <a:avLst/>
+          </a:prstGeom>
+          <a:solidFill>
+            <a:srgbClr val="003DA5"/>
+          </a:solidFill>
+          <a:ln>
+            <a:noFill/>
+          </a:ln>
+        </p:spPr>
+        <p:style>
+          <a:lnRef idx="1">
+            <a:schemeClr val="accent1"/>
+          </a:lnRef>
+          <a:fillRef idx="3">
+            <a:schemeClr val="accent1"/>
+          </a:fillRef>
+          <a:effectRef idx="2">
+            <a:schemeClr val="accent1"/>
+          </a:effectRef>
+          <a:fontRef idx="minor">
+            <a:schemeClr val="lt1"/>
+          </a:fontRef>
+        </p:style>
+        <p:txBody>
+          <a:bodyPr rtlCol="0" anchor="ctr"/>
+          <a:lstStyle/>
+          <a:p>
+            <a:pPr algn="ctr"/>
+          </a:p>
+        </p:txBody>
+      </p:sp>
+      <p:sp>
+        <p:nvSpPr>
+          <p:cNvPr id="3" name="TextBox 2"/>
+          <p:cNvSpPr txBox="1"/>
+          <p:nvPr/>
+        </p:nvSpPr>
+        <p:spPr>
+          <a:xfrm>
+            <a:off x="228600" y="182880"/>
+            <a:ext cx="11430000" cy="320040"/>
+          </a:xfrm>
+          <a:prstGeom prst="rect">
+            <a:avLst/>
+          </a:prstGeom>
+          <a:noFill/>
+        </p:spPr>
+        <p:txBody>
+          <a:bodyPr wrap="square">
+            <a:spAutoFit/>
+          </a:bodyPr>
+          <a:lstStyle/>
+          <a:p>
+            <a:pPr algn="l"/>
+            <a:r>
+              <a:rPr sz="900" b="0" i="0">
+                <a:solidFill>
+                  <a:srgbClr val="556575"/>
+                </a:solidFill>
+                <a:latin typeface="Arial"/>
+              </a:rPr>
+              <a:t>M20 · 4.7 Arbeitsblätter</a:t>
+            </a:r>
+          </a:p>
+        </p:txBody>
+      </p:sp>
+      <p:sp>
+        <p:nvSpPr>
+          <p:cNvPr id="4" name="TextBox 3"/>
+          <p:cNvSpPr txBox="1"/>
+          <p:nvPr/>
+        </p:nvSpPr>
+        <p:spPr>
+          <a:xfrm>
+            <a:off x="365760" y="274320"/>
+            <a:ext cx="11430000" cy="777240"/>
+          </a:xfrm>
+          <a:prstGeom prst="rect">
+            <a:avLst/>
+          </a:prstGeom>
+          <a:noFill/>
+        </p:spPr>
+        <p:txBody>
+          <a:bodyPr wrap="square">
+            <a:spAutoFit/>
+          </a:bodyPr>
+          <a:lstStyle/>
+          <a:p>
+            <a:pPr algn="l"/>
+            <a:r>
+              <a:rPr sz="2200" b="1" i="0">
+                <a:solidFill>
+                  <a:srgbClr val="003DA5"/>
+                </a:solidFill>
+                <a:latin typeface="Arial"/>
+              </a:rPr>
+              <a:t>Arbeitsblatt 1: Persönliche Netzwerkkarte</a:t>
+            </a:r>
+          </a:p>
+        </p:txBody>
+      </p:sp>
+      <p:sp>
+        <p:nvSpPr>
+          <p:cNvPr id="5" name="Rectangle 4"/>
+          <p:cNvSpPr/>
+          <p:nvPr/>
+        </p:nvSpPr>
+        <p:spPr>
+          <a:xfrm>
+            <a:off x="365760" y="1005840"/>
+            <a:ext cx="11430000" cy="27432"/>
+          </a:xfrm>
+          <a:prstGeom prst="rect">
+            <a:avLst/>
+          </a:prstGeom>
+          <a:solidFill>
+            <a:srgbClr val="D1D5DB"/>
+          </a:solidFill>
+          <a:ln>
+            <a:noFill/>
+          </a:ln>
+        </p:spPr>
+        <p:style>
+          <a:lnRef idx="1">
+            <a:schemeClr val="accent1"/>
+          </a:lnRef>
+          <a:fillRef idx="3">
+            <a:schemeClr val="accent1"/>
+          </a:fillRef>
+          <a:effectRef idx="2">
+            <a:schemeClr val="accent1"/>
+          </a:effectRef>
+          <a:fontRef idx="minor">
+            <a:schemeClr val="lt1"/>
+          </a:fontRef>
+        </p:style>
+        <p:txBody>
+          <a:bodyPr rtlCol="0" anchor="ctr"/>
+          <a:lstStyle/>
+          <a:p>
+            <a:pPr algn="ctr"/>
+          </a:p>
+        </p:txBody>
+      </p:sp>
+      <p:graphicFrame>
+        <p:nvGraphicFramePr>
+          <p:cNvPr id="6" name="Table 5"/>
+          <p:cNvGraphicFramePr>
+            <a:graphicFrameLocks noGrp="1"/>
+          </p:cNvGraphicFramePr>
+          <p:nvPr/>
+        </p:nvGraphicFramePr>
+        <p:xfrm>
+          <a:off x="365760" y="1143000"/>
+          <a:ext cx="11430000" cy="4279392"/>
+        </p:xfrm>
+        <a:graphic>
+          <a:graphicData uri="http://schemas.openxmlformats.org/drawingml/2006/table">
+            <a:tbl>
+              <a:tblPr firstRow="1" bandRow="1">
+                <a:tableStyleId>{5C22544A-7EE6-4342-B048-85BDC9FD1C3A}</a:tableStyleId>
+              </a:tblPr>
+              <a:tblGrid>
+                <a:gridCol w="2286000"/>
+                <a:gridCol w="2286000"/>
+                <a:gridCol w="2286000"/>
+                <a:gridCol w="2286000"/>
+                <a:gridCol w="2286000"/>
+              </a:tblGrid>
+              <a:tr h="475488">
+                <a:tc>
+                  <a:txBody>
+                    <a:bodyPr wrap="square"/>
+                    <a:lstStyle/>
+                    <a:p>
+                      <a:r>
+                        <a:rPr sz="1100" b="1">
+                          <a:solidFill>
+                            <a:srgbClr val="FFFFFF"/>
+                          </a:solidFill>
+                          <a:latin typeface="Arial"/>
+                        </a:rPr>
+                        <a:t>Bereich</a:t>
+                      </a:r>
+                    </a:p>
+                  </a:txBody>
+                  <a:tcPr>
+                    <a:solidFill>
+                      <a:srgbClr val="003DA5"/>
+                    </a:solidFill>
+                  </a:tcPr>
+                </a:tc>
+                <a:tc>
+                  <a:txBody>
+                    <a:bodyPr wrap="square"/>
+                    <a:lstStyle/>
+                    <a:p>
+                      <a:r>
+                        <a:rPr sz="1100" b="1">
+                          <a:solidFill>
+                            <a:srgbClr val="FFFFFF"/>
+                          </a:solidFill>
+                          <a:latin typeface="Arial"/>
+                        </a:rPr>
+                        <a:t>Meine wichtigsten Kontakte</a:t>
+                      </a:r>
+                    </a:p>
+                  </a:txBody>
+                  <a:tcPr>
+                    <a:solidFill>
+                      <a:srgbClr val="003DA5"/>
+                    </a:solidFill>
+                  </a:tcPr>
+                </a:tc>
+                <a:tc>
+                  <a:txBody>
+                    <a:bodyPr wrap="square"/>
+                    <a:lstStyle/>
+                    <a:p>
+                      <a:r>
+                        <a:rPr sz="1100" b="1">
+                          <a:solidFill>
+                            <a:srgbClr val="FFFFFF"/>
+                          </a:solidFill>
+                          <a:latin typeface="Arial"/>
+                        </a:rPr>
+                        <a:t>Qualität (1–5)</a:t>
+                      </a:r>
+                    </a:p>
+                  </a:txBody>
+                  <a:tcPr>
+                    <a:solidFill>
+                      <a:srgbClr val="003DA5"/>
+                    </a:solidFill>
+                  </a:tcPr>
+                </a:tc>
+                <a:tc>
+                  <a:txBody>
+                    <a:bodyPr wrap="square"/>
+                    <a:lstStyle/>
+                    <a:p>
+                      <a:r>
+                        <a:rPr sz="1100" b="1">
+                          <a:solidFill>
+                            <a:srgbClr val="FFFFFF"/>
+                          </a:solidFill>
+                          <a:latin typeface="Arial"/>
+                        </a:rPr>
+                        <a:t>Letzte Interaktion</a:t>
+                      </a:r>
+                    </a:p>
+                  </a:txBody>
+                  <a:tcPr>
+                    <a:solidFill>
+                      <a:srgbClr val="003DA5"/>
+                    </a:solidFill>
+                  </a:tcPr>
+                </a:tc>
+                <a:tc>
+                  <a:txBody>
+                    <a:bodyPr wrap="square"/>
+                    <a:lstStyle/>
+                    <a:p>
+                      <a:r>
+                        <a:rPr sz="1100" b="1">
+                          <a:solidFill>
+                            <a:srgbClr val="FFFFFF"/>
+                          </a:solidFill>
+                          <a:latin typeface="Arial"/>
+                        </a:rPr>
+                        <a:t>Nächster Schritt</a:t>
+                      </a:r>
+                    </a:p>
+                  </a:txBody>
+                  <a:tcPr>
+                    <a:solidFill>
+                      <a:srgbClr val="003DA5"/>
+                    </a:solidFill>
+                  </a:tcPr>
+                </a:tc>
+              </a:tr>
+              <a:tr h="475488">
+                <a:tc>
+                  <a:txBody>
+                    <a:bodyPr wrap="square"/>
+                    <a:lstStyle/>
+                    <a:p>
+                      <a:r>
+                        <a:rPr sz="1100" b="0">
+                          <a:solidFill>
+                            <a:srgbClr val="1A1A1A"/>
+                          </a:solidFill>
+                          <a:latin typeface="Arial"/>
+                        </a:rPr>
+                        <a:t>Internes FK-Team</a:t>
+                      </a:r>
+                    </a:p>
+                  </a:txBody>
+                  <a:tcPr>
+                    <a:solidFill>
+                      <a:srgbClr val="FFFFFF"/>
+                    </a:solidFill>
+                  </a:tcPr>
+                </a:tc>
+                <a:tc>
+                  <a:txBody>
+                    <a:bodyPr wrap="square"/>
+                    <a:lstStyle/>
+                    <a:p>
+                      <a:r>
+                        <a:rPr sz="1100" b="0">
+                          <a:solidFill>
+                            <a:srgbClr val="1A1A1A"/>
+                          </a:solidFill>
+                          <a:latin typeface="Arial"/>
+                        </a:rPr>
+                        <a:t/>
+                      </a:r>
+                    </a:p>
+                  </a:txBody>
+                  <a:tcPr>
+                    <a:solidFill>
+                      <a:srgbClr val="FFFFFF"/>
+                    </a:solidFill>
+                  </a:tcPr>
+                </a:tc>
+                <a:tc>
+                  <a:txBody>
+                    <a:bodyPr wrap="square"/>
+                    <a:lstStyle/>
+                    <a:p>
+                      <a:r>
+                        <a:rPr sz="1100" b="0">
+                          <a:solidFill>
+                            <a:srgbClr val="1A1A1A"/>
+                          </a:solidFill>
+                          <a:latin typeface="Arial"/>
+                        </a:rPr>
+                        <a:t/>
+                      </a:r>
+                    </a:p>
+                  </a:txBody>
+                  <a:tcPr>
+                    <a:solidFill>
+                      <a:srgbClr val="FFFFFF"/>
+                    </a:solidFill>
+                  </a:tcPr>
+                </a:tc>
+                <a:tc>
+                  <a:txBody>
+                    <a:bodyPr wrap="square"/>
+                    <a:lstStyle/>
+                    <a:p>
+                      <a:r>
+                        <a:rPr sz="1100" b="0">
+                          <a:solidFill>
+                            <a:srgbClr val="1A1A1A"/>
+                          </a:solidFill>
+                          <a:latin typeface="Arial"/>
+                        </a:rPr>
+                        <a:t/>
+                      </a:r>
+                    </a:p>
+                  </a:txBody>
+                  <a:tcPr>
+                    <a:solidFill>
+                      <a:srgbClr val="FFFFFF"/>
+                    </a:solidFill>
+                  </a:tcPr>
+                </a:tc>
+                <a:tc>
+                  <a:txBody>
+                    <a:bodyPr wrap="square"/>
+                    <a:lstStyle/>
+                    <a:p>
+                      <a:r>
+                        <a:rPr sz="1100" b="0">
+                          <a:solidFill>
+                            <a:srgbClr val="1A1A1A"/>
+                          </a:solidFill>
+                          <a:latin typeface="Arial"/>
+                        </a:rPr>
+                        <a:t/>
+                      </a:r>
+                    </a:p>
+                  </a:txBody>
+                  <a:tcPr>
+                    <a:solidFill>
+                      <a:srgbClr val="FFFFFF"/>
+                    </a:solidFill>
+                  </a:tcPr>
+                </a:tc>
+              </a:tr>
+              <a:tr h="475488">
+                <a:tc>
+                  <a:txBody>
+                    <a:bodyPr wrap="square"/>
+                    <a:lstStyle/>
+                    <a:p>
+                      <a:r>
+                        <a:rPr sz="1100" b="0">
+                          <a:solidFill>
+                            <a:srgbClr val="1A1A1A"/>
+                          </a:solidFill>
+                          <a:latin typeface="Arial"/>
+                        </a:rPr>
+                        <a:t>Interne Spezialisten</a:t>
+                      </a:r>
+                    </a:p>
+                  </a:txBody>
+                  <a:tcPr>
+                    <a:solidFill>
+                      <a:srgbClr val="F4F6FA"/>
+                    </a:solidFill>
+                  </a:tcPr>
+                </a:tc>
+                <a:tc>
+                  <a:txBody>
+                    <a:bodyPr wrap="square"/>
+                    <a:lstStyle/>
+                    <a:p>
+                      <a:r>
+                        <a:rPr sz="1100" b="0">
+                          <a:solidFill>
+                            <a:srgbClr val="1A1A1A"/>
+                          </a:solidFill>
+                          <a:latin typeface="Arial"/>
+                        </a:rPr>
+                        <a:t/>
+                      </a:r>
+                    </a:p>
+                  </a:txBody>
+                  <a:tcPr>
+                    <a:solidFill>
+                      <a:srgbClr val="F4F6FA"/>
+                    </a:solidFill>
+                  </a:tcPr>
+                </a:tc>
+                <a:tc>
+                  <a:txBody>
+                    <a:bodyPr wrap="square"/>
+                    <a:lstStyle/>
+                    <a:p>
+                      <a:r>
+                        <a:rPr sz="1100" b="0">
+                          <a:solidFill>
+                            <a:srgbClr val="1A1A1A"/>
+                          </a:solidFill>
+                          <a:latin typeface="Arial"/>
+                        </a:rPr>
+                        <a:t/>
+                      </a:r>
+                    </a:p>
+                  </a:txBody>
+                  <a:tcPr>
+                    <a:solidFill>
+                      <a:srgbClr val="F4F6FA"/>
+                    </a:solidFill>
+                  </a:tcPr>
+                </a:tc>
+                <a:tc>
+                  <a:txBody>
+                    <a:bodyPr wrap="square"/>
+                    <a:lstStyle/>
+                    <a:p>
+                      <a:r>
+                        <a:rPr sz="1100" b="0">
+                          <a:solidFill>
+                            <a:srgbClr val="1A1A1A"/>
+                          </a:solidFill>
+                          <a:latin typeface="Arial"/>
+                        </a:rPr>
+                        <a:t/>
+                      </a:r>
+                    </a:p>
+                  </a:txBody>
+                  <a:tcPr>
+                    <a:solidFill>
+                      <a:srgbClr val="F4F6FA"/>
+                    </a:solidFill>
+                  </a:tcPr>
+                </a:tc>
+                <a:tc>
+                  <a:txBody>
+                    <a:bodyPr wrap="square"/>
+                    <a:lstStyle/>
+                    <a:p>
+                      <a:r>
+                        <a:rPr sz="1100" b="0">
+                          <a:solidFill>
+                            <a:srgbClr val="1A1A1A"/>
+                          </a:solidFill>
+                          <a:latin typeface="Arial"/>
+                        </a:rPr>
+                        <a:t/>
+                      </a:r>
+                    </a:p>
+                  </a:txBody>
+                  <a:tcPr>
+                    <a:solidFill>
+                      <a:srgbClr val="F4F6FA"/>
+                    </a:solidFill>
+                  </a:tcPr>
+                </a:tc>
+              </a:tr>
+              <a:tr h="475488">
+                <a:tc>
+                  <a:txBody>
+                    <a:bodyPr wrap="square"/>
+                    <a:lstStyle/>
+                    <a:p>
+                      <a:r>
+                        <a:rPr sz="1100" b="0">
+                          <a:solidFill>
+                            <a:srgbClr val="1A1A1A"/>
+                          </a:solidFill>
+                          <a:latin typeface="Arial"/>
+                        </a:rPr>
+                        <a:t>Verbundpartner</a:t>
+                      </a:r>
+                    </a:p>
+                  </a:txBody>
+                  <a:tcPr>
+                    <a:solidFill>
+                      <a:srgbClr val="FFFFFF"/>
+                    </a:solidFill>
+                  </a:tcPr>
+                </a:tc>
+                <a:tc>
+                  <a:txBody>
+                    <a:bodyPr wrap="square"/>
+                    <a:lstStyle/>
+                    <a:p>
+                      <a:r>
+                        <a:rPr sz="1100" b="0">
+                          <a:solidFill>
+                            <a:srgbClr val="1A1A1A"/>
+                          </a:solidFill>
+                          <a:latin typeface="Arial"/>
+                        </a:rPr>
+                        <a:t/>
+                      </a:r>
+                    </a:p>
+                  </a:txBody>
+                  <a:tcPr>
+                    <a:solidFill>
+                      <a:srgbClr val="FFFFFF"/>
+                    </a:solidFill>
+                  </a:tcPr>
+                </a:tc>
+                <a:tc>
+                  <a:txBody>
+                    <a:bodyPr wrap="square"/>
+                    <a:lstStyle/>
+                    <a:p>
+                      <a:r>
+                        <a:rPr sz="1100" b="0">
+                          <a:solidFill>
+                            <a:srgbClr val="1A1A1A"/>
+                          </a:solidFill>
+                          <a:latin typeface="Arial"/>
+                        </a:rPr>
+                        <a:t/>
+                      </a:r>
+                    </a:p>
+                  </a:txBody>
+                  <a:tcPr>
+                    <a:solidFill>
+                      <a:srgbClr val="FFFFFF"/>
+                    </a:solidFill>
+                  </a:tcPr>
+                </a:tc>
+                <a:tc>
+                  <a:txBody>
+                    <a:bodyPr wrap="square"/>
+                    <a:lstStyle/>
+                    <a:p>
+                      <a:r>
+                        <a:rPr sz="1100" b="0">
+                          <a:solidFill>
+                            <a:srgbClr val="1A1A1A"/>
+                          </a:solidFill>
+                          <a:latin typeface="Arial"/>
+                        </a:rPr>
+                        <a:t/>
+                      </a:r>
+                    </a:p>
+                  </a:txBody>
+                  <a:tcPr>
+                    <a:solidFill>
+                      <a:srgbClr val="FFFFFF"/>
+                    </a:solidFill>
+                  </a:tcPr>
+                </a:tc>
+                <a:tc>
+                  <a:txBody>
+                    <a:bodyPr wrap="square"/>
+                    <a:lstStyle/>
+                    <a:p>
+                      <a:r>
+                        <a:rPr sz="1100" b="0">
+                          <a:solidFill>
+                            <a:srgbClr val="1A1A1A"/>
+                          </a:solidFill>
+                          <a:latin typeface="Arial"/>
+                        </a:rPr>
+                        <a:t/>
+                      </a:r>
+                    </a:p>
+                  </a:txBody>
+                  <a:tcPr>
+                    <a:solidFill>
+                      <a:srgbClr val="FFFFFF"/>
+                    </a:solidFill>
+                  </a:tcPr>
+                </a:tc>
+              </a:tr>
+              <a:tr h="475488">
+                <a:tc>
+                  <a:txBody>
+                    <a:bodyPr wrap="square"/>
+                    <a:lstStyle/>
+                    <a:p>
+                      <a:r>
+                        <a:rPr sz="1100" b="0">
+                          <a:solidFill>
+                            <a:srgbClr val="1A1A1A"/>
+                          </a:solidFill>
+                          <a:latin typeface="Arial"/>
+                        </a:rPr>
+                        <a:t>Steuerberater / WP</a:t>
+                      </a:r>
+                    </a:p>
+                  </a:txBody>
+                  <a:tcPr>
+                    <a:solidFill>
+                      <a:srgbClr val="F4F6FA"/>
+                    </a:solidFill>
+                  </a:tcPr>
+                </a:tc>
+                <a:tc>
+                  <a:txBody>
+                    <a:bodyPr wrap="square"/>
+                    <a:lstStyle/>
+                    <a:p>
+                      <a:r>
+                        <a:rPr sz="1100" b="0">
+                          <a:solidFill>
+                            <a:srgbClr val="1A1A1A"/>
+                          </a:solidFill>
+                          <a:latin typeface="Arial"/>
+                        </a:rPr>
+                        <a:t/>
+                      </a:r>
+                    </a:p>
+                  </a:txBody>
+                  <a:tcPr>
+                    <a:solidFill>
+                      <a:srgbClr val="F4F6FA"/>
+                    </a:solidFill>
+                  </a:tcPr>
+                </a:tc>
+                <a:tc>
+                  <a:txBody>
+                    <a:bodyPr wrap="square"/>
+                    <a:lstStyle/>
+                    <a:p>
+                      <a:r>
+                        <a:rPr sz="1100" b="0">
+                          <a:solidFill>
+                            <a:srgbClr val="1A1A1A"/>
+                          </a:solidFill>
+                          <a:latin typeface="Arial"/>
+                        </a:rPr>
+                        <a:t/>
+                      </a:r>
+                    </a:p>
+                  </a:txBody>
+                  <a:tcPr>
+                    <a:solidFill>
+                      <a:srgbClr val="F4F6FA"/>
+                    </a:solidFill>
+                  </a:tcPr>
+                </a:tc>
+                <a:tc>
+                  <a:txBody>
+                    <a:bodyPr wrap="square"/>
+                    <a:lstStyle/>
+                    <a:p>
+                      <a:r>
+                        <a:rPr sz="1100" b="0">
+                          <a:solidFill>
+                            <a:srgbClr val="1A1A1A"/>
+                          </a:solidFill>
+                          <a:latin typeface="Arial"/>
+                        </a:rPr>
+                        <a:t/>
+                      </a:r>
+                    </a:p>
+                  </a:txBody>
+                  <a:tcPr>
+                    <a:solidFill>
+                      <a:srgbClr val="F4F6FA"/>
+                    </a:solidFill>
+                  </a:tcPr>
+                </a:tc>
+                <a:tc>
+                  <a:txBody>
+                    <a:bodyPr wrap="square"/>
+                    <a:lstStyle/>
+                    <a:p>
+                      <a:r>
+                        <a:rPr sz="1100" b="0">
+                          <a:solidFill>
+                            <a:srgbClr val="1A1A1A"/>
+                          </a:solidFill>
+                          <a:latin typeface="Arial"/>
+                        </a:rPr>
+                        <a:t/>
+                      </a:r>
+                    </a:p>
+                  </a:txBody>
+                  <a:tcPr>
+                    <a:solidFill>
+                      <a:srgbClr val="F4F6FA"/>
+                    </a:solidFill>
+                  </a:tcPr>
+                </a:tc>
+              </a:tr>
+              <a:tr h="475488">
+                <a:tc>
+                  <a:txBody>
+                    <a:bodyPr wrap="square"/>
+                    <a:lstStyle/>
+                    <a:p>
+                      <a:r>
+                        <a:rPr sz="1100" b="0">
+                          <a:solidFill>
+                            <a:srgbClr val="1A1A1A"/>
+                          </a:solidFill>
+                          <a:latin typeface="Arial"/>
+                        </a:rPr>
+                        <a:t>Rechtsanwälte</a:t>
+                      </a:r>
+                    </a:p>
+                  </a:txBody>
+                  <a:tcPr>
+                    <a:solidFill>
+                      <a:srgbClr val="FFFFFF"/>
+                    </a:solidFill>
+                  </a:tcPr>
+                </a:tc>
+                <a:tc>
+                  <a:txBody>
+                    <a:bodyPr wrap="square"/>
+                    <a:lstStyle/>
+                    <a:p>
+                      <a:r>
+                        <a:rPr sz="1100" b="0">
+                          <a:solidFill>
+                            <a:srgbClr val="1A1A1A"/>
+                          </a:solidFill>
+                          <a:latin typeface="Arial"/>
+                        </a:rPr>
+                        <a:t/>
+                      </a:r>
+                    </a:p>
+                  </a:txBody>
+                  <a:tcPr>
+                    <a:solidFill>
+                      <a:srgbClr val="FFFFFF"/>
+                    </a:solidFill>
+                  </a:tcPr>
+                </a:tc>
+                <a:tc>
+                  <a:txBody>
+                    <a:bodyPr wrap="square"/>
+                    <a:lstStyle/>
+                    <a:p>
+                      <a:r>
+                        <a:rPr sz="1100" b="0">
+                          <a:solidFill>
+                            <a:srgbClr val="1A1A1A"/>
+                          </a:solidFill>
+                          <a:latin typeface="Arial"/>
+                        </a:rPr>
+                        <a:t/>
+                      </a:r>
+                    </a:p>
+                  </a:txBody>
+                  <a:tcPr>
+                    <a:solidFill>
+                      <a:srgbClr val="FFFFFF"/>
+                    </a:solidFill>
+                  </a:tcPr>
+                </a:tc>
+                <a:tc>
+                  <a:txBody>
+                    <a:bodyPr wrap="square"/>
+                    <a:lstStyle/>
+                    <a:p>
+                      <a:r>
+                        <a:rPr sz="1100" b="0">
+                          <a:solidFill>
+                            <a:srgbClr val="1A1A1A"/>
+                          </a:solidFill>
+                          <a:latin typeface="Arial"/>
+                        </a:rPr>
+                        <a:t/>
+                      </a:r>
+                    </a:p>
+                  </a:txBody>
+                  <a:tcPr>
+                    <a:solidFill>
+                      <a:srgbClr val="FFFFFF"/>
+                    </a:solidFill>
+                  </a:tcPr>
+                </a:tc>
+                <a:tc>
+                  <a:txBody>
+                    <a:bodyPr wrap="square"/>
+                    <a:lstStyle/>
+                    <a:p>
+                      <a:r>
+                        <a:rPr sz="1100" b="0">
+                          <a:solidFill>
+                            <a:srgbClr val="1A1A1A"/>
+                          </a:solidFill>
+                          <a:latin typeface="Arial"/>
+                        </a:rPr>
+                        <a:t/>
+                      </a:r>
+                    </a:p>
+                  </a:txBody>
+                  <a:tcPr>
+                    <a:solidFill>
+                      <a:srgbClr val="FFFFFF"/>
+                    </a:solidFill>
+                  </a:tcPr>
+                </a:tc>
+              </a:tr>
+              <a:tr h="475488">
+                <a:tc>
+                  <a:txBody>
+                    <a:bodyPr wrap="square"/>
+                    <a:lstStyle/>
+                    <a:p>
+                      <a:r>
+                        <a:rPr sz="1100" b="0">
+                          <a:solidFill>
+                            <a:srgbClr val="1A1A1A"/>
+                          </a:solidFill>
+                          <a:latin typeface="Arial"/>
+                        </a:rPr>
+                        <a:t>Branchenverbände</a:t>
+                      </a:r>
+                    </a:p>
+                  </a:txBody>
+                  <a:tcPr>
+                    <a:solidFill>
+                      <a:srgbClr val="F4F6FA"/>
+                    </a:solidFill>
+                  </a:tcPr>
+                </a:tc>
+                <a:tc>
+                  <a:txBody>
+                    <a:bodyPr wrap="square"/>
+                    <a:lstStyle/>
+                    <a:p>
+                      <a:r>
+                        <a:rPr sz="1100" b="0">
+                          <a:solidFill>
+                            <a:srgbClr val="1A1A1A"/>
+                          </a:solidFill>
+                          <a:latin typeface="Arial"/>
+                        </a:rPr>
+                        <a:t/>
+                      </a:r>
+                    </a:p>
+                  </a:txBody>
+                  <a:tcPr>
+                    <a:solidFill>
+                      <a:srgbClr val="F4F6FA"/>
+                    </a:solidFill>
+                  </a:tcPr>
+                </a:tc>
+                <a:tc>
+                  <a:txBody>
+                    <a:bodyPr wrap="square"/>
+                    <a:lstStyle/>
+                    <a:p>
+                      <a:r>
+                        <a:rPr sz="1100" b="0">
+                          <a:solidFill>
+                            <a:srgbClr val="1A1A1A"/>
+                          </a:solidFill>
+                          <a:latin typeface="Arial"/>
+                        </a:rPr>
+                        <a:t/>
+                      </a:r>
+                    </a:p>
+                  </a:txBody>
+                  <a:tcPr>
+                    <a:solidFill>
+                      <a:srgbClr val="F4F6FA"/>
+                    </a:solidFill>
+                  </a:tcPr>
+                </a:tc>
+                <a:tc>
+                  <a:txBody>
+                    <a:bodyPr wrap="square"/>
+                    <a:lstStyle/>
+                    <a:p>
+                      <a:r>
+                        <a:rPr sz="1100" b="0">
+                          <a:solidFill>
+                            <a:srgbClr val="1A1A1A"/>
+                          </a:solidFill>
+                          <a:latin typeface="Arial"/>
+                        </a:rPr>
+                        <a:t/>
+                      </a:r>
+                    </a:p>
+                  </a:txBody>
+                  <a:tcPr>
+                    <a:solidFill>
+                      <a:srgbClr val="F4F6FA"/>
+                    </a:solidFill>
+                  </a:tcPr>
+                </a:tc>
+                <a:tc>
+                  <a:txBody>
+                    <a:bodyPr wrap="square"/>
+                    <a:lstStyle/>
+                    <a:p>
+                      <a:r>
+                        <a:rPr sz="1100" b="0">
+                          <a:solidFill>
+                            <a:srgbClr val="1A1A1A"/>
+                          </a:solidFill>
+                          <a:latin typeface="Arial"/>
+                        </a:rPr>
+                        <a:t/>
+                      </a:r>
+                    </a:p>
+                  </a:txBody>
+                  <a:tcPr>
+                    <a:solidFill>
+                      <a:srgbClr val="F4F6FA"/>
+                    </a:solidFill>
+                  </a:tcPr>
+                </a:tc>
+              </a:tr>
+              <a:tr h="475488">
+                <a:tc>
+                  <a:txBody>
+                    <a:bodyPr wrap="square"/>
+                    <a:lstStyle/>
+                    <a:p>
+                      <a:r>
+                        <a:rPr sz="1100" b="0">
+                          <a:solidFill>
+                            <a:srgbClr val="1A1A1A"/>
+                          </a:solidFill>
+                          <a:latin typeface="Arial"/>
+                        </a:rPr>
+                        <a:t>Unternehmerclubs / Gremien</a:t>
+                      </a:r>
+                    </a:p>
+                  </a:txBody>
+                  <a:tcPr>
+                    <a:solidFill>
+                      <a:srgbClr val="FFFFFF"/>
+                    </a:solidFill>
+                  </a:tcPr>
+                </a:tc>
+                <a:tc>
+                  <a:txBody>
+                    <a:bodyPr wrap="square"/>
+                    <a:lstStyle/>
+                    <a:p>
+                      <a:r>
+                        <a:rPr sz="1100" b="0">
+                          <a:solidFill>
+                            <a:srgbClr val="1A1A1A"/>
+                          </a:solidFill>
+                          <a:latin typeface="Arial"/>
+                        </a:rPr>
+                        <a:t/>
+                      </a:r>
+                    </a:p>
+                  </a:txBody>
+                  <a:tcPr>
+                    <a:solidFill>
+                      <a:srgbClr val="FFFFFF"/>
+                    </a:solidFill>
+                  </a:tcPr>
+                </a:tc>
+                <a:tc>
+                  <a:txBody>
+                    <a:bodyPr wrap="square"/>
+                    <a:lstStyle/>
+                    <a:p>
+                      <a:r>
+                        <a:rPr sz="1100" b="0">
+                          <a:solidFill>
+                            <a:srgbClr val="1A1A1A"/>
+                          </a:solidFill>
+                          <a:latin typeface="Arial"/>
+                        </a:rPr>
+                        <a:t/>
+                      </a:r>
+                    </a:p>
+                  </a:txBody>
+                  <a:tcPr>
+                    <a:solidFill>
+                      <a:srgbClr val="FFFFFF"/>
+                    </a:solidFill>
+                  </a:tcPr>
+                </a:tc>
+                <a:tc>
+                  <a:txBody>
+                    <a:bodyPr wrap="square"/>
+                    <a:lstStyle/>
+                    <a:p>
+                      <a:r>
+                        <a:rPr sz="1100" b="0">
+                          <a:solidFill>
+                            <a:srgbClr val="1A1A1A"/>
+                          </a:solidFill>
+                          <a:latin typeface="Arial"/>
+                        </a:rPr>
+                        <a:t/>
+                      </a:r>
+                    </a:p>
+                  </a:txBody>
+                  <a:tcPr>
+                    <a:solidFill>
+                      <a:srgbClr val="FFFFFF"/>
+                    </a:solidFill>
+                  </a:tcPr>
+                </a:tc>
+                <a:tc>
+                  <a:txBody>
+                    <a:bodyPr wrap="square"/>
+                    <a:lstStyle/>
+                    <a:p>
+                      <a:r>
+                        <a:rPr sz="1100" b="0">
+                          <a:solidFill>
+                            <a:srgbClr val="1A1A1A"/>
+                          </a:solidFill>
+                          <a:latin typeface="Arial"/>
+                        </a:rPr>
+                        <a:t/>
+                      </a:r>
+                    </a:p>
+                  </a:txBody>
+                  <a:tcPr>
+                    <a:solidFill>
+                      <a:srgbClr val="FFFFFF"/>
+                    </a:solidFill>
+                  </a:tcPr>
+                </a:tc>
+              </a:tr>
+              <a:tr h="475488">
+                <a:tc>
+                  <a:txBody>
+                    <a:bodyPr wrap="square"/>
+                    <a:lstStyle/>
+                    <a:p>
+                      <a:r>
+                        <a:rPr sz="1100" b="0">
+                          <a:solidFill>
+                            <a:srgbClr val="1A1A1A"/>
+                          </a:solidFill>
+                          <a:latin typeface="Arial"/>
+                        </a:rPr>
+                        <a:t>Digitale Kontakte</a:t>
+                      </a:r>
+                    </a:p>
+                  </a:txBody>
+                  <a:tcPr>
+                    <a:solidFill>
+                      <a:srgbClr val="F4F6FA"/>
+                    </a:solidFill>
+                  </a:tcPr>
+                </a:tc>
+                <a:tc>
+                  <a:txBody>
+                    <a:bodyPr wrap="square"/>
+                    <a:lstStyle/>
+                    <a:p>
+                      <a:r>
+                        <a:rPr sz="1100" b="0">
+                          <a:solidFill>
+                            <a:srgbClr val="1A1A1A"/>
+                          </a:solidFill>
+                          <a:latin typeface="Arial"/>
+                        </a:rPr>
+                        <a:t/>
+                      </a:r>
+                    </a:p>
+                  </a:txBody>
+                  <a:tcPr>
+                    <a:solidFill>
+                      <a:srgbClr val="F4F6FA"/>
+                    </a:solidFill>
+                  </a:tcPr>
+                </a:tc>
+                <a:tc>
+                  <a:txBody>
+                    <a:bodyPr wrap="square"/>
+                    <a:lstStyle/>
+                    <a:p>
+                      <a:r>
+                        <a:rPr sz="1100" b="0">
+                          <a:solidFill>
+                            <a:srgbClr val="1A1A1A"/>
+                          </a:solidFill>
+                          <a:latin typeface="Arial"/>
+                        </a:rPr>
+                        <a:t/>
+                      </a:r>
+                    </a:p>
+                  </a:txBody>
+                  <a:tcPr>
+                    <a:solidFill>
+                      <a:srgbClr val="F4F6FA"/>
+                    </a:solidFill>
+                  </a:tcPr>
+                </a:tc>
+                <a:tc>
+                  <a:txBody>
+                    <a:bodyPr wrap="square"/>
+                    <a:lstStyle/>
+                    <a:p>
+                      <a:r>
+                        <a:rPr sz="1100" b="0">
+                          <a:solidFill>
+                            <a:srgbClr val="1A1A1A"/>
+                          </a:solidFill>
+                          <a:latin typeface="Arial"/>
+                        </a:rPr>
+                        <a:t/>
+                      </a:r>
+                    </a:p>
+                  </a:txBody>
+                  <a:tcPr>
+                    <a:solidFill>
+                      <a:srgbClr val="F4F6FA"/>
+                    </a:solidFill>
+                  </a:tcPr>
+                </a:tc>
+                <a:tc>
+                  <a:txBody>
+                    <a:bodyPr wrap="square"/>
+                    <a:lstStyle/>
+                    <a:p>
+                      <a:r>
+                        <a:rPr sz="1100" b="0">
+                          <a:solidFill>
+                            <a:srgbClr val="1A1A1A"/>
+                          </a:solidFill>
+                          <a:latin typeface="Arial"/>
+                        </a:rPr>
+                        <a:t/>
+                      </a:r>
+                    </a:p>
+                  </a:txBody>
+                  <a:tcPr>
+                    <a:solidFill>
+                      <a:srgbClr val="F4F6FA"/>
+                    </a:solidFill>
+                  </a:tcPr>
+                </a:tc>
+              </a:tr>
+            </a:tbl>
+          </a:graphicData>
+        </a:graphic>
+      </p:graphicFrame>
+    </p:spTree>
+  </p:cSld>
+  <p:clrMapOvr>
+    <a:masterClrMapping/>
+  </p:clrMapOvr>
+</p:sld>
+</file>
+
+<file path=ppt/slides/slide21.xml><?xml version="1.0" encoding="utf-8"?>
+<p:sld xmlns:a="http://schemas.openxmlformats.org/drawingml/2006/main" xmlns:p="http://schemas.openxmlformats.org/presentationml/2006/main" xmlns:r="http://schemas.openxmlformats.org/officeDocument/2006/relationships">
+  <p:cSld>
+    <p:bg>
+      <p:bgPr>
+        <a:solidFill>
+          <a:srgbClr val="1A1A1A"/>
+        </a:solidFill>
+        <a:effectLst/>
+      </p:bgPr>
+    </p:bg>
+    <p:spTree>
+      <p:nvGrpSpPr>
+        <p:cNvPr id="1" name=""/>
+        <p:cNvGrpSpPr/>
+        <p:nvPr/>
+      </p:nvGrpSpPr>
+      <p:grpSpPr/>
+      <p:sp>
+        <p:nvSpPr>
+          <p:cNvPr id="2" name="Rectangle 1"/>
+          <p:cNvSpPr/>
+          <p:nvPr/>
+        </p:nvSpPr>
+        <p:spPr>
+          <a:xfrm>
+            <a:off x="0" y="0"/>
+            <a:ext cx="73152" cy="6858000"/>
+          </a:xfrm>
+          <a:prstGeom prst="rect">
+            <a:avLst/>
+          </a:prstGeom>
+          <a:solidFill>
+            <a:srgbClr val="E05B00"/>
+          </a:solidFill>
+          <a:ln>
+            <a:noFill/>
+          </a:ln>
+        </p:spPr>
+        <p:style>
+          <a:lnRef idx="1">
+            <a:schemeClr val="accent1"/>
+          </a:lnRef>
+          <a:fillRef idx="3">
+            <a:schemeClr val="accent1"/>
+          </a:fillRef>
+          <a:effectRef idx="2">
+            <a:schemeClr val="accent1"/>
+          </a:effectRef>
+          <a:fontRef idx="minor">
+            <a:schemeClr val="lt1"/>
+          </a:fontRef>
+        </p:style>
+        <p:txBody>
+          <a:bodyPr rtlCol="0" anchor="ctr"/>
+          <a:lstStyle/>
+          <a:p>
+            <a:pPr algn="ctr"/>
+          </a:p>
+        </p:txBody>
+      </p:sp>
+      <p:sp>
+        <p:nvSpPr>
+          <p:cNvPr id="3" name="TextBox 2"/>
+          <p:cNvSpPr txBox="1"/>
+          <p:nvPr/>
+        </p:nvSpPr>
+        <p:spPr>
+          <a:xfrm>
+            <a:off x="365760" y="2011680"/>
+            <a:ext cx="11430000" cy="2011680"/>
+          </a:xfrm>
+          <a:prstGeom prst="rect">
+            <a:avLst/>
+          </a:prstGeom>
+          <a:noFill/>
+        </p:spPr>
+        <p:txBody>
+          <a:bodyPr wrap="square">
+            <a:spAutoFit/>
+          </a:bodyPr>
+          <a:lstStyle/>
+          <a:p>
+            <a:pPr algn="l"/>
+            <a:r>
+              <a:rPr sz="3600" b="1" i="0">
+                <a:solidFill>
+                  <a:srgbClr val="FFFFFF"/>
+                </a:solidFill>
+                <a:latin typeface="Arial"/>
+              </a:rPr>
+              <a:t>Arbeitsblatt 2: Lückenanalyse</a:t>
+            </a:r>
+          </a:p>
+        </p:txBody>
+      </p:sp>
+    </p:spTree>
+  </p:cSld>
+  <p:clrMapOvr>
+    <a:masterClrMapping/>
+  </p:clrMapOvr>
+</p:sld>
+</file>
+
+<file path=ppt/slides/slide22.xml><?xml version="1.0" encoding="utf-8"?>
+<p:sld xmlns:a="http://schemas.openxmlformats.org/drawingml/2006/main" xmlns:p="http://schemas.openxmlformats.org/presentationml/2006/main" xmlns:r="http://schemas.openxmlformats.org/officeDocument/2006/relationships">
+  <p:cSld>
+    <p:bg>
+      <p:bgPr>
+        <a:solidFill>
+          <a:srgbClr val="FFFFFF"/>
+        </a:solidFill>
+        <a:effectLst/>
+      </p:bgPr>
+    </p:bg>
+    <p:spTree>
+      <p:nvGrpSpPr>
+        <p:cNvPr id="1" name=""/>
+        <p:cNvGrpSpPr/>
+        <p:nvPr/>
+      </p:nvGrpSpPr>
+      <p:grpSpPr/>
+      <p:sp>
+        <p:nvSpPr>
+          <p:cNvPr id="2" name="Rectangle 1"/>
+          <p:cNvSpPr/>
+          <p:nvPr/>
+        </p:nvSpPr>
+        <p:spPr>
+          <a:xfrm>
+            <a:off x="0" y="0"/>
+            <a:ext cx="73152" cy="6858000"/>
+          </a:xfrm>
+          <a:prstGeom prst="rect">
+            <a:avLst/>
+          </a:prstGeom>
+          <a:solidFill>
+            <a:srgbClr val="003DA5"/>
+          </a:solidFill>
+          <a:ln>
+            <a:noFill/>
+          </a:ln>
+        </p:spPr>
+        <p:style>
+          <a:lnRef idx="1">
+            <a:schemeClr val="accent1"/>
+          </a:lnRef>
+          <a:fillRef idx="3">
+            <a:schemeClr val="accent1"/>
+          </a:fillRef>
+          <a:effectRef idx="2">
+            <a:schemeClr val="accent1"/>
+          </a:effectRef>
+          <a:fontRef idx="minor">
+            <a:schemeClr val="lt1"/>
+          </a:fontRef>
+        </p:style>
+        <p:txBody>
+          <a:bodyPr rtlCol="0" anchor="ctr"/>
+          <a:lstStyle/>
+          <a:p>
+            <a:pPr algn="ctr"/>
+          </a:p>
+        </p:txBody>
+      </p:sp>
+      <p:sp>
+        <p:nvSpPr>
+          <p:cNvPr id="3" name="TextBox 2"/>
+          <p:cNvSpPr txBox="1"/>
+          <p:nvPr/>
+        </p:nvSpPr>
+        <p:spPr>
+          <a:xfrm>
+            <a:off x="228600" y="182880"/>
+            <a:ext cx="11430000" cy="320040"/>
+          </a:xfrm>
+          <a:prstGeom prst="rect">
+            <a:avLst/>
+          </a:prstGeom>
+          <a:noFill/>
+        </p:spPr>
+        <p:txBody>
+          <a:bodyPr wrap="square">
+            <a:spAutoFit/>
+          </a:bodyPr>
+          <a:lstStyle/>
+          <a:p>
+            <a:pPr algn="l"/>
+            <a:r>
+              <a:rPr sz="900" b="0" i="0">
+                <a:solidFill>
+                  <a:srgbClr val="556575"/>
+                </a:solidFill>
+                <a:latin typeface="Arial"/>
+              </a:rPr>
+              <a:t>M20 · 4.7 Arbeitsblätter</a:t>
+            </a:r>
+          </a:p>
+        </p:txBody>
+      </p:sp>
+      <p:sp>
+        <p:nvSpPr>
+          <p:cNvPr id="4" name="TextBox 3"/>
+          <p:cNvSpPr txBox="1"/>
+          <p:nvPr/>
+        </p:nvSpPr>
+        <p:spPr>
+          <a:xfrm>
+            <a:off x="365760" y="274320"/>
+            <a:ext cx="11430000" cy="777240"/>
+          </a:xfrm>
+          <a:prstGeom prst="rect">
+            <a:avLst/>
+          </a:prstGeom>
+          <a:noFill/>
+        </p:spPr>
+        <p:txBody>
+          <a:bodyPr wrap="square">
+            <a:spAutoFit/>
+          </a:bodyPr>
+          <a:lstStyle/>
+          <a:p>
+            <a:pPr algn="l"/>
+            <a:r>
+              <a:rPr sz="2200" b="1" i="0">
+                <a:solidFill>
+                  <a:srgbClr val="003DA5"/>
+                </a:solidFill>
+                <a:latin typeface="Arial"/>
+              </a:rPr>
+              <a:t>Arbeitsblatt 2: Lückenanalyse</a:t>
+            </a:r>
+          </a:p>
+        </p:txBody>
+      </p:sp>
+      <p:sp>
+        <p:nvSpPr>
+          <p:cNvPr id="5" name="Rectangle 4"/>
+          <p:cNvSpPr/>
+          <p:nvPr/>
+        </p:nvSpPr>
+        <p:spPr>
+          <a:xfrm>
+            <a:off x="365760" y="1005840"/>
+            <a:ext cx="11430000" cy="27432"/>
+          </a:xfrm>
+          <a:prstGeom prst="rect">
+            <a:avLst/>
+          </a:prstGeom>
+          <a:solidFill>
+            <a:srgbClr val="D1D5DB"/>
+          </a:solidFill>
+          <a:ln>
+            <a:noFill/>
+          </a:ln>
+        </p:spPr>
+        <p:style>
+          <a:lnRef idx="1">
+            <a:schemeClr val="accent1"/>
+          </a:lnRef>
+          <a:fillRef idx="3">
+            <a:schemeClr val="accent1"/>
+          </a:fillRef>
+          <a:effectRef idx="2">
+            <a:schemeClr val="accent1"/>
+          </a:effectRef>
+          <a:fontRef idx="minor">
+            <a:schemeClr val="lt1"/>
+          </a:fontRef>
+        </p:style>
+        <p:txBody>
+          <a:bodyPr rtlCol="0" anchor="ctr"/>
+          <a:lstStyle/>
+          <a:p>
+            <a:pPr algn="ctr"/>
+          </a:p>
+        </p:txBody>
+      </p:sp>
+      <p:graphicFrame>
+        <p:nvGraphicFramePr>
+          <p:cNvPr id="6" name="Table 5"/>
+          <p:cNvGraphicFramePr>
+            <a:graphicFrameLocks noGrp="1"/>
+          </p:cNvGraphicFramePr>
+          <p:nvPr/>
+        </p:nvGraphicFramePr>
+        <p:xfrm>
+          <a:off x="365760" y="1143000"/>
+          <a:ext cx="11430000" cy="2377440"/>
+        </p:xfrm>
+        <a:graphic>
+          <a:graphicData uri="http://schemas.openxmlformats.org/drawingml/2006/table">
+            <a:tbl>
+              <a:tblPr firstRow="1" bandRow="1">
+                <a:tableStyleId>{5C22544A-7EE6-4342-B048-85BDC9FD1C3A}</a:tableStyleId>
+              </a:tblPr>
+              <a:tblGrid>
+                <a:gridCol w="5715000"/>
+                <a:gridCol w="5715000"/>
+              </a:tblGrid>
+              <a:tr h="475488">
+                <a:tc>
+                  <a:txBody>
+                    <a:bodyPr wrap="square"/>
+                    <a:lstStyle/>
+                    <a:p>
+                      <a:r>
+                        <a:rPr sz="1100" b="1">
+                          <a:solidFill>
+                            <a:srgbClr val="FFFFFF"/>
+                          </a:solidFill>
+                          <a:latin typeface="Arial"/>
+                        </a:rPr>
+                        <a:t>Frage</a:t>
+                      </a:r>
+                    </a:p>
+                  </a:txBody>
+                  <a:tcPr>
+                    <a:solidFill>
+                      <a:srgbClr val="003DA5"/>
+                    </a:solidFill>
+                  </a:tcPr>
+                </a:tc>
+                <a:tc>
+                  <a:txBody>
+                    <a:bodyPr wrap="square"/>
+                    <a:lstStyle/>
+                    <a:p>
+                      <a:r>
+                        <a:rPr sz="1100" b="1">
+                          <a:solidFill>
+                            <a:srgbClr val="FFFFFF"/>
+                          </a:solidFill>
+                          <a:latin typeface="Arial"/>
+                        </a:rPr>
+                        <a:t>Meine Antwort</a:t>
+                      </a:r>
+                    </a:p>
+                  </a:txBody>
+                  <a:tcPr>
+                    <a:solidFill>
+                      <a:srgbClr val="003DA5"/>
+                    </a:solidFill>
+                  </a:tcPr>
+                </a:tc>
+              </a:tr>
+              <a:tr h="475488">
+                <a:tc>
+                  <a:txBody>
+                    <a:bodyPr wrap="square"/>
+                    <a:lstStyle/>
+                    <a:p>
+                      <a:r>
+                        <a:rPr sz="1100" b="0">
+                          <a:solidFill>
+                            <a:srgbClr val="1A1A1A"/>
+                          </a:solidFill>
+                          <a:latin typeface="Arial"/>
+                        </a:rPr>
+                        <a:t>In welchen Branchen fehlen mir externe Multiplikatoren?</a:t>
+                      </a:r>
+                    </a:p>
+                  </a:txBody>
+                  <a:tcPr>
+                    <a:solidFill>
+                      <a:srgbClr val="FFFFFF"/>
+                    </a:solidFill>
+                  </a:tcPr>
+                </a:tc>
+                <a:tc>
+                  <a:txBody>
+                    <a:bodyPr wrap="square"/>
+                    <a:lstStyle/>
+                    <a:p>
+                      <a:r>
+                        <a:rPr sz="1100" b="0">
+                          <a:solidFill>
+                            <a:srgbClr val="1A1A1A"/>
+                          </a:solidFill>
+                          <a:latin typeface="Arial"/>
+                        </a:rPr>
+                        <a:t/>
+                      </a:r>
+                    </a:p>
+                  </a:txBody>
+                  <a:tcPr>
+                    <a:solidFill>
+                      <a:srgbClr val="FFFFFF"/>
+                    </a:solidFill>
+                  </a:tcPr>
+                </a:tc>
+              </a:tr>
+              <a:tr h="475488">
+                <a:tc>
+                  <a:txBody>
+                    <a:bodyPr wrap="square"/>
+                    <a:lstStyle/>
+                    <a:p>
+                      <a:r>
+                        <a:rPr sz="1100" b="0">
+                          <a:solidFill>
+                            <a:srgbClr val="1A1A1A"/>
+                          </a:solidFill>
+                          <a:latin typeface="Arial"/>
+                        </a:rPr>
+                        <a:t>Welche 3 Personen hätte ich gerne in meinem Netzwerk?</a:t>
+                      </a:r>
+                    </a:p>
+                  </a:txBody>
+                  <a:tcPr>
+                    <a:solidFill>
+                      <a:srgbClr val="F4F6FA"/>
+                    </a:solidFill>
+                  </a:tcPr>
+                </a:tc>
+                <a:tc>
+                  <a:txBody>
+                    <a:bodyPr wrap="square"/>
+                    <a:lstStyle/>
+                    <a:p>
+                      <a:r>
+                        <a:rPr sz="1100" b="0">
+                          <a:solidFill>
+                            <a:srgbClr val="1A1A1A"/>
+                          </a:solidFill>
+                          <a:latin typeface="Arial"/>
+                        </a:rPr>
+                        <a:t/>
+                      </a:r>
+                    </a:p>
+                  </a:txBody>
+                  <a:tcPr>
+                    <a:solidFill>
+                      <a:srgbClr val="F4F6FA"/>
+                    </a:solidFill>
+                  </a:tcPr>
+                </a:tc>
+              </a:tr>
+              <a:tr h="475488">
+                <a:tc>
+                  <a:txBody>
+                    <a:bodyPr wrap="square"/>
+                    <a:lstStyle/>
+                    <a:p>
+                      <a:r>
+                        <a:rPr sz="1100" b="0">
+                          <a:solidFill>
+                            <a:srgbClr val="1A1A1A"/>
+                          </a:solidFill>
+                          <a:latin typeface="Arial"/>
+                        </a:rPr>
+                        <a:t>Welche interne Vernetzung würde meine Arbeit am meisten erleichtern?</a:t>
+                      </a:r>
+                    </a:p>
+                  </a:txBody>
+                  <a:tcPr>
+                    <a:solidFill>
+                      <a:srgbClr val="FFFFFF"/>
+                    </a:solidFill>
+                  </a:tcPr>
+                </a:tc>
+                <a:tc>
+                  <a:txBody>
+                    <a:bodyPr wrap="square"/>
+                    <a:lstStyle/>
+                    <a:p>
+                      <a:r>
+                        <a:rPr sz="1100" b="0">
+                          <a:solidFill>
+                            <a:srgbClr val="1A1A1A"/>
+                          </a:solidFill>
+                          <a:latin typeface="Arial"/>
+                        </a:rPr>
+                        <a:t/>
+                      </a:r>
+                    </a:p>
+                  </a:txBody>
+                  <a:tcPr>
+                    <a:solidFill>
+                      <a:srgbClr val="FFFFFF"/>
+                    </a:solidFill>
+                  </a:tcPr>
+                </a:tc>
+              </a:tr>
+              <a:tr h="475488">
+                <a:tc>
+                  <a:txBody>
+                    <a:bodyPr wrap="square"/>
+                    <a:lstStyle/>
+                    <a:p>
+                      <a:r>
+                        <a:rPr sz="1100" b="0">
+                          <a:solidFill>
+                            <a:srgbClr val="1A1A1A"/>
+                          </a:solidFill>
+                          <a:latin typeface="Arial"/>
+                        </a:rPr>
+                        <a:t>Wo könnte ich als Broker Mehrwert stiften?</a:t>
+                      </a:r>
+                    </a:p>
+                  </a:txBody>
+                  <a:tcPr>
+                    <a:solidFill>
+                      <a:srgbClr val="F4F6FA"/>
+                    </a:solidFill>
+                  </a:tcPr>
+                </a:tc>
+                <a:tc>
+                  <a:txBody>
+                    <a:bodyPr wrap="square"/>
+                    <a:lstStyle/>
+                    <a:p>
+                      <a:r>
+                        <a:rPr sz="1100" b="0">
+                          <a:solidFill>
+                            <a:srgbClr val="1A1A1A"/>
+                          </a:solidFill>
+                          <a:latin typeface="Arial"/>
+                        </a:rPr>
+                        <a:t/>
+                      </a:r>
+                    </a:p>
+                  </a:txBody>
+                  <a:tcPr>
+                    <a:solidFill>
+                      <a:srgbClr val="F4F6FA"/>
+                    </a:solidFill>
+                  </a:tcPr>
+                </a:tc>
+              </a:tr>
+            </a:tbl>
+          </a:graphicData>
+        </a:graphic>
+      </p:graphicFrame>
+    </p:spTree>
+  </p:cSld>
+  <p:clrMapOvr>
+    <a:masterClrMapping/>
+  </p:clrMapOvr>
+</p:sld>
+</file>
+
+<file path=ppt/slides/slide23.xml><?xml version="1.0" encoding="utf-8"?>
+<p:sld xmlns:a="http://schemas.openxmlformats.org/drawingml/2006/main" xmlns:p="http://schemas.openxmlformats.org/presentationml/2006/main" xmlns:r="http://schemas.openxmlformats.org/officeDocument/2006/relationships">
+  <p:cSld>
+    <p:bg>
+      <p:bgPr>
+        <a:solidFill>
+          <a:srgbClr val="1A1A1A"/>
+        </a:solidFill>
+        <a:effectLst/>
+      </p:bgPr>
+    </p:bg>
+    <p:spTree>
+      <p:nvGrpSpPr>
+        <p:cNvPr id="1" name=""/>
+        <p:cNvGrpSpPr/>
+        <p:nvPr/>
+      </p:nvGrpSpPr>
+      <p:grpSpPr/>
+      <p:sp>
+        <p:nvSpPr>
+          <p:cNvPr id="2" name="Rectangle 1"/>
+          <p:cNvSpPr/>
+          <p:nvPr/>
+        </p:nvSpPr>
+        <p:spPr>
+          <a:xfrm>
+            <a:off x="0" y="0"/>
+            <a:ext cx="73152" cy="6858000"/>
+          </a:xfrm>
+          <a:prstGeom prst="rect">
+            <a:avLst/>
+          </a:prstGeom>
+          <a:solidFill>
+            <a:srgbClr val="E05B00"/>
+          </a:solidFill>
+          <a:ln>
+            <a:noFill/>
+          </a:ln>
+        </p:spPr>
+        <p:style>
+          <a:lnRef idx="1">
+            <a:schemeClr val="accent1"/>
+          </a:lnRef>
+          <a:fillRef idx="3">
+            <a:schemeClr val="accent1"/>
+          </a:fillRef>
+          <a:effectRef idx="2">
+            <a:schemeClr val="accent1"/>
+          </a:effectRef>
+          <a:fontRef idx="minor">
+            <a:schemeClr val="lt1"/>
+          </a:fontRef>
+        </p:style>
+        <p:txBody>
+          <a:bodyPr rtlCol="0" anchor="ctr"/>
+          <a:lstStyle/>
+          <a:p>
+            <a:pPr algn="ctr"/>
+          </a:p>
+        </p:txBody>
+      </p:sp>
+      <p:sp>
+        <p:nvSpPr>
+          <p:cNvPr id="3" name="TextBox 2"/>
+          <p:cNvSpPr txBox="1"/>
+          <p:nvPr/>
+        </p:nvSpPr>
+        <p:spPr>
+          <a:xfrm>
+            <a:off x="365760" y="2011680"/>
+            <a:ext cx="11430000" cy="2011680"/>
+          </a:xfrm>
+          <a:prstGeom prst="rect">
+            <a:avLst/>
+          </a:prstGeom>
+          <a:noFill/>
+        </p:spPr>
+        <p:txBody>
+          <a:bodyPr wrap="square">
+            <a:spAutoFit/>
+          </a:bodyPr>
+          <a:lstStyle/>
+          <a:p>
+            <a:pPr algn="l"/>
+            <a:r>
+              <a:rPr sz="3600" b="1" i="0">
+                <a:solidFill>
+                  <a:srgbClr val="FFFFFF"/>
+                </a:solidFill>
+                <a:latin typeface="Arial"/>
+              </a:rPr>
+              <a:t>Arbeitsblatt 3: 90-Tage-Aktionsplan</a:t>
+            </a:r>
+          </a:p>
+        </p:txBody>
+      </p:sp>
+    </p:spTree>
+  </p:cSld>
+  <p:clrMapOvr>
+    <a:masterClrMapping/>
+  </p:clrMapOvr>
+</p:sld>
+</file>
+
+<file path=ppt/slides/slide24.xml><?xml version="1.0" encoding="utf-8"?>
+<p:sld xmlns:a="http://schemas.openxmlformats.org/drawingml/2006/main" xmlns:p="http://schemas.openxmlformats.org/presentationml/2006/main" xmlns:r="http://schemas.openxmlformats.org/officeDocument/2006/relationships">
+  <p:cSld>
+    <p:bg>
+      <p:bgPr>
+        <a:solidFill>
+          <a:srgbClr val="FFFFFF"/>
+        </a:solidFill>
+        <a:effectLst/>
+      </p:bgPr>
+    </p:bg>
+    <p:spTree>
+      <p:nvGrpSpPr>
+        <p:cNvPr id="1" name=""/>
+        <p:cNvGrpSpPr/>
+        <p:nvPr/>
+      </p:nvGrpSpPr>
+      <p:grpSpPr/>
+      <p:sp>
+        <p:nvSpPr>
+          <p:cNvPr id="2" name="Rectangle 1"/>
+          <p:cNvSpPr/>
+          <p:nvPr/>
+        </p:nvSpPr>
+        <p:spPr>
+          <a:xfrm>
+            <a:off x="0" y="0"/>
+            <a:ext cx="73152" cy="6858000"/>
+          </a:xfrm>
+          <a:prstGeom prst="rect">
+            <a:avLst/>
+          </a:prstGeom>
+          <a:solidFill>
+            <a:srgbClr val="003DA5"/>
+          </a:solidFill>
+          <a:ln>
+            <a:noFill/>
+          </a:ln>
+        </p:spPr>
+        <p:style>
+          <a:lnRef idx="1">
+            <a:schemeClr val="accent1"/>
+          </a:lnRef>
+          <a:fillRef idx="3">
+            <a:schemeClr val="accent1"/>
+          </a:fillRef>
+          <a:effectRef idx="2">
+            <a:schemeClr val="accent1"/>
+          </a:effectRef>
+          <a:fontRef idx="minor">
+            <a:schemeClr val="lt1"/>
+          </a:fontRef>
+        </p:style>
+        <p:txBody>
+          <a:bodyPr rtlCol="0" anchor="ctr"/>
+          <a:lstStyle/>
+          <a:p>
+            <a:pPr algn="ctr"/>
+          </a:p>
+        </p:txBody>
+      </p:sp>
+      <p:sp>
+        <p:nvSpPr>
+          <p:cNvPr id="3" name="TextBox 2"/>
+          <p:cNvSpPr txBox="1"/>
+          <p:nvPr/>
+        </p:nvSpPr>
+        <p:spPr>
+          <a:xfrm>
+            <a:off x="228600" y="182880"/>
+            <a:ext cx="11430000" cy="320040"/>
+          </a:xfrm>
+          <a:prstGeom prst="rect">
+            <a:avLst/>
+          </a:prstGeom>
+          <a:noFill/>
+        </p:spPr>
+        <p:txBody>
+          <a:bodyPr wrap="square">
+            <a:spAutoFit/>
+          </a:bodyPr>
+          <a:lstStyle/>
+          <a:p>
+            <a:pPr algn="l"/>
+            <a:r>
+              <a:rPr sz="900" b="0" i="0">
+                <a:solidFill>
+                  <a:srgbClr val="556575"/>
+                </a:solidFill>
+                <a:latin typeface="Arial"/>
+              </a:rPr>
+              <a:t>M20 · 4.7 Arbeitsblätter</a:t>
+            </a:r>
+          </a:p>
+        </p:txBody>
+      </p:sp>
+      <p:sp>
+        <p:nvSpPr>
+          <p:cNvPr id="4" name="TextBox 3"/>
+          <p:cNvSpPr txBox="1"/>
+          <p:nvPr/>
+        </p:nvSpPr>
+        <p:spPr>
+          <a:xfrm>
+            <a:off x="365760" y="274320"/>
+            <a:ext cx="11430000" cy="777240"/>
+          </a:xfrm>
+          <a:prstGeom prst="rect">
+            <a:avLst/>
+          </a:prstGeom>
+          <a:noFill/>
+        </p:spPr>
+        <p:txBody>
+          <a:bodyPr wrap="square">
+            <a:spAutoFit/>
+          </a:bodyPr>
+          <a:lstStyle/>
+          <a:p>
+            <a:pPr algn="l"/>
+            <a:r>
+              <a:rPr sz="2200" b="1" i="0">
+                <a:solidFill>
+                  <a:srgbClr val="003DA5"/>
+                </a:solidFill>
+                <a:latin typeface="Arial"/>
+              </a:rPr>
+              <a:t>Arbeitsblatt 3: 90-Tage-Aktionsplan</a:t>
+            </a:r>
+          </a:p>
+        </p:txBody>
+      </p:sp>
+      <p:sp>
+        <p:nvSpPr>
+          <p:cNvPr id="5" name="Rectangle 4"/>
+          <p:cNvSpPr/>
+          <p:nvPr/>
+        </p:nvSpPr>
+        <p:spPr>
+          <a:xfrm>
+            <a:off x="365760" y="1005840"/>
+            <a:ext cx="11430000" cy="27432"/>
+          </a:xfrm>
+          <a:prstGeom prst="rect">
+            <a:avLst/>
+          </a:prstGeom>
+          <a:solidFill>
+            <a:srgbClr val="D1D5DB"/>
+          </a:solidFill>
+          <a:ln>
+            <a:noFill/>
+          </a:ln>
+        </p:spPr>
+        <p:style>
+          <a:lnRef idx="1">
+            <a:schemeClr val="accent1"/>
+          </a:lnRef>
+          <a:fillRef idx="3">
+            <a:schemeClr val="accent1"/>
+          </a:fillRef>
+          <a:effectRef idx="2">
+            <a:schemeClr val="accent1"/>
+          </a:effectRef>
+          <a:fontRef idx="minor">
+            <a:schemeClr val="lt1"/>
+          </a:fontRef>
+        </p:style>
+        <p:txBody>
+          <a:bodyPr rtlCol="0" anchor="ctr"/>
+          <a:lstStyle/>
+          <a:p>
+            <a:pPr algn="ctr"/>
+          </a:p>
+        </p:txBody>
+      </p:sp>
+      <p:graphicFrame>
+        <p:nvGraphicFramePr>
+          <p:cNvPr id="6" name="Table 5"/>
+          <p:cNvGraphicFramePr>
+            <a:graphicFrameLocks noGrp="1"/>
+          </p:cNvGraphicFramePr>
+          <p:nvPr/>
+        </p:nvGraphicFramePr>
+        <p:xfrm>
+          <a:off x="365760" y="1143000"/>
+          <a:ext cx="11430000" cy="2377440"/>
+        </p:xfrm>
+        <a:graphic>
+          <a:graphicData uri="http://schemas.openxmlformats.org/drawingml/2006/table">
+            <a:tbl>
+              <a:tblPr firstRow="1" bandRow="1">
+                <a:tableStyleId>{5C22544A-7EE6-4342-B048-85BDC9FD1C3A}</a:tableStyleId>
+              </a:tblPr>
+              <a:tblGrid>
+                <a:gridCol w="2286000"/>
+                <a:gridCol w="2286000"/>
+                <a:gridCol w="2286000"/>
+                <a:gridCol w="2286000"/>
+                <a:gridCol w="2286000"/>
+              </a:tblGrid>
+              <a:tr h="475488">
+                <a:tc>
+                  <a:txBody>
+                    <a:bodyPr wrap="square"/>
+                    <a:lstStyle/>
+                    <a:p>
+                      <a:r>
+                        <a:rPr sz="1100" b="1">
+                          <a:solidFill>
+                            <a:srgbClr val="FFFFFF"/>
+                          </a:solidFill>
+                          <a:latin typeface="Arial"/>
+                        </a:rPr>
+                        <a:t>Zeitraum</a:t>
+                      </a:r>
+                    </a:p>
+                  </a:txBody>
+                  <a:tcPr>
+                    <a:solidFill>
+                      <a:srgbClr val="003DA5"/>
+                    </a:solidFill>
+                  </a:tcPr>
+                </a:tc>
+                <a:tc>
+                  <a:txBody>
+                    <a:bodyPr wrap="square"/>
+                    <a:lstStyle/>
+                    <a:p>
+                      <a:r>
+                        <a:rPr sz="1100" b="1">
+                          <a:solidFill>
+                            <a:srgbClr val="FFFFFF"/>
+                          </a:solidFill>
+                          <a:latin typeface="Arial"/>
+                        </a:rPr>
+                        <a:t>Aktivität</a:t>
+                      </a:r>
+                    </a:p>
+                  </a:txBody>
+                  <a:tcPr>
+                    <a:solidFill>
+                      <a:srgbClr val="003DA5"/>
+                    </a:solidFill>
+                  </a:tcPr>
+                </a:tc>
+                <a:tc>
+                  <a:txBody>
+                    <a:bodyPr wrap="square"/>
+                    <a:lstStyle/>
+                    <a:p>
+                      <a:r>
+                        <a:rPr sz="1100" b="1">
+                          <a:solidFill>
+                            <a:srgbClr val="FFFFFF"/>
+                          </a:solidFill>
+                          <a:latin typeface="Arial"/>
+                        </a:rPr>
+                        <a:t>Zielkontakt</a:t>
+                      </a:r>
+                    </a:p>
+                  </a:txBody>
+                  <a:tcPr>
+                    <a:solidFill>
+                      <a:srgbClr val="003DA5"/>
+                    </a:solidFill>
+                  </a:tcPr>
+                </a:tc>
+                <a:tc>
+                  <a:txBody>
+                    <a:bodyPr wrap="square"/>
+                    <a:lstStyle/>
+                    <a:p>
+                      <a:r>
+                        <a:rPr sz="1100" b="1">
+                          <a:solidFill>
+                            <a:srgbClr val="FFFFFF"/>
+                          </a:solidFill>
+                          <a:latin typeface="Arial"/>
+                        </a:rPr>
+                        <a:t>Ziel</a:t>
+                      </a:r>
+                    </a:p>
+                  </a:txBody>
+                  <a:tcPr>
+                    <a:solidFill>
+                      <a:srgbClr val="003DA5"/>
+                    </a:solidFill>
+                  </a:tcPr>
+                </a:tc>
+                <a:tc>
+                  <a:txBody>
+                    <a:bodyPr wrap="square"/>
+                    <a:lstStyle/>
+                    <a:p>
+                      <a:r>
+                        <a:rPr sz="1100" b="1">
+                          <a:solidFill>
+                            <a:srgbClr val="FFFFFF"/>
+                          </a:solidFill>
+                          <a:latin typeface="Arial"/>
+                        </a:rPr>
+                        <a:t>Erledigt?</a:t>
+                      </a:r>
+                    </a:p>
+                  </a:txBody>
+                  <a:tcPr>
+                    <a:solidFill>
+                      <a:srgbClr val="003DA5"/>
+                    </a:solidFill>
+                  </a:tcPr>
+                </a:tc>
+              </a:tr>
+              <a:tr h="475488">
+                <a:tc>
+                  <a:txBody>
+                    <a:bodyPr wrap="square"/>
+                    <a:lstStyle/>
+                    <a:p>
+                      <a:r>
+                        <a:rPr sz="1100" b="0">
+                          <a:solidFill>
+                            <a:srgbClr val="1A1A1A"/>
+                          </a:solidFill>
+                          <a:latin typeface="Arial"/>
+                        </a:rPr>
+                        <a:t>Woche 1–2</a:t>
+                      </a:r>
+                    </a:p>
+                  </a:txBody>
+                  <a:tcPr>
+                    <a:solidFill>
+                      <a:srgbClr val="FFFFFF"/>
+                    </a:solidFill>
+                  </a:tcPr>
+                </a:tc>
+                <a:tc>
+                  <a:txBody>
+                    <a:bodyPr wrap="square"/>
+                    <a:lstStyle/>
+                    <a:p>
+                      <a:r>
+                        <a:rPr sz="1100" b="0">
+                          <a:solidFill>
+                            <a:srgbClr val="1A1A1A"/>
+                          </a:solidFill>
+                          <a:latin typeface="Arial"/>
+                        </a:rPr>
+                        <a:t/>
+                      </a:r>
+                    </a:p>
+                  </a:txBody>
+                  <a:tcPr>
+                    <a:solidFill>
+                      <a:srgbClr val="FFFFFF"/>
+                    </a:solidFill>
+                  </a:tcPr>
+                </a:tc>
+                <a:tc>
+                  <a:txBody>
+                    <a:bodyPr wrap="square"/>
+                    <a:lstStyle/>
+                    <a:p>
+                      <a:r>
+                        <a:rPr sz="1100" b="0">
+                          <a:solidFill>
+                            <a:srgbClr val="1A1A1A"/>
+                          </a:solidFill>
+                          <a:latin typeface="Arial"/>
+                        </a:rPr>
+                        <a:t/>
+                      </a:r>
+                    </a:p>
+                  </a:txBody>
+                  <a:tcPr>
+                    <a:solidFill>
+                      <a:srgbClr val="FFFFFF"/>
+                    </a:solidFill>
+                  </a:tcPr>
+                </a:tc>
+                <a:tc>
+                  <a:txBody>
+                    <a:bodyPr wrap="square"/>
+                    <a:lstStyle/>
+                    <a:p>
+                      <a:r>
+                        <a:rPr sz="1100" b="0">
+                          <a:solidFill>
+                            <a:srgbClr val="1A1A1A"/>
+                          </a:solidFill>
+                          <a:latin typeface="Arial"/>
+                        </a:rPr>
+                        <a:t/>
+                      </a:r>
+                    </a:p>
+                  </a:txBody>
+                  <a:tcPr>
+                    <a:solidFill>
+                      <a:srgbClr val="FFFFFF"/>
+                    </a:solidFill>
+                  </a:tcPr>
+                </a:tc>
+                <a:tc>
+                  <a:txBody>
+                    <a:bodyPr wrap="square"/>
+                    <a:lstStyle/>
+                    <a:p>
+                      <a:r>
+                        <a:rPr sz="1100" b="0">
+                          <a:solidFill>
+                            <a:srgbClr val="1A1A1A"/>
+                          </a:solidFill>
+                          <a:latin typeface="Arial"/>
+                        </a:rPr>
+                        <a:t/>
+                      </a:r>
+                    </a:p>
+                  </a:txBody>
+                  <a:tcPr>
+                    <a:solidFill>
+                      <a:srgbClr val="FFFFFF"/>
+                    </a:solidFill>
+                  </a:tcPr>
+                </a:tc>
+              </a:tr>
+              <a:tr h="475488">
+                <a:tc>
+                  <a:txBody>
+                    <a:bodyPr wrap="square"/>
+                    <a:lstStyle/>
+                    <a:p>
+                      <a:r>
+                        <a:rPr sz="1100" b="0">
+                          <a:solidFill>
+                            <a:srgbClr val="1A1A1A"/>
+                          </a:solidFill>
+                          <a:latin typeface="Arial"/>
+                        </a:rPr>
+                        <a:t>Woche 3–4</a:t>
+                      </a:r>
+                    </a:p>
+                  </a:txBody>
+                  <a:tcPr>
+                    <a:solidFill>
+                      <a:srgbClr val="F4F6FA"/>
+                    </a:solidFill>
+                  </a:tcPr>
+                </a:tc>
+                <a:tc>
+                  <a:txBody>
+                    <a:bodyPr wrap="square"/>
+                    <a:lstStyle/>
+                    <a:p>
+                      <a:r>
+                        <a:rPr sz="1100" b="0">
+                          <a:solidFill>
+                            <a:srgbClr val="1A1A1A"/>
+                          </a:solidFill>
+                          <a:latin typeface="Arial"/>
+                        </a:rPr>
+                        <a:t/>
+                      </a:r>
+                    </a:p>
+                  </a:txBody>
+                  <a:tcPr>
+                    <a:solidFill>
+                      <a:srgbClr val="F4F6FA"/>
+                    </a:solidFill>
+                  </a:tcPr>
+                </a:tc>
+                <a:tc>
+                  <a:txBody>
+                    <a:bodyPr wrap="square"/>
+                    <a:lstStyle/>
+                    <a:p>
+                      <a:r>
+                        <a:rPr sz="1100" b="0">
+                          <a:solidFill>
+                            <a:srgbClr val="1A1A1A"/>
+                          </a:solidFill>
+                          <a:latin typeface="Arial"/>
+                        </a:rPr>
+                        <a:t/>
+                      </a:r>
+                    </a:p>
+                  </a:txBody>
+                  <a:tcPr>
+                    <a:solidFill>
+                      <a:srgbClr val="F4F6FA"/>
+                    </a:solidFill>
+                  </a:tcPr>
+                </a:tc>
+                <a:tc>
+                  <a:txBody>
+                    <a:bodyPr wrap="square"/>
+                    <a:lstStyle/>
+                    <a:p>
+                      <a:r>
+                        <a:rPr sz="1100" b="0">
+                          <a:solidFill>
+                            <a:srgbClr val="1A1A1A"/>
+                          </a:solidFill>
+                          <a:latin typeface="Arial"/>
+                        </a:rPr>
+                        <a:t/>
+                      </a:r>
+                    </a:p>
+                  </a:txBody>
+                  <a:tcPr>
+                    <a:solidFill>
+                      <a:srgbClr val="F4F6FA"/>
+                    </a:solidFill>
+                  </a:tcPr>
+                </a:tc>
+                <a:tc>
+                  <a:txBody>
+                    <a:bodyPr wrap="square"/>
+                    <a:lstStyle/>
+                    <a:p>
+                      <a:r>
+                        <a:rPr sz="1100" b="0">
+                          <a:solidFill>
+                            <a:srgbClr val="1A1A1A"/>
+                          </a:solidFill>
+                          <a:latin typeface="Arial"/>
+                        </a:rPr>
+                        <a:t/>
+                      </a:r>
+                    </a:p>
+                  </a:txBody>
+                  <a:tcPr>
+                    <a:solidFill>
+                      <a:srgbClr val="F4F6FA"/>
+                    </a:solidFill>
+                  </a:tcPr>
+                </a:tc>
+              </a:tr>
+              <a:tr h="475488">
+                <a:tc>
+                  <a:txBody>
+                    <a:bodyPr wrap="square"/>
+                    <a:lstStyle/>
+                    <a:p>
+                      <a:r>
+                        <a:rPr sz="1100" b="0">
+                          <a:solidFill>
+                            <a:srgbClr val="1A1A1A"/>
+                          </a:solidFill>
+                          <a:latin typeface="Arial"/>
+                        </a:rPr>
+                        <a:t>Monat 2</a:t>
+                      </a:r>
+                    </a:p>
+                  </a:txBody>
+                  <a:tcPr>
+                    <a:solidFill>
+                      <a:srgbClr val="FFFFFF"/>
+                    </a:solidFill>
+                  </a:tcPr>
+                </a:tc>
+                <a:tc>
+                  <a:txBody>
+                    <a:bodyPr wrap="square"/>
+                    <a:lstStyle/>
+                    <a:p>
+                      <a:r>
+                        <a:rPr sz="1100" b="0">
+                          <a:solidFill>
+                            <a:srgbClr val="1A1A1A"/>
+                          </a:solidFill>
+                          <a:latin typeface="Arial"/>
+                        </a:rPr>
+                        <a:t/>
+                      </a:r>
+                    </a:p>
+                  </a:txBody>
+                  <a:tcPr>
+                    <a:solidFill>
+                      <a:srgbClr val="FFFFFF"/>
+                    </a:solidFill>
+                  </a:tcPr>
+                </a:tc>
+                <a:tc>
+                  <a:txBody>
+                    <a:bodyPr wrap="square"/>
+                    <a:lstStyle/>
+                    <a:p>
+                      <a:r>
+                        <a:rPr sz="1100" b="0">
+                          <a:solidFill>
+                            <a:srgbClr val="1A1A1A"/>
+                          </a:solidFill>
+                          <a:latin typeface="Arial"/>
+                        </a:rPr>
+                        <a:t/>
+                      </a:r>
+                    </a:p>
+                  </a:txBody>
+                  <a:tcPr>
+                    <a:solidFill>
+                      <a:srgbClr val="FFFFFF"/>
+                    </a:solidFill>
+                  </a:tcPr>
+                </a:tc>
+                <a:tc>
+                  <a:txBody>
+                    <a:bodyPr wrap="square"/>
+                    <a:lstStyle/>
+                    <a:p>
+                      <a:r>
+                        <a:rPr sz="1100" b="0">
+                          <a:solidFill>
+                            <a:srgbClr val="1A1A1A"/>
+                          </a:solidFill>
+                          <a:latin typeface="Arial"/>
+                        </a:rPr>
+                        <a:t/>
+                      </a:r>
+                    </a:p>
+                  </a:txBody>
+                  <a:tcPr>
+                    <a:solidFill>
+                      <a:srgbClr val="FFFFFF"/>
+                    </a:solidFill>
+                  </a:tcPr>
+                </a:tc>
+                <a:tc>
+                  <a:txBody>
+                    <a:bodyPr wrap="square"/>
+                    <a:lstStyle/>
+                    <a:p>
+                      <a:r>
+                        <a:rPr sz="1100" b="0">
+                          <a:solidFill>
+                            <a:srgbClr val="1A1A1A"/>
+                          </a:solidFill>
+                          <a:latin typeface="Arial"/>
+                        </a:rPr>
+                        <a:t/>
+                      </a:r>
+                    </a:p>
+                  </a:txBody>
+                  <a:tcPr>
+                    <a:solidFill>
+                      <a:srgbClr val="FFFFFF"/>
+                    </a:solidFill>
+                  </a:tcPr>
+                </a:tc>
+              </a:tr>
+              <a:tr h="475488">
+                <a:tc>
+                  <a:txBody>
+                    <a:bodyPr wrap="square"/>
+                    <a:lstStyle/>
+                    <a:p>
+                      <a:r>
+                        <a:rPr sz="1100" b="0">
+                          <a:solidFill>
+                            <a:srgbClr val="1A1A1A"/>
+                          </a:solidFill>
+                          <a:latin typeface="Arial"/>
+                        </a:rPr>
+                        <a:t>Monat 3</a:t>
+                      </a:r>
+                    </a:p>
+                  </a:txBody>
+                  <a:tcPr>
+                    <a:solidFill>
+                      <a:srgbClr val="F4F6FA"/>
+                    </a:solidFill>
+                  </a:tcPr>
+                </a:tc>
+                <a:tc>
+                  <a:txBody>
+                    <a:bodyPr wrap="square"/>
+                    <a:lstStyle/>
+                    <a:p>
+                      <a:r>
+                        <a:rPr sz="1100" b="0">
+                          <a:solidFill>
+                            <a:srgbClr val="1A1A1A"/>
+                          </a:solidFill>
+                          <a:latin typeface="Arial"/>
+                        </a:rPr>
+                        <a:t/>
+                      </a:r>
+                    </a:p>
+                  </a:txBody>
+                  <a:tcPr>
+                    <a:solidFill>
+                      <a:srgbClr val="F4F6FA"/>
+                    </a:solidFill>
+                  </a:tcPr>
+                </a:tc>
+                <a:tc>
+                  <a:txBody>
+                    <a:bodyPr wrap="square"/>
+                    <a:lstStyle/>
+                    <a:p>
+                      <a:r>
+                        <a:rPr sz="1100" b="0">
+                          <a:solidFill>
+                            <a:srgbClr val="1A1A1A"/>
+                          </a:solidFill>
+                          <a:latin typeface="Arial"/>
+                        </a:rPr>
+                        <a:t/>
+                      </a:r>
+                    </a:p>
+                  </a:txBody>
+                  <a:tcPr>
+                    <a:solidFill>
+                      <a:srgbClr val="F4F6FA"/>
+                    </a:solidFill>
+                  </a:tcPr>
+                </a:tc>
+                <a:tc>
+                  <a:txBody>
+                    <a:bodyPr wrap="square"/>
+                    <a:lstStyle/>
+                    <a:p>
+                      <a:r>
+                        <a:rPr sz="1100" b="0">
+                          <a:solidFill>
+                            <a:srgbClr val="1A1A1A"/>
+                          </a:solidFill>
+                          <a:latin typeface="Arial"/>
+                        </a:rPr>
+                        <a:t/>
+                      </a:r>
+                    </a:p>
+                  </a:txBody>
+                  <a:tcPr>
+                    <a:solidFill>
+                      <a:srgbClr val="F4F6FA"/>
+                    </a:solidFill>
+                  </a:tcPr>
+                </a:tc>
+                <a:tc>
+                  <a:txBody>
+                    <a:bodyPr wrap="square"/>
+                    <a:lstStyle/>
+                    <a:p>
+                      <a:r>
+                        <a:rPr sz="1100" b="0">
+                          <a:solidFill>
+                            <a:srgbClr val="1A1A1A"/>
+                          </a:solidFill>
+                          <a:latin typeface="Arial"/>
+                        </a:rPr>
+                        <a:t/>
+                      </a:r>
+                    </a:p>
+                  </a:txBody>
+                  <a:tcPr>
+                    <a:solidFill>
+                      <a:srgbClr val="F4F6FA"/>
+                    </a:solidFill>
+                  </a:tcPr>
+                </a:tc>
+              </a:tr>
+            </a:tbl>
+          </a:graphicData>
+        </a:graphic>
+      </p:graphicFrame>
+    </p:spTree>
+  </p:cSld>
+  <p:clrMapOvr>
+    <a:masterClrMapping/>
+  </p:clrMapOvr>
+</p:sld>
+</file>
+
+<file path=ppt/slides/slide25.xml><?xml version="1.0" encoding="utf-8"?>
 <p:sld xmlns:a="http://schemas.openxmlformats.org/drawingml/2006/main" xmlns:p="http://schemas.openxmlformats.org/presentationml/2006/main" xmlns:r="http://schemas.openxmlformats.org/officeDocument/2006/relationships">
   <p:cSld>
     <p:bg>
@@ -3828,8 +9672,8 @@
         </p:nvSpPr>
         <p:spPr>
           <a:xfrm>
-            <a:off x="365760" y="365760"/>
-            <a:ext cx="5486400" cy="365760"/>
+            <a:off x="365760" y="347472"/>
+            <a:ext cx="7315200" cy="384048"/>
           </a:xfrm>
           <a:prstGeom prst="rect">
             <a:avLst/>
@@ -3844,62 +9688,27 @@
           <a:p>
             <a:pPr algn="l"/>
             <a:r>
-              <a:rPr sz="1000" b="1">
+              <a:rPr sz="900" b="1" i="0">
                 <a:solidFill>
                   <a:srgbClr val="CCD6F0"/>
                 </a:solidFill>
                 <a:latin typeface="Arial"/>
               </a:rPr>
-              <a:t>PRAXISTRANSFER</a:t>
-            </a:r>
-          </a:p>
-        </p:txBody>
-      </p:sp>
-      <p:sp>
-        <p:nvSpPr>
-          <p:cNvPr id="4" name="TextBox 3"/>
-          <p:cNvSpPr txBox="1"/>
+              <a:t>PRAXISTRANSFER &amp; NÄCHSTE SCHRITTE</a:t>
+            </a:r>
+          </a:p>
+        </p:txBody>
+      </p:sp>
+      <p:sp>
+        <p:nvSpPr>
+          <p:cNvPr id="4" name="Rectangle 3"/>
+          <p:cNvSpPr/>
           <p:nvPr/>
         </p:nvSpPr>
         <p:spPr>
           <a:xfrm>
-            <a:off x="365760" y="640080"/>
-            <a:ext cx="9144000" cy="914400"/>
-          </a:xfrm>
-          <a:prstGeom prst="rect">
-            <a:avLst/>
-          </a:prstGeom>
-          <a:noFill/>
-        </p:spPr>
-        <p:txBody>
-          <a:bodyPr wrap="square">
-            <a:spAutoFit/>
-          </a:bodyPr>
-          <a:lstStyle/>
-          <a:p>
-            <a:pPr algn="l"/>
-            <a:r>
-              <a:rPr sz="2800" b="1">
-                <a:solidFill>
-                  <a:srgbClr val="FFFFFF"/>
-                </a:solidFill>
-                <a:latin typeface="Arial"/>
-              </a:rPr>
-              <a:t>Was nehmen Sie mit?</a:t>
-            </a:r>
-          </a:p>
-        </p:txBody>
-      </p:sp>
-      <p:sp>
-        <p:nvSpPr>
-          <p:cNvPr id="5" name="Rectangle 4"/>
-          <p:cNvSpPr/>
-          <p:nvPr/>
-        </p:nvSpPr>
-        <p:spPr>
-          <a:xfrm>
-            <a:off x="365760" y="1463040"/>
-            <a:ext cx="7315200" cy="27432"/>
+            <a:off x="365760" y="804672"/>
+            <a:ext cx="8229600" cy="22860"/>
           </a:xfrm>
           <a:prstGeom prst="rect">
             <a:avLst/>
@@ -3935,13 +9744,48 @@
       </p:sp>
       <p:sp>
         <p:nvSpPr>
+          <p:cNvPr id="5" name="TextBox 4"/>
+          <p:cNvSpPr txBox="1"/>
+          <p:nvPr/>
+        </p:nvSpPr>
+        <p:spPr>
+          <a:xfrm>
+            <a:off x="365760" y="960120"/>
+            <a:ext cx="9144000" cy="914400"/>
+          </a:xfrm>
+          <a:prstGeom prst="rect">
+            <a:avLst/>
+          </a:prstGeom>
+          <a:noFill/>
+        </p:spPr>
+        <p:txBody>
+          <a:bodyPr wrap="square">
+            <a:spAutoFit/>
+          </a:bodyPr>
+          <a:lstStyle/>
+          <a:p>
+            <a:pPr algn="l"/>
+            <a:r>
+              <a:rPr sz="3000" b="1" i="0">
+                <a:solidFill>
+                  <a:srgbClr val="FFFFFF"/>
+                </a:solidFill>
+                <a:latin typeface="Arial"/>
+              </a:rPr>
+              <a:t>Was nehmen Sie mit?</a:t>
+            </a:r>
+          </a:p>
+        </p:txBody>
+      </p:sp>
+      <p:sp>
+        <p:nvSpPr>
           <p:cNvPr id="6" name="TextBox 5"/>
           <p:cNvSpPr txBox="1"/>
           <p:nvPr/>
         </p:nvSpPr>
         <p:spPr>
           <a:xfrm>
-            <a:off x="365760" y="1645920"/>
+            <a:off x="365760" y="2103120"/>
             <a:ext cx="11430000" cy="4114800"/>
           </a:xfrm>
           <a:prstGeom prst="rect">
@@ -3957,7 +9801,7 @@
           <a:p>
             <a:pPr>
               <a:spcBef>
-                <a:spcPts val="400"/>
+                <a:spcPts val="500"/>
               </a:spcBef>
             </a:pPr>
             <a:r>
@@ -3982,7 +9826,7 @@
           <a:p>
             <a:pPr>
               <a:spcBef>
-                <a:spcPts val="400"/>
+                <a:spcPts val="500"/>
               </a:spcBef>
             </a:pPr>
             <a:r>
@@ -4001,7 +9845,7 @@
                 </a:solidFill>
                 <a:latin typeface="Arial"/>
               </a:rPr>
-              <a:t>Selbstcheck nach 4 Wochen: Was hat sich verändert?</a:t>
+              <a:t>Selbstcheck nach 4 Wochen: Bewerten Sie Ihre Fortschritte ehrlich.</a:t>
             </a:r>
           </a:p>
         </p:txBody>
@@ -4030,343 +9874,13 @@
           <a:p>
             <a:pPr algn="l"/>
             <a:r>
-              <a:rPr sz="900" b="0">
-                <a:solidFill>
-                  <a:srgbClr val="99AACC"/>
+              <a:rPr sz="900" b="0" i="0">
+                <a:solidFill>
+                  <a:srgbClr val="889ACC"/>
                 </a:solidFill>
                 <a:latin typeface="Arial"/>
               </a:rPr>
               <a:t>M20 · Netzwerk &amp; Sichtbarkeit  ·  v0.4  ·  Benedikt Zoller Coaching</a:t>
-            </a:r>
-          </a:p>
-        </p:txBody>
-      </p:sp>
-    </p:spTree>
-  </p:cSld>
-  <p:clrMapOvr>
-    <a:masterClrMapping/>
-  </p:clrMapOvr>
-</p:sld>
-</file>
-
-<file path=ppt/slides/slide2.xml><?xml version="1.0" encoding="utf-8"?>
-<p:sld xmlns:a="http://schemas.openxmlformats.org/drawingml/2006/main" xmlns:p="http://schemas.openxmlformats.org/presentationml/2006/main" xmlns:r="http://schemas.openxmlformats.org/officeDocument/2006/relationships">
-  <p:cSld>
-    <p:bg>
-      <p:bgPr>
-        <a:solidFill>
-          <a:srgbClr val="F5F7FA"/>
-        </a:solidFill>
-        <a:effectLst/>
-      </p:bgPr>
-    </p:bg>
-    <p:spTree>
-      <p:nvGrpSpPr>
-        <p:cNvPr id="1" name=""/>
-        <p:cNvGrpSpPr/>
-        <p:nvPr/>
-      </p:nvGrpSpPr>
-      <p:grpSpPr/>
-      <p:sp>
-        <p:nvSpPr>
-          <p:cNvPr id="2" name="Rectangle 1"/>
-          <p:cNvSpPr/>
-          <p:nvPr/>
-        </p:nvSpPr>
-        <p:spPr>
-          <a:xfrm>
-            <a:off x="0" y="0"/>
-            <a:ext cx="73152" cy="6858000"/>
-          </a:xfrm>
-          <a:prstGeom prst="rect">
-            <a:avLst/>
-          </a:prstGeom>
-          <a:solidFill>
-            <a:srgbClr val="003DA5"/>
-          </a:solidFill>
-          <a:ln>
-            <a:noFill/>
-          </a:ln>
-        </p:spPr>
-        <p:style>
-          <a:lnRef idx="1">
-            <a:schemeClr val="accent1"/>
-          </a:lnRef>
-          <a:fillRef idx="3">
-            <a:schemeClr val="accent1"/>
-          </a:fillRef>
-          <a:effectRef idx="2">
-            <a:schemeClr val="accent1"/>
-          </a:effectRef>
-          <a:fontRef idx="minor">
-            <a:schemeClr val="lt1"/>
-          </a:fontRef>
-        </p:style>
-        <p:txBody>
-          <a:bodyPr rtlCol="0" anchor="ctr"/>
-          <a:lstStyle/>
-          <a:p>
-            <a:pPr algn="ctr"/>
-          </a:p>
-        </p:txBody>
-      </p:sp>
-      <p:sp>
-        <p:nvSpPr>
-          <p:cNvPr id="3" name="Rectangle 2"/>
-          <p:cNvSpPr/>
-          <p:nvPr/>
-        </p:nvSpPr>
-        <p:spPr>
-          <a:xfrm>
-            <a:off x="365760" y="868680"/>
-            <a:ext cx="7315200" cy="27432"/>
-          </a:xfrm>
-          <a:prstGeom prst="rect">
-            <a:avLst/>
-          </a:prstGeom>
-          <a:solidFill>
-            <a:srgbClr val="E5E7EB"/>
-          </a:solidFill>
-          <a:ln>
-            <a:noFill/>
-          </a:ln>
-        </p:spPr>
-        <p:style>
-          <a:lnRef idx="1">
-            <a:schemeClr val="accent1"/>
-          </a:lnRef>
-          <a:fillRef idx="3">
-            <a:schemeClr val="accent1"/>
-          </a:fillRef>
-          <a:effectRef idx="2">
-            <a:schemeClr val="accent1"/>
-          </a:effectRef>
-          <a:fontRef idx="minor">
-            <a:schemeClr val="lt1"/>
-          </a:fontRef>
-        </p:style>
-        <p:txBody>
-          <a:bodyPr rtlCol="0" anchor="ctr"/>
-          <a:lstStyle/>
-          <a:p>
-            <a:pPr algn="ctr"/>
-          </a:p>
-        </p:txBody>
-      </p:sp>
-      <p:sp>
-        <p:nvSpPr>
-          <p:cNvPr id="4" name="TextBox 3"/>
-          <p:cNvSpPr txBox="1"/>
-          <p:nvPr/>
-        </p:nvSpPr>
-        <p:spPr>
-          <a:xfrm>
-            <a:off x="365760" y="320040"/>
-            <a:ext cx="3657600" cy="365760"/>
-          </a:xfrm>
-          <a:prstGeom prst="rect">
-            <a:avLst/>
-          </a:prstGeom>
-          <a:noFill/>
-        </p:spPr>
-        <p:txBody>
-          <a:bodyPr wrap="square">
-            <a:spAutoFit/>
-          </a:bodyPr>
-          <a:lstStyle/>
-          <a:p>
-            <a:pPr algn="l"/>
-            <a:r>
-              <a:rPr sz="1000" b="1">
-                <a:solidFill>
-                  <a:srgbClr val="003DA5"/>
-                </a:solidFill>
-                <a:latin typeface="Arial"/>
-              </a:rPr>
-              <a:t>LERNZIELE</a:t>
-            </a:r>
-          </a:p>
-        </p:txBody>
-      </p:sp>
-      <p:sp>
-        <p:nvSpPr>
-          <p:cNvPr id="5" name="TextBox 4"/>
-          <p:cNvSpPr txBox="1"/>
-          <p:nvPr/>
-        </p:nvSpPr>
-        <p:spPr>
-          <a:xfrm>
-            <a:off x="365760" y="502920"/>
-            <a:ext cx="9144000" cy="548640"/>
-          </a:xfrm>
-          <a:prstGeom prst="rect">
-            <a:avLst/>
-          </a:prstGeom>
-          <a:noFill/>
-        </p:spPr>
-        <p:txBody>
-          <a:bodyPr wrap="square">
-            <a:spAutoFit/>
-          </a:bodyPr>
-          <a:lstStyle/>
-          <a:p>
-            <a:pPr algn="l"/>
-            <a:r>
-              <a:rPr sz="2200" b="1">
-                <a:solidFill>
-                  <a:srgbClr val="1A1A1A"/>
-                </a:solidFill>
-                <a:latin typeface="Arial"/>
-              </a:rPr>
-              <a:t>Was Sie nach diesem Modul können.</a:t>
-            </a:r>
-          </a:p>
-        </p:txBody>
-      </p:sp>
-      <p:sp>
-        <p:nvSpPr>
-          <p:cNvPr id="6" name="TextBox 5"/>
-          <p:cNvSpPr txBox="1"/>
-          <p:nvPr/>
-        </p:nvSpPr>
-        <p:spPr>
-          <a:xfrm>
-            <a:off x="365760" y="1188720"/>
-            <a:ext cx="11430000" cy="5303520"/>
-          </a:xfrm>
-          <a:prstGeom prst="rect">
-            <a:avLst/>
-          </a:prstGeom>
-          <a:noFill/>
-        </p:spPr>
-        <p:txBody>
-          <a:bodyPr wrap="square">
-            <a:spAutoFit/>
-          </a:bodyPr>
-          <a:lstStyle/>
-          <a:p>
-            <a:pPr>
-              <a:spcBef>
-                <a:spcPts val="400"/>
-              </a:spcBef>
-            </a:pPr>
-            <a:r>
-              <a:rPr sz="1400">
-                <a:solidFill>
-                  <a:srgbClr val="003DA5"/>
-                </a:solidFill>
-                <a:latin typeface="Arial"/>
-              </a:rPr>
-              <a:t>▪  </a:t>
-            </a:r>
-            <a:r>
-              <a:rPr sz="1600">
-                <a:solidFill>
-                  <a:srgbClr val="1A1A1A"/>
-                </a:solidFill>
-                <a:latin typeface="Arial"/>
-              </a:rPr>
-              <a:t>Eigenes Netzwerk nach Stärke, Brücken und Lücken analysieren und Erweiterungsstrategie ableiten</a:t>
-            </a:r>
-          </a:p>
-          <a:p>
-            <a:pPr>
-              <a:spcBef>
-                <a:spcPts val="400"/>
-              </a:spcBef>
-            </a:pPr>
-            <a:r>
-              <a:rPr sz="1400">
-                <a:solidFill>
-                  <a:srgbClr val="003DA5"/>
-                </a:solidFill>
-                <a:latin typeface="Arial"/>
-              </a:rPr>
-              <a:t>▪  </a:t>
-            </a:r>
-            <a:r>
-              <a:rPr sz="1600">
-                <a:solidFill>
-                  <a:srgbClr val="1A1A1A"/>
-                </a:solidFill>
-                <a:latin typeface="Arial"/>
-              </a:rPr>
-              <a:t>Verschiedene Netzwerk-Kanäle nach strategischer Eignung bewerten</a:t>
-            </a:r>
-          </a:p>
-          <a:p>
-            <a:pPr>
-              <a:spcBef>
-                <a:spcPts val="400"/>
-              </a:spcBef>
-            </a:pPr>
-            <a:r>
-              <a:rPr sz="1400">
-                <a:solidFill>
-                  <a:srgbClr val="003DA5"/>
-                </a:solidFill>
-                <a:latin typeface="Arial"/>
-              </a:rPr>
-              <a:t>▪  </a:t>
-            </a:r>
-            <a:r>
-              <a:rPr sz="1600">
-                <a:solidFill>
-                  <a:srgbClr val="1A1A1A"/>
-                </a:solidFill>
-                <a:latin typeface="Arial"/>
-              </a:rPr>
-              <a:t>Persönliche Sichtbarkeitsstrategie entwickeln</a:t>
-            </a:r>
-          </a:p>
-          <a:p>
-            <a:pPr>
-              <a:spcBef>
-                <a:spcPts val="400"/>
-              </a:spcBef>
-            </a:pPr>
-            <a:r>
-              <a:rPr sz="1400">
-                <a:solidFill>
-                  <a:srgbClr val="003DA5"/>
-                </a:solidFill>
-                <a:latin typeface="Arial"/>
-              </a:rPr>
-              <a:t>▪  </a:t>
-            </a:r>
-            <a:r>
-              <a:rPr sz="1600">
-                <a:solidFill>
-                  <a:srgbClr val="1A1A1A"/>
-                </a:solidFill>
-                <a:latin typeface="Arial"/>
-              </a:rPr>
-              <a:t>90-Tage-Netzwerkstrategie mit konkreten Aktivitäten gestalten</a:t>
-            </a:r>
-          </a:p>
-          <a:p>
-            <a:pPr>
-              <a:spcBef>
-                <a:spcPts val="400"/>
-              </a:spcBef>
-            </a:pPr>
-            <a:r>
-              <a:rPr sz="1400">
-                <a:solidFill>
-                  <a:srgbClr val="003DA5"/>
-                </a:solidFill>
-                <a:latin typeface="Arial"/>
-              </a:rPr>
-              <a:t>▪  </a:t>
-            </a:r>
-            <a:r>
-              <a:rPr sz="1600">
-                <a:solidFill>
-                  <a:srgbClr val="1A1A1A"/>
-                </a:solidFill>
-                <a:latin typeface="Arial"/>
-              </a:rPr>
-              <a:t>Operative Netzwerkpflege von strategischem Beziehungsaufbau unterscheiden</a:t>
             </a:r>
           </a:p>
         </p:txBody>
@@ -4448,8 +9962,8 @@
         </p:nvSpPr>
         <p:spPr>
           <a:xfrm>
-            <a:off x="365760" y="2286000"/>
-            <a:ext cx="11430000" cy="1828800"/>
+            <a:off x="365760" y="2011680"/>
+            <a:ext cx="11430000" cy="2011680"/>
           </a:xfrm>
           <a:prstGeom prst="rect">
             <a:avLst/>
@@ -4464,7 +9978,7 @@
           <a:p>
             <a:pPr algn="l"/>
             <a:r>
-              <a:rPr sz="3600" b="1">
+              <a:rPr sz="3600" b="1" i="0">
                 <a:solidFill>
                   <a:srgbClr val="FFFFFF"/>
                 </a:solidFill>
@@ -4489,7 +10003,7 @@
     <p:bg>
       <p:bgPr>
         <a:solidFill>
-          <a:srgbClr val="1A1A1A"/>
+          <a:srgbClr val="FFFFFF"/>
         </a:solidFill>
         <a:effectLst/>
       </p:bgPr>
@@ -4516,7 +10030,7 @@
             <a:avLst/>
           </a:prstGeom>
           <a:solidFill>
-            <a:srgbClr val="E05B00"/>
+            <a:srgbClr val="003DA5"/>
           </a:solidFill>
           <a:ln>
             <a:noFill/>
@@ -4552,8 +10066,8 @@
         </p:nvSpPr>
         <p:spPr>
           <a:xfrm>
-            <a:off x="365760" y="2286000"/>
-            <a:ext cx="11430000" cy="1828800"/>
+            <a:off x="228600" y="182880"/>
+            <a:ext cx="11430000" cy="320040"/>
           </a:xfrm>
           <a:prstGeom prst="rect">
             <a:avLst/>
@@ -4568,13 +10082,164 @@
           <a:p>
             <a:pPr algn="l"/>
             <a:r>
-              <a:rPr sz="3600" b="1">
-                <a:solidFill>
-                  <a:srgbClr val="FFFFFF"/>
+              <a:rPr sz="900" b="0" i="0">
+                <a:solidFill>
+                  <a:srgbClr val="556575"/>
                 </a:solidFill>
                 <a:latin typeface="Arial"/>
               </a:rPr>
-              <a:t>Dimension 2: Verbundpartner-Netzwerk</a:t>
+              <a:t>M20 · 4.2 Die drei Netzwerkdimensionen eines FK-Beraters</a:t>
+            </a:r>
+          </a:p>
+        </p:txBody>
+      </p:sp>
+      <p:sp>
+        <p:nvSpPr>
+          <p:cNvPr id="4" name="TextBox 3"/>
+          <p:cNvSpPr txBox="1"/>
+          <p:nvPr/>
+        </p:nvSpPr>
+        <p:spPr>
+          <a:xfrm>
+            <a:off x="365760" y="274320"/>
+            <a:ext cx="11430000" cy="777240"/>
+          </a:xfrm>
+          <a:prstGeom prst="rect">
+            <a:avLst/>
+          </a:prstGeom>
+          <a:noFill/>
+        </p:spPr>
+        <p:txBody>
+          <a:bodyPr wrap="square">
+            <a:spAutoFit/>
+          </a:bodyPr>
+          <a:lstStyle/>
+          <a:p>
+            <a:pPr algn="l"/>
+            <a:r>
+              <a:rPr sz="2200" b="1" i="0">
+                <a:solidFill>
+                  <a:srgbClr val="003DA5"/>
+                </a:solidFill>
+                <a:latin typeface="Arial"/>
+              </a:rPr>
+              <a:t>Dimension 1: Internes Netzwerk</a:t>
+            </a:r>
+          </a:p>
+        </p:txBody>
+      </p:sp>
+      <p:sp>
+        <p:nvSpPr>
+          <p:cNvPr id="5" name="Rectangle 4"/>
+          <p:cNvSpPr/>
+          <p:nvPr/>
+        </p:nvSpPr>
+        <p:spPr>
+          <a:xfrm>
+            <a:off x="365760" y="1005840"/>
+            <a:ext cx="11430000" cy="27432"/>
+          </a:xfrm>
+          <a:prstGeom prst="rect">
+            <a:avLst/>
+          </a:prstGeom>
+          <a:solidFill>
+            <a:srgbClr val="D1D5DB"/>
+          </a:solidFill>
+          <a:ln>
+            <a:noFill/>
+          </a:ln>
+        </p:spPr>
+        <p:style>
+          <a:lnRef idx="1">
+            <a:schemeClr val="accent1"/>
+          </a:lnRef>
+          <a:fillRef idx="3">
+            <a:schemeClr val="accent1"/>
+          </a:fillRef>
+          <a:effectRef idx="2">
+            <a:schemeClr val="accent1"/>
+          </a:effectRef>
+          <a:fontRef idx="minor">
+            <a:schemeClr val="lt1"/>
+          </a:fontRef>
+        </p:style>
+        <p:txBody>
+          <a:bodyPr rtlCol="0" anchor="ctr"/>
+          <a:lstStyle/>
+          <a:p>
+            <a:pPr algn="ctr"/>
+          </a:p>
+        </p:txBody>
+      </p:sp>
+      <p:sp>
+        <p:nvSpPr>
+          <p:cNvPr id="6" name="TextBox 5"/>
+          <p:cNvSpPr txBox="1"/>
+          <p:nvPr/>
+        </p:nvSpPr>
+        <p:spPr>
+          <a:xfrm>
+            <a:off x="365760" y="1143000"/>
+            <a:ext cx="11430000" cy="5212080"/>
+          </a:xfrm>
+          <a:prstGeom prst="rect">
+            <a:avLst/>
+          </a:prstGeom>
+          <a:noFill/>
+        </p:spPr>
+        <p:txBody>
+          <a:bodyPr wrap="square">
+            <a:spAutoFit/>
+          </a:bodyPr>
+          <a:lstStyle/>
+          <a:p>
+            <a:pPr>
+              <a:spcBef>
+                <a:spcPts val="500"/>
+              </a:spcBef>
+            </a:pPr>
+            <a:r>
+              <a:rPr sz="1500">
+                <a:solidFill>
+                  <a:srgbClr val="003DA5"/>
+                </a:solidFill>
+                <a:latin typeface="Arial"/>
+              </a:rPr>
+              <a:t>▪  </a:t>
+            </a:r>
+            <a:r>
+              <a:rPr sz="1700">
+                <a:solidFill>
+                  <a:srgbClr val="1A1A1A"/>
+                </a:solidFill>
+                <a:latin typeface="Arial"/>
+              </a:rPr>
+              <a:t>Die häufig unterschätzte Dimension. Wer im eigenen Haus als kompetenter Ansprechpartner bekannt ist, bekommt: - Interne Empfehlungen aus Privatkundenbereichen…</a:t>
+            </a:r>
+          </a:p>
+          <a:p>
+            <a:pPr>
+              <a:spcBef>
+                <a:spcPts val="500"/>
+              </a:spcBef>
+            </a:pPr>
+            <a:r>
+              <a:rPr sz="1500">
+                <a:solidFill>
+                  <a:srgbClr val="003DA5"/>
+                </a:solidFill>
+                <a:latin typeface="Arial"/>
+              </a:rPr>
+              <a:t>▪  </a:t>
+            </a:r>
+            <a:r>
+              <a:rPr sz="1700">
+                <a:solidFill>
+                  <a:srgbClr val="1A1A1A"/>
+                </a:solidFill>
+                <a:latin typeface="Arial"/>
+              </a:rPr>
+              <a:t>Netzwerkanker intern: Bereichsleiter FK, Kreditspezialisten, Risikomanager, Privatkundenberater mit Unternehmerkunden, Verbundpartner-Spezialisten (R+V, Union…</a:t>
             </a:r>
           </a:p>
         </p:txBody>
@@ -4656,8 +10321,8 @@
         </p:nvSpPr>
         <p:spPr>
           <a:xfrm>
-            <a:off x="365760" y="2286000"/>
-            <a:ext cx="11430000" cy="1828800"/>
+            <a:off x="365760" y="2011680"/>
+            <a:ext cx="11430000" cy="2011680"/>
           </a:xfrm>
           <a:prstGeom prst="rect">
             <a:avLst/>
@@ -4672,13 +10337,13 @@
           <a:p>
             <a:pPr algn="l"/>
             <a:r>
-              <a:rPr sz="3600" b="1">
+              <a:rPr sz="3600" b="1" i="0">
                 <a:solidFill>
                   <a:srgbClr val="FFFFFF"/>
                 </a:solidFill>
                 <a:latin typeface="Arial"/>
               </a:rPr>
-              <a:t>Dimension 3: Markt-Netzwerk</a:t>
+              <a:t>Dimension 2: Verbundpartner-Netzwerk</a:t>
             </a:r>
           </a:p>
         </p:txBody>
@@ -4697,7 +10362,7 @@
     <p:bg>
       <p:bgPr>
         <a:solidFill>
-          <a:srgbClr val="1A1A1A"/>
+          <a:srgbClr val="FFFFFF"/>
         </a:solidFill>
         <a:effectLst/>
       </p:bgPr>
@@ -4724,7 +10389,7 @@
             <a:avLst/>
           </a:prstGeom>
           <a:solidFill>
-            <a:srgbClr val="E05B00"/>
+            <a:srgbClr val="003DA5"/>
           </a:solidFill>
           <a:ln>
             <a:noFill/>
@@ -4760,8 +10425,8 @@
         </p:nvSpPr>
         <p:spPr>
           <a:xfrm>
-            <a:off x="365760" y="2286000"/>
-            <a:ext cx="11430000" cy="1828800"/>
+            <a:off x="228600" y="182880"/>
+            <a:ext cx="11430000" cy="320040"/>
           </a:xfrm>
           <a:prstGeom prst="rect">
             <a:avLst/>
@@ -4776,13 +10441,250 @@
           <a:p>
             <a:pPr algn="l"/>
             <a:r>
-              <a:rPr sz="3600" b="1">
-                <a:solidFill>
-                  <a:srgbClr val="FFFFFF"/>
+              <a:rPr sz="900" b="0" i="0">
+                <a:solidFill>
+                  <a:srgbClr val="556575"/>
                 </a:solidFill>
                 <a:latin typeface="Arial"/>
               </a:rPr>
-              <a:t>Das Netzwerk-Audit (3 Fragen)</a:t>
+              <a:t>M20 · 4.2 Die drei Netzwerkdimensionen eines FK-Beraters</a:t>
+            </a:r>
+          </a:p>
+        </p:txBody>
+      </p:sp>
+      <p:sp>
+        <p:nvSpPr>
+          <p:cNvPr id="4" name="TextBox 3"/>
+          <p:cNvSpPr txBox="1"/>
+          <p:nvPr/>
+        </p:nvSpPr>
+        <p:spPr>
+          <a:xfrm>
+            <a:off x="365760" y="274320"/>
+            <a:ext cx="11430000" cy="777240"/>
+          </a:xfrm>
+          <a:prstGeom prst="rect">
+            <a:avLst/>
+          </a:prstGeom>
+          <a:noFill/>
+        </p:spPr>
+        <p:txBody>
+          <a:bodyPr wrap="square">
+            <a:spAutoFit/>
+          </a:bodyPr>
+          <a:lstStyle/>
+          <a:p>
+            <a:pPr algn="l"/>
+            <a:r>
+              <a:rPr sz="2200" b="1" i="0">
+                <a:solidFill>
+                  <a:srgbClr val="003DA5"/>
+                </a:solidFill>
+                <a:latin typeface="Arial"/>
+              </a:rPr>
+              <a:t>Dimension 2: Verbundpartner-Netzwerk</a:t>
+            </a:r>
+          </a:p>
+        </p:txBody>
+      </p:sp>
+      <p:sp>
+        <p:nvSpPr>
+          <p:cNvPr id="5" name="Rectangle 4"/>
+          <p:cNvSpPr/>
+          <p:nvPr/>
+        </p:nvSpPr>
+        <p:spPr>
+          <a:xfrm>
+            <a:off x="365760" y="1005840"/>
+            <a:ext cx="11430000" cy="27432"/>
+          </a:xfrm>
+          <a:prstGeom prst="rect">
+            <a:avLst/>
+          </a:prstGeom>
+          <a:solidFill>
+            <a:srgbClr val="D1D5DB"/>
+          </a:solidFill>
+          <a:ln>
+            <a:noFill/>
+          </a:ln>
+        </p:spPr>
+        <p:style>
+          <a:lnRef idx="1">
+            <a:schemeClr val="accent1"/>
+          </a:lnRef>
+          <a:fillRef idx="3">
+            <a:schemeClr val="accent1"/>
+          </a:fillRef>
+          <a:effectRef idx="2">
+            <a:schemeClr val="accent1"/>
+          </a:effectRef>
+          <a:fontRef idx="minor">
+            <a:schemeClr val="lt1"/>
+          </a:fontRef>
+        </p:style>
+        <p:txBody>
+          <a:bodyPr rtlCol="0" anchor="ctr"/>
+          <a:lstStyle/>
+          <a:p>
+            <a:pPr algn="ctr"/>
+          </a:p>
+        </p:txBody>
+      </p:sp>
+      <p:sp>
+        <p:nvSpPr>
+          <p:cNvPr id="6" name="TextBox 5"/>
+          <p:cNvSpPr txBox="1"/>
+          <p:nvPr/>
+        </p:nvSpPr>
+        <p:spPr>
+          <a:xfrm>
+            <a:off x="365760" y="1143000"/>
+            <a:ext cx="11430000" cy="5212080"/>
+          </a:xfrm>
+          <a:prstGeom prst="rect">
+            <a:avLst/>
+          </a:prstGeom>
+          <a:noFill/>
+        </p:spPr>
+        <p:txBody>
+          <a:bodyPr wrap="square">
+            <a:spAutoFit/>
+          </a:bodyPr>
+          <a:lstStyle/>
+          <a:p>
+            <a:pPr>
+              <a:spcBef>
+                <a:spcPts val="500"/>
+              </a:spcBef>
+            </a:pPr>
+            <a:r>
+              <a:rPr sz="1500">
+                <a:solidFill>
+                  <a:srgbClr val="003DA5"/>
+                </a:solidFill>
+                <a:latin typeface="Arial"/>
+              </a:rPr>
+              <a:t>▪  </a:t>
+            </a:r>
+            <a:r>
+              <a:rPr sz="1700" b="1">
+                <a:solidFill>
+                  <a:srgbClr val="003DA5"/>
+                </a:solidFill>
+                <a:latin typeface="Arial"/>
+              </a:rPr>
+              <a:t>Strategischer Nutzen: </a:t>
+            </a:r>
+            <a:r>
+              <a:rPr sz="1700">
+                <a:solidFill>
+                  <a:srgbClr val="1A1A1A"/>
+                </a:solidFill>
+                <a:latin typeface="Arial"/>
+              </a:rPr>
+              <a:t>Verbundpartner können den Berater bei ihren eigenen Kundenkontakten empfehlen; der Berater positioniert sich als Koordinator der gesamten Verbundleistung.</a:t>
+            </a:r>
+          </a:p>
+          <a:p>
+            <a:pPr>
+              <a:spcBef>
+                <a:spcPts val="500"/>
+              </a:spcBef>
+            </a:pPr>
+            <a:r>
+              <a:rPr sz="1500">
+                <a:solidFill>
+                  <a:srgbClr val="003DA5"/>
+                </a:solidFill>
+                <a:latin typeface="Arial"/>
+              </a:rPr>
+              <a:t>▪  </a:t>
+            </a:r>
+            <a:r>
+              <a:rPr sz="1700" b="1">
+                <a:solidFill>
+                  <a:srgbClr val="003DA5"/>
+                </a:solidFill>
+                <a:latin typeface="Arial"/>
+              </a:rPr>
+              <a:t>Gemeinsame Kundenveranstaltungen: </a:t>
+            </a:r>
+            <a:r>
+              <a:rPr sz="1700">
+                <a:solidFill>
+                  <a:srgbClr val="1A1A1A"/>
+                </a:solidFill>
+                <a:latin typeface="Arial"/>
+              </a:rPr>
+              <a:t>mit R+V oder Union Investment: Der FK-Berater tritt als Co-Moderator auf und gewinnt Sichtbarkeit bei Kunden anderer Berater. -</a:t>
+            </a:r>
+          </a:p>
+          <a:p>
+            <a:pPr>
+              <a:spcBef>
+                <a:spcPts val="500"/>
+              </a:spcBef>
+            </a:pPr>
+            <a:r>
+              <a:rPr sz="1500">
+                <a:solidFill>
+                  <a:srgbClr val="003DA5"/>
+                </a:solidFill>
+                <a:latin typeface="Arial"/>
+              </a:rPr>
+              <a:t>▪  </a:t>
+            </a:r>
+            <a:r>
+              <a:rPr sz="1700" b="1">
+                <a:solidFill>
+                  <a:srgbClr val="003DA5"/>
+                </a:solidFill>
+                <a:latin typeface="Arial"/>
+              </a:rPr>
+              <a:t>Monatlicher Jour fixe: </a:t>
+            </a:r>
+            <a:r>
+              <a:rPr sz="1700">
+                <a:solidFill>
+                  <a:srgbClr val="1A1A1A"/>
+                </a:solidFill>
+                <a:latin typeface="Arial"/>
+              </a:rPr>
+              <a:t>(30 Min.) mit dem R+V-Gebietsleiter oder UIN-Regionalbetreuer: Leads gegenseitig teilen, aktuelle Cross-Selling-Opportunitäten besprechen. -</a:t>
+            </a:r>
+          </a:p>
+          <a:p>
+            <a:pPr>
+              <a:spcBef>
+                <a:spcPts val="500"/>
+              </a:spcBef>
+            </a:pPr>
+            <a:r>
+              <a:rPr sz="1500">
+                <a:solidFill>
+                  <a:srgbClr val="003DA5"/>
+                </a:solidFill>
+                <a:latin typeface="Arial"/>
+              </a:rPr>
+              <a:t>▪  </a:t>
+            </a:r>
+            <a:r>
+              <a:rPr sz="1700" b="1">
+                <a:solidFill>
+                  <a:srgbClr val="003DA5"/>
+                </a:solidFill>
+                <a:latin typeface="Arial"/>
+              </a:rPr>
+              <a:t>Internes Cross-Selling-Meeting: </a:t>
+            </a:r>
+            <a:r>
+              <a:rPr sz="1700">
+                <a:solidFill>
+                  <a:srgbClr val="1A1A1A"/>
+                </a:solidFill>
+                <a:latin typeface="Arial"/>
+              </a:rPr>
+              <a:t>Privatkundenberater mit Unternehmerkunden systematisch ansprechen – das ist im Alltag oft der schnellste Weg zu Neukunden, wird aber selten als aktives Format geführt.</a:t>
             </a:r>
           </a:p>
         </p:txBody>
@@ -4864,8 +10766,8 @@
         </p:nvSpPr>
         <p:spPr>
           <a:xfrm>
-            <a:off x="365760" y="2286000"/>
-            <a:ext cx="11430000" cy="1828800"/>
+            <a:off x="365760" y="2011680"/>
+            <a:ext cx="11430000" cy="2011680"/>
           </a:xfrm>
           <a:prstGeom prst="rect">
             <a:avLst/>
@@ -4880,13 +10782,13 @@
           <a:p>
             <a:pPr algn="l"/>
             <a:r>
-              <a:rPr sz="3600" b="1">
+              <a:rPr sz="3600" b="1" i="0">
                 <a:solidFill>
                   <a:srgbClr val="FFFFFF"/>
                 </a:solidFill>
                 <a:latin typeface="Arial"/>
               </a:rPr>
-              <a:t>Format 1: Fachbeiträge und Impulse</a:t>
+              <a:t>Dimension 3: Markt-Netzwerk</a:t>
             </a:r>
           </a:p>
         </p:txBody>
@@ -4905,7 +10807,7 @@
     <p:bg>
       <p:bgPr>
         <a:solidFill>
-          <a:srgbClr val="1A1A1A"/>
+          <a:srgbClr val="FFFFFF"/>
         </a:solidFill>
         <a:effectLst/>
       </p:bgPr>
@@ -4932,7 +10834,7 @@
             <a:avLst/>
           </a:prstGeom>
           <a:solidFill>
-            <a:srgbClr val="E05B00"/>
+            <a:srgbClr val="003DA5"/>
           </a:solidFill>
           <a:ln>
             <a:noFill/>
@@ -4968,8 +10870,8 @@
         </p:nvSpPr>
         <p:spPr>
           <a:xfrm>
-            <a:off x="365760" y="2286000"/>
-            <a:ext cx="11430000" cy="1828800"/>
+            <a:off x="228600" y="182880"/>
+            <a:ext cx="11430000" cy="320040"/>
           </a:xfrm>
           <a:prstGeom prst="rect">
             <a:avLst/>
@@ -4984,13 +10886,164 @@
           <a:p>
             <a:pPr algn="l"/>
             <a:r>
-              <a:rPr sz="3600" b="1">
-                <a:solidFill>
-                  <a:srgbClr val="FFFFFF"/>
+              <a:rPr sz="900" b="0" i="0">
+                <a:solidFill>
+                  <a:srgbClr val="556575"/>
                 </a:solidFill>
                 <a:latin typeface="Arial"/>
               </a:rPr>
-              <a:t>Format 2: Empfehlungen geben, bevor man welche bekommt</a:t>
+              <a:t>M20 · 4.2 Die drei Netzwerkdimensionen eines FK-Beraters</a:t>
+            </a:r>
+          </a:p>
+        </p:txBody>
+      </p:sp>
+      <p:sp>
+        <p:nvSpPr>
+          <p:cNvPr id="4" name="TextBox 3"/>
+          <p:cNvSpPr txBox="1"/>
+          <p:nvPr/>
+        </p:nvSpPr>
+        <p:spPr>
+          <a:xfrm>
+            <a:off x="365760" y="274320"/>
+            <a:ext cx="11430000" cy="777240"/>
+          </a:xfrm>
+          <a:prstGeom prst="rect">
+            <a:avLst/>
+          </a:prstGeom>
+          <a:noFill/>
+        </p:spPr>
+        <p:txBody>
+          <a:bodyPr wrap="square">
+            <a:spAutoFit/>
+          </a:bodyPr>
+          <a:lstStyle/>
+          <a:p>
+            <a:pPr algn="l"/>
+            <a:r>
+              <a:rPr sz="2200" b="1" i="0">
+                <a:solidFill>
+                  <a:srgbClr val="003DA5"/>
+                </a:solidFill>
+                <a:latin typeface="Arial"/>
+              </a:rPr>
+              <a:t>Dimension 3: Markt-Netzwerk</a:t>
+            </a:r>
+          </a:p>
+        </p:txBody>
+      </p:sp>
+      <p:sp>
+        <p:nvSpPr>
+          <p:cNvPr id="5" name="Rectangle 4"/>
+          <p:cNvSpPr/>
+          <p:nvPr/>
+        </p:nvSpPr>
+        <p:spPr>
+          <a:xfrm>
+            <a:off x="365760" y="1005840"/>
+            <a:ext cx="11430000" cy="27432"/>
+          </a:xfrm>
+          <a:prstGeom prst="rect">
+            <a:avLst/>
+          </a:prstGeom>
+          <a:solidFill>
+            <a:srgbClr val="D1D5DB"/>
+          </a:solidFill>
+          <a:ln>
+            <a:noFill/>
+          </a:ln>
+        </p:spPr>
+        <p:style>
+          <a:lnRef idx="1">
+            <a:schemeClr val="accent1"/>
+          </a:lnRef>
+          <a:fillRef idx="3">
+            <a:schemeClr val="accent1"/>
+          </a:fillRef>
+          <a:effectRef idx="2">
+            <a:schemeClr val="accent1"/>
+          </a:effectRef>
+          <a:fontRef idx="minor">
+            <a:schemeClr val="lt1"/>
+          </a:fontRef>
+        </p:style>
+        <p:txBody>
+          <a:bodyPr rtlCol="0" anchor="ctr"/>
+          <a:lstStyle/>
+          <a:p>
+            <a:pPr algn="ctr"/>
+          </a:p>
+        </p:txBody>
+      </p:sp>
+      <p:sp>
+        <p:nvSpPr>
+          <p:cNvPr id="6" name="TextBox 5"/>
+          <p:cNvSpPr txBox="1"/>
+          <p:nvPr/>
+        </p:nvSpPr>
+        <p:spPr>
+          <a:xfrm>
+            <a:off x="365760" y="1143000"/>
+            <a:ext cx="11430000" cy="5212080"/>
+          </a:xfrm>
+          <a:prstGeom prst="rect">
+            <a:avLst/>
+          </a:prstGeom>
+          <a:noFill/>
+        </p:spPr>
+        <p:txBody>
+          <a:bodyPr wrap="square">
+            <a:spAutoFit/>
+          </a:bodyPr>
+          <a:lstStyle/>
+          <a:p>
+            <a:pPr>
+              <a:spcBef>
+                <a:spcPts val="500"/>
+              </a:spcBef>
+            </a:pPr>
+            <a:r>
+              <a:rPr sz="1500">
+                <a:solidFill>
+                  <a:srgbClr val="003DA5"/>
+                </a:solidFill>
+                <a:latin typeface="Arial"/>
+              </a:rPr>
+              <a:t>▪  </a:t>
+            </a:r>
+            <a:r>
+              <a:rPr sz="1700">
+                <a:solidFill>
+                  <a:srgbClr val="1A1A1A"/>
+                </a:solidFill>
+                <a:latin typeface="Arial"/>
+              </a:rPr>
+              <a:t>Hier entsteht langfristig die stärkste Wirkung: Steuerberater, Wirtschaftsprüfer, Rechtsanwälte, Unternehmensberater, Branchenverbände, Handwerkskammern, IHK-…</a:t>
+            </a:r>
+          </a:p>
+          <a:p>
+            <a:pPr>
+              <a:spcBef>
+                <a:spcPts val="500"/>
+              </a:spcBef>
+            </a:pPr>
+            <a:r>
+              <a:rPr sz="1500">
+                <a:solidFill>
+                  <a:srgbClr val="003DA5"/>
+                </a:solidFill>
+                <a:latin typeface="Arial"/>
+              </a:rPr>
+              <a:t>▪  </a:t>
+            </a:r>
+            <a:r>
+              <a:rPr sz="1700">
+                <a:solidFill>
+                  <a:srgbClr val="1A1A1A"/>
+                </a:solidFill>
+                <a:latin typeface="Arial"/>
+              </a:rPr>
+              <a:t>Cross &amp; Parker (2004): Formelle Netzwerke (Organigramme, Mitgliedschaften) sind sichtbar, aber oft weniger wirksam als informelle Netzwerke. Entscheidend ist,…</a:t>
             </a:r>
           </a:p>
         </p:txBody>
@@ -5072,8 +11125,8 @@
         </p:nvSpPr>
         <p:spPr>
           <a:xfrm>
-            <a:off x="365760" y="2286000"/>
-            <a:ext cx="11430000" cy="1828800"/>
+            <a:off x="365760" y="2011680"/>
+            <a:ext cx="11430000" cy="2011680"/>
           </a:xfrm>
           <a:prstGeom prst="rect">
             <a:avLst/>
@@ -5088,13 +11141,13 @@
           <a:p>
             <a:pPr algn="l"/>
             <a:r>
-              <a:rPr sz="3600" b="1">
+              <a:rPr sz="3600" b="1" i="0">
                 <a:solidFill>
                   <a:srgbClr val="FFFFFF"/>
                 </a:solidFill>
                 <a:latin typeface="Arial"/>
               </a:rPr>
-              <a:t>Format 3: Präsenz in Gremien und Verbänden</a:t>
+              <a:t>Das Netzwerk-Audit (3 Fragen)</a:t>
             </a:r>
           </a:p>
         </p:txBody>

--- a/public/downloads/praesentation/M20.pptx
+++ b/public/downloads/praesentation/M20.pptx
@@ -3457,7 +3457,7 @@
     <p:bg>
       <p:bgPr>
         <a:solidFill>
-          <a:srgbClr val="191D2E"/>
+          <a:srgbClr val="1F2B56"/>
         </a:solidFill>
         <a:effectLst/>
       </p:bgPr>
@@ -5035,7 +5035,7 @@
                   </a:txBody>
                   <a:tcPr>
                     <a:solidFill>
-                      <a:srgbClr val="191D2E"/>
+                      <a:srgbClr val="1F2B56"/>
                     </a:solidFill>
                   </a:tcPr>
                 </a:tc>
@@ -5057,7 +5057,7 @@
                   </a:txBody>
                   <a:tcPr>
                     <a:solidFill>
-                      <a:srgbClr val="191D2E"/>
+                      <a:srgbClr val="1F2B56"/>
                     </a:solidFill>
                   </a:tcPr>
                 </a:tc>
@@ -5079,7 +5079,7 @@
                   </a:txBody>
                   <a:tcPr>
                     <a:solidFill>
-                      <a:srgbClr val="191D2E"/>
+                      <a:srgbClr val="1F2B56"/>
                     </a:solidFill>
                   </a:tcPr>
                 </a:tc>
@@ -5101,7 +5101,7 @@
                   </a:txBody>
                   <a:tcPr>
                     <a:solidFill>
-                      <a:srgbClr val="191D2E"/>
+                      <a:srgbClr val="1F2B56"/>
                     </a:solidFill>
                   </a:tcPr>
                 </a:tc>
@@ -6458,7 +6458,7 @@
     <p:bg>
       <p:bgPr>
         <a:solidFill>
-          <a:srgbClr val="191D2E"/>
+          <a:srgbClr val="1F2B56"/>
         </a:solidFill>
         <a:effectLst/>
       </p:bgPr>
@@ -6659,7 +6659,7 @@
     <p:bg>
       <p:bgPr>
         <a:solidFill>
-          <a:srgbClr val="191D2E"/>
+          <a:srgbClr val="1F2B56"/>
         </a:solidFill>
         <a:effectLst/>
       </p:bgPr>
@@ -6860,7 +6860,7 @@
     <p:bg>
       <p:bgPr>
         <a:solidFill>
-          <a:srgbClr val="191D2E"/>
+          <a:srgbClr val="1F2B56"/>
         </a:solidFill>
         <a:effectLst/>
       </p:bgPr>
@@ -7370,7 +7370,7 @@
                   </a:txBody>
                   <a:tcPr>
                     <a:solidFill>
-                      <a:srgbClr val="191D2E"/>
+                      <a:srgbClr val="1F2B56"/>
                     </a:solidFill>
                   </a:tcPr>
                 </a:tc>
@@ -7392,7 +7392,7 @@
                   </a:txBody>
                   <a:tcPr>
                     <a:solidFill>
-                      <a:srgbClr val="191D2E"/>
+                      <a:srgbClr val="1F2B56"/>
                     </a:solidFill>
                   </a:tcPr>
                 </a:tc>
@@ -7414,7 +7414,7 @@
                   </a:txBody>
                   <a:tcPr>
                     <a:solidFill>
-                      <a:srgbClr val="191D2E"/>
+                      <a:srgbClr val="1F2B56"/>
                     </a:solidFill>
                   </a:tcPr>
                 </a:tc>
@@ -7436,7 +7436,7 @@
                   </a:txBody>
                   <a:tcPr>
                     <a:solidFill>
-                      <a:srgbClr val="191D2E"/>
+                      <a:srgbClr val="1F2B56"/>
                     </a:solidFill>
                   </a:tcPr>
                 </a:tc>
@@ -7458,7 +7458,7 @@
                   </a:txBody>
                   <a:tcPr>
                     <a:solidFill>
-                      <a:srgbClr val="191D2E"/>
+                      <a:srgbClr val="1F2B56"/>
                     </a:solidFill>
                   </a:tcPr>
                 </a:tc>
@@ -8613,7 +8613,7 @@
                   </a:txBody>
                   <a:tcPr>
                     <a:solidFill>
-                      <a:srgbClr val="191D2E"/>
+                      <a:srgbClr val="1F2B56"/>
                     </a:solidFill>
                   </a:tcPr>
                 </a:tc>
@@ -8635,7 +8635,7 @@
                   </a:txBody>
                   <a:tcPr>
                     <a:solidFill>
-                      <a:srgbClr val="191D2E"/>
+                      <a:srgbClr val="1F2B56"/>
                     </a:solidFill>
                   </a:tcPr>
                 </a:tc>
@@ -9088,29 +9088,29 @@
         </p:nvSpPr>
         <p:spPr>
           <a:xfrm>
-            <a:off x="4064000" y="927100"/>
-            <a:ext cx="508000" cy="647700"/>
-          </a:xfrm>
-          <a:prstGeom prst="rect">
-            <a:avLst/>
-          </a:prstGeom>
-          <a:noFill/>
-        </p:spPr>
-        <p:txBody>
-          <a:bodyPr wrap="square">
+            <a:off x="4064000" y="939799"/>
+            <a:ext cx="762000" cy="647700"/>
+          </a:xfrm>
+          <a:prstGeom prst="rect">
+            <a:avLst/>
+          </a:prstGeom>
+          <a:noFill/>
+        </p:spPr>
+        <p:txBody>
+          <a:bodyPr wrap="none">
             <a:normAutofit/>
           </a:bodyPr>
           <a:lstStyle/>
           <a:p>
             <a:pPr algn="l"/>
             <a:r>
-              <a:rPr sz="2600" b="0" i="1">
+              <a:rPr sz="2400" b="0" i="1">
                 <a:solidFill>
                   <a:srgbClr val="1F2B56"/>
                 </a:solidFill>
                 <a:latin typeface="Georgia"/>
               </a:rPr>
-              <a:t>I.</a:t>
+              <a:t>I</a:t>
             </a:r>
           </a:p>
         </p:txBody>
@@ -9123,8 +9123,8 @@
         </p:nvSpPr>
         <p:spPr>
           <a:xfrm>
-            <a:off x="4699000" y="952500"/>
-            <a:ext cx="6858000" cy="622300"/>
+            <a:off x="4953000" y="952500"/>
+            <a:ext cx="6629400" cy="635000"/>
           </a:xfrm>
           <a:prstGeom prst="rect">
             <a:avLst/>
@@ -9158,7 +9158,7 @@
         </p:nvSpPr>
         <p:spPr>
           <a:xfrm>
-            <a:off x="4064000" y="1574800"/>
+            <a:off x="4064000" y="1587500"/>
             <a:ext cx="7518399" cy="6350"/>
           </a:xfrm>
           <a:prstGeom prst="rect">
@@ -9201,29 +9201,29 @@
         </p:nvSpPr>
         <p:spPr>
           <a:xfrm>
-            <a:off x="4064000" y="1612900"/>
-            <a:ext cx="508000" cy="647700"/>
-          </a:xfrm>
-          <a:prstGeom prst="rect">
-            <a:avLst/>
-          </a:prstGeom>
-          <a:noFill/>
-        </p:spPr>
-        <p:txBody>
-          <a:bodyPr wrap="square">
+            <a:off x="4064000" y="1638300"/>
+            <a:ext cx="762000" cy="647700"/>
+          </a:xfrm>
+          <a:prstGeom prst="rect">
+            <a:avLst/>
+          </a:prstGeom>
+          <a:noFill/>
+        </p:spPr>
+        <p:txBody>
+          <a:bodyPr wrap="none">
             <a:normAutofit/>
           </a:bodyPr>
           <a:lstStyle/>
           <a:p>
             <a:pPr algn="l"/>
             <a:r>
-              <a:rPr sz="2600" b="0" i="1">
+              <a:rPr sz="2400" b="0" i="1">
                 <a:solidFill>
                   <a:srgbClr val="1F2B56"/>
                 </a:solidFill>
                 <a:latin typeface="Georgia"/>
               </a:rPr>
-              <a:t>II.</a:t>
+              <a:t>II</a:t>
             </a:r>
           </a:p>
         </p:txBody>
@@ -9236,8 +9236,8 @@
         </p:nvSpPr>
         <p:spPr>
           <a:xfrm>
-            <a:off x="4699000" y="1638300"/>
-            <a:ext cx="6858000" cy="622300"/>
+            <a:off x="4953000" y="1651000"/>
+            <a:ext cx="6629400" cy="635000"/>
           </a:xfrm>
           <a:prstGeom prst="rect">
             <a:avLst/>
@@ -9271,7 +9271,7 @@
         </p:nvSpPr>
         <p:spPr>
           <a:xfrm>
-            <a:off x="4064000" y="2260600"/>
+            <a:off x="4064000" y="2286000"/>
             <a:ext cx="7518399" cy="6350"/>
           </a:xfrm>
           <a:prstGeom prst="rect">
@@ -9314,29 +9314,29 @@
         </p:nvSpPr>
         <p:spPr>
           <a:xfrm>
-            <a:off x="4064000" y="2298700"/>
-            <a:ext cx="508000" cy="647700"/>
-          </a:xfrm>
-          <a:prstGeom prst="rect">
-            <a:avLst/>
-          </a:prstGeom>
-          <a:noFill/>
-        </p:spPr>
-        <p:txBody>
-          <a:bodyPr wrap="square">
+            <a:off x="4064000" y="2336800"/>
+            <a:ext cx="762000" cy="647700"/>
+          </a:xfrm>
+          <a:prstGeom prst="rect">
+            <a:avLst/>
+          </a:prstGeom>
+          <a:noFill/>
+        </p:spPr>
+        <p:txBody>
+          <a:bodyPr wrap="none">
             <a:normAutofit/>
           </a:bodyPr>
           <a:lstStyle/>
           <a:p>
             <a:pPr algn="l"/>
             <a:r>
-              <a:rPr sz="2600" b="0" i="1">
+              <a:rPr sz="2400" b="0" i="1">
                 <a:solidFill>
                   <a:srgbClr val="1F2B56"/>
                 </a:solidFill>
                 <a:latin typeface="Georgia"/>
               </a:rPr>
-              <a:t>III.</a:t>
+              <a:t>III</a:t>
             </a:r>
           </a:p>
         </p:txBody>
@@ -9349,8 +9349,8 @@
         </p:nvSpPr>
         <p:spPr>
           <a:xfrm>
-            <a:off x="4699000" y="2324100"/>
-            <a:ext cx="6858000" cy="622300"/>
+            <a:off x="4953000" y="2349500"/>
+            <a:ext cx="6629400" cy="635000"/>
           </a:xfrm>
           <a:prstGeom prst="rect">
             <a:avLst/>
@@ -9384,7 +9384,7 @@
         </p:nvSpPr>
         <p:spPr>
           <a:xfrm>
-            <a:off x="4064000" y="2946400"/>
+            <a:off x="4064000" y="2984500"/>
             <a:ext cx="7518399" cy="6350"/>
           </a:xfrm>
           <a:prstGeom prst="rect">
@@ -9427,29 +9427,29 @@
         </p:nvSpPr>
         <p:spPr>
           <a:xfrm>
-            <a:off x="4064000" y="2984500"/>
-            <a:ext cx="508000" cy="647700"/>
-          </a:xfrm>
-          <a:prstGeom prst="rect">
-            <a:avLst/>
-          </a:prstGeom>
-          <a:noFill/>
-        </p:spPr>
-        <p:txBody>
-          <a:bodyPr wrap="square">
+            <a:off x="4064000" y="3035300"/>
+            <a:ext cx="762000" cy="647700"/>
+          </a:xfrm>
+          <a:prstGeom prst="rect">
+            <a:avLst/>
+          </a:prstGeom>
+          <a:noFill/>
+        </p:spPr>
+        <p:txBody>
+          <a:bodyPr wrap="none">
             <a:normAutofit/>
           </a:bodyPr>
           <a:lstStyle/>
           <a:p>
             <a:pPr algn="l"/>
             <a:r>
-              <a:rPr sz="2600" b="0" i="1">
+              <a:rPr sz="2400" b="0" i="1">
                 <a:solidFill>
                   <a:srgbClr val="1F2B56"/>
                 </a:solidFill>
                 <a:latin typeface="Georgia"/>
               </a:rPr>
-              <a:t>IV.</a:t>
+              <a:t>IV</a:t>
             </a:r>
           </a:p>
         </p:txBody>
@@ -9462,8 +9462,8 @@
         </p:nvSpPr>
         <p:spPr>
           <a:xfrm>
-            <a:off x="4699000" y="3009900"/>
-            <a:ext cx="6858000" cy="622300"/>
+            <a:off x="4953000" y="3048000"/>
+            <a:ext cx="6629400" cy="635000"/>
           </a:xfrm>
           <a:prstGeom prst="rect">
             <a:avLst/>
@@ -9497,7 +9497,7 @@
         </p:nvSpPr>
         <p:spPr>
           <a:xfrm>
-            <a:off x="4064000" y="3632200"/>
+            <a:off x="4064000" y="3683000"/>
             <a:ext cx="7518399" cy="6350"/>
           </a:xfrm>
           <a:prstGeom prst="rect">
@@ -9540,29 +9540,29 @@
         </p:nvSpPr>
         <p:spPr>
           <a:xfrm>
-            <a:off x="4064000" y="3670300"/>
-            <a:ext cx="508000" cy="647700"/>
-          </a:xfrm>
-          <a:prstGeom prst="rect">
-            <a:avLst/>
-          </a:prstGeom>
-          <a:noFill/>
-        </p:spPr>
-        <p:txBody>
-          <a:bodyPr wrap="square">
+            <a:off x="4064000" y="3733799"/>
+            <a:ext cx="762000" cy="647700"/>
+          </a:xfrm>
+          <a:prstGeom prst="rect">
+            <a:avLst/>
+          </a:prstGeom>
+          <a:noFill/>
+        </p:spPr>
+        <p:txBody>
+          <a:bodyPr wrap="none">
             <a:normAutofit/>
           </a:bodyPr>
           <a:lstStyle/>
           <a:p>
             <a:pPr algn="l"/>
             <a:r>
-              <a:rPr sz="2600" b="0" i="1">
+              <a:rPr sz="2400" b="0" i="1">
                 <a:solidFill>
                   <a:srgbClr val="1F2B56"/>
                 </a:solidFill>
                 <a:latin typeface="Georgia"/>
               </a:rPr>
-              <a:t>V.</a:t>
+              <a:t>V</a:t>
             </a:r>
           </a:p>
         </p:txBody>
@@ -9575,8 +9575,8 @@
         </p:nvSpPr>
         <p:spPr>
           <a:xfrm>
-            <a:off x="4699000" y="3695700"/>
-            <a:ext cx="6858000" cy="622300"/>
+            <a:off x="4953000" y="3746500"/>
+            <a:ext cx="6629400" cy="635000"/>
           </a:xfrm>
           <a:prstGeom prst="rect">
             <a:avLst/>
@@ -9890,7 +9890,7 @@
                   </a:txBody>
                   <a:tcPr>
                     <a:solidFill>
-                      <a:srgbClr val="191D2E"/>
+                      <a:srgbClr val="1F2B56"/>
                     </a:solidFill>
                   </a:tcPr>
                 </a:tc>
@@ -9912,7 +9912,7 @@
                   </a:txBody>
                   <a:tcPr>
                     <a:solidFill>
-                      <a:srgbClr val="191D2E"/>
+                      <a:srgbClr val="1F2B56"/>
                     </a:solidFill>
                   </a:tcPr>
                 </a:tc>
@@ -9934,7 +9934,7 @@
                   </a:txBody>
                   <a:tcPr>
                     <a:solidFill>
-                      <a:srgbClr val="191D2E"/>
+                      <a:srgbClr val="1F2B56"/>
                     </a:solidFill>
                   </a:tcPr>
                 </a:tc>
@@ -9956,7 +9956,7 @@
                   </a:txBody>
                   <a:tcPr>
                     <a:solidFill>
-                      <a:srgbClr val="191D2E"/>
+                      <a:srgbClr val="1F2B56"/>
                     </a:solidFill>
                   </a:tcPr>
                 </a:tc>
@@ -9978,7 +9978,7 @@
                   </a:txBody>
                   <a:tcPr>
                     <a:solidFill>
-                      <a:srgbClr val="191D2E"/>
+                      <a:srgbClr val="1F2B56"/>
                     </a:solidFill>
                   </a:tcPr>
                 </a:tc>
@@ -10449,7 +10449,7 @@
     <p:bg>
       <p:bgPr>
         <a:solidFill>
-          <a:srgbClr val="191D2E"/>
+          <a:srgbClr val="1F2B56"/>
         </a:solidFill>
         <a:effectLst/>
       </p:bgPr>
@@ -10650,7 +10650,7 @@
     <p:bg>
       <p:bgPr>
         <a:solidFill>
-          <a:srgbClr val="191D2E"/>
+          <a:srgbClr val="1F2B56"/>
         </a:solidFill>
         <a:effectLst/>
       </p:bgPr>
@@ -10851,7 +10851,7 @@
     <p:bg>
       <p:bgPr>
         <a:solidFill>
-          <a:srgbClr val="191D2E"/>
+          <a:srgbClr val="1F2B56"/>
         </a:solidFill>
         <a:effectLst/>
       </p:bgPr>
@@ -11052,7 +11052,7 @@
     <p:bg>
       <p:bgPr>
         <a:solidFill>
-          <a:srgbClr val="191D2E"/>
+          <a:srgbClr val="1F2B56"/>
         </a:solidFill>
         <a:effectLst/>
       </p:bgPr>
@@ -11603,7 +11603,7 @@
     <p:bg>
       <p:bgPr>
         <a:solidFill>
-          <a:srgbClr val="191D2E"/>
+          <a:srgbClr val="1F2B56"/>
         </a:solidFill>
         <a:effectLst/>
       </p:bgPr>
@@ -11804,7 +11804,7 @@
     <p:bg>
       <p:bgPr>
         <a:solidFill>
-          <a:srgbClr val="191D2E"/>
+          <a:srgbClr val="1F2B56"/>
         </a:solidFill>
         <a:effectLst/>
       </p:bgPr>
@@ -13700,7 +13700,7 @@
     <p:bg>
       <p:bgPr>
         <a:solidFill>
-          <a:srgbClr val="191D2E"/>
+          <a:srgbClr val="1F2B56"/>
         </a:solidFill>
         <a:effectLst/>
       </p:bgPr>
@@ -14209,7 +14209,7 @@
                   </a:txBody>
                   <a:tcPr>
                     <a:solidFill>
-                      <a:srgbClr val="191D2E"/>
+                      <a:srgbClr val="1F2B56"/>
                     </a:solidFill>
                   </a:tcPr>
                 </a:tc>
@@ -14231,7 +14231,7 @@
                   </a:txBody>
                   <a:tcPr>
                     <a:solidFill>
-                      <a:srgbClr val="191D2E"/>
+                      <a:srgbClr val="1F2B56"/>
                     </a:solidFill>
                   </a:tcPr>
                 </a:tc>
@@ -14253,7 +14253,7 @@
                   </a:txBody>
                   <a:tcPr>
                     <a:solidFill>
-                      <a:srgbClr val="191D2E"/>
+                      <a:srgbClr val="1F2B56"/>
                     </a:solidFill>
                   </a:tcPr>
                 </a:tc>
@@ -14275,7 +14275,7 @@
                   </a:txBody>
                   <a:tcPr>
                     <a:solidFill>
-                      <a:srgbClr val="191D2E"/>
+                      <a:srgbClr val="1F2B56"/>
                     </a:solidFill>
                   </a:tcPr>
                 </a:tc>

--- a/public/downloads/praesentation/M20.pptx
+++ b/public/downloads/praesentation/M20.pptx
@@ -16,8 +16,11 @@
     <p:sldId id="264" r:id="rId15"/>
     <p:sldId id="265" r:id="rId16"/>
     <p:sldId id="266" r:id="rId17"/>
+    <p:sldId id="267" r:id="rId18"/>
+    <p:sldId id="268" r:id="rId19"/>
+    <p:sldId id="269" r:id="rId20"/>
   </p:sldIdLst>
-  <p:sldSz cx="12191695" cy="6858000" type="screen4x3"/>
+  <p:sldSz cx="12188952" cy="6858000" type="screen4x3"/>
   <p:notesSz cx="6858000" cy="9144000"/>
   <p:defaultTextStyle>
     <a:defPPr>
@@ -3091,14 +3094,6 @@
 <file path=ppt/slides/slide1.xml><?xml version="1.0" encoding="utf-8"?>
 <p:sld xmlns:a="http://schemas.openxmlformats.org/drawingml/2006/main" xmlns:p="http://schemas.openxmlformats.org/presentationml/2006/main" xmlns:r="http://schemas.openxmlformats.org/officeDocument/2006/relationships">
   <p:cSld>
-    <p:bg>
-      <p:bgPr>
-        <a:solidFill>
-          <a:srgbClr val="F8F8FA"/>
-        </a:solidFill>
-        <a:effectLst/>
-      </p:bgPr>
-    </p:bg>
     <p:spTree>
       <p:nvGrpSpPr>
         <p:cNvPr id="1" name=""/>
@@ -3108,125 +3103,20 @@
       <p:grpSpPr/>
       <p:sp>
         <p:nvSpPr>
-          <p:cNvPr id="2" name="TextBox 1"/>
-          <p:cNvSpPr txBox="1"/>
-          <p:nvPr/>
-        </p:nvSpPr>
-        <p:spPr>
-          <a:xfrm>
-            <a:off x="609600" y="304800"/>
-            <a:ext cx="3175000" cy="279400"/>
-          </a:xfrm>
-          <a:prstGeom prst="rect">
-            <a:avLst/>
-          </a:prstGeom>
-          <a:noFill/>
-        </p:spPr>
-        <p:txBody>
-          <a:bodyPr wrap="square">
-            <a:normAutofit/>
-          </a:bodyPr>
-          <a:lstStyle/>
-          <a:p>
-            <a:pPr algn="l"/>
-            <a:r>
-              <a:rPr sz="1000" b="1" i="0">
-                <a:solidFill>
-                  <a:srgbClr val="191D2E"/>
-                </a:solidFill>
-                <a:latin typeface="Arial"/>
-              </a:rPr>
-              <a:t>FKB  Campus</a:t>
-            </a:r>
-          </a:p>
-        </p:txBody>
-      </p:sp>
-      <p:sp>
-        <p:nvSpPr>
-          <p:cNvPr id="3" name="TextBox 2"/>
-          <p:cNvSpPr txBox="1"/>
-          <p:nvPr/>
-        </p:nvSpPr>
-        <p:spPr>
-          <a:xfrm>
-            <a:off x="609600" y="304800"/>
-            <a:ext cx="10972800" cy="279400"/>
-          </a:xfrm>
-          <a:prstGeom prst="rect">
-            <a:avLst/>
-          </a:prstGeom>
-          <a:noFill/>
-        </p:spPr>
-        <p:txBody>
-          <a:bodyPr wrap="square">
-            <a:normAutofit/>
-          </a:bodyPr>
-          <a:lstStyle/>
-          <a:p>
-            <a:pPr algn="r"/>
-            <a:r>
-              <a:rPr sz="900" b="0" i="0">
-                <a:solidFill>
-                  <a:srgbClr val="7B7FA0"/>
-                </a:solidFill>
-                <a:latin typeface="Courier New"/>
-              </a:rPr>
-              <a:t>M20  ·  v0.4</a:t>
-            </a:r>
-          </a:p>
-        </p:txBody>
-      </p:sp>
-      <p:sp>
-        <p:nvSpPr>
-          <p:cNvPr id="4" name="TextBox 3"/>
-          <p:cNvSpPr txBox="1"/>
-          <p:nvPr/>
-        </p:nvSpPr>
-        <p:spPr>
-          <a:xfrm>
-            <a:off x="609600" y="2794000"/>
-            <a:ext cx="10972800" cy="2032000"/>
-          </a:xfrm>
-          <a:prstGeom prst="rect">
-            <a:avLst/>
-          </a:prstGeom>
-          <a:noFill/>
-        </p:spPr>
-        <p:txBody>
-          <a:bodyPr wrap="square">
-            <a:normAutofit/>
-          </a:bodyPr>
-          <a:lstStyle/>
-          <a:p>
-            <a:pPr algn="l"/>
-            <a:r>
-              <a:rPr sz="6000" b="0" i="0">
-                <a:solidFill>
-                  <a:srgbClr val="191D2E"/>
-                </a:solidFill>
-                <a:latin typeface="Georgia"/>
-              </a:rPr>
-              <a:t>Netzwerk &amp; Sichtbarkeit</a:t>
-            </a:r>
-          </a:p>
-        </p:txBody>
-      </p:sp>
-      <p:sp>
-        <p:nvSpPr>
-          <p:cNvPr id="5" name="Rectangle 4"/>
+          <p:cNvPr id="2" name="Rectangle 1"/>
           <p:cNvSpPr/>
           <p:nvPr/>
         </p:nvSpPr>
         <p:spPr>
           <a:xfrm>
-            <a:off x="609600" y="4889500"/>
-            <a:ext cx="10972800" cy="6350"/>
+            <a:off x="0" y="0"/>
+            <a:ext cx="12188952" cy="6858000"/>
           </a:xfrm>
           <a:prstGeom prst="rect">
             <a:avLst/>
           </a:prstGeom>
           <a:solidFill>
-            <a:srgbClr val="191D2E"/>
+            <a:srgbClr val="1F2C56"/>
           </a:solidFill>
           <a:ln>
             <a:noFill/>
@@ -3256,14 +3146,57 @@
       </p:sp>
       <p:sp>
         <p:nvSpPr>
-          <p:cNvPr id="6" name="TextBox 5"/>
+          <p:cNvPr id="3" name="Rectangle 2"/>
+          <p:cNvSpPr/>
+          <p:nvPr/>
+        </p:nvSpPr>
+        <p:spPr>
+          <a:xfrm>
+            <a:off x="0" y="0"/>
+            <a:ext cx="12188952" cy="54864"/>
+          </a:xfrm>
+          <a:prstGeom prst="rect">
+            <a:avLst/>
+          </a:prstGeom>
+          <a:solidFill>
+            <a:srgbClr val="D9C089"/>
+          </a:solidFill>
+          <a:ln>
+            <a:noFill/>
+          </a:ln>
+        </p:spPr>
+        <p:style>
+          <a:lnRef idx="1">
+            <a:schemeClr val="accent1"/>
+          </a:lnRef>
+          <a:fillRef idx="3">
+            <a:schemeClr val="accent1"/>
+          </a:fillRef>
+          <a:effectRef idx="2">
+            <a:schemeClr val="accent1"/>
+          </a:effectRef>
+          <a:fontRef idx="minor">
+            <a:schemeClr val="lt1"/>
+          </a:fontRef>
+        </p:style>
+        <p:txBody>
+          <a:bodyPr rtlCol="0" anchor="ctr"/>
+          <a:lstStyle/>
+          <a:p>
+            <a:pPr algn="ctr"/>
+          </a:p>
+        </p:txBody>
+      </p:sp>
+      <p:sp>
+        <p:nvSpPr>
+          <p:cNvPr id="4" name="TextBox 3"/>
           <p:cNvSpPr txBox="1"/>
           <p:nvPr/>
         </p:nvSpPr>
         <p:spPr>
           <a:xfrm>
-            <a:off x="609600" y="5016500"/>
-            <a:ext cx="5207000" cy="1143000"/>
+            <a:off x="685800" y="201168"/>
+            <a:ext cx="10817352" cy="256032"/>
           </a:xfrm>
           <a:prstGeom prst="rect">
             <a:avLst/>
@@ -3271,21 +3204,99 @@
           <a:noFill/>
         </p:spPr>
         <p:txBody>
+          <a:bodyPr wrap="none">
+            <a:spAutoFit/>
+          </a:bodyPr>
+          <a:lstStyle/>
+          <a:p>
+            <a:pPr algn="l"/>
+            <a:r>
+              <a:rPr sz="800">
+                <a:solidFill>
+                  <a:srgbClr val="C8D2E6"/>
+                </a:solidFill>
+                <a:latin typeface="JetBrains Mono"/>
+              </a:rPr>
+              <a:t>FKB CAMPUS  ·  FIRMENKUNDENAKADEMIE  ·  M20</a:t>
+            </a:r>
+          </a:p>
+        </p:txBody>
+      </p:sp>
+      <p:sp>
+        <p:nvSpPr>
+          <p:cNvPr id="5" name="TextBox 4"/>
+          <p:cNvSpPr txBox="1"/>
+          <p:nvPr/>
+        </p:nvSpPr>
+        <p:spPr>
+          <a:xfrm>
+            <a:off x="685800" y="1828800"/>
+            <a:ext cx="10817352" cy="2011680"/>
+          </a:xfrm>
+          <a:prstGeom prst="rect">
+            <a:avLst/>
+          </a:prstGeom>
+          <a:noFill/>
+        </p:spPr>
+        <p:txBody>
           <a:bodyPr wrap="square">
-            <a:normAutofit/>
+            <a:spAutoFit/>
           </a:bodyPr>
           <a:lstStyle/>
           <a:p>
             <a:pPr algn="l"/>
             <a:r>
-              <a:rPr sz="1400" b="0" i="1">
-                <a:solidFill>
-                  <a:srgbClr val="4D5270"/>
-                </a:solidFill>
-                <a:latin typeface="Georgia"/>
-              </a:rPr>
-              <a:t>Strategisches Beziehungskapital aufbauen und Fachexpertise im Markt positionieren</a:t>
-            </a:r>
+              <a:rPr sz="4600" b="1" i="0">
+                <a:solidFill>
+                  <a:srgbClr val="FFFFFF"/>
+                </a:solidFill>
+                <a:latin typeface="Source Serif 4"/>
+              </a:rPr>
+              <a:t>Netzwerk &amp; Sichtbarkeit</a:t>
+            </a:r>
+          </a:p>
+        </p:txBody>
+      </p:sp>
+      <p:sp>
+        <p:nvSpPr>
+          <p:cNvPr id="6" name="Rectangle 5"/>
+          <p:cNvSpPr/>
+          <p:nvPr/>
+        </p:nvSpPr>
+        <p:spPr>
+          <a:xfrm>
+            <a:off x="685800" y="5029200"/>
+            <a:ext cx="10817352" cy="12700"/>
+          </a:xfrm>
+          <a:prstGeom prst="rect">
+            <a:avLst/>
+          </a:prstGeom>
+          <a:solidFill>
+            <a:srgbClr val="FFFFFF"/>
+          </a:solidFill>
+          <a:ln>
+            <a:noFill/>
+          </a:ln>
+        </p:spPr>
+        <p:style>
+          <a:lnRef idx="1">
+            <a:schemeClr val="accent1"/>
+          </a:lnRef>
+          <a:fillRef idx="3">
+            <a:schemeClr val="accent1"/>
+          </a:fillRef>
+          <a:effectRef idx="2">
+            <a:schemeClr val="accent1"/>
+          </a:effectRef>
+          <a:fontRef idx="minor">
+            <a:schemeClr val="lt1"/>
+          </a:fontRef>
+        </p:style>
+        <p:txBody>
+          <a:bodyPr rtlCol="0" anchor="ctr"/>
+          <a:lstStyle/>
+          <a:p>
+            <a:pPr algn="ctr"/>
           </a:p>
         </p:txBody>
       </p:sp>
@@ -3297,8 +3308,8 @@
         </p:nvSpPr>
         <p:spPr>
           <a:xfrm>
-            <a:off x="6032500" y="5016500"/>
-            <a:ext cx="2540000" cy="177800"/>
+            <a:off x="685800" y="5193792"/>
+            <a:ext cx="5408676" cy="201168"/>
           </a:xfrm>
           <a:prstGeom prst="rect">
             <a:avLst/>
@@ -3306,20 +3317,20 @@
           <a:noFill/>
         </p:spPr>
         <p:txBody>
-          <a:bodyPr wrap="square">
-            <a:normAutofit/>
+          <a:bodyPr wrap="none">
+            <a:spAutoFit/>
           </a:bodyPr>
           <a:lstStyle/>
           <a:p>
             <a:pPr algn="l"/>
             <a:r>
-              <a:rPr sz="900" b="0" i="0">
-                <a:solidFill>
-                  <a:srgbClr val="7B7FA0"/>
-                </a:solidFill>
-                <a:latin typeface="Courier New"/>
-              </a:rPr>
-              <a:t>ZIELSTUFE</a:t>
+              <a:rPr sz="700">
+                <a:solidFill>
+                  <a:srgbClr val="A0B4D2"/>
+                </a:solidFill>
+                <a:latin typeface="JetBrains Mono"/>
+              </a:rPr>
+              <a:t>KOMPETENZSTUFE</a:t>
             </a:r>
           </a:p>
         </p:txBody>
@@ -3332,8 +3343,8 @@
         </p:nvSpPr>
         <p:spPr>
           <a:xfrm>
-            <a:off x="6032500" y="5207000"/>
-            <a:ext cx="2540000" cy="508000"/>
+            <a:off x="685800" y="5394960"/>
+            <a:ext cx="5408676" cy="320040"/>
           </a:xfrm>
           <a:prstGeom prst="rect">
             <a:avLst/>
@@ -3342,17 +3353,17 @@
         </p:spPr>
         <p:txBody>
           <a:bodyPr wrap="square">
-            <a:normAutofit/>
+            <a:spAutoFit/>
           </a:bodyPr>
           <a:lstStyle/>
           <a:p>
             <a:pPr algn="l"/>
             <a:r>
-              <a:rPr sz="1400" b="0" i="0">
-                <a:solidFill>
-                  <a:srgbClr val="191D2E"/>
-                </a:solidFill>
-                <a:latin typeface="Georgia"/>
+              <a:rPr sz="1100" b="0" i="0">
+                <a:solidFill>
+                  <a:srgbClr val="FFFFFF"/>
+                </a:solidFill>
+                <a:latin typeface="Arial"/>
               </a:rPr>
               <a:t>Stratege</a:t>
             </a:r>
@@ -3367,8 +3378,8 @@
         </p:nvSpPr>
         <p:spPr>
           <a:xfrm>
-            <a:off x="8890000" y="5016500"/>
-            <a:ext cx="2667000" cy="177800"/>
+            <a:off x="6094476" y="5193792"/>
+            <a:ext cx="5408676" cy="201168"/>
           </a:xfrm>
           <a:prstGeom prst="rect">
             <a:avLst/>
@@ -3376,20 +3387,20 @@
           <a:noFill/>
         </p:spPr>
         <p:txBody>
-          <a:bodyPr wrap="square">
-            <a:normAutofit/>
+          <a:bodyPr wrap="none">
+            <a:spAutoFit/>
           </a:bodyPr>
           <a:lstStyle/>
           <a:p>
             <a:pPr algn="l"/>
             <a:r>
-              <a:rPr sz="900" b="0" i="0">
-                <a:solidFill>
-                  <a:srgbClr val="7B7FA0"/>
-                </a:solidFill>
-                <a:latin typeface="Courier New"/>
-              </a:rPr>
-              <a:t>DAUER</a:t>
+              <a:rPr sz="700">
+                <a:solidFill>
+                  <a:srgbClr val="A0B4D2"/>
+                </a:solidFill>
+                <a:latin typeface="JetBrains Mono"/>
+              </a:rPr>
+              <a:t>VERSION</a:t>
             </a:r>
           </a:p>
         </p:txBody>
@@ -3402,8 +3413,8 @@
         </p:nvSpPr>
         <p:spPr>
           <a:xfrm>
-            <a:off x="8890000" y="5207000"/>
-            <a:ext cx="2667000" cy="508000"/>
+            <a:off x="6094476" y="5394960"/>
+            <a:ext cx="5408676" cy="320040"/>
           </a:xfrm>
           <a:prstGeom prst="rect">
             <a:avLst/>
@@ -3412,19 +3423,132 @@
         </p:spPr>
         <p:txBody>
           <a:bodyPr wrap="square">
-            <a:normAutofit/>
+            <a:spAutoFit/>
           </a:bodyPr>
           <a:lstStyle/>
           <a:p>
             <a:pPr algn="l"/>
             <a:r>
-              <a:rPr sz="1400" b="0" i="0">
-                <a:solidFill>
-                  <a:srgbClr val="191D2E"/>
-                </a:solidFill>
-                <a:latin typeface="Georgia"/>
-              </a:rPr>
-              <a:t>90 Min.</a:t>
+              <a:rPr sz="1100" b="0" i="0">
+                <a:solidFill>
+                  <a:srgbClr val="FFFFFF"/>
+                </a:solidFill>
+                <a:latin typeface="Arial"/>
+              </a:rPr>
+              <a:t>v0.4</a:t>
+            </a:r>
+          </a:p>
+        </p:txBody>
+      </p:sp>
+      <p:sp>
+        <p:nvSpPr>
+          <p:cNvPr id="11" name="Rectangle 10"/>
+          <p:cNvSpPr/>
+          <p:nvPr/>
+        </p:nvSpPr>
+        <p:spPr>
+          <a:xfrm>
+            <a:off x="0" y="6510528"/>
+            <a:ext cx="12188952" cy="347472"/>
+          </a:xfrm>
+          <a:prstGeom prst="rect">
+            <a:avLst/>
+          </a:prstGeom>
+          <a:solidFill>
+            <a:srgbClr val="0A1937"/>
+          </a:solidFill>
+          <a:ln>
+            <a:noFill/>
+          </a:ln>
+        </p:spPr>
+        <p:style>
+          <a:lnRef idx="1">
+            <a:schemeClr val="accent1"/>
+          </a:lnRef>
+          <a:fillRef idx="3">
+            <a:schemeClr val="accent1"/>
+          </a:fillRef>
+          <a:effectRef idx="2">
+            <a:schemeClr val="accent1"/>
+          </a:effectRef>
+          <a:fontRef idx="minor">
+            <a:schemeClr val="lt1"/>
+          </a:fontRef>
+        </p:style>
+        <p:txBody>
+          <a:bodyPr rtlCol="0" anchor="ctr"/>
+          <a:lstStyle/>
+          <a:p>
+            <a:pPr algn="ctr"/>
+          </a:p>
+        </p:txBody>
+      </p:sp>
+      <p:sp>
+        <p:nvSpPr>
+          <p:cNvPr id="12" name="TextBox 11"/>
+          <p:cNvSpPr txBox="1"/>
+          <p:nvPr/>
+        </p:nvSpPr>
+        <p:spPr>
+          <a:xfrm>
+            <a:off x="685800" y="6583680"/>
+            <a:ext cx="5408676" cy="256032"/>
+          </a:xfrm>
+          <a:prstGeom prst="rect">
+            <a:avLst/>
+          </a:prstGeom>
+          <a:noFill/>
+        </p:spPr>
+        <p:txBody>
+          <a:bodyPr wrap="none">
+            <a:spAutoFit/>
+          </a:bodyPr>
+          <a:lstStyle/>
+          <a:p>
+            <a:pPr algn="l"/>
+            <a:r>
+              <a:rPr sz="700">
+                <a:solidFill>
+                  <a:srgbClr val="96A5BE"/>
+                </a:solidFill>
+                <a:latin typeface="JetBrains Mono"/>
+              </a:rPr>
+              <a:t>Benedikt Zoller Coaching  ·  FKB Campus  ·  2026</a:t>
+            </a:r>
+          </a:p>
+        </p:txBody>
+      </p:sp>
+      <p:sp>
+        <p:nvSpPr>
+          <p:cNvPr id="13" name="TextBox 12"/>
+          <p:cNvSpPr txBox="1"/>
+          <p:nvPr/>
+        </p:nvSpPr>
+        <p:spPr>
+          <a:xfrm>
+            <a:off x="6094476" y="6583680"/>
+            <a:ext cx="5408676" cy="256032"/>
+          </a:xfrm>
+          <a:prstGeom prst="rect">
+            <a:avLst/>
+          </a:prstGeom>
+          <a:noFill/>
+        </p:spPr>
+        <p:txBody>
+          <a:bodyPr wrap="none">
+            <a:spAutoFit/>
+          </a:bodyPr>
+          <a:lstStyle/>
+          <a:p>
+            <a:pPr algn="r"/>
+            <a:r>
+              <a:rPr sz="700">
+                <a:solidFill>
+                  <a:srgbClr val="96A5BE"/>
+                </a:solidFill>
+                <a:latin typeface="JetBrains Mono"/>
+              </a:rPr>
+              <a:t>Trainer-Präsentation</a:t>
             </a:r>
           </a:p>
         </p:txBody>
@@ -3440,14 +3564,6 @@
 <file path=ppt/slides/slide10.xml><?xml version="1.0" encoding="utf-8"?>
 <p:sld xmlns:a="http://schemas.openxmlformats.org/drawingml/2006/main" xmlns:p="http://schemas.openxmlformats.org/presentationml/2006/main" xmlns:r="http://schemas.openxmlformats.org/officeDocument/2006/relationships">
   <p:cSld>
-    <p:bg>
-      <p:bgPr>
-        <a:solidFill>
-          <a:srgbClr val="1F2B56"/>
-        </a:solidFill>
-        <a:effectLst/>
-      </p:bgPr>
-    </p:bg>
     <p:spTree>
       <p:nvGrpSpPr>
         <p:cNvPr id="1" name=""/>
@@ -3457,195 +3573,20 @@
       <p:grpSpPr/>
       <p:sp>
         <p:nvSpPr>
-          <p:cNvPr id="2" name="TextBox 1"/>
-          <p:cNvSpPr txBox="1"/>
-          <p:nvPr/>
-        </p:nvSpPr>
-        <p:spPr>
-          <a:xfrm>
-            <a:off x="609600" y="279400"/>
-            <a:ext cx="2540000" cy="279400"/>
-          </a:xfrm>
-          <a:prstGeom prst="rect">
-            <a:avLst/>
-          </a:prstGeom>
-          <a:noFill/>
-        </p:spPr>
-        <p:txBody>
-          <a:bodyPr wrap="square">
-            <a:normAutofit/>
-          </a:bodyPr>
-          <a:lstStyle/>
-          <a:p>
-            <a:pPr algn="l"/>
-            <a:r>
-              <a:rPr sz="1000" b="1" i="0">
-                <a:solidFill>
-                  <a:srgbClr val="F8F8FA"/>
-                </a:solidFill>
-                <a:latin typeface="Arial"/>
-              </a:rPr>
-              <a:t>FKB  Campus</a:t>
-            </a:r>
-          </a:p>
-        </p:txBody>
-      </p:sp>
-      <p:sp>
-        <p:nvSpPr>
-          <p:cNvPr id="3" name="TextBox 2"/>
-          <p:cNvSpPr txBox="1"/>
-          <p:nvPr/>
-        </p:nvSpPr>
-        <p:spPr>
-          <a:xfrm>
-            <a:off x="609600" y="279400"/>
-            <a:ext cx="10972800" cy="279400"/>
-          </a:xfrm>
-          <a:prstGeom prst="rect">
-            <a:avLst/>
-          </a:prstGeom>
-          <a:noFill/>
-        </p:spPr>
-        <p:txBody>
-          <a:bodyPr wrap="square">
-            <a:normAutofit/>
-          </a:bodyPr>
-          <a:lstStyle/>
-          <a:p>
-            <a:pPr algn="r"/>
-            <a:r>
-              <a:rPr sz="900" b="0" i="0">
-                <a:solidFill>
-                  <a:srgbClr val="7B7FA0"/>
-                </a:solidFill>
-                <a:latin typeface="Courier New"/>
-              </a:rPr>
-              <a:t>QUELLENAPPARAT</a:t>
-            </a:r>
-          </a:p>
-        </p:txBody>
-      </p:sp>
-      <p:sp>
-        <p:nvSpPr>
-          <p:cNvPr id="4" name="TextBox 3"/>
-          <p:cNvSpPr txBox="1"/>
-          <p:nvPr/>
-        </p:nvSpPr>
-        <p:spPr>
-          <a:xfrm>
-            <a:off x="609600" y="6426200"/>
-            <a:ext cx="10972800" cy="228600"/>
-          </a:xfrm>
-          <a:prstGeom prst="rect">
-            <a:avLst/>
-          </a:prstGeom>
-          <a:noFill/>
-        </p:spPr>
-        <p:txBody>
-          <a:bodyPr wrap="square">
-            <a:normAutofit/>
-          </a:bodyPr>
-          <a:lstStyle/>
-          <a:p>
-            <a:pPr algn="r"/>
-            <a:r>
-              <a:rPr sz="900" b="0" i="0">
-                <a:solidFill>
-                  <a:srgbClr val="7B7FA0"/>
-                </a:solidFill>
-                <a:latin typeface="Courier New"/>
-              </a:rPr>
-              <a:t>10</a:t>
-            </a:r>
-          </a:p>
-        </p:txBody>
-      </p:sp>
-      <p:sp>
-        <p:nvSpPr>
-          <p:cNvPr id="5" name="TextBox 4"/>
-          <p:cNvSpPr txBox="1"/>
-          <p:nvPr/>
-        </p:nvSpPr>
-        <p:spPr>
-          <a:xfrm>
-            <a:off x="609600" y="863600"/>
-            <a:ext cx="5080000" cy="203200"/>
-          </a:xfrm>
-          <a:prstGeom prst="rect">
-            <a:avLst/>
-          </a:prstGeom>
-          <a:noFill/>
-        </p:spPr>
-        <p:txBody>
-          <a:bodyPr wrap="square">
-            <a:normAutofit/>
-          </a:bodyPr>
-          <a:lstStyle/>
-          <a:p>
-            <a:pPr algn="l"/>
-            <a:r>
-              <a:rPr sz="900" b="0" i="0">
-                <a:solidFill>
-                  <a:srgbClr val="A0AACC"/>
-                </a:solidFill>
-                <a:latin typeface="Courier New"/>
-              </a:rPr>
-              <a:t>Quellenapparat</a:t>
-            </a:r>
-          </a:p>
-        </p:txBody>
-      </p:sp>
-      <p:sp>
-        <p:nvSpPr>
-          <p:cNvPr id="6" name="TextBox 5"/>
-          <p:cNvSpPr txBox="1"/>
-          <p:nvPr/>
-        </p:nvSpPr>
-        <p:spPr>
-          <a:xfrm>
-            <a:off x="609600" y="920750"/>
-            <a:ext cx="10972800" cy="1270000"/>
-          </a:xfrm>
-          <a:prstGeom prst="rect">
-            <a:avLst/>
-          </a:prstGeom>
-          <a:noFill/>
-        </p:spPr>
-        <p:txBody>
-          <a:bodyPr wrap="square">
-            <a:normAutofit/>
-          </a:bodyPr>
-          <a:lstStyle/>
-          <a:p>
-            <a:pPr algn="l"/>
-            <a:r>
-              <a:rPr sz="3800" b="0" i="0">
-                <a:solidFill>
-                  <a:srgbClr val="F8F8FA"/>
-                </a:solidFill>
-                <a:latin typeface="Georgia"/>
-              </a:rPr>
-              <a:t>Quellen.</a:t>
-            </a:r>
-          </a:p>
-        </p:txBody>
-      </p:sp>
-      <p:sp>
-        <p:nvSpPr>
-          <p:cNvPr id="7" name="Rectangle 6"/>
+          <p:cNvPr id="2" name="Rectangle 1"/>
           <p:cNvSpPr/>
           <p:nvPr/>
         </p:nvSpPr>
         <p:spPr>
           <a:xfrm>
-            <a:off x="609600" y="2254250"/>
-            <a:ext cx="10972800" cy="6350"/>
+            <a:off x="0" y="0"/>
+            <a:ext cx="12188952" cy="6858000"/>
           </a:xfrm>
           <a:prstGeom prst="rect">
             <a:avLst/>
           </a:prstGeom>
           <a:solidFill>
-            <a:srgbClr val="3A4880"/>
+            <a:srgbClr val="EDEDF3"/>
           </a:solidFill>
           <a:ln>
             <a:noFill/>
@@ -3675,14 +3616,213 @@
       </p:sp>
       <p:sp>
         <p:nvSpPr>
+          <p:cNvPr id="3" name="Rectangle 2"/>
+          <p:cNvSpPr/>
+          <p:nvPr/>
+        </p:nvSpPr>
+        <p:spPr>
+          <a:xfrm>
+            <a:off x="0" y="0"/>
+            <a:ext cx="12188952" cy="50292"/>
+          </a:xfrm>
+          <a:prstGeom prst="rect">
+            <a:avLst/>
+          </a:prstGeom>
+          <a:solidFill>
+            <a:srgbClr val="1F2C56"/>
+          </a:solidFill>
+          <a:ln>
+            <a:noFill/>
+          </a:ln>
+        </p:spPr>
+        <p:style>
+          <a:lnRef idx="1">
+            <a:schemeClr val="accent1"/>
+          </a:lnRef>
+          <a:fillRef idx="3">
+            <a:schemeClr val="accent1"/>
+          </a:fillRef>
+          <a:effectRef idx="2">
+            <a:schemeClr val="accent1"/>
+          </a:effectRef>
+          <a:fontRef idx="minor">
+            <a:schemeClr val="lt1"/>
+          </a:fontRef>
+        </p:style>
+        <p:txBody>
+          <a:bodyPr rtlCol="0" anchor="ctr"/>
+          <a:lstStyle/>
+          <a:p>
+            <a:pPr algn="ctr"/>
+          </a:p>
+        </p:txBody>
+      </p:sp>
+      <p:sp>
+        <p:nvSpPr>
+          <p:cNvPr id="4" name="TextBox 3"/>
+          <p:cNvSpPr txBox="1"/>
+          <p:nvPr/>
+        </p:nvSpPr>
+        <p:spPr>
+          <a:xfrm>
+            <a:off x="685800" y="109728"/>
+            <a:ext cx="10817352" cy="228600"/>
+          </a:xfrm>
+          <a:prstGeom prst="rect">
+            <a:avLst/>
+          </a:prstGeom>
+          <a:noFill/>
+        </p:spPr>
+        <p:txBody>
+          <a:bodyPr wrap="none">
+            <a:spAutoFit/>
+          </a:bodyPr>
+          <a:lstStyle/>
+          <a:p>
+            <a:pPr algn="l"/>
+            <a:r>
+              <a:rPr sz="750">
+                <a:solidFill>
+                  <a:srgbClr val="78808C"/>
+                </a:solidFill>
+                <a:latin typeface="JetBrains Mono"/>
+              </a:rPr>
+              <a:t>M20  ·  INHALT</a:t>
+            </a:r>
+          </a:p>
+        </p:txBody>
+      </p:sp>
+      <p:sp>
+        <p:nvSpPr>
+          <p:cNvPr id="5" name="Rectangle 4"/>
+          <p:cNvSpPr/>
+          <p:nvPr/>
+        </p:nvSpPr>
+        <p:spPr>
+          <a:xfrm>
+            <a:off x="0" y="1234440"/>
+            <a:ext cx="12188952" cy="12700"/>
+          </a:xfrm>
+          <a:prstGeom prst="rect">
+            <a:avLst/>
+          </a:prstGeom>
+          <a:solidFill>
+            <a:srgbClr val="D8DFE4"/>
+          </a:solidFill>
+          <a:ln>
+            <a:noFill/>
+          </a:ln>
+        </p:spPr>
+        <p:style>
+          <a:lnRef idx="1">
+            <a:schemeClr val="accent1"/>
+          </a:lnRef>
+          <a:fillRef idx="3">
+            <a:schemeClr val="accent1"/>
+          </a:fillRef>
+          <a:effectRef idx="2">
+            <a:schemeClr val="accent1"/>
+          </a:effectRef>
+          <a:fontRef idx="minor">
+            <a:schemeClr val="lt1"/>
+          </a:fontRef>
+        </p:style>
+        <p:txBody>
+          <a:bodyPr rtlCol="0" anchor="ctr"/>
+          <a:lstStyle/>
+          <a:p>
+            <a:pPr algn="ctr"/>
+          </a:p>
+        </p:txBody>
+      </p:sp>
+      <p:sp>
+        <p:nvSpPr>
+          <p:cNvPr id="6" name="Rectangle 5"/>
+          <p:cNvSpPr/>
+          <p:nvPr/>
+        </p:nvSpPr>
+        <p:spPr>
+          <a:xfrm>
+            <a:off x="685800" y="502920"/>
+            <a:ext cx="36576" cy="658368"/>
+          </a:xfrm>
+          <a:prstGeom prst="rect">
+            <a:avLst/>
+          </a:prstGeom>
+          <a:solidFill>
+            <a:srgbClr val="D9C089"/>
+          </a:solidFill>
+          <a:ln>
+            <a:noFill/>
+          </a:ln>
+        </p:spPr>
+        <p:style>
+          <a:lnRef idx="1">
+            <a:schemeClr val="accent1"/>
+          </a:lnRef>
+          <a:fillRef idx="3">
+            <a:schemeClr val="accent1"/>
+          </a:fillRef>
+          <a:effectRef idx="2">
+            <a:schemeClr val="accent1"/>
+          </a:effectRef>
+          <a:fontRef idx="minor">
+            <a:schemeClr val="lt1"/>
+          </a:fontRef>
+        </p:style>
+        <p:txBody>
+          <a:bodyPr rtlCol="0" anchor="ctr"/>
+          <a:lstStyle/>
+          <a:p>
+            <a:pPr algn="ctr"/>
+          </a:p>
+        </p:txBody>
+      </p:sp>
+      <p:sp>
+        <p:nvSpPr>
+          <p:cNvPr id="7" name="TextBox 6"/>
+          <p:cNvSpPr txBox="1"/>
+          <p:nvPr/>
+        </p:nvSpPr>
+        <p:spPr>
+          <a:xfrm>
+            <a:off x="813816" y="502920"/>
+            <a:ext cx="10634472" cy="685800"/>
+          </a:xfrm>
+          <a:prstGeom prst="rect">
+            <a:avLst/>
+          </a:prstGeom>
+          <a:noFill/>
+        </p:spPr>
+        <p:txBody>
+          <a:bodyPr wrap="square">
+            <a:spAutoFit/>
+          </a:bodyPr>
+          <a:lstStyle/>
+          <a:p>
+            <a:pPr algn="l"/>
+            <a:r>
+              <a:rPr sz="2400" b="1" i="0">
+                <a:solidFill>
+                  <a:srgbClr val="1F2C56"/>
+                </a:solidFill>
+                <a:latin typeface="Source Serif 4"/>
+              </a:rPr>
+              <a:t>Format 3: Präsenz in Gremien und Verbänden</a:t>
+            </a:r>
+          </a:p>
+        </p:txBody>
+      </p:sp>
+      <p:sp>
+        <p:nvSpPr>
           <p:cNvPr id="8" name="TextBox 7"/>
           <p:cNvSpPr txBox="1"/>
           <p:nvPr/>
         </p:nvSpPr>
         <p:spPr>
           <a:xfrm>
-            <a:off x="609600" y="2317750"/>
-            <a:ext cx="5207000" cy="444500"/>
+            <a:off x="685800" y="1417320"/>
+            <a:ext cx="10817352" cy="5029200"/>
           </a:xfrm>
           <a:prstGeom prst="rect">
             <a:avLst/>
@@ -3691,55 +3831,146 @@
         </p:spPr>
         <p:txBody>
           <a:bodyPr wrap="square">
-            <a:normAutofit/>
+            <a:spAutoFit/>
           </a:bodyPr>
           <a:lstStyle/>
           <a:p>
-            <a:pPr algn="l"/>
-            <a:r>
-              <a:rPr sz="1000" b="0" i="0">
-                <a:solidFill>
-                  <a:srgbClr val="F8F8FA"/>
-                </a:solidFill>
-                <a:latin typeface="Courier New"/>
-              </a:rPr>
-              <a:t>(Alle Quellen im APA-7-Format)</a:t>
-            </a:r>
-          </a:p>
-        </p:txBody>
-      </p:sp>
-      <p:sp>
-        <p:nvSpPr>
-          <p:cNvPr id="9" name="TextBox 8"/>
-          <p:cNvSpPr txBox="1"/>
-          <p:nvPr/>
-        </p:nvSpPr>
-        <p:spPr>
-          <a:xfrm>
-            <a:off x="609600" y="2800350"/>
-            <a:ext cx="5207000" cy="444500"/>
-          </a:xfrm>
-          <a:prstGeom prst="rect">
-            <a:avLst/>
-          </a:prstGeom>
-          <a:noFill/>
-        </p:spPr>
-        <p:txBody>
-          <a:bodyPr wrap="square">
-            <a:normAutofit/>
-          </a:bodyPr>
-          <a:lstStyle/>
-          <a:p>
-            <a:pPr algn="l"/>
-            <a:r>
-              <a:rPr sz="1000" b="0" i="0">
-                <a:solidFill>
-                  <a:srgbClr val="F8F8FA"/>
-                </a:solidFill>
-                <a:latin typeface="Courier New"/>
-              </a:rPr>
-              <a:t>Anderson, L.W. &amp; Krathwohl, D.R. (Hrsg.). (2001). A taxonomy for learning, teaching, and assessing: A revision of Bloom's educational…</a:t>
-            </a:r>
+            <a:pPr>
+              <a:spcBef>
+                <a:spcPts val="400"/>
+              </a:spcBef>
+              <a:spcAft>
+                <a:spcPts val="200"/>
+              </a:spcAft>
+            </a:pPr>
+            <a:r>
+              <a:rPr sz="1200">
+                <a:solidFill>
+                  <a:srgbClr val="3D5466"/>
+                </a:solidFill>
+                <a:latin typeface="Arial"/>
+              </a:rPr>
+              <a:t>Strategisch wählen: Nicht jede Mitgliedschaft lohnt sich. Kriterien:</a:t>
+            </a:r>
+          </a:p>
+          <a:p>
+            <a:pPr>
+              <a:spcBef>
+                <a:spcPts val="400"/>
+              </a:spcBef>
+              <a:spcAft>
+                <a:spcPts val="200"/>
+              </a:spcAft>
+            </a:pPr>
+            <a:r>
+              <a:rPr sz="1300">
+                <a:solidFill>
+                  <a:srgbClr val="3D5466"/>
+                </a:solidFill>
+                <a:latin typeface="Arial"/>
+              </a:rPr>
+              <a:t>▸  Sind meine Zielkunden oder ihre Berater dort aktiv?</a:t>
+            </a:r>
+          </a:p>
+          <a:p>
+            <a:pPr>
+              <a:spcBef>
+                <a:spcPts val="400"/>
+              </a:spcBef>
+              <a:spcAft>
+                <a:spcPts val="200"/>
+              </a:spcAft>
+            </a:pPr>
+            <a:r>
+              <a:rPr sz="1300">
+                <a:solidFill>
+                  <a:srgbClr val="3D5466"/>
+                </a:solidFill>
+                <a:latin typeface="Arial"/>
+              </a:rPr>
+              <a:t>▸  Gibt es eine Möglichkeit, sich inhaltlich einzubringen (Vortrag, Arbeitskreis)?</a:t>
+            </a:r>
+          </a:p>
+          <a:p>
+            <a:pPr>
+              <a:spcBef>
+                <a:spcPts val="400"/>
+              </a:spcBef>
+              <a:spcAft>
+                <a:spcPts val="200"/>
+              </a:spcAft>
+            </a:pPr>
+            <a:r>
+              <a:rPr sz="1300">
+                <a:solidFill>
+                  <a:srgbClr val="3D5466"/>
+                </a:solidFill>
+                <a:latin typeface="Arial"/>
+              </a:rPr>
+              <a:t>▸  Lässt sich die Zeitinvestition rechtfertigen (qualitativ hochwertige Kontakte)?</a:t>
+            </a:r>
+          </a:p>
+          <a:p>
+            <a:pPr>
+              <a:spcBef>
+                <a:spcPts val="400"/>
+              </a:spcBef>
+              <a:spcAft>
+                <a:spcPts val="200"/>
+              </a:spcAft>
+            </a:pPr>
+            <a:r>
+              <a:rPr sz="1200">
+                <a:solidFill>
+                  <a:srgbClr val="3D5466"/>
+                </a:solidFill>
+                <a:latin typeface="Arial"/>
+              </a:rPr>
+              <a:t>Empfehlungen für FK-Berater in Süddeutschland – bewährteste Formate nach Zeitaufwand und Netzwerkqualität:</a:t>
+            </a:r>
+          </a:p>
+        </p:txBody>
+      </p:sp>
+      <p:sp>
+        <p:nvSpPr>
+          <p:cNvPr id="9" name="Rectangle 8"/>
+          <p:cNvSpPr/>
+          <p:nvPr/>
+        </p:nvSpPr>
+        <p:spPr>
+          <a:xfrm>
+            <a:off x="0" y="6510528"/>
+            <a:ext cx="12188952" cy="347472"/>
+          </a:xfrm>
+          <a:prstGeom prst="rect">
+            <a:avLst/>
+          </a:prstGeom>
+          <a:solidFill>
+            <a:srgbClr val="0A1937"/>
+          </a:solidFill>
+          <a:ln>
+            <a:noFill/>
+          </a:ln>
+        </p:spPr>
+        <p:style>
+          <a:lnRef idx="1">
+            <a:schemeClr val="accent1"/>
+          </a:lnRef>
+          <a:fillRef idx="3">
+            <a:schemeClr val="accent1"/>
+          </a:fillRef>
+          <a:effectRef idx="2">
+            <a:schemeClr val="accent1"/>
+          </a:effectRef>
+          <a:fontRef idx="minor">
+            <a:schemeClr val="lt1"/>
+          </a:fontRef>
+        </p:style>
+        <p:txBody>
+          <a:bodyPr rtlCol="0" anchor="ctr"/>
+          <a:lstStyle/>
+          <a:p>
+            <a:pPr algn="ctr"/>
           </a:p>
         </p:txBody>
       </p:sp>
@@ -3751,8 +3982,8 @@
         </p:nvSpPr>
         <p:spPr>
           <a:xfrm>
-            <a:off x="609600" y="3282950"/>
-            <a:ext cx="5207000" cy="444500"/>
+            <a:off x="685800" y="6583680"/>
+            <a:ext cx="6490411" cy="256032"/>
           </a:xfrm>
           <a:prstGeom prst="rect">
             <a:avLst/>
@@ -3760,195 +3991,20 @@
           <a:noFill/>
         </p:spPr>
         <p:txBody>
-          <a:bodyPr wrap="square">
-            <a:normAutofit/>
+          <a:bodyPr wrap="none">
+            <a:spAutoFit/>
           </a:bodyPr>
           <a:lstStyle/>
           <a:p>
             <a:pPr algn="l"/>
             <a:r>
-              <a:rPr sz="1000" b="0" i="0">
-                <a:solidFill>
-                  <a:srgbClr val="F8F8FA"/>
-                </a:solidFill>
-                <a:latin typeface="Courier New"/>
-              </a:rPr>
-              <a:t>Burt, R.S. (2004). Structural holes and good ideas. American Journal of Sociology, 110(2), 349–399. https://doi.org/10.1086/421787</a:t>
-            </a:r>
-          </a:p>
-        </p:txBody>
-      </p:sp>
-      <p:sp>
-        <p:nvSpPr>
-          <p:cNvPr id="11" name="TextBox 10"/>
-          <p:cNvSpPr txBox="1"/>
-          <p:nvPr/>
-        </p:nvSpPr>
-        <p:spPr>
-          <a:xfrm>
-            <a:off x="609600" y="3765550"/>
-            <a:ext cx="5207000" cy="444500"/>
-          </a:xfrm>
-          <a:prstGeom prst="rect">
-            <a:avLst/>
-          </a:prstGeom>
-          <a:noFill/>
-        </p:spPr>
-        <p:txBody>
-          <a:bodyPr wrap="square">
-            <a:normAutofit/>
-          </a:bodyPr>
-          <a:lstStyle/>
-          <a:p>
-            <a:pPr algn="l"/>
-            <a:r>
-              <a:rPr sz="1000" b="0" i="0">
-                <a:solidFill>
-                  <a:srgbClr val="F8F8FA"/>
-                </a:solidFill>
-                <a:latin typeface="Courier New"/>
-              </a:rPr>
-              <a:t>Dreyfus, H.L. &amp; Dreyfus, S.E. (1986). Mind over Machine: The Power of Human Intuition and Expertise in the Era of the Computer. Free Press.</a:t>
-            </a:r>
-          </a:p>
-        </p:txBody>
-      </p:sp>
-      <p:sp>
-        <p:nvSpPr>
-          <p:cNvPr id="12" name="TextBox 11"/>
-          <p:cNvSpPr txBox="1"/>
-          <p:nvPr/>
-        </p:nvSpPr>
-        <p:spPr>
-          <a:xfrm>
-            <a:off x="609600" y="4248150"/>
-            <a:ext cx="5207000" cy="444500"/>
-          </a:xfrm>
-          <a:prstGeom prst="rect">
-            <a:avLst/>
-          </a:prstGeom>
-          <a:noFill/>
-        </p:spPr>
-        <p:txBody>
-          <a:bodyPr wrap="square">
-            <a:normAutofit/>
-          </a:bodyPr>
-          <a:lstStyle/>
-          <a:p>
-            <a:pPr algn="l"/>
-            <a:r>
-              <a:rPr sz="1000" b="0" i="0">
-                <a:solidFill>
-                  <a:srgbClr val="F8F8FA"/>
-                </a:solidFill>
-                <a:latin typeface="Courier New"/>
-              </a:rPr>
-              <a:t>Kirkpatrick, D.L. (1994). Evaluating Training Programs: The Four Levels. Berrett-Koehler.</a:t>
-            </a:r>
-          </a:p>
-        </p:txBody>
-      </p:sp>
-      <p:sp>
-        <p:nvSpPr>
-          <p:cNvPr id="13" name="TextBox 12"/>
-          <p:cNvSpPr txBox="1"/>
-          <p:nvPr/>
-        </p:nvSpPr>
-        <p:spPr>
-          <a:xfrm>
-            <a:off x="6096000" y="2317750"/>
-            <a:ext cx="5232400" cy="444500"/>
-          </a:xfrm>
-          <a:prstGeom prst="rect">
-            <a:avLst/>
-          </a:prstGeom>
-          <a:noFill/>
-        </p:spPr>
-        <p:txBody>
-          <a:bodyPr wrap="square">
-            <a:normAutofit/>
-          </a:bodyPr>
-          <a:lstStyle/>
-          <a:p>
-            <a:pPr algn="l"/>
-            <a:r>
-              <a:rPr sz="1000" b="0" i="0">
-                <a:solidFill>
-                  <a:srgbClr val="F8F8FA"/>
-                </a:solidFill>
-                <a:latin typeface="Courier New"/>
-              </a:rPr>
-              <a:t>Cialdini, R.B. (2001). Influence: The psychology of persuasion (Rev. ed.). HarperCollins.</a:t>
-            </a:r>
-          </a:p>
-        </p:txBody>
-      </p:sp>
-      <p:sp>
-        <p:nvSpPr>
-          <p:cNvPr id="14" name="TextBox 13"/>
-          <p:cNvSpPr txBox="1"/>
-          <p:nvPr/>
-        </p:nvSpPr>
-        <p:spPr>
-          <a:xfrm>
-            <a:off x="6096000" y="2800350"/>
-            <a:ext cx="5232400" cy="444500"/>
-          </a:xfrm>
-          <a:prstGeom prst="rect">
-            <a:avLst/>
-          </a:prstGeom>
-          <a:noFill/>
-        </p:spPr>
-        <p:txBody>
-          <a:bodyPr wrap="square">
-            <a:normAutofit/>
-          </a:bodyPr>
-          <a:lstStyle/>
-          <a:p>
-            <a:pPr algn="l"/>
-            <a:r>
-              <a:rPr sz="1000" b="0" i="0">
-                <a:solidFill>
-                  <a:srgbClr val="F8F8FA"/>
-                </a:solidFill>
-                <a:latin typeface="Courier New"/>
-              </a:rPr>
-              <a:t>Cross, R. &amp; Parker, A. (2004). The hidden power of social networks: Understanding how work really gets done in organizations. Harvard…</a:t>
-            </a:r>
-          </a:p>
-        </p:txBody>
-      </p:sp>
-      <p:sp>
-        <p:nvSpPr>
-          <p:cNvPr id="15" name="TextBox 14"/>
-          <p:cNvSpPr txBox="1"/>
-          <p:nvPr/>
-        </p:nvSpPr>
-        <p:spPr>
-          <a:xfrm>
-            <a:off x="6096000" y="3282950"/>
-            <a:ext cx="5232400" cy="444500"/>
-          </a:xfrm>
-          <a:prstGeom prst="rect">
-            <a:avLst/>
-          </a:prstGeom>
-          <a:noFill/>
-        </p:spPr>
-        <p:txBody>
-          <a:bodyPr wrap="square">
-            <a:normAutofit/>
-          </a:bodyPr>
-          <a:lstStyle/>
-          <a:p>
-            <a:pPr algn="l"/>
-            <a:r>
-              <a:rPr sz="1000" b="0" i="0">
-                <a:solidFill>
-                  <a:srgbClr val="F8F8FA"/>
-                </a:solidFill>
-                <a:latin typeface="Courier New"/>
-              </a:rPr>
-              <a:t>Granovetter, M.S. (1973). The strength of weak ties. American Journal of Sociology, 78(6), 1360–1380. https://doi.org/10.1086/225469</a:t>
+              <a:rPr sz="700">
+                <a:solidFill>
+                  <a:srgbClr val="A0B4D2"/>
+                </a:solidFill>
+                <a:latin typeface="JetBrains Mono"/>
+              </a:rPr>
+              <a:t>Benedikt Zoller Coaching  ·  FKB Campus  ·  M20</a:t>
             </a:r>
           </a:p>
         </p:txBody>
@@ -3964,14 +4020,6 @@
 <file path=ppt/slides/slide11.xml><?xml version="1.0" encoding="utf-8"?>
 <p:sld xmlns:a="http://schemas.openxmlformats.org/drawingml/2006/main" xmlns:p="http://schemas.openxmlformats.org/presentationml/2006/main" xmlns:r="http://schemas.openxmlformats.org/officeDocument/2006/relationships">
   <p:cSld>
-    <p:bg>
-      <p:bgPr>
-        <a:solidFill>
-          <a:srgbClr val="F8F8FA"/>
-        </a:solidFill>
-        <a:effectLst/>
-      </p:bgPr>
-    </p:bg>
     <p:spTree>
       <p:nvGrpSpPr>
         <p:cNvPr id="1" name=""/>
@@ -3981,126 +4029,20 @@
       <p:grpSpPr/>
       <p:sp>
         <p:nvSpPr>
-          <p:cNvPr id="2" name="TextBox 1"/>
-          <p:cNvSpPr txBox="1"/>
-          <p:nvPr/>
-        </p:nvSpPr>
-        <p:spPr>
-          <a:xfrm>
-            <a:off x="609600" y="457200"/>
-            <a:ext cx="3175000" cy="279400"/>
-          </a:xfrm>
-          <a:prstGeom prst="rect">
-            <a:avLst/>
-          </a:prstGeom>
-          <a:noFill/>
-        </p:spPr>
-        <p:txBody>
-          <a:bodyPr wrap="square">
-            <a:normAutofit/>
-          </a:bodyPr>
-          <a:lstStyle/>
-          <a:p>
-            <a:pPr algn="l"/>
-            <a:r>
-              <a:rPr sz="1000" b="1" i="0">
-                <a:solidFill>
-                  <a:srgbClr val="191D2E"/>
-                </a:solidFill>
-                <a:latin typeface="Arial"/>
-              </a:rPr>
-              <a:t>FKB  Campus</a:t>
-            </a:r>
-          </a:p>
-        </p:txBody>
-      </p:sp>
-      <p:sp>
-        <p:nvSpPr>
-          <p:cNvPr id="3" name="TextBox 2"/>
-          <p:cNvSpPr txBox="1"/>
-          <p:nvPr/>
-        </p:nvSpPr>
-        <p:spPr>
-          <a:xfrm>
-            <a:off x="609600" y="457200"/>
-            <a:ext cx="10972800" cy="279400"/>
-          </a:xfrm>
-          <a:prstGeom prst="rect">
-            <a:avLst/>
-          </a:prstGeom>
-          <a:noFill/>
-        </p:spPr>
-        <p:txBody>
-          <a:bodyPr wrap="square">
-            <a:normAutofit/>
-          </a:bodyPr>
-          <a:lstStyle/>
-          <a:p>
-            <a:pPr algn="r"/>
-            <a:r>
-              <a:rPr sz="900" b="0" i="0">
-                <a:solidFill>
-                  <a:srgbClr val="7B7FA0"/>
-                </a:solidFill>
-                <a:latin typeface="Courier New"/>
-              </a:rPr>
-              <a:t>Ende · v0.4</a:t>
-            </a:r>
-          </a:p>
-        </p:txBody>
-      </p:sp>
-      <p:sp>
-        <p:nvSpPr>
-          <p:cNvPr id="4" name="TextBox 3"/>
-          <p:cNvSpPr txBox="1"/>
-          <p:nvPr/>
-        </p:nvSpPr>
-        <p:spPr>
-          <a:xfrm>
-            <a:off x="609600" y="1143000"/>
-            <a:ext cx="10972800" cy="3556000"/>
-          </a:xfrm>
-          <a:prstGeom prst="rect">
-            <a:avLst/>
-          </a:prstGeom>
-          <a:noFill/>
-        </p:spPr>
-        <p:txBody>
-          <a:bodyPr wrap="square">
-            <a:normAutofit/>
-          </a:bodyPr>
-          <a:lstStyle/>
-          <a:p>
-            <a:pPr algn="l"/>
-            <a:r>
-              <a:rPr sz="9600" b="0" i="0">
-                <a:solidFill>
-                  <a:srgbClr val="191D2E"/>
-                </a:solidFill>
-                <a:latin typeface="Georgia"/>
-              </a:rPr>
-              <a:t>Danke.
-Fragen?</a:t>
-            </a:r>
-          </a:p>
-        </p:txBody>
-      </p:sp>
-      <p:sp>
-        <p:nvSpPr>
-          <p:cNvPr id="5" name="Rectangle 4"/>
+          <p:cNvPr id="2" name="Rectangle 1"/>
           <p:cNvSpPr/>
           <p:nvPr/>
         </p:nvSpPr>
         <p:spPr>
           <a:xfrm>
-            <a:off x="609600" y="4826000"/>
-            <a:ext cx="10972800" cy="6350"/>
+            <a:off x="0" y="0"/>
+            <a:ext cx="12188952" cy="6858000"/>
           </a:xfrm>
           <a:prstGeom prst="rect">
             <a:avLst/>
           </a:prstGeom>
           <a:solidFill>
-            <a:srgbClr val="191D2E"/>
+            <a:srgbClr val="EDEDF3"/>
           </a:solidFill>
           <a:ln>
             <a:noFill/>
@@ -4130,14 +4072,57 @@
       </p:sp>
       <p:sp>
         <p:nvSpPr>
-          <p:cNvPr id="6" name="TextBox 5"/>
+          <p:cNvPr id="3" name="Rectangle 2"/>
+          <p:cNvSpPr/>
+          <p:nvPr/>
+        </p:nvSpPr>
+        <p:spPr>
+          <a:xfrm>
+            <a:off x="0" y="0"/>
+            <a:ext cx="12188952" cy="50292"/>
+          </a:xfrm>
+          <a:prstGeom prst="rect">
+            <a:avLst/>
+          </a:prstGeom>
+          <a:solidFill>
+            <a:srgbClr val="1F2C56"/>
+          </a:solidFill>
+          <a:ln>
+            <a:noFill/>
+          </a:ln>
+        </p:spPr>
+        <p:style>
+          <a:lnRef idx="1">
+            <a:schemeClr val="accent1"/>
+          </a:lnRef>
+          <a:fillRef idx="3">
+            <a:schemeClr val="accent1"/>
+          </a:fillRef>
+          <a:effectRef idx="2">
+            <a:schemeClr val="accent1"/>
+          </a:effectRef>
+          <a:fontRef idx="minor">
+            <a:schemeClr val="lt1"/>
+          </a:fontRef>
+        </p:style>
+        <p:txBody>
+          <a:bodyPr rtlCol="0" anchor="ctr"/>
+          <a:lstStyle/>
+          <a:p>
+            <a:pPr algn="ctr"/>
+          </a:p>
+        </p:txBody>
+      </p:sp>
+      <p:sp>
+        <p:nvSpPr>
+          <p:cNvPr id="4" name="TextBox 3"/>
           <p:cNvSpPr txBox="1"/>
           <p:nvPr/>
         </p:nvSpPr>
         <p:spPr>
           <a:xfrm>
-            <a:off x="609600" y="4953000"/>
-            <a:ext cx="5715000" cy="1143000"/>
+            <a:off x="685800" y="109728"/>
+            <a:ext cx="10817352" cy="228600"/>
           </a:xfrm>
           <a:prstGeom prst="rect">
             <a:avLst/>
@@ -4145,21 +4130,107 @@
           <a:noFill/>
         </p:spPr>
         <p:txBody>
-          <a:bodyPr wrap="square">
-            <a:normAutofit/>
+          <a:bodyPr wrap="none">
+            <a:spAutoFit/>
           </a:bodyPr>
           <a:lstStyle/>
           <a:p>
             <a:pPr algn="l"/>
             <a:r>
-              <a:rPr sz="1400" b="0" i="1">
-                <a:solidFill>
-                  <a:srgbClr val="191D2E"/>
-                </a:solidFill>
-                <a:latin typeface="Georgia"/>
-              </a:rPr>
-              <a:t>Modul «Netzwerk &amp; Sichtbarkeit» auf FKB Campus — 5 Lernziele, Praxisfall und Quellenapparat.</a:t>
-            </a:r>
+              <a:rPr sz="750">
+                <a:solidFill>
+                  <a:srgbClr val="78808C"/>
+                </a:solidFill>
+                <a:latin typeface="JetBrains Mono"/>
+              </a:rPr>
+              <a:t>M20  ·  INHALT</a:t>
+            </a:r>
+          </a:p>
+        </p:txBody>
+      </p:sp>
+      <p:sp>
+        <p:nvSpPr>
+          <p:cNvPr id="5" name="Rectangle 4"/>
+          <p:cNvSpPr/>
+          <p:nvPr/>
+        </p:nvSpPr>
+        <p:spPr>
+          <a:xfrm>
+            <a:off x="0" y="1234440"/>
+            <a:ext cx="12188952" cy="12700"/>
+          </a:xfrm>
+          <a:prstGeom prst="rect">
+            <a:avLst/>
+          </a:prstGeom>
+          <a:solidFill>
+            <a:srgbClr val="D8DFE4"/>
+          </a:solidFill>
+          <a:ln>
+            <a:noFill/>
+          </a:ln>
+        </p:spPr>
+        <p:style>
+          <a:lnRef idx="1">
+            <a:schemeClr val="accent1"/>
+          </a:lnRef>
+          <a:fillRef idx="3">
+            <a:schemeClr val="accent1"/>
+          </a:fillRef>
+          <a:effectRef idx="2">
+            <a:schemeClr val="accent1"/>
+          </a:effectRef>
+          <a:fontRef idx="minor">
+            <a:schemeClr val="lt1"/>
+          </a:fontRef>
+        </p:style>
+        <p:txBody>
+          <a:bodyPr rtlCol="0" anchor="ctr"/>
+          <a:lstStyle/>
+          <a:p>
+            <a:pPr algn="ctr"/>
+          </a:p>
+        </p:txBody>
+      </p:sp>
+      <p:sp>
+        <p:nvSpPr>
+          <p:cNvPr id="6" name="Rectangle 5"/>
+          <p:cNvSpPr/>
+          <p:nvPr/>
+        </p:nvSpPr>
+        <p:spPr>
+          <a:xfrm>
+            <a:off x="685800" y="502920"/>
+            <a:ext cx="36576" cy="658368"/>
+          </a:xfrm>
+          <a:prstGeom prst="rect">
+            <a:avLst/>
+          </a:prstGeom>
+          <a:solidFill>
+            <a:srgbClr val="D9C089"/>
+          </a:solidFill>
+          <a:ln>
+            <a:noFill/>
+          </a:ln>
+        </p:spPr>
+        <p:style>
+          <a:lnRef idx="1">
+            <a:schemeClr val="accent1"/>
+          </a:lnRef>
+          <a:fillRef idx="3">
+            <a:schemeClr val="accent1"/>
+          </a:fillRef>
+          <a:effectRef idx="2">
+            <a:schemeClr val="accent1"/>
+          </a:effectRef>
+          <a:fontRef idx="minor">
+            <a:schemeClr val="lt1"/>
+          </a:fontRef>
+        </p:style>
+        <p:txBody>
+          <a:bodyPr rtlCol="0" anchor="ctr"/>
+          <a:lstStyle/>
+          <a:p>
+            <a:pPr algn="ctr"/>
           </a:p>
         </p:txBody>
       </p:sp>
@@ -4171,8 +4242,8 @@
         </p:nvSpPr>
         <p:spPr>
           <a:xfrm>
-            <a:off x="6731000" y="4953000"/>
-            <a:ext cx="2413000" cy="177800"/>
+            <a:off x="813816" y="502920"/>
+            <a:ext cx="10634472" cy="685800"/>
           </a:xfrm>
           <a:prstGeom prst="rect">
             <a:avLst/>
@@ -4181,19 +4252,19 @@
         </p:spPr>
         <p:txBody>
           <a:bodyPr wrap="square">
-            <a:normAutofit/>
+            <a:spAutoFit/>
           </a:bodyPr>
           <a:lstStyle/>
           <a:p>
             <a:pPr algn="l"/>
             <a:r>
-              <a:rPr sz="900" b="0" i="0">
-                <a:solidFill>
-                  <a:srgbClr val="7B7FA0"/>
-                </a:solidFill>
-                <a:latin typeface="Courier New"/>
-              </a:rPr>
-              <a:t>Trainer</a:t>
+              <a:rPr sz="2400" b="1" i="0">
+                <a:solidFill>
+                  <a:srgbClr val="1F2C56"/>
+                </a:solidFill>
+                <a:latin typeface="Source Serif 4"/>
+              </a:rPr>
+              <a:t>Format 4: Digitale Sichtbarkeit (nachrangig, selektiv)</a:t>
             </a:r>
           </a:p>
         </p:txBody>
@@ -4206,8 +4277,8 @@
         </p:nvSpPr>
         <p:spPr>
           <a:xfrm>
-            <a:off x="6731000" y="5156200"/>
-            <a:ext cx="2413000" cy="381000"/>
+            <a:off x="685800" y="1417320"/>
+            <a:ext cx="10817352" cy="5029200"/>
           </a:xfrm>
           <a:prstGeom prst="rect">
             <a:avLst/>
@@ -4216,20 +4287,997 @@
         </p:spPr>
         <p:txBody>
           <a:bodyPr wrap="square">
-            <a:normAutofit/>
+            <a:spAutoFit/>
           </a:bodyPr>
           <a:lstStyle/>
           <a:p>
+            <a:pPr>
+              <a:spcBef>
+                <a:spcPts val="400"/>
+              </a:spcBef>
+              <a:spcAft>
+                <a:spcPts val="200"/>
+              </a:spcAft>
+            </a:pPr>
+            <a:r>
+              <a:rPr sz="1200">
+                <a:solidFill>
+                  <a:srgbClr val="3D5466"/>
+                </a:solidFill>
+                <a:latin typeface="Arial"/>
+              </a:rPr>
+              <a:t>## 4.5 Der 90-Tage-Netzwerkplan</a:t>
+            </a:r>
+          </a:p>
+          <a:p>
+            <a:pPr>
+              <a:spcBef>
+                <a:spcPts val="400"/>
+              </a:spcBef>
+              <a:spcAft>
+                <a:spcPts val="200"/>
+              </a:spcAft>
+            </a:pPr>
+            <a:r>
+              <a:rPr sz="1200">
+                <a:solidFill>
+                  <a:srgbClr val="3D5466"/>
+                </a:solidFill>
+                <a:latin typeface="Arial"/>
+              </a:rPr>
+              <a:t>Ein Netzwerk entsteht nicht durch einmalige Aktionen. Es braucht ein System – klein, aber regelmäßig.</a:t>
+            </a:r>
+          </a:p>
+          <a:p>
+            <a:pPr>
+              <a:spcBef>
+                <a:spcPts val="400"/>
+              </a:spcBef>
+              <a:spcAft>
+                <a:spcPts val="200"/>
+              </a:spcAft>
+            </a:pPr>
+            <a:r>
+              <a:rPr sz="1200">
+                <a:solidFill>
+                  <a:srgbClr val="3D5466"/>
+                </a:solidFill>
+                <a:latin typeface="Arial"/>
+              </a:rPr>
+              <a:t>## 4.6 Praxiscase: Stefan Köhler – vom Geheimtipp zur Autorität</a:t>
+            </a:r>
+          </a:p>
+          <a:p>
+            <a:pPr>
+              <a:spcBef>
+                <a:spcPts val="400"/>
+              </a:spcBef>
+              <a:spcAft>
+                <a:spcPts val="200"/>
+              </a:spcAft>
+            </a:pPr>
+            <a:r>
+              <a:rPr sz="1200">
+                <a:solidFill>
+                  <a:srgbClr val="3D5466"/>
+                </a:solidFill>
+                <a:latin typeface="Arial"/>
+              </a:rPr>
+              <a:t>Ausgangssituation</a:t>
+            </a:r>
+          </a:p>
+          <a:p>
+            <a:pPr>
+              <a:spcBef>
+                <a:spcPts val="400"/>
+              </a:spcBef>
+              <a:spcAft>
+                <a:spcPts val="200"/>
+              </a:spcAft>
+            </a:pPr>
+            <a:r>
+              <a:rPr sz="1200">
+                <a:solidFill>
+                  <a:srgbClr val="3D5466"/>
+                </a:solidFill>
+                <a:latin typeface="Arial"/>
+              </a:rPr>
+              <a:t>Stefan arbeitet hart, berät gut – aber er ist unsichtbar.</a:t>
+            </a:r>
+          </a:p>
+          <a:p>
+            <a:pPr>
+              <a:spcBef>
+                <a:spcPts val="400"/>
+              </a:spcBef>
+              <a:spcAft>
+                <a:spcPts val="200"/>
+              </a:spcAft>
+            </a:pPr>
+            <a:r>
+              <a:rPr sz="1200">
+                <a:solidFill>
+                  <a:srgbClr val="3D5466"/>
+                </a:solidFill>
+                <a:latin typeface="Arial"/>
+              </a:rPr>
+              <a:t>Was Stefan verändert (in 90 Tagen)</a:t>
+            </a:r>
+          </a:p>
+          <a:p>
+            <a:pPr>
+              <a:spcBef>
+                <a:spcPts val="400"/>
+              </a:spcBef>
+              <a:spcAft>
+                <a:spcPts val="200"/>
+              </a:spcAft>
+            </a:pPr>
+            <a:r>
+              <a:rPr sz="1200">
+                <a:solidFill>
+                  <a:srgbClr val="3D5466"/>
+                </a:solidFill>
+                <a:latin typeface="Arial"/>
+              </a:rPr>
+              <a:t>Monat 1 – Analyse &amp; Positionierung:</a:t>
+            </a:r>
+          </a:p>
+          <a:p>
+            <a:pPr>
+              <a:spcBef>
+                <a:spcPts val="400"/>
+              </a:spcBef>
+              <a:spcAft>
+                <a:spcPts val="200"/>
+              </a:spcAft>
+            </a:pPr>
+            <a:r>
+              <a:rPr sz="1300">
+                <a:solidFill>
+                  <a:srgbClr val="3D5466"/>
+                </a:solidFill>
+                <a:latin typeface="Arial"/>
+              </a:rPr>
+              <a:t>▸  Stefan erstellt seine persönliche Netzwerkkarte. Ergebnis: Intern gut vernetzt, intern überbekannt. Extern: kaum Kontakte außerhalb seiner eigenen Kunden.</a:t>
+            </a:r>
+          </a:p>
+          <a:p>
+            <a:pPr>
+              <a:spcBef>
+                <a:spcPts val="400"/>
+              </a:spcBef>
+              <a:spcAft>
+                <a:spcPts val="200"/>
+              </a:spcAft>
+            </a:pPr>
+            <a:r>
+              <a:rPr sz="1300">
+                <a:solidFill>
+                  <a:srgbClr val="3D5466"/>
+                </a:solidFill>
+                <a:latin typeface="Arial"/>
+              </a:rPr>
+              <a:t>▸  Er identifiziert drei Multiplikatoren, die für sein Zielfeld entscheidend sind: (1) der größte Steuerberater für Landwirte in der Region, (2) der Geschäftsführer des regionalen Maschinenrings, (3) der BBV-Kreisverband.</a:t>
+            </a:r>
+          </a:p>
+          <a:p>
+            <a:pPr>
+              <a:spcBef>
+                <a:spcPts val="400"/>
+              </a:spcBef>
+              <a:spcAft>
+                <a:spcPts val="200"/>
+              </a:spcAft>
+            </a:pPr>
+            <a:r>
+              <a:rPr sz="1300">
+                <a:solidFill>
+                  <a:srgbClr val="3D5466"/>
+                </a:solidFill>
+                <a:latin typeface="Arial"/>
+              </a:rPr>
+              <a:t>▸  Er formuliert sein Positionierungsversprechen: „Ich bin der Ansprechpartner für Agrar- und Forstbetriebe ab 200 ha im Allgäu, wenn es um Investitionsfinanzierung, Betriebsumstrukturierung und Nachfolge geht."</a:t>
+            </a:r>
+          </a:p>
+          <a:p>
+            <a:pPr>
+              <a:spcBef>
+                <a:spcPts val="400"/>
+              </a:spcBef>
+              <a:spcAft>
+                <a:spcPts val="200"/>
+              </a:spcAft>
+            </a:pPr>
+            <a:r>
+              <a:rPr sz="1200">
+                <a:solidFill>
+                  <a:srgbClr val="3D5466"/>
+                </a:solidFill>
+                <a:latin typeface="Arial"/>
+              </a:rPr>
+              <a:t>Monat 2 – Erste Kontakte:</a:t>
+            </a:r>
+          </a:p>
+          <a:p>
+            <a:pPr>
+              <a:spcBef>
+                <a:spcPts val="400"/>
+              </a:spcBef>
+              <a:spcAft>
+                <a:spcPts val="200"/>
+              </a:spcAft>
+            </a:pPr>
+            <a:r>
+              <a:rPr sz="1300">
+                <a:solidFill>
+                  <a:srgbClr val="3D5466"/>
+                </a:solidFill>
+                <a:latin typeface="Arial"/>
+              </a:rPr>
+              <a:t>▸  Stefan ruft den Steuerberater an – nicht mit einem Verkaufsangebot, sondern mit einer konkreten Einladung: „Ich würde Ihnen gerne zeigen, wie wir bei Biogasinvestitionen vorgehen – vielleicht ist das für Ihre Mandanten relevant." Er bezieht sich dabei auf eine jüngste GAP-Meldung im Bayerischen Landwirtschaftlichen Wochenblatt als sachlichen Aufhänger. Der Steuerberater ist anfangs reserviert – Bankberater haben keinen guten Ruf bei Steuerberatern, die Direktvertrieb fürchten. Stefan macht deshalb keinen Produktbezug, sondern bietet ein fachliches Kurzgespräch über Fördermittel an, das dem Steuerberater selbst gegenüber seinen Mandanten nützt. → Treffen findet statt. Wäre möglich: Vorab-Kontakt über das BBV-Netzwerk oder ein gemeinsames IHK-Event hätte diesen Anruf noch einfacher gemacht.</a:t>
+            </a:r>
+          </a:p>
+        </p:txBody>
+      </p:sp>
+      <p:sp>
+        <p:nvSpPr>
+          <p:cNvPr id="9" name="Rectangle 8"/>
+          <p:cNvSpPr/>
+          <p:nvPr/>
+        </p:nvSpPr>
+        <p:spPr>
+          <a:xfrm>
+            <a:off x="0" y="6510528"/>
+            <a:ext cx="12188952" cy="347472"/>
+          </a:xfrm>
+          <a:prstGeom prst="rect">
+            <a:avLst/>
+          </a:prstGeom>
+          <a:solidFill>
+            <a:srgbClr val="0A1937"/>
+          </a:solidFill>
+          <a:ln>
+            <a:noFill/>
+          </a:ln>
+        </p:spPr>
+        <p:style>
+          <a:lnRef idx="1">
+            <a:schemeClr val="accent1"/>
+          </a:lnRef>
+          <a:fillRef idx="3">
+            <a:schemeClr val="accent1"/>
+          </a:fillRef>
+          <a:effectRef idx="2">
+            <a:schemeClr val="accent1"/>
+          </a:effectRef>
+          <a:fontRef idx="minor">
+            <a:schemeClr val="lt1"/>
+          </a:fontRef>
+        </p:style>
+        <p:txBody>
+          <a:bodyPr rtlCol="0" anchor="ctr"/>
+          <a:lstStyle/>
+          <a:p>
+            <a:pPr algn="ctr"/>
+          </a:p>
+        </p:txBody>
+      </p:sp>
+      <p:sp>
+        <p:nvSpPr>
+          <p:cNvPr id="10" name="TextBox 9"/>
+          <p:cNvSpPr txBox="1"/>
+          <p:nvPr/>
+        </p:nvSpPr>
+        <p:spPr>
+          <a:xfrm>
+            <a:off x="685800" y="6583680"/>
+            <a:ext cx="6490411" cy="256032"/>
+          </a:xfrm>
+          <a:prstGeom prst="rect">
+            <a:avLst/>
+          </a:prstGeom>
+          <a:noFill/>
+        </p:spPr>
+        <p:txBody>
+          <a:bodyPr wrap="none">
+            <a:spAutoFit/>
+          </a:bodyPr>
+          <a:lstStyle/>
+          <a:p>
             <a:pPr algn="l"/>
             <a:r>
-              <a:rPr sz="1400" b="0" i="0">
-                <a:solidFill>
-                  <a:srgbClr val="4D5270"/>
-                </a:solidFill>
-                <a:latin typeface="Georgia"/>
-              </a:rPr>
-              <a:t>[Name · Kontakt]</a:t>
-            </a:r>
+              <a:rPr sz="700">
+                <a:solidFill>
+                  <a:srgbClr val="A0B4D2"/>
+                </a:solidFill>
+                <a:latin typeface="JetBrains Mono"/>
+              </a:rPr>
+              <a:t>Benedikt Zoller Coaching  ·  FKB Campus  ·  M20</a:t>
+            </a:r>
+          </a:p>
+        </p:txBody>
+      </p:sp>
+    </p:spTree>
+  </p:cSld>
+  <p:clrMapOvr>
+    <a:masterClrMapping/>
+  </p:clrMapOvr>
+</p:sld>
+</file>
+
+<file path=ppt/slides/slide12.xml><?xml version="1.0" encoding="utf-8"?>
+<p:sld xmlns:a="http://schemas.openxmlformats.org/drawingml/2006/main" xmlns:p="http://schemas.openxmlformats.org/presentationml/2006/main" xmlns:r="http://schemas.openxmlformats.org/officeDocument/2006/relationships">
+  <p:cSld>
+    <p:spTree>
+      <p:nvGrpSpPr>
+        <p:cNvPr id="1" name=""/>
+        <p:cNvGrpSpPr/>
+        <p:nvPr/>
+      </p:nvGrpSpPr>
+      <p:grpSpPr/>
+      <p:sp>
+        <p:nvSpPr>
+          <p:cNvPr id="2" name="Rectangle 1"/>
+          <p:cNvSpPr/>
+          <p:nvPr/>
+        </p:nvSpPr>
+        <p:spPr>
+          <a:xfrm>
+            <a:off x="0" y="0"/>
+            <a:ext cx="12188952" cy="6858000"/>
+          </a:xfrm>
+          <a:prstGeom prst="rect">
+            <a:avLst/>
+          </a:prstGeom>
+          <a:solidFill>
+            <a:srgbClr val="EDEDF3"/>
+          </a:solidFill>
+          <a:ln>
+            <a:noFill/>
+          </a:ln>
+        </p:spPr>
+        <p:style>
+          <a:lnRef idx="1">
+            <a:schemeClr val="accent1"/>
+          </a:lnRef>
+          <a:fillRef idx="3">
+            <a:schemeClr val="accent1"/>
+          </a:fillRef>
+          <a:effectRef idx="2">
+            <a:schemeClr val="accent1"/>
+          </a:effectRef>
+          <a:fontRef idx="minor">
+            <a:schemeClr val="lt1"/>
+          </a:fontRef>
+        </p:style>
+        <p:txBody>
+          <a:bodyPr rtlCol="0" anchor="ctr"/>
+          <a:lstStyle/>
+          <a:p>
+            <a:pPr algn="ctr"/>
+          </a:p>
+        </p:txBody>
+      </p:sp>
+      <p:sp>
+        <p:nvSpPr>
+          <p:cNvPr id="3" name="Rectangle 2"/>
+          <p:cNvSpPr/>
+          <p:nvPr/>
+        </p:nvSpPr>
+        <p:spPr>
+          <a:xfrm>
+            <a:off x="0" y="0"/>
+            <a:ext cx="12188952" cy="50292"/>
+          </a:xfrm>
+          <a:prstGeom prst="rect">
+            <a:avLst/>
+          </a:prstGeom>
+          <a:solidFill>
+            <a:srgbClr val="1F2C56"/>
+          </a:solidFill>
+          <a:ln>
+            <a:noFill/>
+          </a:ln>
+        </p:spPr>
+        <p:style>
+          <a:lnRef idx="1">
+            <a:schemeClr val="accent1"/>
+          </a:lnRef>
+          <a:fillRef idx="3">
+            <a:schemeClr val="accent1"/>
+          </a:fillRef>
+          <a:effectRef idx="2">
+            <a:schemeClr val="accent1"/>
+          </a:effectRef>
+          <a:fontRef idx="minor">
+            <a:schemeClr val="lt1"/>
+          </a:fontRef>
+        </p:style>
+        <p:txBody>
+          <a:bodyPr rtlCol="0" anchor="ctr"/>
+          <a:lstStyle/>
+          <a:p>
+            <a:pPr algn="ctr"/>
+          </a:p>
+        </p:txBody>
+      </p:sp>
+      <p:sp>
+        <p:nvSpPr>
+          <p:cNvPr id="4" name="TextBox 3"/>
+          <p:cNvSpPr txBox="1"/>
+          <p:nvPr/>
+        </p:nvSpPr>
+        <p:spPr>
+          <a:xfrm>
+            <a:off x="685800" y="109728"/>
+            <a:ext cx="10817352" cy="228600"/>
+          </a:xfrm>
+          <a:prstGeom prst="rect">
+            <a:avLst/>
+          </a:prstGeom>
+          <a:noFill/>
+        </p:spPr>
+        <p:txBody>
+          <a:bodyPr wrap="none">
+            <a:spAutoFit/>
+          </a:bodyPr>
+          <a:lstStyle/>
+          <a:p>
+            <a:pPr algn="l"/>
+            <a:r>
+              <a:rPr sz="750">
+                <a:solidFill>
+                  <a:srgbClr val="78808C"/>
+                </a:solidFill>
+                <a:latin typeface="JetBrains Mono"/>
+              </a:rPr>
+              <a:t>M20  ·  INHALT</a:t>
+            </a:r>
+          </a:p>
+        </p:txBody>
+      </p:sp>
+      <p:sp>
+        <p:nvSpPr>
+          <p:cNvPr id="5" name="Rectangle 4"/>
+          <p:cNvSpPr/>
+          <p:nvPr/>
+        </p:nvSpPr>
+        <p:spPr>
+          <a:xfrm>
+            <a:off x="0" y="1234440"/>
+            <a:ext cx="12188952" cy="12700"/>
+          </a:xfrm>
+          <a:prstGeom prst="rect">
+            <a:avLst/>
+          </a:prstGeom>
+          <a:solidFill>
+            <a:srgbClr val="D8DFE4"/>
+          </a:solidFill>
+          <a:ln>
+            <a:noFill/>
+          </a:ln>
+        </p:spPr>
+        <p:style>
+          <a:lnRef idx="1">
+            <a:schemeClr val="accent1"/>
+          </a:lnRef>
+          <a:fillRef idx="3">
+            <a:schemeClr val="accent1"/>
+          </a:fillRef>
+          <a:effectRef idx="2">
+            <a:schemeClr val="accent1"/>
+          </a:effectRef>
+          <a:fontRef idx="minor">
+            <a:schemeClr val="lt1"/>
+          </a:fontRef>
+        </p:style>
+        <p:txBody>
+          <a:bodyPr rtlCol="0" anchor="ctr"/>
+          <a:lstStyle/>
+          <a:p>
+            <a:pPr algn="ctr"/>
+          </a:p>
+        </p:txBody>
+      </p:sp>
+      <p:sp>
+        <p:nvSpPr>
+          <p:cNvPr id="6" name="Rectangle 5"/>
+          <p:cNvSpPr/>
+          <p:nvPr/>
+        </p:nvSpPr>
+        <p:spPr>
+          <a:xfrm>
+            <a:off x="685800" y="502920"/>
+            <a:ext cx="36576" cy="658368"/>
+          </a:xfrm>
+          <a:prstGeom prst="rect">
+            <a:avLst/>
+          </a:prstGeom>
+          <a:solidFill>
+            <a:srgbClr val="D9C089"/>
+          </a:solidFill>
+          <a:ln>
+            <a:noFill/>
+          </a:ln>
+        </p:spPr>
+        <p:style>
+          <a:lnRef idx="1">
+            <a:schemeClr val="accent1"/>
+          </a:lnRef>
+          <a:fillRef idx="3">
+            <a:schemeClr val="accent1"/>
+          </a:fillRef>
+          <a:effectRef idx="2">
+            <a:schemeClr val="accent1"/>
+          </a:effectRef>
+          <a:fontRef idx="minor">
+            <a:schemeClr val="lt1"/>
+          </a:fontRef>
+        </p:style>
+        <p:txBody>
+          <a:bodyPr rtlCol="0" anchor="ctr"/>
+          <a:lstStyle/>
+          <a:p>
+            <a:pPr algn="ctr"/>
+          </a:p>
+        </p:txBody>
+      </p:sp>
+      <p:sp>
+        <p:nvSpPr>
+          <p:cNvPr id="7" name="TextBox 6"/>
+          <p:cNvSpPr txBox="1"/>
+          <p:nvPr/>
+        </p:nvSpPr>
+        <p:spPr>
+          <a:xfrm>
+            <a:off x="813816" y="502920"/>
+            <a:ext cx="10634472" cy="685800"/>
+          </a:xfrm>
+          <a:prstGeom prst="rect">
+            <a:avLst/>
+          </a:prstGeom>
+          <a:noFill/>
+        </p:spPr>
+        <p:txBody>
+          <a:bodyPr wrap="square">
+            <a:spAutoFit/>
+          </a:bodyPr>
+          <a:lstStyle/>
+          <a:p>
+            <a:pPr algn="l"/>
+            <a:r>
+              <a:rPr sz="2400" b="1" i="0">
+                <a:solidFill>
+                  <a:srgbClr val="1F2C56"/>
+                </a:solidFill>
+                <a:latin typeface="Source Serif 4"/>
+              </a:rPr>
+              <a:t>Arbeitsblatt 1: Persönliche Netzwerkkarte</a:t>
+            </a:r>
+          </a:p>
+        </p:txBody>
+      </p:sp>
+      <p:sp>
+        <p:nvSpPr>
+          <p:cNvPr id="8" name="TextBox 7"/>
+          <p:cNvSpPr txBox="1"/>
+          <p:nvPr/>
+        </p:nvSpPr>
+        <p:spPr>
+          <a:xfrm>
+            <a:off x="685800" y="1417320"/>
+            <a:ext cx="10817352" cy="5029200"/>
+          </a:xfrm>
+          <a:prstGeom prst="rect">
+            <a:avLst/>
+          </a:prstGeom>
+          <a:noFill/>
+        </p:spPr>
+        <p:txBody>
+          <a:bodyPr wrap="square">
+            <a:spAutoFit/>
+          </a:bodyPr>
+          <a:lstStyle/>
+          <a:p>
+            <a:pPr>
+              <a:spcBef>
+                <a:spcPts val="400"/>
+              </a:spcBef>
+              <a:spcAft>
+                <a:spcPts val="200"/>
+              </a:spcAft>
+            </a:pPr>
+            <a:r>
+              <a:rPr sz="1200">
+                <a:solidFill>
+                  <a:srgbClr val="3D5466"/>
+                </a:solidFill>
+                <a:latin typeface="Arial"/>
+              </a:rPr>
+              <a:t>(Zeichnen oder tabellarisch ausfüllen)</a:t>
+            </a:r>
+          </a:p>
+        </p:txBody>
+      </p:sp>
+      <p:sp>
+        <p:nvSpPr>
+          <p:cNvPr id="9" name="Rectangle 8"/>
+          <p:cNvSpPr/>
+          <p:nvPr/>
+        </p:nvSpPr>
+        <p:spPr>
+          <a:xfrm>
+            <a:off x="0" y="6510528"/>
+            <a:ext cx="12188952" cy="347472"/>
+          </a:xfrm>
+          <a:prstGeom prst="rect">
+            <a:avLst/>
+          </a:prstGeom>
+          <a:solidFill>
+            <a:srgbClr val="0A1937"/>
+          </a:solidFill>
+          <a:ln>
+            <a:noFill/>
+          </a:ln>
+        </p:spPr>
+        <p:style>
+          <a:lnRef idx="1">
+            <a:schemeClr val="accent1"/>
+          </a:lnRef>
+          <a:fillRef idx="3">
+            <a:schemeClr val="accent1"/>
+          </a:fillRef>
+          <a:effectRef idx="2">
+            <a:schemeClr val="accent1"/>
+          </a:effectRef>
+          <a:fontRef idx="minor">
+            <a:schemeClr val="lt1"/>
+          </a:fontRef>
+        </p:style>
+        <p:txBody>
+          <a:bodyPr rtlCol="0" anchor="ctr"/>
+          <a:lstStyle/>
+          <a:p>
+            <a:pPr algn="ctr"/>
+          </a:p>
+        </p:txBody>
+      </p:sp>
+      <p:sp>
+        <p:nvSpPr>
+          <p:cNvPr id="10" name="TextBox 9"/>
+          <p:cNvSpPr txBox="1"/>
+          <p:nvPr/>
+        </p:nvSpPr>
+        <p:spPr>
+          <a:xfrm>
+            <a:off x="685800" y="6583680"/>
+            <a:ext cx="6490411" cy="256032"/>
+          </a:xfrm>
+          <a:prstGeom prst="rect">
+            <a:avLst/>
+          </a:prstGeom>
+          <a:noFill/>
+        </p:spPr>
+        <p:txBody>
+          <a:bodyPr wrap="none">
+            <a:spAutoFit/>
+          </a:bodyPr>
+          <a:lstStyle/>
+          <a:p>
+            <a:pPr algn="l"/>
+            <a:r>
+              <a:rPr sz="700">
+                <a:solidFill>
+                  <a:srgbClr val="A0B4D2"/>
+                </a:solidFill>
+                <a:latin typeface="JetBrains Mono"/>
+              </a:rPr>
+              <a:t>Benedikt Zoller Coaching  ·  FKB Campus  ·  M20</a:t>
+            </a:r>
+          </a:p>
+        </p:txBody>
+      </p:sp>
+    </p:spTree>
+  </p:cSld>
+  <p:clrMapOvr>
+    <a:masterClrMapping/>
+  </p:clrMapOvr>
+</p:sld>
+</file>
+
+<file path=ppt/slides/slide13.xml><?xml version="1.0" encoding="utf-8"?>
+<p:sld xmlns:a="http://schemas.openxmlformats.org/drawingml/2006/main" xmlns:p="http://schemas.openxmlformats.org/presentationml/2006/main" xmlns:r="http://schemas.openxmlformats.org/officeDocument/2006/relationships">
+  <p:cSld>
+    <p:spTree>
+      <p:nvGrpSpPr>
+        <p:cNvPr id="1" name=""/>
+        <p:cNvGrpSpPr/>
+        <p:nvPr/>
+      </p:nvGrpSpPr>
+      <p:grpSpPr/>
+      <p:sp>
+        <p:nvSpPr>
+          <p:cNvPr id="2" name="Rectangle 1"/>
+          <p:cNvSpPr/>
+          <p:nvPr/>
+        </p:nvSpPr>
+        <p:spPr>
+          <a:xfrm>
+            <a:off x="0" y="0"/>
+            <a:ext cx="12188952" cy="6858000"/>
+          </a:xfrm>
+          <a:prstGeom prst="rect">
+            <a:avLst/>
+          </a:prstGeom>
+          <a:solidFill>
+            <a:srgbClr val="EDEDF3"/>
+          </a:solidFill>
+          <a:ln>
+            <a:noFill/>
+          </a:ln>
+        </p:spPr>
+        <p:style>
+          <a:lnRef idx="1">
+            <a:schemeClr val="accent1"/>
+          </a:lnRef>
+          <a:fillRef idx="3">
+            <a:schemeClr val="accent1"/>
+          </a:fillRef>
+          <a:effectRef idx="2">
+            <a:schemeClr val="accent1"/>
+          </a:effectRef>
+          <a:fontRef idx="minor">
+            <a:schemeClr val="lt1"/>
+          </a:fontRef>
+        </p:style>
+        <p:txBody>
+          <a:bodyPr rtlCol="0" anchor="ctr"/>
+          <a:lstStyle/>
+          <a:p>
+            <a:pPr algn="ctr"/>
+          </a:p>
+        </p:txBody>
+      </p:sp>
+      <p:sp>
+        <p:nvSpPr>
+          <p:cNvPr id="3" name="Rectangle 2"/>
+          <p:cNvSpPr/>
+          <p:nvPr/>
+        </p:nvSpPr>
+        <p:spPr>
+          <a:xfrm>
+            <a:off x="0" y="0"/>
+            <a:ext cx="12188952" cy="50292"/>
+          </a:xfrm>
+          <a:prstGeom prst="rect">
+            <a:avLst/>
+          </a:prstGeom>
+          <a:solidFill>
+            <a:srgbClr val="1F2C56"/>
+          </a:solidFill>
+          <a:ln>
+            <a:noFill/>
+          </a:ln>
+        </p:spPr>
+        <p:style>
+          <a:lnRef idx="1">
+            <a:schemeClr val="accent1"/>
+          </a:lnRef>
+          <a:fillRef idx="3">
+            <a:schemeClr val="accent1"/>
+          </a:fillRef>
+          <a:effectRef idx="2">
+            <a:schemeClr val="accent1"/>
+          </a:effectRef>
+          <a:fontRef idx="minor">
+            <a:schemeClr val="lt1"/>
+          </a:fontRef>
+        </p:style>
+        <p:txBody>
+          <a:bodyPr rtlCol="0" anchor="ctr"/>
+          <a:lstStyle/>
+          <a:p>
+            <a:pPr algn="ctr"/>
+          </a:p>
+        </p:txBody>
+      </p:sp>
+      <p:sp>
+        <p:nvSpPr>
+          <p:cNvPr id="4" name="TextBox 3"/>
+          <p:cNvSpPr txBox="1"/>
+          <p:nvPr/>
+        </p:nvSpPr>
+        <p:spPr>
+          <a:xfrm>
+            <a:off x="685800" y="109728"/>
+            <a:ext cx="10817352" cy="228600"/>
+          </a:xfrm>
+          <a:prstGeom prst="rect">
+            <a:avLst/>
+          </a:prstGeom>
+          <a:noFill/>
+        </p:spPr>
+        <p:txBody>
+          <a:bodyPr wrap="none">
+            <a:spAutoFit/>
+          </a:bodyPr>
+          <a:lstStyle/>
+          <a:p>
+            <a:pPr algn="l"/>
+            <a:r>
+              <a:rPr sz="750">
+                <a:solidFill>
+                  <a:srgbClr val="78808C"/>
+                </a:solidFill>
+                <a:latin typeface="JetBrains Mono"/>
+              </a:rPr>
+              <a:t>M20  ·  INHALT</a:t>
+            </a:r>
+          </a:p>
+        </p:txBody>
+      </p:sp>
+      <p:sp>
+        <p:nvSpPr>
+          <p:cNvPr id="5" name="Rectangle 4"/>
+          <p:cNvSpPr/>
+          <p:nvPr/>
+        </p:nvSpPr>
+        <p:spPr>
+          <a:xfrm>
+            <a:off x="0" y="1234440"/>
+            <a:ext cx="12188952" cy="12700"/>
+          </a:xfrm>
+          <a:prstGeom prst="rect">
+            <a:avLst/>
+          </a:prstGeom>
+          <a:solidFill>
+            <a:srgbClr val="D8DFE4"/>
+          </a:solidFill>
+          <a:ln>
+            <a:noFill/>
+          </a:ln>
+        </p:spPr>
+        <p:style>
+          <a:lnRef idx="1">
+            <a:schemeClr val="accent1"/>
+          </a:lnRef>
+          <a:fillRef idx="3">
+            <a:schemeClr val="accent1"/>
+          </a:fillRef>
+          <a:effectRef idx="2">
+            <a:schemeClr val="accent1"/>
+          </a:effectRef>
+          <a:fontRef idx="minor">
+            <a:schemeClr val="lt1"/>
+          </a:fontRef>
+        </p:style>
+        <p:txBody>
+          <a:bodyPr rtlCol="0" anchor="ctr"/>
+          <a:lstStyle/>
+          <a:p>
+            <a:pPr algn="ctr"/>
+          </a:p>
+        </p:txBody>
+      </p:sp>
+      <p:sp>
+        <p:nvSpPr>
+          <p:cNvPr id="6" name="Rectangle 5"/>
+          <p:cNvSpPr/>
+          <p:nvPr/>
+        </p:nvSpPr>
+        <p:spPr>
+          <a:xfrm>
+            <a:off x="685800" y="502920"/>
+            <a:ext cx="36576" cy="658368"/>
+          </a:xfrm>
+          <a:prstGeom prst="rect">
+            <a:avLst/>
+          </a:prstGeom>
+          <a:solidFill>
+            <a:srgbClr val="D9C089"/>
+          </a:solidFill>
+          <a:ln>
+            <a:noFill/>
+          </a:ln>
+        </p:spPr>
+        <p:style>
+          <a:lnRef idx="1">
+            <a:schemeClr val="accent1"/>
+          </a:lnRef>
+          <a:fillRef idx="3">
+            <a:schemeClr val="accent1"/>
+          </a:fillRef>
+          <a:effectRef idx="2">
+            <a:schemeClr val="accent1"/>
+          </a:effectRef>
+          <a:fontRef idx="minor">
+            <a:schemeClr val="lt1"/>
+          </a:fontRef>
+        </p:style>
+        <p:txBody>
+          <a:bodyPr rtlCol="0" anchor="ctr"/>
+          <a:lstStyle/>
+          <a:p>
+            <a:pPr algn="ctr"/>
+          </a:p>
+        </p:txBody>
+      </p:sp>
+      <p:sp>
+        <p:nvSpPr>
+          <p:cNvPr id="7" name="TextBox 6"/>
+          <p:cNvSpPr txBox="1"/>
+          <p:nvPr/>
+        </p:nvSpPr>
+        <p:spPr>
+          <a:xfrm>
+            <a:off x="813816" y="502920"/>
+            <a:ext cx="10634472" cy="685800"/>
+          </a:xfrm>
+          <a:prstGeom prst="rect">
+            <a:avLst/>
+          </a:prstGeom>
+          <a:noFill/>
+        </p:spPr>
+        <p:txBody>
+          <a:bodyPr wrap="square">
+            <a:spAutoFit/>
+          </a:bodyPr>
+          <a:lstStyle/>
+          <a:p>
+            <a:pPr algn="l"/>
+            <a:r>
+              <a:rPr sz="2400" b="1" i="0">
+                <a:solidFill>
+                  <a:srgbClr val="1F2C56"/>
+                </a:solidFill>
+                <a:latin typeface="Source Serif 4"/>
+              </a:rPr>
+              <a:t>Arbeitsblatt 2: Lückenanalyse</a:t>
+            </a:r>
+          </a:p>
+        </p:txBody>
+      </p:sp>
+      <p:sp>
+        <p:nvSpPr>
+          <p:cNvPr id="8" name="Rectangle 7"/>
+          <p:cNvSpPr/>
+          <p:nvPr/>
+        </p:nvSpPr>
+        <p:spPr>
+          <a:xfrm>
+            <a:off x="0" y="6510528"/>
+            <a:ext cx="12188952" cy="347472"/>
+          </a:xfrm>
+          <a:prstGeom prst="rect">
+            <a:avLst/>
+          </a:prstGeom>
+          <a:solidFill>
+            <a:srgbClr val="0A1937"/>
+          </a:solidFill>
+          <a:ln>
+            <a:noFill/>
+          </a:ln>
+        </p:spPr>
+        <p:style>
+          <a:lnRef idx="1">
+            <a:schemeClr val="accent1"/>
+          </a:lnRef>
+          <a:fillRef idx="3">
+            <a:schemeClr val="accent1"/>
+          </a:fillRef>
+          <a:effectRef idx="2">
+            <a:schemeClr val="accent1"/>
+          </a:effectRef>
+          <a:fontRef idx="minor">
+            <a:schemeClr val="lt1"/>
+          </a:fontRef>
+        </p:style>
+        <p:txBody>
+          <a:bodyPr rtlCol="0" anchor="ctr"/>
+          <a:lstStyle/>
+          <a:p>
+            <a:pPr algn="ctr"/>
           </a:p>
         </p:txBody>
       </p:sp>
@@ -4241,8 +5289,8 @@
         </p:nvSpPr>
         <p:spPr>
           <a:xfrm>
-            <a:off x="9398000" y="4953000"/>
-            <a:ext cx="2184400" cy="177800"/>
+            <a:off x="685800" y="6583680"/>
+            <a:ext cx="6490411" cy="256032"/>
           </a:xfrm>
           <a:prstGeom prst="rect">
             <a:avLst/>
@@ -4250,21 +5298,366 @@
           <a:noFill/>
         </p:spPr>
         <p:txBody>
+          <a:bodyPr wrap="none">
+            <a:spAutoFit/>
+          </a:bodyPr>
+          <a:lstStyle/>
+          <a:p>
+            <a:pPr algn="l"/>
+            <a:r>
+              <a:rPr sz="700">
+                <a:solidFill>
+                  <a:srgbClr val="A0B4D2"/>
+                </a:solidFill>
+                <a:latin typeface="JetBrains Mono"/>
+              </a:rPr>
+              <a:t>Benedikt Zoller Coaching  ·  FKB Campus  ·  M20</a:t>
+            </a:r>
+          </a:p>
+        </p:txBody>
+      </p:sp>
+    </p:spTree>
+  </p:cSld>
+  <p:clrMapOvr>
+    <a:masterClrMapping/>
+  </p:clrMapOvr>
+</p:sld>
+</file>
+
+<file path=ppt/slides/slide14.xml><?xml version="1.0" encoding="utf-8"?>
+<p:sld xmlns:a="http://schemas.openxmlformats.org/drawingml/2006/main" xmlns:p="http://schemas.openxmlformats.org/presentationml/2006/main" xmlns:r="http://schemas.openxmlformats.org/officeDocument/2006/relationships">
+  <p:cSld>
+    <p:spTree>
+      <p:nvGrpSpPr>
+        <p:cNvPr id="1" name=""/>
+        <p:cNvGrpSpPr/>
+        <p:nvPr/>
+      </p:nvGrpSpPr>
+      <p:grpSpPr/>
+      <p:sp>
+        <p:nvSpPr>
+          <p:cNvPr id="2" name="Rectangle 1"/>
+          <p:cNvSpPr/>
+          <p:nvPr/>
+        </p:nvSpPr>
+        <p:spPr>
+          <a:xfrm>
+            <a:off x="0" y="0"/>
+            <a:ext cx="12188952" cy="6858000"/>
+          </a:xfrm>
+          <a:prstGeom prst="rect">
+            <a:avLst/>
+          </a:prstGeom>
+          <a:solidFill>
+            <a:srgbClr val="EDEDF3"/>
+          </a:solidFill>
+          <a:ln>
+            <a:noFill/>
+          </a:ln>
+        </p:spPr>
+        <p:style>
+          <a:lnRef idx="1">
+            <a:schemeClr val="accent1"/>
+          </a:lnRef>
+          <a:fillRef idx="3">
+            <a:schemeClr val="accent1"/>
+          </a:fillRef>
+          <a:effectRef idx="2">
+            <a:schemeClr val="accent1"/>
+          </a:effectRef>
+          <a:fontRef idx="minor">
+            <a:schemeClr val="lt1"/>
+          </a:fontRef>
+        </p:style>
+        <p:txBody>
+          <a:bodyPr rtlCol="0" anchor="ctr"/>
+          <a:lstStyle/>
+          <a:p>
+            <a:pPr algn="ctr"/>
+          </a:p>
+        </p:txBody>
+      </p:sp>
+      <p:sp>
+        <p:nvSpPr>
+          <p:cNvPr id="3" name="Rectangle 2"/>
+          <p:cNvSpPr/>
+          <p:nvPr/>
+        </p:nvSpPr>
+        <p:spPr>
+          <a:xfrm>
+            <a:off x="0" y="0"/>
+            <a:ext cx="12188952" cy="50292"/>
+          </a:xfrm>
+          <a:prstGeom prst="rect">
+            <a:avLst/>
+          </a:prstGeom>
+          <a:solidFill>
+            <a:srgbClr val="1F2C56"/>
+          </a:solidFill>
+          <a:ln>
+            <a:noFill/>
+          </a:ln>
+        </p:spPr>
+        <p:style>
+          <a:lnRef idx="1">
+            <a:schemeClr val="accent1"/>
+          </a:lnRef>
+          <a:fillRef idx="3">
+            <a:schemeClr val="accent1"/>
+          </a:fillRef>
+          <a:effectRef idx="2">
+            <a:schemeClr val="accent1"/>
+          </a:effectRef>
+          <a:fontRef idx="minor">
+            <a:schemeClr val="lt1"/>
+          </a:fontRef>
+        </p:style>
+        <p:txBody>
+          <a:bodyPr rtlCol="0" anchor="ctr"/>
+          <a:lstStyle/>
+          <a:p>
+            <a:pPr algn="ctr"/>
+          </a:p>
+        </p:txBody>
+      </p:sp>
+      <p:sp>
+        <p:nvSpPr>
+          <p:cNvPr id="4" name="TextBox 3"/>
+          <p:cNvSpPr txBox="1"/>
+          <p:nvPr/>
+        </p:nvSpPr>
+        <p:spPr>
+          <a:xfrm>
+            <a:off x="685800" y="109728"/>
+            <a:ext cx="10817352" cy="228600"/>
+          </a:xfrm>
+          <a:prstGeom prst="rect">
+            <a:avLst/>
+          </a:prstGeom>
+          <a:noFill/>
+        </p:spPr>
+        <p:txBody>
+          <a:bodyPr wrap="none">
+            <a:spAutoFit/>
+          </a:bodyPr>
+          <a:lstStyle/>
+          <a:p>
+            <a:pPr algn="l"/>
+            <a:r>
+              <a:rPr sz="750">
+                <a:solidFill>
+                  <a:srgbClr val="78808C"/>
+                </a:solidFill>
+                <a:latin typeface="JetBrains Mono"/>
+              </a:rPr>
+              <a:t>M20  ·  INHALT</a:t>
+            </a:r>
+          </a:p>
+        </p:txBody>
+      </p:sp>
+      <p:sp>
+        <p:nvSpPr>
+          <p:cNvPr id="5" name="Rectangle 4"/>
+          <p:cNvSpPr/>
+          <p:nvPr/>
+        </p:nvSpPr>
+        <p:spPr>
+          <a:xfrm>
+            <a:off x="0" y="1234440"/>
+            <a:ext cx="12188952" cy="12700"/>
+          </a:xfrm>
+          <a:prstGeom prst="rect">
+            <a:avLst/>
+          </a:prstGeom>
+          <a:solidFill>
+            <a:srgbClr val="D8DFE4"/>
+          </a:solidFill>
+          <a:ln>
+            <a:noFill/>
+          </a:ln>
+        </p:spPr>
+        <p:style>
+          <a:lnRef idx="1">
+            <a:schemeClr val="accent1"/>
+          </a:lnRef>
+          <a:fillRef idx="3">
+            <a:schemeClr val="accent1"/>
+          </a:fillRef>
+          <a:effectRef idx="2">
+            <a:schemeClr val="accent1"/>
+          </a:effectRef>
+          <a:fontRef idx="minor">
+            <a:schemeClr val="lt1"/>
+          </a:fontRef>
+        </p:style>
+        <p:txBody>
+          <a:bodyPr rtlCol="0" anchor="ctr"/>
+          <a:lstStyle/>
+          <a:p>
+            <a:pPr algn="ctr"/>
+          </a:p>
+        </p:txBody>
+      </p:sp>
+      <p:sp>
+        <p:nvSpPr>
+          <p:cNvPr id="6" name="Rectangle 5"/>
+          <p:cNvSpPr/>
+          <p:nvPr/>
+        </p:nvSpPr>
+        <p:spPr>
+          <a:xfrm>
+            <a:off x="685800" y="502920"/>
+            <a:ext cx="36576" cy="658368"/>
+          </a:xfrm>
+          <a:prstGeom prst="rect">
+            <a:avLst/>
+          </a:prstGeom>
+          <a:solidFill>
+            <a:srgbClr val="D9C089"/>
+          </a:solidFill>
+          <a:ln>
+            <a:noFill/>
+          </a:ln>
+        </p:spPr>
+        <p:style>
+          <a:lnRef idx="1">
+            <a:schemeClr val="accent1"/>
+          </a:lnRef>
+          <a:fillRef idx="3">
+            <a:schemeClr val="accent1"/>
+          </a:fillRef>
+          <a:effectRef idx="2">
+            <a:schemeClr val="accent1"/>
+          </a:effectRef>
+          <a:fontRef idx="minor">
+            <a:schemeClr val="lt1"/>
+          </a:fontRef>
+        </p:style>
+        <p:txBody>
+          <a:bodyPr rtlCol="0" anchor="ctr"/>
+          <a:lstStyle/>
+          <a:p>
+            <a:pPr algn="ctr"/>
+          </a:p>
+        </p:txBody>
+      </p:sp>
+      <p:sp>
+        <p:nvSpPr>
+          <p:cNvPr id="7" name="TextBox 6"/>
+          <p:cNvSpPr txBox="1"/>
+          <p:nvPr/>
+        </p:nvSpPr>
+        <p:spPr>
+          <a:xfrm>
+            <a:off x="813816" y="502920"/>
+            <a:ext cx="10634472" cy="685800"/>
+          </a:xfrm>
+          <a:prstGeom prst="rect">
+            <a:avLst/>
+          </a:prstGeom>
+          <a:noFill/>
+        </p:spPr>
+        <p:txBody>
           <a:bodyPr wrap="square">
-            <a:normAutofit/>
+            <a:spAutoFit/>
           </a:bodyPr>
           <a:lstStyle/>
           <a:p>
             <a:pPr algn="l"/>
             <a:r>
-              <a:rPr sz="900" b="0" i="0">
-                <a:solidFill>
-                  <a:srgbClr val="7B7FA0"/>
-                </a:solidFill>
-                <a:latin typeface="Courier New"/>
-              </a:rPr>
-              <a:t>Modul</a:t>
-            </a:r>
+              <a:rPr sz="2400" b="1" i="0">
+                <a:solidFill>
+                  <a:srgbClr val="1F2C56"/>
+                </a:solidFill>
+                <a:latin typeface="Source Serif 4"/>
+              </a:rPr>
+              <a:t>Arbeitsblatt 3: 90-Tage-Aktionsplan</a:t>
+            </a:r>
+          </a:p>
+        </p:txBody>
+      </p:sp>
+      <p:sp>
+        <p:nvSpPr>
+          <p:cNvPr id="8" name="TextBox 7"/>
+          <p:cNvSpPr txBox="1"/>
+          <p:nvPr/>
+        </p:nvSpPr>
+        <p:spPr>
+          <a:xfrm>
+            <a:off x="685800" y="1417320"/>
+            <a:ext cx="10817352" cy="5029200"/>
+          </a:xfrm>
+          <a:prstGeom prst="rect">
+            <a:avLst/>
+          </a:prstGeom>
+          <a:noFill/>
+        </p:spPr>
+        <p:txBody>
+          <a:bodyPr wrap="square">
+            <a:spAutoFit/>
+          </a:bodyPr>
+          <a:lstStyle/>
+          <a:p>
+            <a:pPr>
+              <a:spcBef>
+                <a:spcPts val="400"/>
+              </a:spcBef>
+              <a:spcAft>
+                <a:spcPts val="200"/>
+              </a:spcAft>
+            </a:pPr>
+            <a:r>
+              <a:rPr sz="1200">
+                <a:solidFill>
+                  <a:srgbClr val="3D5466"/>
+                </a:solidFill>
+                <a:latin typeface="Arial"/>
+              </a:rPr>
+              <a:t># 5. PRAXISTRANSFER</a:t>
+            </a:r>
+          </a:p>
+        </p:txBody>
+      </p:sp>
+      <p:sp>
+        <p:nvSpPr>
+          <p:cNvPr id="9" name="Rectangle 8"/>
+          <p:cNvSpPr/>
+          <p:nvPr/>
+        </p:nvSpPr>
+        <p:spPr>
+          <a:xfrm>
+            <a:off x="0" y="6510528"/>
+            <a:ext cx="12188952" cy="347472"/>
+          </a:xfrm>
+          <a:prstGeom prst="rect">
+            <a:avLst/>
+          </a:prstGeom>
+          <a:solidFill>
+            <a:srgbClr val="0A1937"/>
+          </a:solidFill>
+          <a:ln>
+            <a:noFill/>
+          </a:ln>
+        </p:spPr>
+        <p:style>
+          <a:lnRef idx="1">
+            <a:schemeClr val="accent1"/>
+          </a:lnRef>
+          <a:fillRef idx="3">
+            <a:schemeClr val="accent1"/>
+          </a:fillRef>
+          <a:effectRef idx="2">
+            <a:schemeClr val="accent1"/>
+          </a:effectRef>
+          <a:fontRef idx="minor">
+            <a:schemeClr val="lt1"/>
+          </a:fontRef>
+        </p:style>
+        <p:txBody>
+          <a:bodyPr rtlCol="0" anchor="ctr"/>
+          <a:lstStyle/>
+          <a:p>
+            <a:pPr algn="ctr"/>
           </a:p>
         </p:txBody>
       </p:sp>
@@ -4276,8 +5669,8 @@
         </p:nvSpPr>
         <p:spPr>
           <a:xfrm>
-            <a:off x="9398000" y="5156200"/>
-            <a:ext cx="2184400" cy="381000"/>
+            <a:off x="685800" y="6583680"/>
+            <a:ext cx="6490411" cy="256032"/>
           </a:xfrm>
           <a:prstGeom prst="rect">
             <a:avLst/>
@@ -4285,20 +5678,20 @@
           <a:noFill/>
         </p:spPr>
         <p:txBody>
-          <a:bodyPr wrap="square">
-            <a:normAutofit/>
+          <a:bodyPr wrap="none">
+            <a:spAutoFit/>
           </a:bodyPr>
           <a:lstStyle/>
           <a:p>
             <a:pPr algn="l"/>
             <a:r>
-              <a:rPr sz="1400" b="0" i="0">
-                <a:solidFill>
-                  <a:srgbClr val="191D2E"/>
-                </a:solidFill>
-                <a:latin typeface="Georgia"/>
-              </a:rPr>
-              <a:t>M20 · Stratege</a:t>
+              <a:rPr sz="700">
+                <a:solidFill>
+                  <a:srgbClr val="A0B4D2"/>
+                </a:solidFill>
+                <a:latin typeface="JetBrains Mono"/>
+              </a:rPr>
+              <a:t>Benedikt Zoller Coaching  ·  FKB Campus  ·  M20</a:t>
             </a:r>
           </a:p>
         </p:txBody>
@@ -4314,14 +5707,6 @@
 <file path=ppt/slides/slide2.xml><?xml version="1.0" encoding="utf-8"?>
 <p:sld xmlns:a="http://schemas.openxmlformats.org/drawingml/2006/main" xmlns:p="http://schemas.openxmlformats.org/presentationml/2006/main" xmlns:r="http://schemas.openxmlformats.org/officeDocument/2006/relationships">
   <p:cSld>
-    <p:bg>
-      <p:bgPr>
-        <a:solidFill>
-          <a:srgbClr val="F8F8FA"/>
-        </a:solidFill>
-        <a:effectLst/>
-      </p:bgPr>
-    </p:bg>
     <p:spTree>
       <p:nvGrpSpPr>
         <p:cNvPr id="1" name=""/>
@@ -4331,125 +5716,20 @@
       <p:grpSpPr/>
       <p:sp>
         <p:nvSpPr>
-          <p:cNvPr id="2" name="TextBox 1"/>
-          <p:cNvSpPr txBox="1"/>
-          <p:nvPr/>
-        </p:nvSpPr>
-        <p:spPr>
-          <a:xfrm>
-            <a:off x="609600" y="279400"/>
-            <a:ext cx="2540000" cy="279400"/>
-          </a:xfrm>
-          <a:prstGeom prst="rect">
-            <a:avLst/>
-          </a:prstGeom>
-          <a:noFill/>
-        </p:spPr>
-        <p:txBody>
-          <a:bodyPr wrap="square">
-            <a:normAutofit/>
-          </a:bodyPr>
-          <a:lstStyle/>
-          <a:p>
-            <a:pPr algn="l"/>
-            <a:r>
-              <a:rPr sz="1000" b="1" i="0">
-                <a:solidFill>
-                  <a:srgbClr val="191D2E"/>
-                </a:solidFill>
-                <a:latin typeface="Arial"/>
-              </a:rPr>
-              <a:t>FKB  Campus</a:t>
-            </a:r>
-          </a:p>
-        </p:txBody>
-      </p:sp>
-      <p:sp>
-        <p:nvSpPr>
-          <p:cNvPr id="3" name="TextBox 2"/>
-          <p:cNvSpPr txBox="1"/>
-          <p:nvPr/>
-        </p:nvSpPr>
-        <p:spPr>
-          <a:xfrm>
-            <a:off x="609600" y="279400"/>
-            <a:ext cx="10972800" cy="279400"/>
-          </a:xfrm>
-          <a:prstGeom prst="rect">
-            <a:avLst/>
-          </a:prstGeom>
-          <a:noFill/>
-        </p:spPr>
-        <p:txBody>
-          <a:bodyPr wrap="square">
-            <a:normAutofit/>
-          </a:bodyPr>
-          <a:lstStyle/>
-          <a:p>
-            <a:pPr algn="r"/>
-            <a:r>
-              <a:rPr sz="900" b="0" i="0">
-                <a:solidFill>
-                  <a:srgbClr val="7B7FA0"/>
-                </a:solidFill>
-                <a:latin typeface="Courier New"/>
-              </a:rPr>
-              <a:t>§ 00 — LERNZIELE</a:t>
-            </a:r>
-          </a:p>
-        </p:txBody>
-      </p:sp>
-      <p:sp>
-        <p:nvSpPr>
-          <p:cNvPr id="4" name="TextBox 3"/>
-          <p:cNvSpPr txBox="1"/>
-          <p:nvPr/>
-        </p:nvSpPr>
-        <p:spPr>
-          <a:xfrm>
-            <a:off x="609600" y="6426200"/>
-            <a:ext cx="10972800" cy="228600"/>
-          </a:xfrm>
-          <a:prstGeom prst="rect">
-            <a:avLst/>
-          </a:prstGeom>
-          <a:noFill/>
-        </p:spPr>
-        <p:txBody>
-          <a:bodyPr wrap="square">
-            <a:normAutofit/>
-          </a:bodyPr>
-          <a:lstStyle/>
-          <a:p>
-            <a:pPr algn="r"/>
-            <a:r>
-              <a:rPr sz="900" b="0" i="0">
-                <a:solidFill>
-                  <a:srgbClr val="7B7FA0"/>
-                </a:solidFill>
-                <a:latin typeface="Courier New"/>
-              </a:rPr>
-              <a:t>02</a:t>
-            </a:r>
-          </a:p>
-        </p:txBody>
-      </p:sp>
-      <p:sp>
-        <p:nvSpPr>
-          <p:cNvPr id="5" name="Rectangle 4"/>
+          <p:cNvPr id="2" name="Rectangle 1"/>
           <p:cNvSpPr/>
           <p:nvPr/>
         </p:nvSpPr>
         <p:spPr>
           <a:xfrm>
-            <a:off x="609600" y="825500"/>
-            <a:ext cx="10972800" cy="6350"/>
+            <a:off x="0" y="0"/>
+            <a:ext cx="12188952" cy="6858000"/>
           </a:xfrm>
           <a:prstGeom prst="rect">
             <a:avLst/>
           </a:prstGeom>
           <a:solidFill>
-            <a:srgbClr val="191D2E"/>
+            <a:srgbClr val="EDEDF3"/>
           </a:solidFill>
           <a:ln>
             <a:noFill/>
@@ -4479,55 +5759,20 @@
       </p:sp>
       <p:sp>
         <p:nvSpPr>
-          <p:cNvPr id="6" name="TextBox 5"/>
-          <p:cNvSpPr txBox="1"/>
-          <p:nvPr/>
-        </p:nvSpPr>
-        <p:spPr>
-          <a:xfrm>
-            <a:off x="609600" y="920750"/>
-            <a:ext cx="3175000" cy="1651000"/>
-          </a:xfrm>
-          <a:prstGeom prst="rect">
-            <a:avLst/>
-          </a:prstGeom>
-          <a:noFill/>
-        </p:spPr>
-        <p:txBody>
-          <a:bodyPr wrap="square">
-            <a:normAutofit/>
-          </a:bodyPr>
-          <a:lstStyle/>
-          <a:p>
-            <a:pPr algn="l"/>
-            <a:r>
-              <a:rPr sz="4800" b="0" i="1">
-                <a:solidFill>
-                  <a:srgbClr val="1F2B56"/>
-                </a:solidFill>
-                <a:latin typeface="Georgia"/>
-              </a:rPr>
-              <a:t>Inhalt.</a:t>
-            </a:r>
-          </a:p>
-        </p:txBody>
-      </p:sp>
-      <p:sp>
-        <p:nvSpPr>
-          <p:cNvPr id="7" name="Rectangle 6"/>
+          <p:cNvPr id="3" name="Rectangle 2"/>
           <p:cNvSpPr/>
           <p:nvPr/>
         </p:nvSpPr>
         <p:spPr>
           <a:xfrm>
-            <a:off x="4064000" y="889000"/>
-            <a:ext cx="7518399" cy="6350"/>
+            <a:off x="0" y="0"/>
+            <a:ext cx="12188952" cy="50292"/>
           </a:xfrm>
           <a:prstGeom prst="rect">
             <a:avLst/>
           </a:prstGeom>
           <a:solidFill>
-            <a:srgbClr val="E0E0E8"/>
+            <a:srgbClr val="1F2C56"/>
           </a:solidFill>
           <a:ln>
             <a:noFill/>
@@ -4557,14 +5802,14 @@
       </p:sp>
       <p:sp>
         <p:nvSpPr>
-          <p:cNvPr id="8" name="TextBox 7"/>
+          <p:cNvPr id="4" name="TextBox 3"/>
           <p:cNvSpPr txBox="1"/>
           <p:nvPr/>
         </p:nvSpPr>
         <p:spPr>
           <a:xfrm>
-            <a:off x="4064000" y="939799"/>
-            <a:ext cx="762000" cy="647700"/>
+            <a:off x="685800" y="109728"/>
+            <a:ext cx="10817352" cy="228600"/>
           </a:xfrm>
           <a:prstGeom prst="rect">
             <a:avLst/>
@@ -4573,74 +5818,39 @@
         </p:spPr>
         <p:txBody>
           <a:bodyPr wrap="none">
-            <a:normAutofit/>
+            <a:spAutoFit/>
           </a:bodyPr>
           <a:lstStyle/>
           <a:p>
             <a:pPr algn="l"/>
             <a:r>
-              <a:rPr sz="2400" b="0" i="1">
-                <a:solidFill>
-                  <a:srgbClr val="1F2B56"/>
-                </a:solidFill>
-                <a:latin typeface="Georgia"/>
-              </a:rPr>
-              <a:t>I</a:t>
-            </a:r>
-          </a:p>
-        </p:txBody>
-      </p:sp>
-      <p:sp>
-        <p:nvSpPr>
-          <p:cNvPr id="9" name="TextBox 8"/>
-          <p:cNvSpPr txBox="1"/>
-          <p:nvPr/>
-        </p:nvSpPr>
-        <p:spPr>
-          <a:xfrm>
-            <a:off x="4953000" y="952500"/>
-            <a:ext cx="6629400" cy="635000"/>
-          </a:xfrm>
-          <a:prstGeom prst="rect">
-            <a:avLst/>
-          </a:prstGeom>
-          <a:noFill/>
-        </p:spPr>
-        <p:txBody>
-          <a:bodyPr wrap="square">
-            <a:normAutofit/>
-          </a:bodyPr>
-          <a:lstStyle/>
-          <a:p>
-            <a:pPr algn="l"/>
-            <a:r>
-              <a:rPr sz="1400" b="0" i="0">
-                <a:solidFill>
-                  <a:srgbClr val="191D2E"/>
-                </a:solidFill>
-                <a:latin typeface="Georgia"/>
-              </a:rPr>
-              <a:t>Eigenes Netzwerk nach Stärke, Brücken und Lücken analysieren und Erweiterungsstrategie ableiten</a:t>
-            </a:r>
-          </a:p>
-        </p:txBody>
-      </p:sp>
-      <p:sp>
-        <p:nvSpPr>
-          <p:cNvPr id="10" name="Rectangle 9"/>
+              <a:rPr sz="750">
+                <a:solidFill>
+                  <a:srgbClr val="78808C"/>
+                </a:solidFill>
+                <a:latin typeface="JetBrains Mono"/>
+              </a:rPr>
+              <a:t>LERNZIELE  ·  M20</a:t>
+            </a:r>
+          </a:p>
+        </p:txBody>
+      </p:sp>
+      <p:sp>
+        <p:nvSpPr>
+          <p:cNvPr id="5" name="Rectangle 4"/>
           <p:cNvSpPr/>
           <p:nvPr/>
         </p:nvSpPr>
         <p:spPr>
           <a:xfrm>
-            <a:off x="4064000" y="1587500"/>
-            <a:ext cx="7518399" cy="6350"/>
+            <a:off x="0" y="1234440"/>
+            <a:ext cx="12188952" cy="12700"/>
           </a:xfrm>
           <a:prstGeom prst="rect">
             <a:avLst/>
           </a:prstGeom>
           <a:solidFill>
-            <a:srgbClr val="E0E0E8"/>
+            <a:srgbClr val="D8DFE4"/>
           </a:solidFill>
           <a:ln>
             <a:noFill/>
@@ -4670,14 +5880,14 @@
       </p:sp>
       <p:sp>
         <p:nvSpPr>
-          <p:cNvPr id="11" name="TextBox 10"/>
+          <p:cNvPr id="6" name="TextBox 5"/>
           <p:cNvSpPr txBox="1"/>
           <p:nvPr/>
         </p:nvSpPr>
         <p:spPr>
           <a:xfrm>
-            <a:off x="4064000" y="1638300"/>
-            <a:ext cx="762000" cy="647700"/>
+            <a:off x="685800" y="502920"/>
+            <a:ext cx="10817352" cy="658368"/>
           </a:xfrm>
           <a:prstGeom prst="rect">
             <a:avLst/>
@@ -4685,34 +5895,34 @@
           <a:noFill/>
         </p:spPr>
         <p:txBody>
-          <a:bodyPr wrap="none">
-            <a:normAutofit/>
+          <a:bodyPr wrap="square">
+            <a:spAutoFit/>
           </a:bodyPr>
           <a:lstStyle/>
           <a:p>
             <a:pPr algn="l"/>
             <a:r>
-              <a:rPr sz="2400" b="0" i="1">
-                <a:solidFill>
-                  <a:srgbClr val="1F2B56"/>
-                </a:solidFill>
-                <a:latin typeface="Georgia"/>
-              </a:rPr>
-              <a:t>II</a:t>
-            </a:r>
-          </a:p>
-        </p:txBody>
-      </p:sp>
-      <p:sp>
-        <p:nvSpPr>
-          <p:cNvPr id="12" name="TextBox 11"/>
+              <a:rPr sz="2600" b="1" i="0">
+                <a:solidFill>
+                  <a:srgbClr val="1F2C56"/>
+                </a:solidFill>
+                <a:latin typeface="Source Serif 4"/>
+              </a:rPr>
+              <a:t>Was Sie heute mitnehmen</a:t>
+            </a:r>
+          </a:p>
+        </p:txBody>
+      </p:sp>
+      <p:sp>
+        <p:nvSpPr>
+          <p:cNvPr id="7" name="TextBox 6"/>
           <p:cNvSpPr txBox="1"/>
           <p:nvPr/>
         </p:nvSpPr>
         <p:spPr>
           <a:xfrm>
-            <a:off x="4953000" y="1651000"/>
-            <a:ext cx="6629400" cy="635000"/>
+            <a:off x="685800" y="1371600"/>
+            <a:ext cx="10817352" cy="5120640"/>
           </a:xfrm>
           <a:prstGeom prst="rect">
             <a:avLst/>
@@ -4721,39 +5931,122 @@
         </p:spPr>
         <p:txBody>
           <a:bodyPr wrap="square">
-            <a:normAutofit/>
+            <a:spAutoFit/>
           </a:bodyPr>
           <a:lstStyle/>
           <a:p>
-            <a:pPr algn="l"/>
-            <a:r>
-              <a:rPr sz="1400" b="0" i="0">
-                <a:solidFill>
-                  <a:srgbClr val="191D2E"/>
-                </a:solidFill>
-                <a:latin typeface="Georgia"/>
-              </a:rPr>
-              <a:t>Verschiedene Netzwerk-Kanäle nach strategischer Eignung bewerten</a:t>
-            </a:r>
-          </a:p>
-        </p:txBody>
-      </p:sp>
-      <p:sp>
-        <p:nvSpPr>
-          <p:cNvPr id="13" name="Rectangle 12"/>
+            <a:pPr>
+              <a:spcBef>
+                <a:spcPts val="800"/>
+              </a:spcBef>
+              <a:spcAft>
+                <a:spcPts val="200"/>
+              </a:spcAft>
+            </a:pPr>
+            <a:r>
+              <a:rPr sz="1400">
+                <a:solidFill>
+                  <a:srgbClr val="3D5466"/>
+                </a:solidFill>
+                <a:latin typeface="Arial"/>
+              </a:rPr>
+              <a:t>▸  Eigenes Netzwerk nach Stärke, Brücken und Lücken analysieren und Erweiterungsstrategie ableiten</a:t>
+            </a:r>
+          </a:p>
+          <a:p>
+            <a:pPr>
+              <a:spcBef>
+                <a:spcPts val="800"/>
+              </a:spcBef>
+              <a:spcAft>
+                <a:spcPts val="200"/>
+              </a:spcAft>
+            </a:pPr>
+            <a:r>
+              <a:rPr sz="1400">
+                <a:solidFill>
+                  <a:srgbClr val="3D5466"/>
+                </a:solidFill>
+                <a:latin typeface="Arial"/>
+              </a:rPr>
+              <a:t>▸  Verschiedene Netzwerk-Kanäle nach strategischer Eignung bewerten</a:t>
+            </a:r>
+          </a:p>
+          <a:p>
+            <a:pPr>
+              <a:spcBef>
+                <a:spcPts val="800"/>
+              </a:spcBef>
+              <a:spcAft>
+                <a:spcPts val="200"/>
+              </a:spcAft>
+            </a:pPr>
+            <a:r>
+              <a:rPr sz="1400">
+                <a:solidFill>
+                  <a:srgbClr val="3D5466"/>
+                </a:solidFill>
+                <a:latin typeface="Arial"/>
+              </a:rPr>
+              <a:t>▸  Persönliche Sichtbarkeitsstrategie entwickeln</a:t>
+            </a:r>
+          </a:p>
+          <a:p>
+            <a:pPr>
+              <a:spcBef>
+                <a:spcPts val="800"/>
+              </a:spcBef>
+              <a:spcAft>
+                <a:spcPts val="200"/>
+              </a:spcAft>
+            </a:pPr>
+            <a:r>
+              <a:rPr sz="1400">
+                <a:solidFill>
+                  <a:srgbClr val="3D5466"/>
+                </a:solidFill>
+                <a:latin typeface="Arial"/>
+              </a:rPr>
+              <a:t>▸  90-Tage-Netzwerkstrategie mit konkreten Aktivitäten gestalten</a:t>
+            </a:r>
+          </a:p>
+          <a:p>
+            <a:pPr>
+              <a:spcBef>
+                <a:spcPts val="800"/>
+              </a:spcBef>
+              <a:spcAft>
+                <a:spcPts val="200"/>
+              </a:spcAft>
+            </a:pPr>
+            <a:r>
+              <a:rPr sz="1400">
+                <a:solidFill>
+                  <a:srgbClr val="3D5466"/>
+                </a:solidFill>
+                <a:latin typeface="Arial"/>
+              </a:rPr>
+              <a:t>▸  Operative Netzwerkpflege von strategischem Beziehungsaufbau unterscheiden</a:t>
+            </a:r>
+          </a:p>
+        </p:txBody>
+      </p:sp>
+      <p:sp>
+        <p:nvSpPr>
+          <p:cNvPr id="8" name="Rectangle 7"/>
           <p:cNvSpPr/>
           <p:nvPr/>
         </p:nvSpPr>
         <p:spPr>
           <a:xfrm>
-            <a:off x="4064000" y="2286000"/>
-            <a:ext cx="7518399" cy="6350"/>
+            <a:off x="0" y="6510528"/>
+            <a:ext cx="12188952" cy="347472"/>
           </a:xfrm>
           <a:prstGeom prst="rect">
             <a:avLst/>
           </a:prstGeom>
           <a:solidFill>
-            <a:srgbClr val="E0E0E8"/>
+            <a:srgbClr val="0A1937"/>
           </a:solidFill>
           <a:ln>
             <a:noFill/>
@@ -4783,14 +6076,14 @@
       </p:sp>
       <p:sp>
         <p:nvSpPr>
-          <p:cNvPr id="14" name="TextBox 13"/>
+          <p:cNvPr id="9" name="TextBox 8"/>
           <p:cNvSpPr txBox="1"/>
           <p:nvPr/>
         </p:nvSpPr>
         <p:spPr>
           <a:xfrm>
-            <a:off x="4064000" y="2336800"/>
-            <a:ext cx="762000" cy="647700"/>
+            <a:off x="685800" y="6583680"/>
+            <a:ext cx="6490411" cy="256032"/>
           </a:xfrm>
           <a:prstGeom prst="rect">
             <a:avLst/>
@@ -4799,280 +6092,19 @@
         </p:spPr>
         <p:txBody>
           <a:bodyPr wrap="none">
-            <a:normAutofit/>
+            <a:spAutoFit/>
           </a:bodyPr>
           <a:lstStyle/>
           <a:p>
             <a:pPr algn="l"/>
             <a:r>
-              <a:rPr sz="2400" b="0" i="1">
-                <a:solidFill>
-                  <a:srgbClr val="1F2B56"/>
-                </a:solidFill>
-                <a:latin typeface="Georgia"/>
-              </a:rPr>
-              <a:t>III</a:t>
-            </a:r>
-          </a:p>
-        </p:txBody>
-      </p:sp>
-      <p:sp>
-        <p:nvSpPr>
-          <p:cNvPr id="15" name="TextBox 14"/>
-          <p:cNvSpPr txBox="1"/>
-          <p:nvPr/>
-        </p:nvSpPr>
-        <p:spPr>
-          <a:xfrm>
-            <a:off x="4953000" y="2349500"/>
-            <a:ext cx="6629400" cy="635000"/>
-          </a:xfrm>
-          <a:prstGeom prst="rect">
-            <a:avLst/>
-          </a:prstGeom>
-          <a:noFill/>
-        </p:spPr>
-        <p:txBody>
-          <a:bodyPr wrap="square">
-            <a:normAutofit/>
-          </a:bodyPr>
-          <a:lstStyle/>
-          <a:p>
-            <a:pPr algn="l"/>
-            <a:r>
-              <a:rPr sz="1400" b="0" i="0">
-                <a:solidFill>
-                  <a:srgbClr val="191D2E"/>
-                </a:solidFill>
-                <a:latin typeface="Georgia"/>
-              </a:rPr>
-              <a:t>Persönliche Sichtbarkeitsstrategie entwickeln</a:t>
-            </a:r>
-          </a:p>
-        </p:txBody>
-      </p:sp>
-      <p:sp>
-        <p:nvSpPr>
-          <p:cNvPr id="16" name="Rectangle 15"/>
-          <p:cNvSpPr/>
-          <p:nvPr/>
-        </p:nvSpPr>
-        <p:spPr>
-          <a:xfrm>
-            <a:off x="4064000" y="2984500"/>
-            <a:ext cx="7518399" cy="6350"/>
-          </a:xfrm>
-          <a:prstGeom prst="rect">
-            <a:avLst/>
-          </a:prstGeom>
-          <a:solidFill>
-            <a:srgbClr val="E0E0E8"/>
-          </a:solidFill>
-          <a:ln>
-            <a:noFill/>
-          </a:ln>
-        </p:spPr>
-        <p:style>
-          <a:lnRef idx="1">
-            <a:schemeClr val="accent1"/>
-          </a:lnRef>
-          <a:fillRef idx="3">
-            <a:schemeClr val="accent1"/>
-          </a:fillRef>
-          <a:effectRef idx="2">
-            <a:schemeClr val="accent1"/>
-          </a:effectRef>
-          <a:fontRef idx="minor">
-            <a:schemeClr val="lt1"/>
-          </a:fontRef>
-        </p:style>
-        <p:txBody>
-          <a:bodyPr rtlCol="0" anchor="ctr"/>
-          <a:lstStyle/>
-          <a:p>
-            <a:pPr algn="ctr"/>
-          </a:p>
-        </p:txBody>
-      </p:sp>
-      <p:sp>
-        <p:nvSpPr>
-          <p:cNvPr id="17" name="TextBox 16"/>
-          <p:cNvSpPr txBox="1"/>
-          <p:nvPr/>
-        </p:nvSpPr>
-        <p:spPr>
-          <a:xfrm>
-            <a:off x="4064000" y="3035300"/>
-            <a:ext cx="762000" cy="647700"/>
-          </a:xfrm>
-          <a:prstGeom prst="rect">
-            <a:avLst/>
-          </a:prstGeom>
-          <a:noFill/>
-        </p:spPr>
-        <p:txBody>
-          <a:bodyPr wrap="none">
-            <a:normAutofit/>
-          </a:bodyPr>
-          <a:lstStyle/>
-          <a:p>
-            <a:pPr algn="l"/>
-            <a:r>
-              <a:rPr sz="2400" b="0" i="1">
-                <a:solidFill>
-                  <a:srgbClr val="1F2B56"/>
-                </a:solidFill>
-                <a:latin typeface="Georgia"/>
-              </a:rPr>
-              <a:t>IV</a:t>
-            </a:r>
-          </a:p>
-        </p:txBody>
-      </p:sp>
-      <p:sp>
-        <p:nvSpPr>
-          <p:cNvPr id="18" name="TextBox 17"/>
-          <p:cNvSpPr txBox="1"/>
-          <p:nvPr/>
-        </p:nvSpPr>
-        <p:spPr>
-          <a:xfrm>
-            <a:off x="4953000" y="3048000"/>
-            <a:ext cx="6629400" cy="635000"/>
-          </a:xfrm>
-          <a:prstGeom prst="rect">
-            <a:avLst/>
-          </a:prstGeom>
-          <a:noFill/>
-        </p:spPr>
-        <p:txBody>
-          <a:bodyPr wrap="square">
-            <a:normAutofit/>
-          </a:bodyPr>
-          <a:lstStyle/>
-          <a:p>
-            <a:pPr algn="l"/>
-            <a:r>
-              <a:rPr sz="1400" b="0" i="0">
-                <a:solidFill>
-                  <a:srgbClr val="191D2E"/>
-                </a:solidFill>
-                <a:latin typeface="Georgia"/>
-              </a:rPr>
-              <a:t>90-Tage-Netzwerkstrategie mit konkreten Aktivitäten gestalten</a:t>
-            </a:r>
-          </a:p>
-        </p:txBody>
-      </p:sp>
-      <p:sp>
-        <p:nvSpPr>
-          <p:cNvPr id="19" name="Rectangle 18"/>
-          <p:cNvSpPr/>
-          <p:nvPr/>
-        </p:nvSpPr>
-        <p:spPr>
-          <a:xfrm>
-            <a:off x="4064000" y="3683000"/>
-            <a:ext cx="7518399" cy="6350"/>
-          </a:xfrm>
-          <a:prstGeom prst="rect">
-            <a:avLst/>
-          </a:prstGeom>
-          <a:solidFill>
-            <a:srgbClr val="E0E0E8"/>
-          </a:solidFill>
-          <a:ln>
-            <a:noFill/>
-          </a:ln>
-        </p:spPr>
-        <p:style>
-          <a:lnRef idx="1">
-            <a:schemeClr val="accent1"/>
-          </a:lnRef>
-          <a:fillRef idx="3">
-            <a:schemeClr val="accent1"/>
-          </a:fillRef>
-          <a:effectRef idx="2">
-            <a:schemeClr val="accent1"/>
-          </a:effectRef>
-          <a:fontRef idx="minor">
-            <a:schemeClr val="lt1"/>
-          </a:fontRef>
-        </p:style>
-        <p:txBody>
-          <a:bodyPr rtlCol="0" anchor="ctr"/>
-          <a:lstStyle/>
-          <a:p>
-            <a:pPr algn="ctr"/>
-          </a:p>
-        </p:txBody>
-      </p:sp>
-      <p:sp>
-        <p:nvSpPr>
-          <p:cNvPr id="20" name="TextBox 19"/>
-          <p:cNvSpPr txBox="1"/>
-          <p:nvPr/>
-        </p:nvSpPr>
-        <p:spPr>
-          <a:xfrm>
-            <a:off x="4064000" y="3733799"/>
-            <a:ext cx="762000" cy="647700"/>
-          </a:xfrm>
-          <a:prstGeom prst="rect">
-            <a:avLst/>
-          </a:prstGeom>
-          <a:noFill/>
-        </p:spPr>
-        <p:txBody>
-          <a:bodyPr wrap="none">
-            <a:normAutofit/>
-          </a:bodyPr>
-          <a:lstStyle/>
-          <a:p>
-            <a:pPr algn="l"/>
-            <a:r>
-              <a:rPr sz="2400" b="0" i="1">
-                <a:solidFill>
-                  <a:srgbClr val="1F2B56"/>
-                </a:solidFill>
-                <a:latin typeface="Georgia"/>
-              </a:rPr>
-              <a:t>V</a:t>
-            </a:r>
-          </a:p>
-        </p:txBody>
-      </p:sp>
-      <p:sp>
-        <p:nvSpPr>
-          <p:cNvPr id="21" name="TextBox 20"/>
-          <p:cNvSpPr txBox="1"/>
-          <p:nvPr/>
-        </p:nvSpPr>
-        <p:spPr>
-          <a:xfrm>
-            <a:off x="4953000" y="3746500"/>
-            <a:ext cx="6629400" cy="635000"/>
-          </a:xfrm>
-          <a:prstGeom prst="rect">
-            <a:avLst/>
-          </a:prstGeom>
-          <a:noFill/>
-        </p:spPr>
-        <p:txBody>
-          <a:bodyPr wrap="square">
-            <a:normAutofit/>
-          </a:bodyPr>
-          <a:lstStyle/>
-          <a:p>
-            <a:pPr algn="l"/>
-            <a:r>
-              <a:rPr sz="1400" b="0" i="0">
-                <a:solidFill>
-                  <a:srgbClr val="191D2E"/>
-                </a:solidFill>
-                <a:latin typeface="Georgia"/>
-              </a:rPr>
-              <a:t>Operative Netzwerkpflege von strategischem Beziehungsaufbau unterscheiden</a:t>
+              <a:rPr sz="700">
+                <a:solidFill>
+                  <a:srgbClr val="A0B4D2"/>
+                </a:solidFill>
+                <a:latin typeface="JetBrains Mono"/>
+              </a:rPr>
+              <a:t>Benedikt Zoller Coaching  ·  FKB Campus  ·  M20</a:t>
             </a:r>
           </a:p>
         </p:txBody>
@@ -5088,14 +6120,6 @@
 <file path=ppt/slides/slide3.xml><?xml version="1.0" encoding="utf-8"?>
 <p:sld xmlns:a="http://schemas.openxmlformats.org/drawingml/2006/main" xmlns:p="http://schemas.openxmlformats.org/presentationml/2006/main" xmlns:r="http://schemas.openxmlformats.org/officeDocument/2006/relationships">
   <p:cSld>
-    <p:bg>
-      <p:bgPr>
-        <a:solidFill>
-          <a:srgbClr val="1F2B56"/>
-        </a:solidFill>
-        <a:effectLst/>
-      </p:bgPr>
-    </p:bg>
     <p:spTree>
       <p:nvGrpSpPr>
         <p:cNvPr id="1" name=""/>
@@ -5105,71 +6129,87 @@
       <p:grpSpPr/>
       <p:sp>
         <p:nvSpPr>
-          <p:cNvPr id="2" name="TextBox 1"/>
-          <p:cNvSpPr txBox="1"/>
-          <p:nvPr/>
-        </p:nvSpPr>
-        <p:spPr>
-          <a:xfrm>
-            <a:off x="609600" y="279400"/>
-            <a:ext cx="2540000" cy="279400"/>
-          </a:xfrm>
-          <a:prstGeom prst="rect">
-            <a:avLst/>
-          </a:prstGeom>
-          <a:noFill/>
-        </p:spPr>
-        <p:txBody>
-          <a:bodyPr wrap="square">
-            <a:normAutofit/>
-          </a:bodyPr>
-          <a:lstStyle/>
-          <a:p>
-            <a:pPr algn="l"/>
-            <a:r>
-              <a:rPr sz="1000" b="1" i="0">
-                <a:solidFill>
-                  <a:srgbClr val="F8F8FA"/>
-                </a:solidFill>
-                <a:latin typeface="Arial"/>
-              </a:rPr>
-              <a:t>FKB  Campus</a:t>
-            </a:r>
-          </a:p>
-        </p:txBody>
-      </p:sp>
-      <p:sp>
-        <p:nvSpPr>
-          <p:cNvPr id="3" name="TextBox 2"/>
-          <p:cNvSpPr txBox="1"/>
-          <p:nvPr/>
-        </p:nvSpPr>
-        <p:spPr>
-          <a:xfrm>
-            <a:off x="609600" y="279400"/>
-            <a:ext cx="10972800" cy="279400"/>
-          </a:xfrm>
-          <a:prstGeom prst="rect">
-            <a:avLst/>
-          </a:prstGeom>
-          <a:noFill/>
-        </p:spPr>
-        <p:txBody>
-          <a:bodyPr wrap="square">
-            <a:normAutofit/>
-          </a:bodyPr>
-          <a:lstStyle/>
-          <a:p>
-            <a:pPr algn="r"/>
-            <a:r>
-              <a:rPr sz="900" b="0" i="0">
-                <a:solidFill>
-                  <a:srgbClr val="7B7FA0"/>
-                </a:solidFill>
-                <a:latin typeface="Courier New"/>
-              </a:rPr>
-              <a:t>NETZWERK IST KEIN VISITENKARTENSAMMELN</a:t>
-            </a:r>
+          <p:cNvPr id="2" name="Rectangle 1"/>
+          <p:cNvSpPr/>
+          <p:nvPr/>
+        </p:nvSpPr>
+        <p:spPr>
+          <a:xfrm>
+            <a:off x="0" y="0"/>
+            <a:ext cx="12188952" cy="6858000"/>
+          </a:xfrm>
+          <a:prstGeom prst="rect">
+            <a:avLst/>
+          </a:prstGeom>
+          <a:solidFill>
+            <a:srgbClr val="EDEDF3"/>
+          </a:solidFill>
+          <a:ln>
+            <a:noFill/>
+          </a:ln>
+        </p:spPr>
+        <p:style>
+          <a:lnRef idx="1">
+            <a:schemeClr val="accent1"/>
+          </a:lnRef>
+          <a:fillRef idx="3">
+            <a:schemeClr val="accent1"/>
+          </a:fillRef>
+          <a:effectRef idx="2">
+            <a:schemeClr val="accent1"/>
+          </a:effectRef>
+          <a:fontRef idx="minor">
+            <a:schemeClr val="lt1"/>
+          </a:fontRef>
+        </p:style>
+        <p:txBody>
+          <a:bodyPr rtlCol="0" anchor="ctr"/>
+          <a:lstStyle/>
+          <a:p>
+            <a:pPr algn="ctr"/>
+          </a:p>
+        </p:txBody>
+      </p:sp>
+      <p:sp>
+        <p:nvSpPr>
+          <p:cNvPr id="3" name="Rectangle 2"/>
+          <p:cNvSpPr/>
+          <p:nvPr/>
+        </p:nvSpPr>
+        <p:spPr>
+          <a:xfrm>
+            <a:off x="0" y="0"/>
+            <a:ext cx="12188952" cy="50292"/>
+          </a:xfrm>
+          <a:prstGeom prst="rect">
+            <a:avLst/>
+          </a:prstGeom>
+          <a:solidFill>
+            <a:srgbClr val="1F2C56"/>
+          </a:solidFill>
+          <a:ln>
+            <a:noFill/>
+          </a:ln>
+        </p:spPr>
+        <p:style>
+          <a:lnRef idx="1">
+            <a:schemeClr val="accent1"/>
+          </a:lnRef>
+          <a:fillRef idx="3">
+            <a:schemeClr val="accent1"/>
+          </a:fillRef>
+          <a:effectRef idx="2">
+            <a:schemeClr val="accent1"/>
+          </a:effectRef>
+          <a:fontRef idx="minor">
+            <a:schemeClr val="lt1"/>
+          </a:fontRef>
+        </p:style>
+        <p:txBody>
+          <a:bodyPr rtlCol="0" anchor="ctr"/>
+          <a:lstStyle/>
+          <a:p>
+            <a:pPr algn="ctr"/>
           </a:p>
         </p:txBody>
       </p:sp>
@@ -5181,8 +6221,8 @@
         </p:nvSpPr>
         <p:spPr>
           <a:xfrm>
-            <a:off x="609600" y="6426200"/>
-            <a:ext cx="10972800" cy="228600"/>
+            <a:off x="685800" y="109728"/>
+            <a:ext cx="10817352" cy="228600"/>
           </a:xfrm>
           <a:prstGeom prst="rect">
             <a:avLst/>
@@ -5190,91 +6230,107 @@
           <a:noFill/>
         </p:spPr>
         <p:txBody>
-          <a:bodyPr wrap="square">
-            <a:normAutofit/>
+          <a:bodyPr wrap="none">
+            <a:spAutoFit/>
           </a:bodyPr>
           <a:lstStyle/>
           <a:p>
-            <a:pPr algn="r"/>
-            <a:r>
-              <a:rPr sz="900" b="0" i="0">
-                <a:solidFill>
-                  <a:srgbClr val="7B7FA0"/>
-                </a:solidFill>
-                <a:latin typeface="Courier New"/>
-              </a:rPr>
-              <a:t>03</a:t>
-            </a:r>
-          </a:p>
-        </p:txBody>
-      </p:sp>
-      <p:sp>
-        <p:nvSpPr>
-          <p:cNvPr id="5" name="TextBox 4"/>
-          <p:cNvSpPr txBox="1"/>
-          <p:nvPr/>
-        </p:nvSpPr>
-        <p:spPr>
-          <a:xfrm>
-            <a:off x="609600" y="635000"/>
-            <a:ext cx="5461000" cy="5461000"/>
-          </a:xfrm>
-          <a:prstGeom prst="rect">
-            <a:avLst/>
-          </a:prstGeom>
-          <a:noFill/>
-        </p:spPr>
-        <p:txBody>
-          <a:bodyPr wrap="square">
-            <a:normAutofit/>
-          </a:bodyPr>
-          <a:lstStyle/>
-          <a:p>
             <a:pPr algn="l"/>
             <a:r>
-              <a:rPr sz="28000" b="0" i="1">
-                <a:solidFill>
-                  <a:srgbClr val="D9BF7A"/>
-                </a:solidFill>
-                <a:latin typeface="Georgia"/>
-              </a:rPr>
-              <a:t>I</a:t>
-            </a:r>
-          </a:p>
-        </p:txBody>
-      </p:sp>
-      <p:sp>
-        <p:nvSpPr>
-          <p:cNvPr id="6" name="TextBox 5"/>
-          <p:cNvSpPr txBox="1"/>
-          <p:nvPr/>
-        </p:nvSpPr>
-        <p:spPr>
-          <a:xfrm>
-            <a:off x="6731000" y="4064000"/>
-            <a:ext cx="4851400" cy="1778000"/>
-          </a:xfrm>
-          <a:prstGeom prst="rect">
-            <a:avLst/>
-          </a:prstGeom>
-          <a:noFill/>
-        </p:spPr>
-        <p:txBody>
-          <a:bodyPr wrap="square">
-            <a:normAutofit/>
-          </a:bodyPr>
-          <a:lstStyle/>
-          <a:p>
-            <a:pPr algn="r"/>
-            <a:r>
-              <a:rPr sz="3800" b="0" i="0">
-                <a:solidFill>
-                  <a:srgbClr val="F8F8FA"/>
-                </a:solidFill>
-                <a:latin typeface="Georgia"/>
-              </a:rPr>
-              <a:t>Netzwerk ist kein Visitenkartensammeln</a:t>
-            </a:r>
+              <a:rPr sz="750">
+                <a:solidFill>
+                  <a:srgbClr val="78808C"/>
+                </a:solidFill>
+                <a:latin typeface="JetBrains Mono"/>
+              </a:rPr>
+              <a:t>M20  ·  INHALT</a:t>
+            </a:r>
+          </a:p>
+        </p:txBody>
+      </p:sp>
+      <p:sp>
+        <p:nvSpPr>
+          <p:cNvPr id="5" name="Rectangle 4"/>
+          <p:cNvSpPr/>
+          <p:nvPr/>
+        </p:nvSpPr>
+        <p:spPr>
+          <a:xfrm>
+            <a:off x="0" y="1234440"/>
+            <a:ext cx="12188952" cy="12700"/>
+          </a:xfrm>
+          <a:prstGeom prst="rect">
+            <a:avLst/>
+          </a:prstGeom>
+          <a:solidFill>
+            <a:srgbClr val="D8DFE4"/>
+          </a:solidFill>
+          <a:ln>
+            <a:noFill/>
+          </a:ln>
+        </p:spPr>
+        <p:style>
+          <a:lnRef idx="1">
+            <a:schemeClr val="accent1"/>
+          </a:lnRef>
+          <a:fillRef idx="3">
+            <a:schemeClr val="accent1"/>
+          </a:fillRef>
+          <a:effectRef idx="2">
+            <a:schemeClr val="accent1"/>
+          </a:effectRef>
+          <a:fontRef idx="minor">
+            <a:schemeClr val="lt1"/>
+          </a:fontRef>
+        </p:style>
+        <p:txBody>
+          <a:bodyPr rtlCol="0" anchor="ctr"/>
+          <a:lstStyle/>
+          <a:p>
+            <a:pPr algn="ctr"/>
+          </a:p>
+        </p:txBody>
+      </p:sp>
+      <p:sp>
+        <p:nvSpPr>
+          <p:cNvPr id="6" name="Rectangle 5"/>
+          <p:cNvSpPr/>
+          <p:nvPr/>
+        </p:nvSpPr>
+        <p:spPr>
+          <a:xfrm>
+            <a:off x="685800" y="502920"/>
+            <a:ext cx="36576" cy="658368"/>
+          </a:xfrm>
+          <a:prstGeom prst="rect">
+            <a:avLst/>
+          </a:prstGeom>
+          <a:solidFill>
+            <a:srgbClr val="D9C089"/>
+          </a:solidFill>
+          <a:ln>
+            <a:noFill/>
+          </a:ln>
+        </p:spPr>
+        <p:style>
+          <a:lnRef idx="1">
+            <a:schemeClr val="accent1"/>
+          </a:lnRef>
+          <a:fillRef idx="3">
+            <a:schemeClr val="accent1"/>
+          </a:fillRef>
+          <a:effectRef idx="2">
+            <a:schemeClr val="accent1"/>
+          </a:effectRef>
+          <a:fontRef idx="minor">
+            <a:schemeClr val="lt1"/>
+          </a:fontRef>
+        </p:style>
+        <p:txBody>
+          <a:bodyPr rtlCol="0" anchor="ctr"/>
+          <a:lstStyle/>
+          <a:p>
+            <a:pPr algn="ctr"/>
           </a:p>
         </p:txBody>
       </p:sp>
@@ -5286,8 +6342,8 @@
         </p:nvSpPr>
         <p:spPr>
           <a:xfrm>
-            <a:off x="6731000" y="5842000"/>
-            <a:ext cx="4851400" cy="635000"/>
+            <a:off x="813816" y="502920"/>
+            <a:ext cx="10634472" cy="685800"/>
           </a:xfrm>
           <a:prstGeom prst="rect">
             <a:avLst/>
@@ -5296,19 +6352,215 @@
         </p:spPr>
         <p:txBody>
           <a:bodyPr wrap="square">
-            <a:normAutofit/>
+            <a:spAutoFit/>
           </a:bodyPr>
           <a:lstStyle/>
           <a:p>
-            <a:pPr algn="r"/>
-            <a:r>
-              <a:rPr sz="1400" b="0" i="1">
-                <a:solidFill>
-                  <a:srgbClr val="7B7FA0"/>
-                </a:solidFill>
-                <a:latin typeface="Georgia"/>
-              </a:rPr>
-              <a:t>Strategisches Beziehungskapital aufbauen</a:t>
+            <a:pPr algn="l"/>
+            <a:r>
+              <a:rPr sz="2400" b="1" i="0">
+                <a:solidFill>
+                  <a:srgbClr val="1F2C56"/>
+                </a:solidFill>
+                <a:latin typeface="Source Serif 4"/>
+              </a:rPr>
+              <a:t>Dimension 1: Internes Netzwerk</a:t>
+            </a:r>
+          </a:p>
+        </p:txBody>
+      </p:sp>
+      <p:sp>
+        <p:nvSpPr>
+          <p:cNvPr id="8" name="TextBox 7"/>
+          <p:cNvSpPr txBox="1"/>
+          <p:nvPr/>
+        </p:nvSpPr>
+        <p:spPr>
+          <a:xfrm>
+            <a:off x="685800" y="1417320"/>
+            <a:ext cx="10817352" cy="5029200"/>
+          </a:xfrm>
+          <a:prstGeom prst="rect">
+            <a:avLst/>
+          </a:prstGeom>
+          <a:noFill/>
+        </p:spPr>
+        <p:txBody>
+          <a:bodyPr wrap="square">
+            <a:spAutoFit/>
+          </a:bodyPr>
+          <a:lstStyle/>
+          <a:p>
+            <a:pPr>
+              <a:spcBef>
+                <a:spcPts val="400"/>
+              </a:spcBef>
+              <a:spcAft>
+                <a:spcPts val="200"/>
+              </a:spcAft>
+            </a:pPr>
+            <a:r>
+              <a:rPr sz="1200">
+                <a:solidFill>
+                  <a:srgbClr val="3D5466"/>
+                </a:solidFill>
+                <a:latin typeface="Arial"/>
+              </a:rPr>
+              <a:t>Die häufig unterschätzte Dimension. Wer im eigenen Haus als kompetenter Ansprechpartner bekannt ist, bekommt:</a:t>
+            </a:r>
+          </a:p>
+          <a:p>
+            <a:pPr>
+              <a:spcBef>
+                <a:spcPts val="400"/>
+              </a:spcBef>
+              <a:spcAft>
+                <a:spcPts val="200"/>
+              </a:spcAft>
+            </a:pPr>
+            <a:r>
+              <a:rPr sz="1300">
+                <a:solidFill>
+                  <a:srgbClr val="3D5466"/>
+                </a:solidFill>
+                <a:latin typeface="Arial"/>
+              </a:rPr>
+              <a:t>▸  Interne Empfehlungen aus Privatkundenbereichen</a:t>
+            </a:r>
+          </a:p>
+          <a:p>
+            <a:pPr>
+              <a:spcBef>
+                <a:spcPts val="400"/>
+              </a:spcBef>
+              <a:spcAft>
+                <a:spcPts val="200"/>
+              </a:spcAft>
+            </a:pPr>
+            <a:r>
+              <a:rPr sz="1300">
+                <a:solidFill>
+                  <a:srgbClr val="3D5466"/>
+                </a:solidFill>
+                <a:latin typeface="Arial"/>
+              </a:rPr>
+              <a:t>▸  Frühzeitige Informationen über anstehende Regulierungen oder Strategieänderungen</a:t>
+            </a:r>
+          </a:p>
+          <a:p>
+            <a:pPr>
+              <a:spcBef>
+                <a:spcPts val="400"/>
+              </a:spcBef>
+              <a:spcAft>
+                <a:spcPts val="200"/>
+              </a:spcAft>
+            </a:pPr>
+            <a:r>
+              <a:rPr sz="1300">
+                <a:solidFill>
+                  <a:srgbClr val="3D5466"/>
+                </a:solidFill>
+                <a:latin typeface="Arial"/>
+              </a:rPr>
+              <a:t>▸  Unterstützung bei komplexen Fällen durch Spezialisten (Immobilien, Strukturierte Finanzierung, Ausland)</a:t>
+            </a:r>
+          </a:p>
+          <a:p>
+            <a:pPr>
+              <a:spcBef>
+                <a:spcPts val="400"/>
+              </a:spcBef>
+              <a:spcAft>
+                <a:spcPts val="200"/>
+              </a:spcAft>
+            </a:pPr>
+            <a:r>
+              <a:rPr sz="1200">
+                <a:solidFill>
+                  <a:srgbClr val="3D5466"/>
+                </a:solidFill>
+                <a:latin typeface="Arial"/>
+              </a:rPr>
+              <a:t>Netzwerkanker intern: Bereichsleiter FK, Kreditspezialisten, Risikomanager, Privatkundenberater mit Unternehmerkunden, Verbundpartner-Spezialisten (R+V, Union Investment).</a:t>
+            </a:r>
+          </a:p>
+        </p:txBody>
+      </p:sp>
+      <p:sp>
+        <p:nvSpPr>
+          <p:cNvPr id="9" name="Rectangle 8"/>
+          <p:cNvSpPr/>
+          <p:nvPr/>
+        </p:nvSpPr>
+        <p:spPr>
+          <a:xfrm>
+            <a:off x="0" y="6510528"/>
+            <a:ext cx="12188952" cy="347472"/>
+          </a:xfrm>
+          <a:prstGeom prst="rect">
+            <a:avLst/>
+          </a:prstGeom>
+          <a:solidFill>
+            <a:srgbClr val="0A1937"/>
+          </a:solidFill>
+          <a:ln>
+            <a:noFill/>
+          </a:ln>
+        </p:spPr>
+        <p:style>
+          <a:lnRef idx="1">
+            <a:schemeClr val="accent1"/>
+          </a:lnRef>
+          <a:fillRef idx="3">
+            <a:schemeClr val="accent1"/>
+          </a:fillRef>
+          <a:effectRef idx="2">
+            <a:schemeClr val="accent1"/>
+          </a:effectRef>
+          <a:fontRef idx="minor">
+            <a:schemeClr val="lt1"/>
+          </a:fontRef>
+        </p:style>
+        <p:txBody>
+          <a:bodyPr rtlCol="0" anchor="ctr"/>
+          <a:lstStyle/>
+          <a:p>
+            <a:pPr algn="ctr"/>
+          </a:p>
+        </p:txBody>
+      </p:sp>
+      <p:sp>
+        <p:nvSpPr>
+          <p:cNvPr id="10" name="TextBox 9"/>
+          <p:cNvSpPr txBox="1"/>
+          <p:nvPr/>
+        </p:nvSpPr>
+        <p:spPr>
+          <a:xfrm>
+            <a:off x="685800" y="6583680"/>
+            <a:ext cx="6490411" cy="256032"/>
+          </a:xfrm>
+          <a:prstGeom prst="rect">
+            <a:avLst/>
+          </a:prstGeom>
+          <a:noFill/>
+        </p:spPr>
+        <p:txBody>
+          <a:bodyPr wrap="none">
+            <a:spAutoFit/>
+          </a:bodyPr>
+          <a:lstStyle/>
+          <a:p>
+            <a:pPr algn="l"/>
+            <a:r>
+              <a:rPr sz="700">
+                <a:solidFill>
+                  <a:srgbClr val="A0B4D2"/>
+                </a:solidFill>
+                <a:latin typeface="JetBrains Mono"/>
+              </a:rPr>
+              <a:t>Benedikt Zoller Coaching  ·  FKB Campus  ·  M20</a:t>
             </a:r>
           </a:p>
         </p:txBody>
@@ -5324,14 +6576,6 @@
 <file path=ppt/slides/slide4.xml><?xml version="1.0" encoding="utf-8"?>
 <p:sld xmlns:a="http://schemas.openxmlformats.org/drawingml/2006/main" xmlns:p="http://schemas.openxmlformats.org/presentationml/2006/main" xmlns:r="http://schemas.openxmlformats.org/officeDocument/2006/relationships">
   <p:cSld>
-    <p:bg>
-      <p:bgPr>
-        <a:solidFill>
-          <a:srgbClr val="F8F8FA"/>
-        </a:solidFill>
-        <a:effectLst/>
-      </p:bgPr>
-    </p:bg>
     <p:spTree>
       <p:nvGrpSpPr>
         <p:cNvPr id="1" name=""/>
@@ -5341,125 +6585,20 @@
       <p:grpSpPr/>
       <p:sp>
         <p:nvSpPr>
-          <p:cNvPr id="2" name="TextBox 1"/>
-          <p:cNvSpPr txBox="1"/>
-          <p:nvPr/>
-        </p:nvSpPr>
-        <p:spPr>
-          <a:xfrm>
-            <a:off x="609600" y="279400"/>
-            <a:ext cx="2540000" cy="279400"/>
-          </a:xfrm>
-          <a:prstGeom prst="rect">
-            <a:avLst/>
-          </a:prstGeom>
-          <a:noFill/>
-        </p:spPr>
-        <p:txBody>
-          <a:bodyPr wrap="square">
-            <a:normAutofit/>
-          </a:bodyPr>
-          <a:lstStyle/>
-          <a:p>
-            <a:pPr algn="l"/>
-            <a:r>
-              <a:rPr sz="1000" b="1" i="0">
-                <a:solidFill>
-                  <a:srgbClr val="191D2E"/>
-                </a:solidFill>
-                <a:latin typeface="Arial"/>
-              </a:rPr>
-              <a:t>FKB  Campus</a:t>
-            </a:r>
-          </a:p>
-        </p:txBody>
-      </p:sp>
-      <p:sp>
-        <p:nvSpPr>
-          <p:cNvPr id="3" name="TextBox 2"/>
-          <p:cNvSpPr txBox="1"/>
-          <p:nvPr/>
-        </p:nvSpPr>
-        <p:spPr>
-          <a:xfrm>
-            <a:off x="609600" y="279400"/>
-            <a:ext cx="10972800" cy="279400"/>
-          </a:xfrm>
-          <a:prstGeom prst="rect">
-            <a:avLst/>
-          </a:prstGeom>
-          <a:noFill/>
-        </p:spPr>
-        <p:txBody>
-          <a:bodyPr wrap="square">
-            <a:normAutofit/>
-          </a:bodyPr>
-          <a:lstStyle/>
-          <a:p>
-            <a:pPr algn="r"/>
-            <a:r>
-              <a:rPr sz="900" b="0" i="0">
-                <a:solidFill>
-                  <a:srgbClr val="7B7FA0"/>
-                </a:solidFill>
-                <a:latin typeface="Courier New"/>
-              </a:rPr>
-              <a:t>I · NETZWERK IST KEIN VISITENKARTENSAMMELN</a:t>
-            </a:r>
-          </a:p>
-        </p:txBody>
-      </p:sp>
-      <p:sp>
-        <p:nvSpPr>
-          <p:cNvPr id="4" name="TextBox 3"/>
-          <p:cNvSpPr txBox="1"/>
-          <p:nvPr/>
-        </p:nvSpPr>
-        <p:spPr>
-          <a:xfrm>
-            <a:off x="609600" y="6426200"/>
-            <a:ext cx="10972800" cy="228600"/>
-          </a:xfrm>
-          <a:prstGeom prst="rect">
-            <a:avLst/>
-          </a:prstGeom>
-          <a:noFill/>
-        </p:spPr>
-        <p:txBody>
-          <a:bodyPr wrap="square">
-            <a:normAutofit/>
-          </a:bodyPr>
-          <a:lstStyle/>
-          <a:p>
-            <a:pPr algn="r"/>
-            <a:r>
-              <a:rPr sz="900" b="0" i="0">
-                <a:solidFill>
-                  <a:srgbClr val="7B7FA0"/>
-                </a:solidFill>
-                <a:latin typeface="Courier New"/>
-              </a:rPr>
-              <a:t>04</a:t>
-            </a:r>
-          </a:p>
-        </p:txBody>
-      </p:sp>
-      <p:sp>
-        <p:nvSpPr>
-          <p:cNvPr id="5" name="Rectangle 4"/>
+          <p:cNvPr id="2" name="Rectangle 1"/>
           <p:cNvSpPr/>
           <p:nvPr/>
         </p:nvSpPr>
         <p:spPr>
           <a:xfrm>
-            <a:off x="609600" y="825500"/>
-            <a:ext cx="10972800" cy="6350"/>
+            <a:off x="0" y="0"/>
+            <a:ext cx="12188952" cy="6858000"/>
           </a:xfrm>
           <a:prstGeom prst="rect">
             <a:avLst/>
           </a:prstGeom>
           <a:solidFill>
-            <a:srgbClr val="191D2E"/>
+            <a:srgbClr val="EDEDF3"/>
           </a:solidFill>
           <a:ln>
             <a:noFill/>
@@ -5489,90 +6628,20 @@
       </p:sp>
       <p:sp>
         <p:nvSpPr>
-          <p:cNvPr id="6" name="TextBox 5"/>
-          <p:cNvSpPr txBox="1"/>
-          <p:nvPr/>
-        </p:nvSpPr>
-        <p:spPr>
-          <a:xfrm>
-            <a:off x="609600" y="889000"/>
-            <a:ext cx="3810000" cy="177800"/>
-          </a:xfrm>
-          <a:prstGeom prst="rect">
-            <a:avLst/>
-          </a:prstGeom>
-          <a:noFill/>
-        </p:spPr>
-        <p:txBody>
-          <a:bodyPr wrap="square">
-            <a:normAutofit/>
-          </a:bodyPr>
-          <a:lstStyle/>
-          <a:p>
-            <a:pPr algn="l"/>
-            <a:r>
-              <a:rPr sz="900" b="0" i="0">
-                <a:solidFill>
-                  <a:srgbClr val="7B7FA0"/>
-                </a:solidFill>
-                <a:latin typeface="Courier New"/>
-              </a:rPr>
-              <a:t>Kernaussage</a:t>
-            </a:r>
-          </a:p>
-        </p:txBody>
-      </p:sp>
-      <p:sp>
-        <p:nvSpPr>
-          <p:cNvPr id="7" name="TextBox 6"/>
-          <p:cNvSpPr txBox="1"/>
-          <p:nvPr/>
-        </p:nvSpPr>
-        <p:spPr>
-          <a:xfrm>
-            <a:off x="609600" y="920750"/>
-            <a:ext cx="10972800" cy="1778000"/>
-          </a:xfrm>
-          <a:prstGeom prst="rect">
-            <a:avLst/>
-          </a:prstGeom>
-          <a:noFill/>
-        </p:spPr>
-        <p:txBody>
-          <a:bodyPr wrap="square">
-            <a:normAutofit/>
-          </a:bodyPr>
-          <a:lstStyle/>
-          <a:p>
-            <a:pPr algn="l"/>
-            <a:r>
-              <a:rPr sz="3800" b="0" i="0">
-                <a:solidFill>
-                  <a:srgbClr val="191D2E"/>
-                </a:solidFill>
-                <a:latin typeface="Georgia"/>
-              </a:rPr>
-              <a:t>Operative Netzwerkpflege vs. strategischer Beziehungsaufbau</a:t>
-            </a:r>
-          </a:p>
-        </p:txBody>
-      </p:sp>
-      <p:sp>
-        <p:nvSpPr>
-          <p:cNvPr id="8" name="Rectangle 7"/>
+          <p:cNvPr id="3" name="Rectangle 2"/>
           <p:cNvSpPr/>
           <p:nvPr/>
         </p:nvSpPr>
         <p:spPr>
           <a:xfrm>
-            <a:off x="609600" y="2762250"/>
-            <a:ext cx="10972800" cy="6350"/>
+            <a:off x="0" y="0"/>
+            <a:ext cx="12188952" cy="50292"/>
           </a:xfrm>
           <a:prstGeom prst="rect">
             <a:avLst/>
           </a:prstGeom>
           <a:solidFill>
-            <a:srgbClr val="191D2E"/>
+            <a:srgbClr val="1F2C56"/>
           </a:solidFill>
           <a:ln>
             <a:noFill/>
@@ -5602,14 +6671,14 @@
       </p:sp>
       <p:sp>
         <p:nvSpPr>
-          <p:cNvPr id="9" name="TextBox 8"/>
+          <p:cNvPr id="4" name="TextBox 3"/>
           <p:cNvSpPr txBox="1"/>
           <p:nvPr/>
         </p:nvSpPr>
         <p:spPr>
           <a:xfrm>
-            <a:off x="609600" y="2825750"/>
-            <a:ext cx="5207000" cy="2857500"/>
+            <a:off x="685800" y="109728"/>
+            <a:ext cx="10817352" cy="228600"/>
           </a:xfrm>
           <a:prstGeom prst="rect">
             <a:avLst/>
@@ -5617,21 +6686,303 @@
           <a:noFill/>
         </p:spPr>
         <p:txBody>
+          <a:bodyPr wrap="none">
+            <a:spAutoFit/>
+          </a:bodyPr>
+          <a:lstStyle/>
+          <a:p>
+            <a:pPr algn="l"/>
+            <a:r>
+              <a:rPr sz="750">
+                <a:solidFill>
+                  <a:srgbClr val="78808C"/>
+                </a:solidFill>
+                <a:latin typeface="JetBrains Mono"/>
+              </a:rPr>
+              <a:t>M20  ·  INHALT</a:t>
+            </a:r>
+          </a:p>
+        </p:txBody>
+      </p:sp>
+      <p:sp>
+        <p:nvSpPr>
+          <p:cNvPr id="5" name="Rectangle 4"/>
+          <p:cNvSpPr/>
+          <p:nvPr/>
+        </p:nvSpPr>
+        <p:spPr>
+          <a:xfrm>
+            <a:off x="0" y="1234440"/>
+            <a:ext cx="12188952" cy="12700"/>
+          </a:xfrm>
+          <a:prstGeom prst="rect">
+            <a:avLst/>
+          </a:prstGeom>
+          <a:solidFill>
+            <a:srgbClr val="D8DFE4"/>
+          </a:solidFill>
+          <a:ln>
+            <a:noFill/>
+          </a:ln>
+        </p:spPr>
+        <p:style>
+          <a:lnRef idx="1">
+            <a:schemeClr val="accent1"/>
+          </a:lnRef>
+          <a:fillRef idx="3">
+            <a:schemeClr val="accent1"/>
+          </a:fillRef>
+          <a:effectRef idx="2">
+            <a:schemeClr val="accent1"/>
+          </a:effectRef>
+          <a:fontRef idx="minor">
+            <a:schemeClr val="lt1"/>
+          </a:fontRef>
+        </p:style>
+        <p:txBody>
+          <a:bodyPr rtlCol="0" anchor="ctr"/>
+          <a:lstStyle/>
+          <a:p>
+            <a:pPr algn="ctr"/>
+          </a:p>
+        </p:txBody>
+      </p:sp>
+      <p:sp>
+        <p:nvSpPr>
+          <p:cNvPr id="6" name="Rectangle 5"/>
+          <p:cNvSpPr/>
+          <p:nvPr/>
+        </p:nvSpPr>
+        <p:spPr>
+          <a:xfrm>
+            <a:off x="685800" y="502920"/>
+            <a:ext cx="36576" cy="658368"/>
+          </a:xfrm>
+          <a:prstGeom prst="rect">
+            <a:avLst/>
+          </a:prstGeom>
+          <a:solidFill>
+            <a:srgbClr val="D9C089"/>
+          </a:solidFill>
+          <a:ln>
+            <a:noFill/>
+          </a:ln>
+        </p:spPr>
+        <p:style>
+          <a:lnRef idx="1">
+            <a:schemeClr val="accent1"/>
+          </a:lnRef>
+          <a:fillRef idx="3">
+            <a:schemeClr val="accent1"/>
+          </a:fillRef>
+          <a:effectRef idx="2">
+            <a:schemeClr val="accent1"/>
+          </a:effectRef>
+          <a:fontRef idx="minor">
+            <a:schemeClr val="lt1"/>
+          </a:fontRef>
+        </p:style>
+        <p:txBody>
+          <a:bodyPr rtlCol="0" anchor="ctr"/>
+          <a:lstStyle/>
+          <a:p>
+            <a:pPr algn="ctr"/>
+          </a:p>
+        </p:txBody>
+      </p:sp>
+      <p:sp>
+        <p:nvSpPr>
+          <p:cNvPr id="7" name="TextBox 6"/>
+          <p:cNvSpPr txBox="1"/>
+          <p:nvPr/>
+        </p:nvSpPr>
+        <p:spPr>
+          <a:xfrm>
+            <a:off x="813816" y="502920"/>
+            <a:ext cx="10634472" cy="685800"/>
+          </a:xfrm>
+          <a:prstGeom prst="rect">
+            <a:avLst/>
+          </a:prstGeom>
+          <a:noFill/>
+        </p:spPr>
+        <p:txBody>
           <a:bodyPr wrap="square">
-            <a:normAutofit/>
+            <a:spAutoFit/>
           </a:bodyPr>
           <a:lstStyle/>
           <a:p>
             <a:pPr algn="l"/>
             <a:r>
-              <a:rPr sz="1400" b="0" i="0">
-                <a:solidFill>
-                  <a:srgbClr val="191D2E"/>
-                </a:solidFill>
-                <a:latin typeface="Georgia"/>
-              </a:rPr>
-              <a:t>Operative Pflege: Bestehende Kontakte halten, Geburtstage notieren, IHK-Abend besuchen. Strategisch: Gezielt in Beziehungen investieren, die langfristig Vertrauen und Empfehlungen erzeugen.</a:t>
-            </a:r>
+              <a:rPr sz="2400" b="1" i="0">
+                <a:solidFill>
+                  <a:srgbClr val="1F2C56"/>
+                </a:solidFill>
+                <a:latin typeface="Source Serif 4"/>
+              </a:rPr>
+              <a:t>Dimension 2: Verbundpartner-Netzwerk</a:t>
+            </a:r>
+          </a:p>
+        </p:txBody>
+      </p:sp>
+      <p:sp>
+        <p:nvSpPr>
+          <p:cNvPr id="8" name="TextBox 7"/>
+          <p:cNvSpPr txBox="1"/>
+          <p:nvPr/>
+        </p:nvSpPr>
+        <p:spPr>
+          <a:xfrm>
+            <a:off x="685800" y="1417320"/>
+            <a:ext cx="10817352" cy="5029200"/>
+          </a:xfrm>
+          <a:prstGeom prst="rect">
+            <a:avLst/>
+          </a:prstGeom>
+          <a:noFill/>
+        </p:spPr>
+        <p:txBody>
+          <a:bodyPr wrap="square">
+            <a:spAutoFit/>
+          </a:bodyPr>
+          <a:lstStyle/>
+          <a:p>
+            <a:pPr>
+              <a:spcBef>
+                <a:spcPts val="400"/>
+              </a:spcBef>
+              <a:spcAft>
+                <a:spcPts val="200"/>
+              </a:spcAft>
+            </a:pPr>
+            <a:r>
+              <a:rPr sz="1200">
+                <a:solidFill>
+                  <a:srgbClr val="3D5466"/>
+                </a:solidFill>
+                <a:latin typeface="Arial"/>
+              </a:rPr>
+              <a:t>Strategischer Nutzen: Verbundpartner können den Berater bei ihren eigenen Kundenkontakten empfehlen; der Berater positioniert sich als Koordinator der gesamten Verbundleistung.</a:t>
+            </a:r>
+          </a:p>
+          <a:p>
+            <a:pPr>
+              <a:spcBef>
+                <a:spcPts val="400"/>
+              </a:spcBef>
+              <a:spcAft>
+                <a:spcPts val="200"/>
+              </a:spcAft>
+            </a:pPr>
+            <a:r>
+              <a:rPr sz="1200">
+                <a:solidFill>
+                  <a:srgbClr val="3D5466"/>
+                </a:solidFill>
+                <a:latin typeface="Arial"/>
+              </a:rPr>
+              <a:t>Konkrete Formate, die in der Praxis funktionieren:</a:t>
+            </a:r>
+          </a:p>
+          <a:p>
+            <a:pPr>
+              <a:spcBef>
+                <a:spcPts val="400"/>
+              </a:spcBef>
+              <a:spcAft>
+                <a:spcPts val="200"/>
+              </a:spcAft>
+            </a:pPr>
+            <a:r>
+              <a:rPr sz="1300">
+                <a:solidFill>
+                  <a:srgbClr val="3D5466"/>
+                </a:solidFill>
+                <a:latin typeface="Arial"/>
+              </a:rPr>
+              <a:t>▸  Gemeinsame Kundenveranstaltungen mit R+V oder Union Investment: Der FK-Berater tritt als Co-Moderator auf und gewinnt Sichtbarkeit bei Kunden anderer Berater.</a:t>
+            </a:r>
+          </a:p>
+          <a:p>
+            <a:pPr>
+              <a:spcBef>
+                <a:spcPts val="400"/>
+              </a:spcBef>
+              <a:spcAft>
+                <a:spcPts val="200"/>
+              </a:spcAft>
+            </a:pPr>
+            <a:r>
+              <a:rPr sz="1300">
+                <a:solidFill>
+                  <a:srgbClr val="3D5466"/>
+                </a:solidFill>
+                <a:latin typeface="Arial"/>
+              </a:rPr>
+              <a:t>▸  Monatlicher Jour fixe (30 Min.) mit dem R+V-Gebietsleiter oder UIN-Regionalbetreuer: Leads gegenseitig teilen, aktuelle Cross-Selling-Opportunitäten besprechen.</a:t>
+            </a:r>
+          </a:p>
+          <a:p>
+            <a:pPr>
+              <a:spcBef>
+                <a:spcPts val="400"/>
+              </a:spcBef>
+              <a:spcAft>
+                <a:spcPts val="200"/>
+              </a:spcAft>
+            </a:pPr>
+            <a:r>
+              <a:rPr sz="1300">
+                <a:solidFill>
+                  <a:srgbClr val="3D5466"/>
+                </a:solidFill>
+                <a:latin typeface="Arial"/>
+              </a:rPr>
+              <a:t>▸  Internes Cross-Selling-Meeting: Privatkundenberater mit Unternehmerkunden systematisch ansprechen – das ist im Alltag oft der schnellste Weg zu Neukunden, wird aber selten als aktives Format geführt.</a:t>
+            </a:r>
+          </a:p>
+        </p:txBody>
+      </p:sp>
+      <p:sp>
+        <p:nvSpPr>
+          <p:cNvPr id="9" name="Rectangle 8"/>
+          <p:cNvSpPr/>
+          <p:nvPr/>
+        </p:nvSpPr>
+        <p:spPr>
+          <a:xfrm>
+            <a:off x="0" y="6510528"/>
+            <a:ext cx="12188952" cy="347472"/>
+          </a:xfrm>
+          <a:prstGeom prst="rect">
+            <a:avLst/>
+          </a:prstGeom>
+          <a:solidFill>
+            <a:srgbClr val="0A1937"/>
+          </a:solidFill>
+          <a:ln>
+            <a:noFill/>
+          </a:ln>
+        </p:spPr>
+        <p:style>
+          <a:lnRef idx="1">
+            <a:schemeClr val="accent1"/>
+          </a:lnRef>
+          <a:fillRef idx="3">
+            <a:schemeClr val="accent1"/>
+          </a:fillRef>
+          <a:effectRef idx="2">
+            <a:schemeClr val="accent1"/>
+          </a:effectRef>
+          <a:fontRef idx="minor">
+            <a:schemeClr val="lt1"/>
+          </a:fontRef>
+        </p:style>
+        <p:txBody>
+          <a:bodyPr rtlCol="0" anchor="ctr"/>
+          <a:lstStyle/>
+          <a:p>
+            <a:pPr algn="ctr"/>
           </a:p>
         </p:txBody>
       </p:sp>
@@ -5643,8 +6994,8 @@
         </p:nvSpPr>
         <p:spPr>
           <a:xfrm>
-            <a:off x="6096000" y="2825750"/>
-            <a:ext cx="4851400" cy="177800"/>
+            <a:off x="685800" y="6583680"/>
+            <a:ext cx="6490411" cy="256032"/>
           </a:xfrm>
           <a:prstGeom prst="rect">
             <a:avLst/>
@@ -5652,55 +7003,20 @@
           <a:noFill/>
         </p:spPr>
         <p:txBody>
-          <a:bodyPr wrap="square">
-            <a:normAutofit/>
+          <a:bodyPr wrap="none">
+            <a:spAutoFit/>
           </a:bodyPr>
           <a:lstStyle/>
           <a:p>
             <a:pPr algn="l"/>
             <a:r>
-              <a:rPr sz="900" b="0" i="0">
-                <a:solidFill>
-                  <a:srgbClr val="1F2B56"/>
-                </a:solidFill>
-                <a:latin typeface="Courier New"/>
-              </a:rPr>
-              <a:t>Mitnahme</a:t>
-            </a:r>
-          </a:p>
-        </p:txBody>
-      </p:sp>
-      <p:sp>
-        <p:nvSpPr>
-          <p:cNvPr id="11" name="TextBox 10"/>
-          <p:cNvSpPr txBox="1"/>
-          <p:nvPr/>
-        </p:nvSpPr>
-        <p:spPr>
-          <a:xfrm>
-            <a:off x="6096000" y="3041650"/>
-            <a:ext cx="4851400" cy="2667000"/>
-          </a:xfrm>
-          <a:prstGeom prst="rect">
-            <a:avLst/>
-          </a:prstGeom>
-          <a:noFill/>
-        </p:spPr>
-        <p:txBody>
-          <a:bodyPr wrap="square">
-            <a:normAutofit/>
-          </a:bodyPr>
-          <a:lstStyle/>
-          <a:p>
-            <a:pPr algn="l"/>
-            <a:r>
-              <a:rPr sz="1400" b="0" i="1">
-                <a:solidFill>
-                  <a:srgbClr val="191D2E"/>
-                </a:solidFill>
-                <a:latin typeface="Georgia"/>
-              </a:rPr>
-              <a:t>Faustregel: 20 % der Netzwerkkontakte erzeugen 80 % der Empfehlungen. Wer sind Ihre 20 %?</a:t>
+              <a:rPr sz="700">
+                <a:solidFill>
+                  <a:srgbClr val="A0B4D2"/>
+                </a:solidFill>
+                <a:latin typeface="JetBrains Mono"/>
+              </a:rPr>
+              <a:t>Benedikt Zoller Coaching  ·  FKB Campus  ·  M20</a:t>
             </a:r>
           </a:p>
         </p:txBody>
@@ -5716,14 +7032,6 @@
 <file path=ppt/slides/slide5.xml><?xml version="1.0" encoding="utf-8"?>
 <p:sld xmlns:a="http://schemas.openxmlformats.org/drawingml/2006/main" xmlns:p="http://schemas.openxmlformats.org/presentationml/2006/main" xmlns:r="http://schemas.openxmlformats.org/officeDocument/2006/relationships">
   <p:cSld>
-    <p:bg>
-      <p:bgPr>
-        <a:solidFill>
-          <a:srgbClr val="1F2B56"/>
-        </a:solidFill>
-        <a:effectLst/>
-      </p:bgPr>
-    </p:bg>
     <p:spTree>
       <p:nvGrpSpPr>
         <p:cNvPr id="1" name=""/>
@@ -5733,71 +7041,87 @@
       <p:grpSpPr/>
       <p:sp>
         <p:nvSpPr>
-          <p:cNvPr id="2" name="TextBox 1"/>
-          <p:cNvSpPr txBox="1"/>
-          <p:nvPr/>
-        </p:nvSpPr>
-        <p:spPr>
-          <a:xfrm>
-            <a:off x="609600" y="279400"/>
-            <a:ext cx="2540000" cy="279400"/>
-          </a:xfrm>
-          <a:prstGeom prst="rect">
-            <a:avLst/>
-          </a:prstGeom>
-          <a:noFill/>
-        </p:spPr>
-        <p:txBody>
-          <a:bodyPr wrap="square">
-            <a:normAutofit/>
-          </a:bodyPr>
-          <a:lstStyle/>
-          <a:p>
-            <a:pPr algn="l"/>
-            <a:r>
-              <a:rPr sz="1000" b="1" i="0">
-                <a:solidFill>
-                  <a:srgbClr val="F8F8FA"/>
-                </a:solidFill>
-                <a:latin typeface="Arial"/>
-              </a:rPr>
-              <a:t>FKB  Campus</a:t>
-            </a:r>
-          </a:p>
-        </p:txBody>
-      </p:sp>
-      <p:sp>
-        <p:nvSpPr>
-          <p:cNvPr id="3" name="TextBox 2"/>
-          <p:cNvSpPr txBox="1"/>
-          <p:nvPr/>
-        </p:nvSpPr>
-        <p:spPr>
-          <a:xfrm>
-            <a:off x="609600" y="279400"/>
-            <a:ext cx="10972800" cy="279400"/>
-          </a:xfrm>
-          <a:prstGeom prst="rect">
-            <a:avLst/>
-          </a:prstGeom>
-          <a:noFill/>
-        </p:spPr>
-        <p:txBody>
-          <a:bodyPr wrap="square">
-            <a:normAutofit/>
-          </a:bodyPr>
-          <a:lstStyle/>
-          <a:p>
-            <a:pPr algn="r"/>
-            <a:r>
-              <a:rPr sz="900" b="0" i="0">
-                <a:solidFill>
-                  <a:srgbClr val="7B7FA0"/>
-                </a:solidFill>
-                <a:latin typeface="Courier New"/>
-              </a:rPr>
-              <a:t>DAS EIGENE NETZWERK ANALYSIEREN</a:t>
-            </a:r>
+          <p:cNvPr id="2" name="Rectangle 1"/>
+          <p:cNvSpPr/>
+          <p:nvPr/>
+        </p:nvSpPr>
+        <p:spPr>
+          <a:xfrm>
+            <a:off x="0" y="0"/>
+            <a:ext cx="12188952" cy="6858000"/>
+          </a:xfrm>
+          <a:prstGeom prst="rect">
+            <a:avLst/>
+          </a:prstGeom>
+          <a:solidFill>
+            <a:srgbClr val="EDEDF3"/>
+          </a:solidFill>
+          <a:ln>
+            <a:noFill/>
+          </a:ln>
+        </p:spPr>
+        <p:style>
+          <a:lnRef idx="1">
+            <a:schemeClr val="accent1"/>
+          </a:lnRef>
+          <a:fillRef idx="3">
+            <a:schemeClr val="accent1"/>
+          </a:fillRef>
+          <a:effectRef idx="2">
+            <a:schemeClr val="accent1"/>
+          </a:effectRef>
+          <a:fontRef idx="minor">
+            <a:schemeClr val="lt1"/>
+          </a:fontRef>
+        </p:style>
+        <p:txBody>
+          <a:bodyPr rtlCol="0" anchor="ctr"/>
+          <a:lstStyle/>
+          <a:p>
+            <a:pPr algn="ctr"/>
+          </a:p>
+        </p:txBody>
+      </p:sp>
+      <p:sp>
+        <p:nvSpPr>
+          <p:cNvPr id="3" name="Rectangle 2"/>
+          <p:cNvSpPr/>
+          <p:nvPr/>
+        </p:nvSpPr>
+        <p:spPr>
+          <a:xfrm>
+            <a:off x="0" y="0"/>
+            <a:ext cx="12188952" cy="50292"/>
+          </a:xfrm>
+          <a:prstGeom prst="rect">
+            <a:avLst/>
+          </a:prstGeom>
+          <a:solidFill>
+            <a:srgbClr val="1F2C56"/>
+          </a:solidFill>
+          <a:ln>
+            <a:noFill/>
+          </a:ln>
+        </p:spPr>
+        <p:style>
+          <a:lnRef idx="1">
+            <a:schemeClr val="accent1"/>
+          </a:lnRef>
+          <a:fillRef idx="3">
+            <a:schemeClr val="accent1"/>
+          </a:fillRef>
+          <a:effectRef idx="2">
+            <a:schemeClr val="accent1"/>
+          </a:effectRef>
+          <a:fontRef idx="minor">
+            <a:schemeClr val="lt1"/>
+          </a:fontRef>
+        </p:style>
+        <p:txBody>
+          <a:bodyPr rtlCol="0" anchor="ctr"/>
+          <a:lstStyle/>
+          <a:p>
+            <a:pPr algn="ctr"/>
           </a:p>
         </p:txBody>
       </p:sp>
@@ -5809,8 +7133,8 @@
         </p:nvSpPr>
         <p:spPr>
           <a:xfrm>
-            <a:off x="609600" y="6426200"/>
-            <a:ext cx="10972800" cy="228600"/>
+            <a:off x="685800" y="109728"/>
+            <a:ext cx="10817352" cy="228600"/>
           </a:xfrm>
           <a:prstGeom prst="rect">
             <a:avLst/>
@@ -5818,91 +7142,107 @@
           <a:noFill/>
         </p:spPr>
         <p:txBody>
-          <a:bodyPr wrap="square">
-            <a:normAutofit/>
+          <a:bodyPr wrap="none">
+            <a:spAutoFit/>
           </a:bodyPr>
           <a:lstStyle/>
           <a:p>
-            <a:pPr algn="r"/>
-            <a:r>
-              <a:rPr sz="900" b="0" i="0">
-                <a:solidFill>
-                  <a:srgbClr val="7B7FA0"/>
-                </a:solidFill>
-                <a:latin typeface="Courier New"/>
-              </a:rPr>
-              <a:t>05</a:t>
-            </a:r>
-          </a:p>
-        </p:txBody>
-      </p:sp>
-      <p:sp>
-        <p:nvSpPr>
-          <p:cNvPr id="5" name="TextBox 4"/>
-          <p:cNvSpPr txBox="1"/>
-          <p:nvPr/>
-        </p:nvSpPr>
-        <p:spPr>
-          <a:xfrm>
-            <a:off x="609600" y="635000"/>
-            <a:ext cx="5461000" cy="5461000"/>
-          </a:xfrm>
-          <a:prstGeom prst="rect">
-            <a:avLst/>
-          </a:prstGeom>
-          <a:noFill/>
-        </p:spPr>
-        <p:txBody>
-          <a:bodyPr wrap="square">
-            <a:normAutofit/>
-          </a:bodyPr>
-          <a:lstStyle/>
-          <a:p>
             <a:pPr algn="l"/>
             <a:r>
-              <a:rPr sz="28000" b="0" i="1">
-                <a:solidFill>
-                  <a:srgbClr val="D9BF7A"/>
-                </a:solidFill>
-                <a:latin typeface="Georgia"/>
-              </a:rPr>
-              <a:t>II</a:t>
-            </a:r>
-          </a:p>
-        </p:txBody>
-      </p:sp>
-      <p:sp>
-        <p:nvSpPr>
-          <p:cNvPr id="6" name="TextBox 5"/>
-          <p:cNvSpPr txBox="1"/>
-          <p:nvPr/>
-        </p:nvSpPr>
-        <p:spPr>
-          <a:xfrm>
-            <a:off x="6731000" y="4064000"/>
-            <a:ext cx="4851400" cy="1778000"/>
-          </a:xfrm>
-          <a:prstGeom prst="rect">
-            <a:avLst/>
-          </a:prstGeom>
-          <a:noFill/>
-        </p:spPr>
-        <p:txBody>
-          <a:bodyPr wrap="square">
-            <a:normAutofit/>
-          </a:bodyPr>
-          <a:lstStyle/>
-          <a:p>
-            <a:pPr algn="r"/>
-            <a:r>
-              <a:rPr sz="3800" b="0" i="0">
-                <a:solidFill>
-                  <a:srgbClr val="F8F8FA"/>
-                </a:solidFill>
-                <a:latin typeface="Georgia"/>
-              </a:rPr>
-              <a:t>Das eigene Netzwerk analysieren</a:t>
-            </a:r>
+              <a:rPr sz="750">
+                <a:solidFill>
+                  <a:srgbClr val="78808C"/>
+                </a:solidFill>
+                <a:latin typeface="JetBrains Mono"/>
+              </a:rPr>
+              <a:t>M20  ·  INHALT</a:t>
+            </a:r>
+          </a:p>
+        </p:txBody>
+      </p:sp>
+      <p:sp>
+        <p:nvSpPr>
+          <p:cNvPr id="5" name="Rectangle 4"/>
+          <p:cNvSpPr/>
+          <p:nvPr/>
+        </p:nvSpPr>
+        <p:spPr>
+          <a:xfrm>
+            <a:off x="0" y="1234440"/>
+            <a:ext cx="12188952" cy="12700"/>
+          </a:xfrm>
+          <a:prstGeom prst="rect">
+            <a:avLst/>
+          </a:prstGeom>
+          <a:solidFill>
+            <a:srgbClr val="D8DFE4"/>
+          </a:solidFill>
+          <a:ln>
+            <a:noFill/>
+          </a:ln>
+        </p:spPr>
+        <p:style>
+          <a:lnRef idx="1">
+            <a:schemeClr val="accent1"/>
+          </a:lnRef>
+          <a:fillRef idx="3">
+            <a:schemeClr val="accent1"/>
+          </a:fillRef>
+          <a:effectRef idx="2">
+            <a:schemeClr val="accent1"/>
+          </a:effectRef>
+          <a:fontRef idx="minor">
+            <a:schemeClr val="lt1"/>
+          </a:fontRef>
+        </p:style>
+        <p:txBody>
+          <a:bodyPr rtlCol="0" anchor="ctr"/>
+          <a:lstStyle/>
+          <a:p>
+            <a:pPr algn="ctr"/>
+          </a:p>
+        </p:txBody>
+      </p:sp>
+      <p:sp>
+        <p:nvSpPr>
+          <p:cNvPr id="6" name="Rectangle 5"/>
+          <p:cNvSpPr/>
+          <p:nvPr/>
+        </p:nvSpPr>
+        <p:spPr>
+          <a:xfrm>
+            <a:off x="685800" y="502920"/>
+            <a:ext cx="36576" cy="658368"/>
+          </a:xfrm>
+          <a:prstGeom prst="rect">
+            <a:avLst/>
+          </a:prstGeom>
+          <a:solidFill>
+            <a:srgbClr val="D9C089"/>
+          </a:solidFill>
+          <a:ln>
+            <a:noFill/>
+          </a:ln>
+        </p:spPr>
+        <p:style>
+          <a:lnRef idx="1">
+            <a:schemeClr val="accent1"/>
+          </a:lnRef>
+          <a:fillRef idx="3">
+            <a:schemeClr val="accent1"/>
+          </a:fillRef>
+          <a:effectRef idx="2">
+            <a:schemeClr val="accent1"/>
+          </a:effectRef>
+          <a:fontRef idx="minor">
+            <a:schemeClr val="lt1"/>
+          </a:fontRef>
+        </p:style>
+        <p:txBody>
+          <a:bodyPr rtlCol="0" anchor="ctr"/>
+          <a:lstStyle/>
+          <a:p>
+            <a:pPr algn="ctr"/>
           </a:p>
         </p:txBody>
       </p:sp>
@@ -5914,8 +7254,8 @@
         </p:nvSpPr>
         <p:spPr>
           <a:xfrm>
-            <a:off x="6731000" y="5842000"/>
-            <a:ext cx="4851400" cy="635000"/>
+            <a:off x="813816" y="502920"/>
+            <a:ext cx="10634472" cy="685800"/>
           </a:xfrm>
           <a:prstGeom prst="rect">
             <a:avLst/>
@@ -5924,19 +7264,158 @@
         </p:spPr>
         <p:txBody>
           <a:bodyPr wrap="square">
-            <a:normAutofit/>
+            <a:spAutoFit/>
           </a:bodyPr>
           <a:lstStyle/>
           <a:p>
-            <a:pPr algn="r"/>
-            <a:r>
-              <a:rPr sz="1400" b="0" i="1">
-                <a:solidFill>
-                  <a:srgbClr val="7B7FA0"/>
-                </a:solidFill>
-                <a:latin typeface="Georgia"/>
-              </a:rPr>
-              <a:t>Stärken, Brücken und Lücken sehen</a:t>
+            <a:pPr algn="l"/>
+            <a:r>
+              <a:rPr sz="2400" b="1" i="0">
+                <a:solidFill>
+                  <a:srgbClr val="1F2C56"/>
+                </a:solidFill>
+                <a:latin typeface="Source Serif 4"/>
+              </a:rPr>
+              <a:t>Dimension 3: Markt-Netzwerk</a:t>
+            </a:r>
+          </a:p>
+        </p:txBody>
+      </p:sp>
+      <p:sp>
+        <p:nvSpPr>
+          <p:cNvPr id="8" name="TextBox 7"/>
+          <p:cNvSpPr txBox="1"/>
+          <p:nvPr/>
+        </p:nvSpPr>
+        <p:spPr>
+          <a:xfrm>
+            <a:off x="685800" y="1417320"/>
+            <a:ext cx="10817352" cy="5029200"/>
+          </a:xfrm>
+          <a:prstGeom prst="rect">
+            <a:avLst/>
+          </a:prstGeom>
+          <a:noFill/>
+        </p:spPr>
+        <p:txBody>
+          <a:bodyPr wrap="square">
+            <a:spAutoFit/>
+          </a:bodyPr>
+          <a:lstStyle/>
+          <a:p>
+            <a:pPr>
+              <a:spcBef>
+                <a:spcPts val="400"/>
+              </a:spcBef>
+              <a:spcAft>
+                <a:spcPts val="200"/>
+              </a:spcAft>
+            </a:pPr>
+            <a:r>
+              <a:rPr sz="1200">
+                <a:solidFill>
+                  <a:srgbClr val="3D5466"/>
+                </a:solidFill>
+                <a:latin typeface="Arial"/>
+              </a:rPr>
+              <a:t>## 4.3 Netzwerkanalyse: Den eigenen Status realistisch einschätzen</a:t>
+            </a:r>
+          </a:p>
+          <a:p>
+            <a:pPr>
+              <a:spcBef>
+                <a:spcPts val="400"/>
+              </a:spcBef>
+              <a:spcAft>
+                <a:spcPts val="200"/>
+              </a:spcAft>
+            </a:pPr>
+            <a:r>
+              <a:rPr sz="1200">
+                <a:solidFill>
+                  <a:srgbClr val="3D5466"/>
+                </a:solidFill>
+                <a:latin typeface="Arial"/>
+              </a:rPr>
+              <a:t>Vor jeder Netzwerkstrategie steht die Analyse. Nicht: „Wie viele Kontakte habe ich?" – sondern: „Welche Verbindungen fehlen mir für meine Ziele?"</a:t>
+            </a:r>
+          </a:p>
+        </p:txBody>
+      </p:sp>
+      <p:sp>
+        <p:nvSpPr>
+          <p:cNvPr id="9" name="Rectangle 8"/>
+          <p:cNvSpPr/>
+          <p:nvPr/>
+        </p:nvSpPr>
+        <p:spPr>
+          <a:xfrm>
+            <a:off x="0" y="6510528"/>
+            <a:ext cx="12188952" cy="347472"/>
+          </a:xfrm>
+          <a:prstGeom prst="rect">
+            <a:avLst/>
+          </a:prstGeom>
+          <a:solidFill>
+            <a:srgbClr val="0A1937"/>
+          </a:solidFill>
+          <a:ln>
+            <a:noFill/>
+          </a:ln>
+        </p:spPr>
+        <p:style>
+          <a:lnRef idx="1">
+            <a:schemeClr val="accent1"/>
+          </a:lnRef>
+          <a:fillRef idx="3">
+            <a:schemeClr val="accent1"/>
+          </a:fillRef>
+          <a:effectRef idx="2">
+            <a:schemeClr val="accent1"/>
+          </a:effectRef>
+          <a:fontRef idx="minor">
+            <a:schemeClr val="lt1"/>
+          </a:fontRef>
+        </p:style>
+        <p:txBody>
+          <a:bodyPr rtlCol="0" anchor="ctr"/>
+          <a:lstStyle/>
+          <a:p>
+            <a:pPr algn="ctr"/>
+          </a:p>
+        </p:txBody>
+      </p:sp>
+      <p:sp>
+        <p:nvSpPr>
+          <p:cNvPr id="10" name="TextBox 9"/>
+          <p:cNvSpPr txBox="1"/>
+          <p:nvPr/>
+        </p:nvSpPr>
+        <p:spPr>
+          <a:xfrm>
+            <a:off x="685800" y="6583680"/>
+            <a:ext cx="6490411" cy="256032"/>
+          </a:xfrm>
+          <a:prstGeom prst="rect">
+            <a:avLst/>
+          </a:prstGeom>
+          <a:noFill/>
+        </p:spPr>
+        <p:txBody>
+          <a:bodyPr wrap="none">
+            <a:spAutoFit/>
+          </a:bodyPr>
+          <a:lstStyle/>
+          <a:p>
+            <a:pPr algn="l"/>
+            <a:r>
+              <a:rPr sz="700">
+                <a:solidFill>
+                  <a:srgbClr val="A0B4D2"/>
+                </a:solidFill>
+                <a:latin typeface="JetBrains Mono"/>
+              </a:rPr>
+              <a:t>Benedikt Zoller Coaching  ·  FKB Campus  ·  M20</a:t>
             </a:r>
           </a:p>
         </p:txBody>
@@ -5952,14 +7431,6 @@
 <file path=ppt/slides/slide6.xml><?xml version="1.0" encoding="utf-8"?>
 <p:sld xmlns:a="http://schemas.openxmlformats.org/drawingml/2006/main" xmlns:p="http://schemas.openxmlformats.org/presentationml/2006/main" xmlns:r="http://schemas.openxmlformats.org/officeDocument/2006/relationships">
   <p:cSld>
-    <p:bg>
-      <p:bgPr>
-        <a:solidFill>
-          <a:srgbClr val="F8F8FA"/>
-        </a:solidFill>
-        <a:effectLst/>
-      </p:bgPr>
-    </p:bg>
     <p:spTree>
       <p:nvGrpSpPr>
         <p:cNvPr id="1" name=""/>
@@ -5969,125 +7440,20 @@
       <p:grpSpPr/>
       <p:sp>
         <p:nvSpPr>
-          <p:cNvPr id="2" name="TextBox 1"/>
-          <p:cNvSpPr txBox="1"/>
-          <p:nvPr/>
-        </p:nvSpPr>
-        <p:spPr>
-          <a:xfrm>
-            <a:off x="609600" y="279400"/>
-            <a:ext cx="2540000" cy="279400"/>
-          </a:xfrm>
-          <a:prstGeom prst="rect">
-            <a:avLst/>
-          </a:prstGeom>
-          <a:noFill/>
-        </p:spPr>
-        <p:txBody>
-          <a:bodyPr wrap="square">
-            <a:normAutofit/>
-          </a:bodyPr>
-          <a:lstStyle/>
-          <a:p>
-            <a:pPr algn="l"/>
-            <a:r>
-              <a:rPr sz="1000" b="1" i="0">
-                <a:solidFill>
-                  <a:srgbClr val="191D2E"/>
-                </a:solidFill>
-                <a:latin typeface="Arial"/>
-              </a:rPr>
-              <a:t>FKB  Campus</a:t>
-            </a:r>
-          </a:p>
-        </p:txBody>
-      </p:sp>
-      <p:sp>
-        <p:nvSpPr>
-          <p:cNvPr id="3" name="TextBox 2"/>
-          <p:cNvSpPr txBox="1"/>
-          <p:nvPr/>
-        </p:nvSpPr>
-        <p:spPr>
-          <a:xfrm>
-            <a:off x="609600" y="279400"/>
-            <a:ext cx="10972800" cy="279400"/>
-          </a:xfrm>
-          <a:prstGeom prst="rect">
-            <a:avLst/>
-          </a:prstGeom>
-          <a:noFill/>
-        </p:spPr>
-        <p:txBody>
-          <a:bodyPr wrap="square">
-            <a:normAutofit/>
-          </a:bodyPr>
-          <a:lstStyle/>
-          <a:p>
-            <a:pPr algn="r"/>
-            <a:r>
-              <a:rPr sz="900" b="0" i="0">
-                <a:solidFill>
-                  <a:srgbClr val="7B7FA0"/>
-                </a:solidFill>
-                <a:latin typeface="Courier New"/>
-              </a:rPr>
-              <a:t>II · DAS EIGENE NETZWERK ANALYSIEREN</a:t>
-            </a:r>
-          </a:p>
-        </p:txBody>
-      </p:sp>
-      <p:sp>
-        <p:nvSpPr>
-          <p:cNvPr id="4" name="TextBox 3"/>
-          <p:cNvSpPr txBox="1"/>
-          <p:nvPr/>
-        </p:nvSpPr>
-        <p:spPr>
-          <a:xfrm>
-            <a:off x="609600" y="6426200"/>
-            <a:ext cx="10972800" cy="228600"/>
-          </a:xfrm>
-          <a:prstGeom prst="rect">
-            <a:avLst/>
-          </a:prstGeom>
-          <a:noFill/>
-        </p:spPr>
-        <p:txBody>
-          <a:bodyPr wrap="square">
-            <a:normAutofit/>
-          </a:bodyPr>
-          <a:lstStyle/>
-          <a:p>
-            <a:pPr algn="r"/>
-            <a:r>
-              <a:rPr sz="900" b="0" i="0">
-                <a:solidFill>
-                  <a:srgbClr val="7B7FA0"/>
-                </a:solidFill>
-                <a:latin typeface="Courier New"/>
-              </a:rPr>
-              <a:t>06</a:t>
-            </a:r>
-          </a:p>
-        </p:txBody>
-      </p:sp>
-      <p:sp>
-        <p:nvSpPr>
-          <p:cNvPr id="5" name="Rectangle 4"/>
+          <p:cNvPr id="2" name="Rectangle 1"/>
           <p:cNvSpPr/>
           <p:nvPr/>
         </p:nvSpPr>
         <p:spPr>
           <a:xfrm>
-            <a:off x="609600" y="825500"/>
-            <a:ext cx="10972800" cy="6350"/>
+            <a:off x="0" y="0"/>
+            <a:ext cx="12188952" cy="6858000"/>
           </a:xfrm>
           <a:prstGeom prst="rect">
             <a:avLst/>
           </a:prstGeom>
           <a:solidFill>
-            <a:srgbClr val="191D2E"/>
+            <a:srgbClr val="FFFFFF"/>
           </a:solidFill>
           <a:ln>
             <a:noFill/>
@@ -6117,55 +7483,20 @@
       </p:sp>
       <p:sp>
         <p:nvSpPr>
-          <p:cNvPr id="6" name="TextBox 5"/>
-          <p:cNvSpPr txBox="1"/>
-          <p:nvPr/>
-        </p:nvSpPr>
-        <p:spPr>
-          <a:xfrm>
-            <a:off x="609600" y="920750"/>
-            <a:ext cx="10972800" cy="1778000"/>
-          </a:xfrm>
-          <a:prstGeom prst="rect">
-            <a:avLst/>
-          </a:prstGeom>
-          <a:noFill/>
-        </p:spPr>
-        <p:txBody>
-          <a:bodyPr wrap="square">
-            <a:normAutofit/>
-          </a:bodyPr>
-          <a:lstStyle/>
-          <a:p>
-            <a:pPr algn="l"/>
-            <a:r>
-              <a:rPr sz="3800" b="0" i="0">
-                <a:solidFill>
-                  <a:srgbClr val="191D2E"/>
-                </a:solidFill>
-                <a:latin typeface="Georgia"/>
-              </a:rPr>
-              <a:t>Netzwerkanalyse in drei Schritten</a:t>
-            </a:r>
-          </a:p>
-        </p:txBody>
-      </p:sp>
-      <p:sp>
-        <p:nvSpPr>
-          <p:cNvPr id="7" name="Rectangle 6"/>
+          <p:cNvPr id="3" name="Rectangle 2"/>
           <p:cNvSpPr/>
           <p:nvPr/>
         </p:nvSpPr>
         <p:spPr>
           <a:xfrm>
-            <a:off x="609600" y="2762250"/>
-            <a:ext cx="10972800" cy="6350"/>
+            <a:off x="0" y="0"/>
+            <a:ext cx="12188952" cy="50292"/>
           </a:xfrm>
           <a:prstGeom prst="rect">
             <a:avLst/>
           </a:prstGeom>
           <a:solidFill>
-            <a:srgbClr val="E0E0E8"/>
+            <a:srgbClr val="1F2C56"/>
           </a:solidFill>
           <a:ln>
             <a:noFill/>
@@ -6195,14 +7526,14 @@
       </p:sp>
       <p:sp>
         <p:nvSpPr>
-          <p:cNvPr id="8" name="TextBox 7"/>
+          <p:cNvPr id="4" name="TextBox 3"/>
           <p:cNvSpPr txBox="1"/>
           <p:nvPr/>
         </p:nvSpPr>
         <p:spPr>
           <a:xfrm>
-            <a:off x="609600" y="2851150"/>
-            <a:ext cx="10972800" cy="3448050"/>
+            <a:off x="685800" y="109728"/>
+            <a:ext cx="10817352" cy="228600"/>
           </a:xfrm>
           <a:prstGeom prst="rect">
             <a:avLst/>
@@ -6210,84 +7541,235 @@
           <a:noFill/>
         </p:spPr>
         <p:txBody>
+          <a:bodyPr wrap="none">
+            <a:spAutoFit/>
+          </a:bodyPr>
+          <a:lstStyle/>
+          <a:p>
+            <a:pPr algn="l"/>
+            <a:r>
+              <a:rPr sz="750">
+                <a:solidFill>
+                  <a:srgbClr val="78808C"/>
+                </a:solidFill>
+                <a:latin typeface="JetBrains Mono"/>
+              </a:rPr>
+              <a:t>M20  ·  SCHAUBILD</a:t>
+            </a:r>
+          </a:p>
+        </p:txBody>
+      </p:sp>
+      <p:sp>
+        <p:nvSpPr>
+          <p:cNvPr id="5" name="TextBox 4"/>
+          <p:cNvSpPr txBox="1"/>
+          <p:nvPr/>
+        </p:nvSpPr>
+        <p:spPr>
+          <a:xfrm>
+            <a:off x="685800" y="502920"/>
+            <a:ext cx="10817352" cy="594360"/>
+          </a:xfrm>
+          <a:prstGeom prst="rect">
+            <a:avLst/>
+          </a:prstGeom>
+          <a:noFill/>
+        </p:spPr>
+        <p:txBody>
           <a:bodyPr wrap="square">
-            <a:normAutofit/>
+            <a:spAutoFit/>
           </a:bodyPr>
           <a:lstStyle/>
           <a:p>
-            <a:pPr>
-              <a:spcBef>
-                <a:spcPts val="600"/>
-              </a:spcBef>
-              <a:spcAft>
-                <a:spcPts val="600"/>
-              </a:spcAft>
-            </a:pPr>
-            <a:r>
-              <a:rPr sz="1400">
-                <a:solidFill>
-                  <a:srgbClr val="191D2E"/>
-                </a:solidFill>
-                <a:latin typeface="Georgia"/>
-              </a:rPr>
-              <a:t>–  Bestandsaufnahme: Wer ist in meinem Netzwerk? (Kunden, Partner, Multiplikatoren)</a:t>
-            </a:r>
-          </a:p>
-          <a:p>
-            <a:pPr>
-              <a:spcBef>
-                <a:spcPts val="600"/>
-              </a:spcBef>
-              <a:spcAft>
-                <a:spcPts val="600"/>
-              </a:spcAft>
-            </a:pPr>
-            <a:r>
-              <a:rPr sz="1400">
-                <a:solidFill>
-                  <a:srgbClr val="191D2E"/>
-                </a:solidFill>
-                <a:latin typeface="Georgia"/>
-              </a:rPr>
-              <a:t>–  Stärke bewerten: Wer empfiehlt mich aktiv? Wer kennt mich nur flüchtig?</a:t>
-            </a:r>
-          </a:p>
-          <a:p>
-            <a:pPr>
-              <a:spcBef>
-                <a:spcPts val="600"/>
-              </a:spcBef>
-              <a:spcAft>
-                <a:spcPts val="600"/>
-              </a:spcAft>
-            </a:pPr>
-            <a:r>
-              <a:rPr sz="1400">
-                <a:solidFill>
-                  <a:srgbClr val="191D2E"/>
-                </a:solidFill>
-                <a:latin typeface="Georgia"/>
-              </a:rPr>
-              <a:t>–  Lücken identifizieren: Welche Branchen, Berufsgruppen fehlen?</a:t>
-            </a:r>
-          </a:p>
-          <a:p>
-            <a:pPr>
-              <a:spcBef>
-                <a:spcPts val="600"/>
-              </a:spcBef>
-              <a:spcAft>
-                <a:spcPts val="600"/>
-              </a:spcAft>
-            </a:pPr>
-            <a:r>
-              <a:rPr sz="1400">
-                <a:solidFill>
-                  <a:srgbClr val="191D2E"/>
-                </a:solidFill>
-                <a:latin typeface="Georgia"/>
-              </a:rPr>
-              <a:t>–  Brücken finden: Wer kann mich zu jemandem einführen, den ich brauche?</a:t>
+            <a:pPr algn="l"/>
+            <a:r>
+              <a:rPr sz="2000" b="1" i="0">
+                <a:solidFill>
+                  <a:srgbClr val="1F2C56"/>
+                </a:solidFill>
+                <a:latin typeface="Source Serif 4"/>
+              </a:rPr>
+              <a:t>Netzwerk-Dimensionen eines FK-Beraters</a:t>
+            </a:r>
+          </a:p>
+        </p:txBody>
+      </p:sp>
+      <p:sp>
+        <p:nvSpPr>
+          <p:cNvPr id="6" name="Rectangle 5"/>
+          <p:cNvSpPr/>
+          <p:nvPr/>
+        </p:nvSpPr>
+        <p:spPr>
+          <a:xfrm>
+            <a:off x="685800" y="1143000"/>
+            <a:ext cx="10817352" cy="25400"/>
+          </a:xfrm>
+          <a:prstGeom prst="rect">
+            <a:avLst/>
+          </a:prstGeom>
+          <a:solidFill>
+            <a:srgbClr val="D9C089"/>
+          </a:solidFill>
+          <a:ln>
+            <a:noFill/>
+          </a:ln>
+        </p:spPr>
+        <p:style>
+          <a:lnRef idx="1">
+            <a:schemeClr val="accent1"/>
+          </a:lnRef>
+          <a:fillRef idx="3">
+            <a:schemeClr val="accent1"/>
+          </a:fillRef>
+          <a:effectRef idx="2">
+            <a:schemeClr val="accent1"/>
+          </a:effectRef>
+          <a:fontRef idx="minor">
+            <a:schemeClr val="lt1"/>
+          </a:fontRef>
+        </p:style>
+        <p:txBody>
+          <a:bodyPr rtlCol="0" anchor="ctr"/>
+          <a:lstStyle/>
+          <a:p>
+            <a:pPr algn="ctr"/>
+          </a:p>
+        </p:txBody>
+      </p:sp>
+      <p:pic>
+        <p:nvPicPr>
+          <p:cNvPr id="7" name="Picture 6" descr="image.png"/>
+          <p:cNvPicPr>
+            <a:picLocks noChangeAspect="1"/>
+          </p:cNvPicPr>
+          <p:nvPr/>
+        </p:nvPicPr>
+        <p:blipFill>
+          <a:blip r:embed="rId2"/>
+          <a:stretch>
+            <a:fillRect/>
+          </a:stretch>
+        </p:blipFill>
+        <p:spPr>
+          <a:xfrm>
+            <a:off x="2303489" y="1325880"/>
+            <a:ext cx="7581973" cy="4937760"/>
+          </a:xfrm>
+          <a:prstGeom prst="rect">
+            <a:avLst/>
+          </a:prstGeom>
+        </p:spPr>
+      </p:pic>
+      <p:sp>
+        <p:nvSpPr>
+          <p:cNvPr id="8" name="Rectangle 7"/>
+          <p:cNvSpPr/>
+          <p:nvPr/>
+        </p:nvSpPr>
+        <p:spPr>
+          <a:xfrm>
+            <a:off x="0" y="6510528"/>
+            <a:ext cx="12188952" cy="347472"/>
+          </a:xfrm>
+          <a:prstGeom prst="rect">
+            <a:avLst/>
+          </a:prstGeom>
+          <a:solidFill>
+            <a:srgbClr val="0A1937"/>
+          </a:solidFill>
+          <a:ln>
+            <a:noFill/>
+          </a:ln>
+        </p:spPr>
+        <p:style>
+          <a:lnRef idx="1">
+            <a:schemeClr val="accent1"/>
+          </a:lnRef>
+          <a:fillRef idx="3">
+            <a:schemeClr val="accent1"/>
+          </a:fillRef>
+          <a:effectRef idx="2">
+            <a:schemeClr val="accent1"/>
+          </a:effectRef>
+          <a:fontRef idx="minor">
+            <a:schemeClr val="lt1"/>
+          </a:fontRef>
+        </p:style>
+        <p:txBody>
+          <a:bodyPr rtlCol="0" anchor="ctr"/>
+          <a:lstStyle/>
+          <a:p>
+            <a:pPr algn="ctr"/>
+          </a:p>
+        </p:txBody>
+      </p:sp>
+      <p:sp>
+        <p:nvSpPr>
+          <p:cNvPr id="9" name="TextBox 8"/>
+          <p:cNvSpPr txBox="1"/>
+          <p:nvPr/>
+        </p:nvSpPr>
+        <p:spPr>
+          <a:xfrm>
+            <a:off x="685800" y="6583680"/>
+            <a:ext cx="6490411" cy="256032"/>
+          </a:xfrm>
+          <a:prstGeom prst="rect">
+            <a:avLst/>
+          </a:prstGeom>
+          <a:noFill/>
+        </p:spPr>
+        <p:txBody>
+          <a:bodyPr wrap="none">
+            <a:spAutoFit/>
+          </a:bodyPr>
+          <a:lstStyle/>
+          <a:p>
+            <a:pPr algn="l"/>
+            <a:r>
+              <a:rPr sz="700">
+                <a:solidFill>
+                  <a:srgbClr val="A0B4D2"/>
+                </a:solidFill>
+                <a:latin typeface="JetBrains Mono"/>
+              </a:rPr>
+              <a:t>Benedikt Zoller Coaching  ·  FKB Campus  ·  M20</a:t>
+            </a:r>
+          </a:p>
+        </p:txBody>
+      </p:sp>
+      <p:sp>
+        <p:nvSpPr>
+          <p:cNvPr id="10" name="TextBox 9"/>
+          <p:cNvSpPr txBox="1"/>
+          <p:nvPr/>
+        </p:nvSpPr>
+        <p:spPr>
+          <a:xfrm>
+            <a:off x="7176211" y="6583680"/>
+            <a:ext cx="4326940" cy="256032"/>
+          </a:xfrm>
+          <a:prstGeom prst="rect">
+            <a:avLst/>
+          </a:prstGeom>
+          <a:noFill/>
+        </p:spPr>
+        <p:txBody>
+          <a:bodyPr wrap="none">
+            <a:spAutoFit/>
+          </a:bodyPr>
+          <a:lstStyle/>
+          <a:p>
+            <a:pPr algn="r"/>
+            <a:r>
+              <a:rPr sz="700">
+                <a:solidFill>
+                  <a:srgbClr val="A0B4D2"/>
+                </a:solidFill>
+                <a:latin typeface="JetBrains Mono"/>
+              </a:rPr>
+              <a:t>Schaubild</a:t>
             </a:r>
           </a:p>
         </p:txBody>
@@ -6303,14 +7785,6 @@
 <file path=ppt/slides/slide7.xml><?xml version="1.0" encoding="utf-8"?>
 <p:sld xmlns:a="http://schemas.openxmlformats.org/drawingml/2006/main" xmlns:p="http://schemas.openxmlformats.org/presentationml/2006/main" xmlns:r="http://schemas.openxmlformats.org/officeDocument/2006/relationships">
   <p:cSld>
-    <p:bg>
-      <p:bgPr>
-        <a:solidFill>
-          <a:srgbClr val="1F2B56"/>
-        </a:solidFill>
-        <a:effectLst/>
-      </p:bgPr>
-    </p:bg>
     <p:spTree>
       <p:nvGrpSpPr>
         <p:cNvPr id="1" name=""/>
@@ -6320,71 +7794,87 @@
       <p:grpSpPr/>
       <p:sp>
         <p:nvSpPr>
-          <p:cNvPr id="2" name="TextBox 1"/>
-          <p:cNvSpPr txBox="1"/>
-          <p:nvPr/>
-        </p:nvSpPr>
-        <p:spPr>
-          <a:xfrm>
-            <a:off x="609600" y="279400"/>
-            <a:ext cx="2540000" cy="279400"/>
-          </a:xfrm>
-          <a:prstGeom prst="rect">
-            <a:avLst/>
-          </a:prstGeom>
-          <a:noFill/>
-        </p:spPr>
-        <p:txBody>
-          <a:bodyPr wrap="square">
-            <a:normAutofit/>
-          </a:bodyPr>
-          <a:lstStyle/>
-          <a:p>
-            <a:pPr algn="l"/>
-            <a:r>
-              <a:rPr sz="1000" b="1" i="0">
-                <a:solidFill>
-                  <a:srgbClr val="F8F8FA"/>
-                </a:solidFill>
-                <a:latin typeface="Arial"/>
-              </a:rPr>
-              <a:t>FKB  Campus</a:t>
-            </a:r>
-          </a:p>
-        </p:txBody>
-      </p:sp>
-      <p:sp>
-        <p:nvSpPr>
-          <p:cNvPr id="3" name="TextBox 2"/>
-          <p:cNvSpPr txBox="1"/>
-          <p:nvPr/>
-        </p:nvSpPr>
-        <p:spPr>
-          <a:xfrm>
-            <a:off x="609600" y="279400"/>
-            <a:ext cx="10972800" cy="279400"/>
-          </a:xfrm>
-          <a:prstGeom prst="rect">
-            <a:avLst/>
-          </a:prstGeom>
-          <a:noFill/>
-        </p:spPr>
-        <p:txBody>
-          <a:bodyPr wrap="square">
-            <a:normAutofit/>
-          </a:bodyPr>
-          <a:lstStyle/>
-          <a:p>
-            <a:pPr algn="r"/>
-            <a:r>
-              <a:rPr sz="900" b="0" i="0">
-                <a:solidFill>
-                  <a:srgbClr val="7B7FA0"/>
-                </a:solidFill>
-                <a:latin typeface="Courier New"/>
-              </a:rPr>
-              <a:t>SICHTBARKEIT AUFBAUEN — AUTHENTISCH</a:t>
-            </a:r>
+          <p:cNvPr id="2" name="Rectangle 1"/>
+          <p:cNvSpPr/>
+          <p:nvPr/>
+        </p:nvSpPr>
+        <p:spPr>
+          <a:xfrm>
+            <a:off x="0" y="0"/>
+            <a:ext cx="12188952" cy="6858000"/>
+          </a:xfrm>
+          <a:prstGeom prst="rect">
+            <a:avLst/>
+          </a:prstGeom>
+          <a:solidFill>
+            <a:srgbClr val="EDEDF3"/>
+          </a:solidFill>
+          <a:ln>
+            <a:noFill/>
+          </a:ln>
+        </p:spPr>
+        <p:style>
+          <a:lnRef idx="1">
+            <a:schemeClr val="accent1"/>
+          </a:lnRef>
+          <a:fillRef idx="3">
+            <a:schemeClr val="accent1"/>
+          </a:fillRef>
+          <a:effectRef idx="2">
+            <a:schemeClr val="accent1"/>
+          </a:effectRef>
+          <a:fontRef idx="minor">
+            <a:schemeClr val="lt1"/>
+          </a:fontRef>
+        </p:style>
+        <p:txBody>
+          <a:bodyPr rtlCol="0" anchor="ctr"/>
+          <a:lstStyle/>
+          <a:p>
+            <a:pPr algn="ctr"/>
+          </a:p>
+        </p:txBody>
+      </p:sp>
+      <p:sp>
+        <p:nvSpPr>
+          <p:cNvPr id="3" name="Rectangle 2"/>
+          <p:cNvSpPr/>
+          <p:nvPr/>
+        </p:nvSpPr>
+        <p:spPr>
+          <a:xfrm>
+            <a:off x="0" y="0"/>
+            <a:ext cx="12188952" cy="50292"/>
+          </a:xfrm>
+          <a:prstGeom prst="rect">
+            <a:avLst/>
+          </a:prstGeom>
+          <a:solidFill>
+            <a:srgbClr val="1F2C56"/>
+          </a:solidFill>
+          <a:ln>
+            <a:noFill/>
+          </a:ln>
+        </p:spPr>
+        <p:style>
+          <a:lnRef idx="1">
+            <a:schemeClr val="accent1"/>
+          </a:lnRef>
+          <a:fillRef idx="3">
+            <a:schemeClr val="accent1"/>
+          </a:fillRef>
+          <a:effectRef idx="2">
+            <a:schemeClr val="accent1"/>
+          </a:effectRef>
+          <a:fontRef idx="minor">
+            <a:schemeClr val="lt1"/>
+          </a:fontRef>
+        </p:style>
+        <p:txBody>
+          <a:bodyPr rtlCol="0" anchor="ctr"/>
+          <a:lstStyle/>
+          <a:p>
+            <a:pPr algn="ctr"/>
           </a:p>
         </p:txBody>
       </p:sp>
@@ -6396,8 +7886,8 @@
         </p:nvSpPr>
         <p:spPr>
           <a:xfrm>
-            <a:off x="609600" y="6426200"/>
-            <a:ext cx="10972800" cy="228600"/>
+            <a:off x="685800" y="109728"/>
+            <a:ext cx="10817352" cy="228600"/>
           </a:xfrm>
           <a:prstGeom prst="rect">
             <a:avLst/>
@@ -6405,91 +7895,107 @@
           <a:noFill/>
         </p:spPr>
         <p:txBody>
-          <a:bodyPr wrap="square">
-            <a:normAutofit/>
+          <a:bodyPr wrap="none">
+            <a:spAutoFit/>
           </a:bodyPr>
           <a:lstStyle/>
           <a:p>
-            <a:pPr algn="r"/>
-            <a:r>
-              <a:rPr sz="900" b="0" i="0">
-                <a:solidFill>
-                  <a:srgbClr val="7B7FA0"/>
-                </a:solidFill>
-                <a:latin typeface="Courier New"/>
-              </a:rPr>
-              <a:t>07</a:t>
-            </a:r>
-          </a:p>
-        </p:txBody>
-      </p:sp>
-      <p:sp>
-        <p:nvSpPr>
-          <p:cNvPr id="5" name="TextBox 4"/>
-          <p:cNvSpPr txBox="1"/>
-          <p:nvPr/>
-        </p:nvSpPr>
-        <p:spPr>
-          <a:xfrm>
-            <a:off x="609600" y="635000"/>
-            <a:ext cx="5461000" cy="5461000"/>
-          </a:xfrm>
-          <a:prstGeom prst="rect">
-            <a:avLst/>
-          </a:prstGeom>
-          <a:noFill/>
-        </p:spPr>
-        <p:txBody>
-          <a:bodyPr wrap="square">
-            <a:normAutofit/>
-          </a:bodyPr>
-          <a:lstStyle/>
-          <a:p>
             <a:pPr algn="l"/>
             <a:r>
-              <a:rPr sz="28000" b="0" i="1">
-                <a:solidFill>
-                  <a:srgbClr val="D9BF7A"/>
-                </a:solidFill>
-                <a:latin typeface="Georgia"/>
-              </a:rPr>
-              <a:t>III</a:t>
-            </a:r>
-          </a:p>
-        </p:txBody>
-      </p:sp>
-      <p:sp>
-        <p:nvSpPr>
-          <p:cNvPr id="6" name="TextBox 5"/>
-          <p:cNvSpPr txBox="1"/>
-          <p:nvPr/>
-        </p:nvSpPr>
-        <p:spPr>
-          <a:xfrm>
-            <a:off x="6731000" y="4064000"/>
-            <a:ext cx="4851400" cy="1778000"/>
-          </a:xfrm>
-          <a:prstGeom prst="rect">
-            <a:avLst/>
-          </a:prstGeom>
-          <a:noFill/>
-        </p:spPr>
-        <p:txBody>
-          <a:bodyPr wrap="square">
-            <a:normAutofit/>
-          </a:bodyPr>
-          <a:lstStyle/>
-          <a:p>
-            <a:pPr algn="r"/>
-            <a:r>
-              <a:rPr sz="3800" b="0" i="0">
-                <a:solidFill>
-                  <a:srgbClr val="F8F8FA"/>
-                </a:solidFill>
-                <a:latin typeface="Georgia"/>
-              </a:rPr>
-              <a:t>Sichtbarkeit aufbauen — authentisch</a:t>
-            </a:r>
+              <a:rPr sz="750">
+                <a:solidFill>
+                  <a:srgbClr val="78808C"/>
+                </a:solidFill>
+                <a:latin typeface="JetBrains Mono"/>
+              </a:rPr>
+              <a:t>M20  ·  INHALT</a:t>
+            </a:r>
+          </a:p>
+        </p:txBody>
+      </p:sp>
+      <p:sp>
+        <p:nvSpPr>
+          <p:cNvPr id="5" name="Rectangle 4"/>
+          <p:cNvSpPr/>
+          <p:nvPr/>
+        </p:nvSpPr>
+        <p:spPr>
+          <a:xfrm>
+            <a:off x="0" y="1234440"/>
+            <a:ext cx="12188952" cy="12700"/>
+          </a:xfrm>
+          <a:prstGeom prst="rect">
+            <a:avLst/>
+          </a:prstGeom>
+          <a:solidFill>
+            <a:srgbClr val="D8DFE4"/>
+          </a:solidFill>
+          <a:ln>
+            <a:noFill/>
+          </a:ln>
+        </p:spPr>
+        <p:style>
+          <a:lnRef idx="1">
+            <a:schemeClr val="accent1"/>
+          </a:lnRef>
+          <a:fillRef idx="3">
+            <a:schemeClr val="accent1"/>
+          </a:fillRef>
+          <a:effectRef idx="2">
+            <a:schemeClr val="accent1"/>
+          </a:effectRef>
+          <a:fontRef idx="minor">
+            <a:schemeClr val="lt1"/>
+          </a:fontRef>
+        </p:style>
+        <p:txBody>
+          <a:bodyPr rtlCol="0" anchor="ctr"/>
+          <a:lstStyle/>
+          <a:p>
+            <a:pPr algn="ctr"/>
+          </a:p>
+        </p:txBody>
+      </p:sp>
+      <p:sp>
+        <p:nvSpPr>
+          <p:cNvPr id="6" name="Rectangle 5"/>
+          <p:cNvSpPr/>
+          <p:nvPr/>
+        </p:nvSpPr>
+        <p:spPr>
+          <a:xfrm>
+            <a:off x="685800" y="502920"/>
+            <a:ext cx="36576" cy="658368"/>
+          </a:xfrm>
+          <a:prstGeom prst="rect">
+            <a:avLst/>
+          </a:prstGeom>
+          <a:solidFill>
+            <a:srgbClr val="D9C089"/>
+          </a:solidFill>
+          <a:ln>
+            <a:noFill/>
+          </a:ln>
+        </p:spPr>
+        <p:style>
+          <a:lnRef idx="1">
+            <a:schemeClr val="accent1"/>
+          </a:lnRef>
+          <a:fillRef idx="3">
+            <a:schemeClr val="accent1"/>
+          </a:fillRef>
+          <a:effectRef idx="2">
+            <a:schemeClr val="accent1"/>
+          </a:effectRef>
+          <a:fontRef idx="minor">
+            <a:schemeClr val="lt1"/>
+          </a:fontRef>
+        </p:style>
+        <p:txBody>
+          <a:bodyPr rtlCol="0" anchor="ctr"/>
+          <a:lstStyle/>
+          <a:p>
+            <a:pPr algn="ctr"/>
           </a:p>
         </p:txBody>
       </p:sp>
@@ -6501,8 +8007,8 @@
         </p:nvSpPr>
         <p:spPr>
           <a:xfrm>
-            <a:off x="6731000" y="5842000"/>
-            <a:ext cx="4851400" cy="635000"/>
+            <a:off x="813816" y="502920"/>
+            <a:ext cx="10634472" cy="685800"/>
           </a:xfrm>
           <a:prstGeom prst="rect">
             <a:avLst/>
@@ -6511,19 +8017,310 @@
         </p:spPr>
         <p:txBody>
           <a:bodyPr wrap="square">
-            <a:normAutofit/>
+            <a:spAutoFit/>
           </a:bodyPr>
           <a:lstStyle/>
           <a:p>
-            <a:pPr algn="r"/>
-            <a:r>
-              <a:rPr sz="1400" b="0" i="1">
-                <a:solidFill>
-                  <a:srgbClr val="7B7FA0"/>
-                </a:solidFill>
-                <a:latin typeface="Georgia"/>
-              </a:rPr>
-              <a:t>Expertise zeigen ohne Eigenwerbung</a:t>
+            <a:pPr algn="l"/>
+            <a:r>
+              <a:rPr sz="2400" b="1" i="0">
+                <a:solidFill>
+                  <a:srgbClr val="1F2C56"/>
+                </a:solidFill>
+                <a:latin typeface="Source Serif 4"/>
+              </a:rPr>
+              <a:t>Das Netzwerk-Audit (3 Fragen)</a:t>
+            </a:r>
+          </a:p>
+        </p:txBody>
+      </p:sp>
+      <p:sp>
+        <p:nvSpPr>
+          <p:cNvPr id="8" name="TextBox 7"/>
+          <p:cNvSpPr txBox="1"/>
+          <p:nvPr/>
+        </p:nvSpPr>
+        <p:spPr>
+          <a:xfrm>
+            <a:off x="685800" y="1417320"/>
+            <a:ext cx="10817352" cy="5029200"/>
+          </a:xfrm>
+          <a:prstGeom prst="rect">
+            <a:avLst/>
+          </a:prstGeom>
+          <a:noFill/>
+        </p:spPr>
+        <p:txBody>
+          <a:bodyPr wrap="square">
+            <a:spAutoFit/>
+          </a:bodyPr>
+          <a:lstStyle/>
+          <a:p>
+            <a:pPr>
+              <a:spcBef>
+                <a:spcPts val="400"/>
+              </a:spcBef>
+              <a:spcAft>
+                <a:spcPts val="200"/>
+              </a:spcAft>
+            </a:pPr>
+            <a:r>
+              <a:rPr sz="1200">
+                <a:solidFill>
+                  <a:srgbClr val="3D5466"/>
+                </a:solidFill>
+                <a:latin typeface="Arial"/>
+              </a:rPr>
+              <a:t>Frage 1: Stärke meiner bestehenden Verbindungen</a:t>
+            </a:r>
+          </a:p>
+          <a:p>
+            <a:pPr>
+              <a:spcBef>
+                <a:spcPts val="400"/>
+              </a:spcBef>
+              <a:spcAft>
+                <a:spcPts val="200"/>
+              </a:spcAft>
+            </a:pPr>
+            <a:r>
+              <a:rPr sz="1200">
+                <a:solidFill>
+                  <a:srgbClr val="3D5466"/>
+                </a:solidFill>
+                <a:latin typeface="Arial"/>
+              </a:rPr>
+              <a:t>Frage 2: Wo sind meine strukturellen Lücken?</a:t>
+            </a:r>
+          </a:p>
+          <a:p>
+            <a:pPr>
+              <a:spcBef>
+                <a:spcPts val="400"/>
+              </a:spcBef>
+              <a:spcAft>
+                <a:spcPts val="200"/>
+              </a:spcAft>
+            </a:pPr>
+            <a:r>
+              <a:rPr sz="1300">
+                <a:solidFill>
+                  <a:srgbClr val="3D5466"/>
+                </a:solidFill>
+                <a:latin typeface="Arial"/>
+              </a:rPr>
+              <a:t>▸  In welchen Branchen kenne ich niemanden außer meinen eigenen Kunden?</a:t>
+            </a:r>
+          </a:p>
+          <a:p>
+            <a:pPr>
+              <a:spcBef>
+                <a:spcPts val="400"/>
+              </a:spcBef>
+              <a:spcAft>
+                <a:spcPts val="200"/>
+              </a:spcAft>
+            </a:pPr>
+            <a:r>
+              <a:rPr sz="1300">
+                <a:solidFill>
+                  <a:srgbClr val="3D5466"/>
+                </a:solidFill>
+                <a:latin typeface="Arial"/>
+              </a:rPr>
+              <a:t>▸  Mit welchen Multiplikatoren hätte ich gerne Kontakt, aber noch keinen?</a:t>
+            </a:r>
+          </a:p>
+          <a:p>
+            <a:pPr>
+              <a:spcBef>
+                <a:spcPts val="400"/>
+              </a:spcBef>
+              <a:spcAft>
+                <a:spcPts val="200"/>
+              </a:spcAft>
+            </a:pPr>
+            <a:r>
+              <a:rPr sz="1300">
+                <a:solidFill>
+                  <a:srgbClr val="3D5466"/>
+                </a:solidFill>
+                <a:latin typeface="Arial"/>
+              </a:rPr>
+              <a:t>▸  Welche internen Bereiche kenne ich zu wenig?</a:t>
+            </a:r>
+          </a:p>
+          <a:p>
+            <a:pPr>
+              <a:spcBef>
+                <a:spcPts val="400"/>
+              </a:spcBef>
+              <a:spcAft>
+                <a:spcPts val="200"/>
+              </a:spcAft>
+            </a:pPr>
+            <a:r>
+              <a:rPr sz="1200">
+                <a:solidFill>
+                  <a:srgbClr val="3D5466"/>
+                </a:solidFill>
+                <a:latin typeface="Arial"/>
+              </a:rPr>
+              <a:t>Frage 3: Wo liegt mein Broker-Potenzial?</a:t>
+            </a:r>
+          </a:p>
+          <a:p>
+            <a:pPr>
+              <a:spcBef>
+                <a:spcPts val="400"/>
+              </a:spcBef>
+              <a:spcAft>
+                <a:spcPts val="200"/>
+              </a:spcAft>
+            </a:pPr>
+            <a:r>
+              <a:rPr sz="1300">
+                <a:solidFill>
+                  <a:srgbClr val="3D5466"/>
+                </a:solidFill>
+                <a:latin typeface="Arial"/>
+              </a:rPr>
+              <a:t>▸  Welche zwei Gruppen in meinem Netzwerk kennen sich nicht, würden aber voneinander profitieren?</a:t>
+            </a:r>
+          </a:p>
+          <a:p>
+            <a:pPr>
+              <a:spcBef>
+                <a:spcPts val="400"/>
+              </a:spcBef>
+              <a:spcAft>
+                <a:spcPts val="200"/>
+              </a:spcAft>
+            </a:pPr>
+            <a:r>
+              <a:rPr sz="1300">
+                <a:solidFill>
+                  <a:srgbClr val="3D5466"/>
+                </a:solidFill>
+                <a:latin typeface="Arial"/>
+              </a:rPr>
+              <a:t>▸  Wo kann ich durch Zusammenführen Mehrwert stiften – ohne Eigeninteresse?</a:t>
+            </a:r>
+          </a:p>
+          <a:p>
+            <a:pPr>
+              <a:spcBef>
+                <a:spcPts val="400"/>
+              </a:spcBef>
+              <a:spcAft>
+                <a:spcPts val="200"/>
+              </a:spcAft>
+            </a:pPr>
+            <a:r>
+              <a:rPr sz="1200">
+                <a:solidFill>
+                  <a:srgbClr val="3D5466"/>
+                </a:solidFill>
+                <a:latin typeface="Arial"/>
+              </a:rPr>
+              <a:t>## 4.4 Sichtbarkeit: Expertise sichtbar machen ohne Eigenwerbung</a:t>
+            </a:r>
+          </a:p>
+          <a:p>
+            <a:pPr>
+              <a:spcBef>
+                <a:spcPts val="400"/>
+              </a:spcBef>
+              <a:spcAft>
+                <a:spcPts val="200"/>
+              </a:spcAft>
+            </a:pPr>
+            <a:r>
+              <a:rPr sz="1200">
+                <a:solidFill>
+                  <a:srgbClr val="3D5466"/>
+                </a:solidFill>
+                <a:latin typeface="Arial"/>
+              </a:rPr>
+              <a:t>Sichtbarkeit entsteht nicht durch Selbstlob, sondern durch konsistente Fachkompetenz, die anderen nutzt. Die wirkmächtigsten Formate:</a:t>
+            </a:r>
+          </a:p>
+        </p:txBody>
+      </p:sp>
+      <p:sp>
+        <p:nvSpPr>
+          <p:cNvPr id="9" name="Rectangle 8"/>
+          <p:cNvSpPr/>
+          <p:nvPr/>
+        </p:nvSpPr>
+        <p:spPr>
+          <a:xfrm>
+            <a:off x="0" y="6510528"/>
+            <a:ext cx="12188952" cy="347472"/>
+          </a:xfrm>
+          <a:prstGeom prst="rect">
+            <a:avLst/>
+          </a:prstGeom>
+          <a:solidFill>
+            <a:srgbClr val="0A1937"/>
+          </a:solidFill>
+          <a:ln>
+            <a:noFill/>
+          </a:ln>
+        </p:spPr>
+        <p:style>
+          <a:lnRef idx="1">
+            <a:schemeClr val="accent1"/>
+          </a:lnRef>
+          <a:fillRef idx="3">
+            <a:schemeClr val="accent1"/>
+          </a:fillRef>
+          <a:effectRef idx="2">
+            <a:schemeClr val="accent1"/>
+          </a:effectRef>
+          <a:fontRef idx="minor">
+            <a:schemeClr val="lt1"/>
+          </a:fontRef>
+        </p:style>
+        <p:txBody>
+          <a:bodyPr rtlCol="0" anchor="ctr"/>
+          <a:lstStyle/>
+          <a:p>
+            <a:pPr algn="ctr"/>
+          </a:p>
+        </p:txBody>
+      </p:sp>
+      <p:sp>
+        <p:nvSpPr>
+          <p:cNvPr id="10" name="TextBox 9"/>
+          <p:cNvSpPr txBox="1"/>
+          <p:nvPr/>
+        </p:nvSpPr>
+        <p:spPr>
+          <a:xfrm>
+            <a:off x="685800" y="6583680"/>
+            <a:ext cx="6490411" cy="256032"/>
+          </a:xfrm>
+          <a:prstGeom prst="rect">
+            <a:avLst/>
+          </a:prstGeom>
+          <a:noFill/>
+        </p:spPr>
+        <p:txBody>
+          <a:bodyPr wrap="none">
+            <a:spAutoFit/>
+          </a:bodyPr>
+          <a:lstStyle/>
+          <a:p>
+            <a:pPr algn="l"/>
+            <a:r>
+              <a:rPr sz="700">
+                <a:solidFill>
+                  <a:srgbClr val="A0B4D2"/>
+                </a:solidFill>
+                <a:latin typeface="JetBrains Mono"/>
+              </a:rPr>
+              <a:t>Benedikt Zoller Coaching  ·  FKB Campus  ·  M20</a:t>
             </a:r>
           </a:p>
         </p:txBody>
@@ -6539,14 +8336,6 @@
 <file path=ppt/slides/slide8.xml><?xml version="1.0" encoding="utf-8"?>
 <p:sld xmlns:a="http://schemas.openxmlformats.org/drawingml/2006/main" xmlns:p="http://schemas.openxmlformats.org/presentationml/2006/main" xmlns:r="http://schemas.openxmlformats.org/officeDocument/2006/relationships">
   <p:cSld>
-    <p:bg>
-      <p:bgPr>
-        <a:solidFill>
-          <a:srgbClr val="F8F8FA"/>
-        </a:solidFill>
-        <a:effectLst/>
-      </p:bgPr>
-    </p:bg>
     <p:spTree>
       <p:nvGrpSpPr>
         <p:cNvPr id="1" name=""/>
@@ -6556,125 +8345,20 @@
       <p:grpSpPr/>
       <p:sp>
         <p:nvSpPr>
-          <p:cNvPr id="2" name="TextBox 1"/>
-          <p:cNvSpPr txBox="1"/>
-          <p:nvPr/>
-        </p:nvSpPr>
-        <p:spPr>
-          <a:xfrm>
-            <a:off x="609600" y="279400"/>
-            <a:ext cx="2540000" cy="279400"/>
-          </a:xfrm>
-          <a:prstGeom prst="rect">
-            <a:avLst/>
-          </a:prstGeom>
-          <a:noFill/>
-        </p:spPr>
-        <p:txBody>
-          <a:bodyPr wrap="square">
-            <a:normAutofit/>
-          </a:bodyPr>
-          <a:lstStyle/>
-          <a:p>
-            <a:pPr algn="l"/>
-            <a:r>
-              <a:rPr sz="1000" b="1" i="0">
-                <a:solidFill>
-                  <a:srgbClr val="191D2E"/>
-                </a:solidFill>
-                <a:latin typeface="Arial"/>
-              </a:rPr>
-              <a:t>FKB  Campus</a:t>
-            </a:r>
-          </a:p>
-        </p:txBody>
-      </p:sp>
-      <p:sp>
-        <p:nvSpPr>
-          <p:cNvPr id="3" name="TextBox 2"/>
-          <p:cNvSpPr txBox="1"/>
-          <p:nvPr/>
-        </p:nvSpPr>
-        <p:spPr>
-          <a:xfrm>
-            <a:off x="609600" y="279400"/>
-            <a:ext cx="10972800" cy="279400"/>
-          </a:xfrm>
-          <a:prstGeom prst="rect">
-            <a:avLst/>
-          </a:prstGeom>
-          <a:noFill/>
-        </p:spPr>
-        <p:txBody>
-          <a:bodyPr wrap="square">
-            <a:normAutofit/>
-          </a:bodyPr>
-          <a:lstStyle/>
-          <a:p>
-            <a:pPr algn="r"/>
-            <a:r>
-              <a:rPr sz="900" b="0" i="0">
-                <a:solidFill>
-                  <a:srgbClr val="7B7FA0"/>
-                </a:solidFill>
-                <a:latin typeface="Courier New"/>
-              </a:rPr>
-              <a:t>III · SICHTBARKEIT AUFBAUEN — AUTHENTISCH</a:t>
-            </a:r>
-          </a:p>
-        </p:txBody>
-      </p:sp>
-      <p:sp>
-        <p:nvSpPr>
-          <p:cNvPr id="4" name="TextBox 3"/>
-          <p:cNvSpPr txBox="1"/>
-          <p:nvPr/>
-        </p:nvSpPr>
-        <p:spPr>
-          <a:xfrm>
-            <a:off x="609600" y="6426200"/>
-            <a:ext cx="10972800" cy="228600"/>
-          </a:xfrm>
-          <a:prstGeom prst="rect">
-            <a:avLst/>
-          </a:prstGeom>
-          <a:noFill/>
-        </p:spPr>
-        <p:txBody>
-          <a:bodyPr wrap="square">
-            <a:normAutofit/>
-          </a:bodyPr>
-          <a:lstStyle/>
-          <a:p>
-            <a:pPr algn="r"/>
-            <a:r>
-              <a:rPr sz="900" b="0" i="0">
-                <a:solidFill>
-                  <a:srgbClr val="7B7FA0"/>
-                </a:solidFill>
-                <a:latin typeface="Courier New"/>
-              </a:rPr>
-              <a:t>08</a:t>
-            </a:r>
-          </a:p>
-        </p:txBody>
-      </p:sp>
-      <p:sp>
-        <p:nvSpPr>
-          <p:cNvPr id="5" name="Rectangle 4"/>
+          <p:cNvPr id="2" name="Rectangle 1"/>
           <p:cNvSpPr/>
           <p:nvPr/>
         </p:nvSpPr>
         <p:spPr>
           <a:xfrm>
-            <a:off x="609600" y="825500"/>
-            <a:ext cx="10972800" cy="6350"/>
+            <a:off x="0" y="0"/>
+            <a:ext cx="12188952" cy="6858000"/>
           </a:xfrm>
           <a:prstGeom prst="rect">
             <a:avLst/>
           </a:prstGeom>
           <a:solidFill>
-            <a:srgbClr val="191D2E"/>
+            <a:srgbClr val="EDEDF3"/>
           </a:solidFill>
           <a:ln>
             <a:noFill/>
@@ -6704,55 +8388,20 @@
       </p:sp>
       <p:sp>
         <p:nvSpPr>
-          <p:cNvPr id="6" name="TextBox 5"/>
-          <p:cNvSpPr txBox="1"/>
-          <p:nvPr/>
-        </p:nvSpPr>
-        <p:spPr>
-          <a:xfrm>
-            <a:off x="609600" y="920750"/>
-            <a:ext cx="10972800" cy="1778000"/>
-          </a:xfrm>
-          <a:prstGeom prst="rect">
-            <a:avLst/>
-          </a:prstGeom>
-          <a:noFill/>
-        </p:spPr>
-        <p:txBody>
-          <a:bodyPr wrap="square">
-            <a:normAutofit/>
-          </a:bodyPr>
-          <a:lstStyle/>
-          <a:p>
-            <a:pPr algn="l"/>
-            <a:r>
-              <a:rPr sz="3800" b="0" i="0">
-                <a:solidFill>
-                  <a:srgbClr val="191D2E"/>
-                </a:solidFill>
-                <a:latin typeface="Georgia"/>
-              </a:rPr>
-              <a:t>Drei Wege zur Fachsichtbarkeit</a:t>
-            </a:r>
-          </a:p>
-        </p:txBody>
-      </p:sp>
-      <p:sp>
-        <p:nvSpPr>
-          <p:cNvPr id="7" name="Rectangle 6"/>
+          <p:cNvPr id="3" name="Rectangle 2"/>
           <p:cNvSpPr/>
           <p:nvPr/>
         </p:nvSpPr>
         <p:spPr>
           <a:xfrm>
-            <a:off x="609600" y="2762250"/>
-            <a:ext cx="10972800" cy="6350"/>
+            <a:off x="0" y="0"/>
+            <a:ext cx="12188952" cy="50292"/>
           </a:xfrm>
           <a:prstGeom prst="rect">
             <a:avLst/>
           </a:prstGeom>
           <a:solidFill>
-            <a:srgbClr val="E0E0E8"/>
+            <a:srgbClr val="1F2C56"/>
           </a:solidFill>
           <a:ln>
             <a:noFill/>
@@ -6782,14 +8431,170 @@
       </p:sp>
       <p:sp>
         <p:nvSpPr>
+          <p:cNvPr id="4" name="TextBox 3"/>
+          <p:cNvSpPr txBox="1"/>
+          <p:nvPr/>
+        </p:nvSpPr>
+        <p:spPr>
+          <a:xfrm>
+            <a:off x="685800" y="109728"/>
+            <a:ext cx="10817352" cy="228600"/>
+          </a:xfrm>
+          <a:prstGeom prst="rect">
+            <a:avLst/>
+          </a:prstGeom>
+          <a:noFill/>
+        </p:spPr>
+        <p:txBody>
+          <a:bodyPr wrap="none">
+            <a:spAutoFit/>
+          </a:bodyPr>
+          <a:lstStyle/>
+          <a:p>
+            <a:pPr algn="l"/>
+            <a:r>
+              <a:rPr sz="750">
+                <a:solidFill>
+                  <a:srgbClr val="78808C"/>
+                </a:solidFill>
+                <a:latin typeface="JetBrains Mono"/>
+              </a:rPr>
+              <a:t>M20  ·  INHALT</a:t>
+            </a:r>
+          </a:p>
+        </p:txBody>
+      </p:sp>
+      <p:sp>
+        <p:nvSpPr>
+          <p:cNvPr id="5" name="Rectangle 4"/>
+          <p:cNvSpPr/>
+          <p:nvPr/>
+        </p:nvSpPr>
+        <p:spPr>
+          <a:xfrm>
+            <a:off x="0" y="1234440"/>
+            <a:ext cx="12188952" cy="12700"/>
+          </a:xfrm>
+          <a:prstGeom prst="rect">
+            <a:avLst/>
+          </a:prstGeom>
+          <a:solidFill>
+            <a:srgbClr val="D8DFE4"/>
+          </a:solidFill>
+          <a:ln>
+            <a:noFill/>
+          </a:ln>
+        </p:spPr>
+        <p:style>
+          <a:lnRef idx="1">
+            <a:schemeClr val="accent1"/>
+          </a:lnRef>
+          <a:fillRef idx="3">
+            <a:schemeClr val="accent1"/>
+          </a:fillRef>
+          <a:effectRef idx="2">
+            <a:schemeClr val="accent1"/>
+          </a:effectRef>
+          <a:fontRef idx="minor">
+            <a:schemeClr val="lt1"/>
+          </a:fontRef>
+        </p:style>
+        <p:txBody>
+          <a:bodyPr rtlCol="0" anchor="ctr"/>
+          <a:lstStyle/>
+          <a:p>
+            <a:pPr algn="ctr"/>
+          </a:p>
+        </p:txBody>
+      </p:sp>
+      <p:sp>
+        <p:nvSpPr>
+          <p:cNvPr id="6" name="Rectangle 5"/>
+          <p:cNvSpPr/>
+          <p:nvPr/>
+        </p:nvSpPr>
+        <p:spPr>
+          <a:xfrm>
+            <a:off x="685800" y="502920"/>
+            <a:ext cx="36576" cy="658368"/>
+          </a:xfrm>
+          <a:prstGeom prst="rect">
+            <a:avLst/>
+          </a:prstGeom>
+          <a:solidFill>
+            <a:srgbClr val="D9C089"/>
+          </a:solidFill>
+          <a:ln>
+            <a:noFill/>
+          </a:ln>
+        </p:spPr>
+        <p:style>
+          <a:lnRef idx="1">
+            <a:schemeClr val="accent1"/>
+          </a:lnRef>
+          <a:fillRef idx="3">
+            <a:schemeClr val="accent1"/>
+          </a:fillRef>
+          <a:effectRef idx="2">
+            <a:schemeClr val="accent1"/>
+          </a:effectRef>
+          <a:fontRef idx="minor">
+            <a:schemeClr val="lt1"/>
+          </a:fontRef>
+        </p:style>
+        <p:txBody>
+          <a:bodyPr rtlCol="0" anchor="ctr"/>
+          <a:lstStyle/>
+          <a:p>
+            <a:pPr algn="ctr"/>
+          </a:p>
+        </p:txBody>
+      </p:sp>
+      <p:sp>
+        <p:nvSpPr>
+          <p:cNvPr id="7" name="TextBox 6"/>
+          <p:cNvSpPr txBox="1"/>
+          <p:nvPr/>
+        </p:nvSpPr>
+        <p:spPr>
+          <a:xfrm>
+            <a:off x="813816" y="502920"/>
+            <a:ext cx="10634472" cy="685800"/>
+          </a:xfrm>
+          <a:prstGeom prst="rect">
+            <a:avLst/>
+          </a:prstGeom>
+          <a:noFill/>
+        </p:spPr>
+        <p:txBody>
+          <a:bodyPr wrap="square">
+            <a:spAutoFit/>
+          </a:bodyPr>
+          <a:lstStyle/>
+          <a:p>
+            <a:pPr algn="l"/>
+            <a:r>
+              <a:rPr sz="2400" b="1" i="0">
+                <a:solidFill>
+                  <a:srgbClr val="1F2C56"/>
+                </a:solidFill>
+                <a:latin typeface="Source Serif 4"/>
+              </a:rPr>
+              <a:t>Format 1: Fachbeiträge und Impulse</a:t>
+            </a:r>
+          </a:p>
+        </p:txBody>
+      </p:sp>
+      <p:sp>
+        <p:nvSpPr>
           <p:cNvPr id="8" name="TextBox 7"/>
           <p:cNvSpPr txBox="1"/>
           <p:nvPr/>
         </p:nvSpPr>
         <p:spPr>
           <a:xfrm>
-            <a:off x="609600" y="2851150"/>
-            <a:ext cx="10972800" cy="3448050"/>
+            <a:off x="685800" y="1417320"/>
+            <a:ext cx="10817352" cy="5029200"/>
           </a:xfrm>
           <a:prstGeom prst="rect">
             <a:avLst/>
@@ -6798,64 +8603,180 @@
         </p:spPr>
         <p:txBody>
           <a:bodyPr wrap="square">
-            <a:normAutofit/>
+            <a:spAutoFit/>
           </a:bodyPr>
           <a:lstStyle/>
           <a:p>
             <a:pPr>
               <a:spcBef>
-                <a:spcPts val="600"/>
+                <a:spcPts val="400"/>
               </a:spcBef>
               <a:spcAft>
-                <a:spcPts val="600"/>
+                <a:spcPts val="200"/>
               </a:spcAft>
             </a:pPr>
             <a:r>
-              <a:rPr sz="1400">
-                <a:solidFill>
-                  <a:srgbClr val="191D2E"/>
-                </a:solidFill>
-                <a:latin typeface="Georgia"/>
-              </a:rPr>
-              <a:t>–  LinkedIn: Fachbeiträge zu Themen, die Ihre Zielkunden beschäftigen</a:t>
+              <a:rPr sz="1200">
+                <a:solidFill>
+                  <a:srgbClr val="3D5466"/>
+                </a:solidFill>
+                <a:latin typeface="Arial"/>
+              </a:rPr>
+              <a:t>Was: Kurze, prägnante Wissensimpulse – nicht als Werbung, sondern als echten Mehrwert für Netzwerkkontakte.</a:t>
             </a:r>
           </a:p>
           <a:p>
             <a:pPr>
               <a:spcBef>
-                <a:spcPts val="600"/>
+                <a:spcPts val="400"/>
               </a:spcBef>
               <a:spcAft>
-                <a:spcPts val="600"/>
+                <a:spcPts val="200"/>
               </a:spcAft>
             </a:pPr>
             <a:r>
-              <a:rPr sz="1400">
-                <a:solidFill>
-                  <a:srgbClr val="191D2E"/>
-                </a:solidFill>
-                <a:latin typeface="Georgia"/>
-              </a:rPr>
-              <a:t>–  Veranstaltungen: Aktiv mitgestalten — nicht nur besuchen</a:t>
+              <a:rPr sz="1200">
+                <a:solidFill>
+                  <a:srgbClr val="3D5466"/>
+                </a:solidFill>
+                <a:latin typeface="Arial"/>
+              </a:rPr>
+              <a:t>Beispiele:</a:t>
             </a:r>
           </a:p>
           <a:p>
             <a:pPr>
               <a:spcBef>
-                <a:spcPts val="600"/>
+                <a:spcPts val="400"/>
               </a:spcBef>
               <a:spcAft>
-                <a:spcPts val="600"/>
+                <a:spcPts val="200"/>
               </a:spcAft>
             </a:pPr>
             <a:r>
-              <a:rPr sz="1400">
-                <a:solidFill>
-                  <a:srgbClr val="191D2E"/>
-                </a:solidFill>
-                <a:latin typeface="Georgia"/>
-              </a:rPr>
-              <a:t>–  Kooperationen: Steuerberater, Anwälte, Unternehmensberater als Partner</a:t>
+              <a:rPr sz="1300">
+                <a:solidFill>
+                  <a:srgbClr val="3D5466"/>
+                </a:solidFill>
+                <a:latin typeface="Arial"/>
+              </a:rPr>
+              <a:t>▸  Monatliche E-Mail an 5–10 Steuerberater mit einem aktuellen Branchenhinweis: „Für Ihre Mandanten in der Landwirtschaft: GAP-Änderungen ab Q3 2026 – was das für Investitionsfinanzierungen bedeutet" (Hinweis: Regelmäßige E-Mail-Kommunikation an externe Multiplikatoren ist datenschutzrechtlich und complianceseitig vorab mit der Compliance-/Datenschutzabteilung der Bank abzustimmen. Empfehlung: Kommunikation über offizielle Bank-Einladungen oder bankveranstaltete Formate läuft oft reibungsloser.)</a:t>
+            </a:r>
+          </a:p>
+          <a:p>
+            <a:pPr>
+              <a:spcBef>
+                <a:spcPts val="400"/>
+              </a:spcBef>
+              <a:spcAft>
+                <a:spcPts val="200"/>
+              </a:spcAft>
+            </a:pPr>
+            <a:r>
+              <a:rPr sz="1300">
+                <a:solidFill>
+                  <a:srgbClr val="3D5466"/>
+                </a:solidFill>
+                <a:latin typeface="Arial"/>
+              </a:rPr>
+              <a:t>▸  Kurzer Vortrag (15 Min.) bei IHK-Frühstück zu einem konkreten Finanzierungsthema</a:t>
+            </a:r>
+          </a:p>
+          <a:p>
+            <a:pPr>
+              <a:spcBef>
+                <a:spcPts val="400"/>
+              </a:spcBef>
+              <a:spcAft>
+                <a:spcPts val="200"/>
+              </a:spcAft>
+            </a:pPr>
+            <a:r>
+              <a:rPr sz="1300">
+                <a:solidFill>
+                  <a:srgbClr val="3D5466"/>
+                </a:solidFill>
+                <a:latin typeface="Arial"/>
+              </a:rPr>
+              <a:t>▸  LinkedIn-Post mit einer praxisnahen Erkenntnis aus einem anonymisierten Kundengespräch</a:t>
+            </a:r>
+          </a:p>
+        </p:txBody>
+      </p:sp>
+      <p:sp>
+        <p:nvSpPr>
+          <p:cNvPr id="9" name="Rectangle 8"/>
+          <p:cNvSpPr/>
+          <p:nvPr/>
+        </p:nvSpPr>
+        <p:spPr>
+          <a:xfrm>
+            <a:off x="0" y="6510528"/>
+            <a:ext cx="12188952" cy="347472"/>
+          </a:xfrm>
+          <a:prstGeom prst="rect">
+            <a:avLst/>
+          </a:prstGeom>
+          <a:solidFill>
+            <a:srgbClr val="0A1937"/>
+          </a:solidFill>
+          <a:ln>
+            <a:noFill/>
+          </a:ln>
+        </p:spPr>
+        <p:style>
+          <a:lnRef idx="1">
+            <a:schemeClr val="accent1"/>
+          </a:lnRef>
+          <a:fillRef idx="3">
+            <a:schemeClr val="accent1"/>
+          </a:fillRef>
+          <a:effectRef idx="2">
+            <a:schemeClr val="accent1"/>
+          </a:effectRef>
+          <a:fontRef idx="minor">
+            <a:schemeClr val="lt1"/>
+          </a:fontRef>
+        </p:style>
+        <p:txBody>
+          <a:bodyPr rtlCol="0" anchor="ctr"/>
+          <a:lstStyle/>
+          <a:p>
+            <a:pPr algn="ctr"/>
+          </a:p>
+        </p:txBody>
+      </p:sp>
+      <p:sp>
+        <p:nvSpPr>
+          <p:cNvPr id="10" name="TextBox 9"/>
+          <p:cNvSpPr txBox="1"/>
+          <p:nvPr/>
+        </p:nvSpPr>
+        <p:spPr>
+          <a:xfrm>
+            <a:off x="685800" y="6583680"/>
+            <a:ext cx="6490411" cy="256032"/>
+          </a:xfrm>
+          <a:prstGeom prst="rect">
+            <a:avLst/>
+          </a:prstGeom>
+          <a:noFill/>
+        </p:spPr>
+        <p:txBody>
+          <a:bodyPr wrap="none">
+            <a:spAutoFit/>
+          </a:bodyPr>
+          <a:lstStyle/>
+          <a:p>
+            <a:pPr algn="l"/>
+            <a:r>
+              <a:rPr sz="700">
+                <a:solidFill>
+                  <a:srgbClr val="A0B4D2"/>
+                </a:solidFill>
+                <a:latin typeface="JetBrains Mono"/>
+              </a:rPr>
+              <a:t>Benedikt Zoller Coaching  ·  FKB Campus  ·  M20</a:t>
             </a:r>
           </a:p>
         </p:txBody>
@@ -6871,14 +8792,6 @@
 <file path=ppt/slides/slide9.xml><?xml version="1.0" encoding="utf-8"?>
 <p:sld xmlns:a="http://schemas.openxmlformats.org/drawingml/2006/main" xmlns:p="http://schemas.openxmlformats.org/presentationml/2006/main" xmlns:r="http://schemas.openxmlformats.org/officeDocument/2006/relationships">
   <p:cSld>
-    <p:bg>
-      <p:bgPr>
-        <a:solidFill>
-          <a:srgbClr val="F8F8FA"/>
-        </a:solidFill>
-        <a:effectLst/>
-      </p:bgPr>
-    </p:bg>
     <p:spTree>
       <p:nvGrpSpPr>
         <p:cNvPr id="1" name=""/>
@@ -6888,125 +8801,20 @@
       <p:grpSpPr/>
       <p:sp>
         <p:nvSpPr>
-          <p:cNvPr id="2" name="TextBox 1"/>
-          <p:cNvSpPr txBox="1"/>
-          <p:nvPr/>
-        </p:nvSpPr>
-        <p:spPr>
-          <a:xfrm>
-            <a:off x="609600" y="279400"/>
-            <a:ext cx="2540000" cy="279400"/>
-          </a:xfrm>
-          <a:prstGeom prst="rect">
-            <a:avLst/>
-          </a:prstGeom>
-          <a:noFill/>
-        </p:spPr>
-        <p:txBody>
-          <a:bodyPr wrap="square">
-            <a:normAutofit/>
-          </a:bodyPr>
-          <a:lstStyle/>
-          <a:p>
-            <a:pPr algn="l"/>
-            <a:r>
-              <a:rPr sz="1000" b="1" i="0">
-                <a:solidFill>
-                  <a:srgbClr val="191D2E"/>
-                </a:solidFill>
-                <a:latin typeface="Arial"/>
-              </a:rPr>
-              <a:t>FKB  Campus</a:t>
-            </a:r>
-          </a:p>
-        </p:txBody>
-      </p:sp>
-      <p:sp>
-        <p:nvSpPr>
-          <p:cNvPr id="3" name="TextBox 2"/>
-          <p:cNvSpPr txBox="1"/>
-          <p:nvPr/>
-        </p:nvSpPr>
-        <p:spPr>
-          <a:xfrm>
-            <a:off x="609600" y="279400"/>
-            <a:ext cx="10972800" cy="279400"/>
-          </a:xfrm>
-          <a:prstGeom prst="rect">
-            <a:avLst/>
-          </a:prstGeom>
-          <a:noFill/>
-        </p:spPr>
-        <p:txBody>
-          <a:bodyPr wrap="square">
-            <a:normAutofit/>
-          </a:bodyPr>
-          <a:lstStyle/>
-          <a:p>
-            <a:pPr algn="r"/>
-            <a:r>
-              <a:rPr sz="900" b="0" i="0">
-                <a:solidFill>
-                  <a:srgbClr val="7B7FA0"/>
-                </a:solidFill>
-                <a:latin typeface="Courier New"/>
-              </a:rPr>
-              <a:t>III · SICHTBARKEIT AUFBAUEN — AUTHENTISCH</a:t>
-            </a:r>
-          </a:p>
-        </p:txBody>
-      </p:sp>
-      <p:sp>
-        <p:nvSpPr>
-          <p:cNvPr id="4" name="TextBox 3"/>
-          <p:cNvSpPr txBox="1"/>
-          <p:nvPr/>
-        </p:nvSpPr>
-        <p:spPr>
-          <a:xfrm>
-            <a:off x="609600" y="6426200"/>
-            <a:ext cx="10972800" cy="228600"/>
-          </a:xfrm>
-          <a:prstGeom prst="rect">
-            <a:avLst/>
-          </a:prstGeom>
-          <a:noFill/>
-        </p:spPr>
-        <p:txBody>
-          <a:bodyPr wrap="square">
-            <a:normAutofit/>
-          </a:bodyPr>
-          <a:lstStyle/>
-          <a:p>
-            <a:pPr algn="r"/>
-            <a:r>
-              <a:rPr sz="900" b="0" i="0">
-                <a:solidFill>
-                  <a:srgbClr val="7B7FA0"/>
-                </a:solidFill>
-                <a:latin typeface="Courier New"/>
-              </a:rPr>
-              <a:t>09</a:t>
-            </a:r>
-          </a:p>
-        </p:txBody>
-      </p:sp>
-      <p:sp>
-        <p:nvSpPr>
-          <p:cNvPr id="5" name="Rectangle 4"/>
+          <p:cNvPr id="2" name="Rectangle 1"/>
           <p:cNvSpPr/>
           <p:nvPr/>
         </p:nvSpPr>
         <p:spPr>
           <a:xfrm>
-            <a:off x="609600" y="825500"/>
-            <a:ext cx="10972800" cy="6350"/>
+            <a:off x="0" y="0"/>
+            <a:ext cx="12188952" cy="6858000"/>
           </a:xfrm>
           <a:prstGeom prst="rect">
             <a:avLst/>
           </a:prstGeom>
           <a:solidFill>
-            <a:srgbClr val="191D2E"/>
+            <a:srgbClr val="EDEDF3"/>
           </a:solidFill>
           <a:ln>
             <a:noFill/>
@@ -7036,55 +8844,20 @@
       </p:sp>
       <p:sp>
         <p:nvSpPr>
-          <p:cNvPr id="6" name="TextBox 5"/>
-          <p:cNvSpPr txBox="1"/>
-          <p:nvPr/>
-        </p:nvSpPr>
-        <p:spPr>
-          <a:xfrm>
-            <a:off x="609600" y="920750"/>
-            <a:ext cx="10972800" cy="1778000"/>
-          </a:xfrm>
-          <a:prstGeom prst="rect">
-            <a:avLst/>
-          </a:prstGeom>
-          <a:noFill/>
-        </p:spPr>
-        <p:txBody>
-          <a:bodyPr wrap="square">
-            <a:normAutofit/>
-          </a:bodyPr>
-          <a:lstStyle/>
-          <a:p>
-            <a:pPr algn="l"/>
-            <a:r>
-              <a:rPr sz="3800" b="0" i="0">
-                <a:solidFill>
-                  <a:srgbClr val="191D2E"/>
-                </a:solidFill>
-                <a:latin typeface="Georgia"/>
-              </a:rPr>
-              <a:t>90-Tage-Netzwerkplan: Konkret werden</a:t>
-            </a:r>
-          </a:p>
-        </p:txBody>
-      </p:sp>
-      <p:sp>
-        <p:nvSpPr>
-          <p:cNvPr id="7" name="Rectangle 6"/>
+          <p:cNvPr id="3" name="Rectangle 2"/>
           <p:cNvSpPr/>
           <p:nvPr/>
         </p:nvSpPr>
         <p:spPr>
           <a:xfrm>
-            <a:off x="609600" y="2762250"/>
-            <a:ext cx="10972800" cy="6350"/>
+            <a:off x="0" y="0"/>
+            <a:ext cx="12188952" cy="50292"/>
           </a:xfrm>
           <a:prstGeom prst="rect">
             <a:avLst/>
           </a:prstGeom>
           <a:solidFill>
-            <a:srgbClr val="E0E0E8"/>
+            <a:srgbClr val="1F2C56"/>
           </a:solidFill>
           <a:ln>
             <a:noFill/>
@@ -7114,14 +8887,170 @@
       </p:sp>
       <p:sp>
         <p:nvSpPr>
+          <p:cNvPr id="4" name="TextBox 3"/>
+          <p:cNvSpPr txBox="1"/>
+          <p:nvPr/>
+        </p:nvSpPr>
+        <p:spPr>
+          <a:xfrm>
+            <a:off x="685800" y="109728"/>
+            <a:ext cx="10817352" cy="228600"/>
+          </a:xfrm>
+          <a:prstGeom prst="rect">
+            <a:avLst/>
+          </a:prstGeom>
+          <a:noFill/>
+        </p:spPr>
+        <p:txBody>
+          <a:bodyPr wrap="none">
+            <a:spAutoFit/>
+          </a:bodyPr>
+          <a:lstStyle/>
+          <a:p>
+            <a:pPr algn="l"/>
+            <a:r>
+              <a:rPr sz="750">
+                <a:solidFill>
+                  <a:srgbClr val="78808C"/>
+                </a:solidFill>
+                <a:latin typeface="JetBrains Mono"/>
+              </a:rPr>
+              <a:t>M20  ·  INHALT</a:t>
+            </a:r>
+          </a:p>
+        </p:txBody>
+      </p:sp>
+      <p:sp>
+        <p:nvSpPr>
+          <p:cNvPr id="5" name="Rectangle 4"/>
+          <p:cNvSpPr/>
+          <p:nvPr/>
+        </p:nvSpPr>
+        <p:spPr>
+          <a:xfrm>
+            <a:off x="0" y="1234440"/>
+            <a:ext cx="12188952" cy="12700"/>
+          </a:xfrm>
+          <a:prstGeom prst="rect">
+            <a:avLst/>
+          </a:prstGeom>
+          <a:solidFill>
+            <a:srgbClr val="D8DFE4"/>
+          </a:solidFill>
+          <a:ln>
+            <a:noFill/>
+          </a:ln>
+        </p:spPr>
+        <p:style>
+          <a:lnRef idx="1">
+            <a:schemeClr val="accent1"/>
+          </a:lnRef>
+          <a:fillRef idx="3">
+            <a:schemeClr val="accent1"/>
+          </a:fillRef>
+          <a:effectRef idx="2">
+            <a:schemeClr val="accent1"/>
+          </a:effectRef>
+          <a:fontRef idx="minor">
+            <a:schemeClr val="lt1"/>
+          </a:fontRef>
+        </p:style>
+        <p:txBody>
+          <a:bodyPr rtlCol="0" anchor="ctr"/>
+          <a:lstStyle/>
+          <a:p>
+            <a:pPr algn="ctr"/>
+          </a:p>
+        </p:txBody>
+      </p:sp>
+      <p:sp>
+        <p:nvSpPr>
+          <p:cNvPr id="6" name="Rectangle 5"/>
+          <p:cNvSpPr/>
+          <p:nvPr/>
+        </p:nvSpPr>
+        <p:spPr>
+          <a:xfrm>
+            <a:off x="685800" y="502920"/>
+            <a:ext cx="36576" cy="658368"/>
+          </a:xfrm>
+          <a:prstGeom prst="rect">
+            <a:avLst/>
+          </a:prstGeom>
+          <a:solidFill>
+            <a:srgbClr val="D9C089"/>
+          </a:solidFill>
+          <a:ln>
+            <a:noFill/>
+          </a:ln>
+        </p:spPr>
+        <p:style>
+          <a:lnRef idx="1">
+            <a:schemeClr val="accent1"/>
+          </a:lnRef>
+          <a:fillRef idx="3">
+            <a:schemeClr val="accent1"/>
+          </a:fillRef>
+          <a:effectRef idx="2">
+            <a:schemeClr val="accent1"/>
+          </a:effectRef>
+          <a:fontRef idx="minor">
+            <a:schemeClr val="lt1"/>
+          </a:fontRef>
+        </p:style>
+        <p:txBody>
+          <a:bodyPr rtlCol="0" anchor="ctr"/>
+          <a:lstStyle/>
+          <a:p>
+            <a:pPr algn="ctr"/>
+          </a:p>
+        </p:txBody>
+      </p:sp>
+      <p:sp>
+        <p:nvSpPr>
+          <p:cNvPr id="7" name="TextBox 6"/>
+          <p:cNvSpPr txBox="1"/>
+          <p:nvPr/>
+        </p:nvSpPr>
+        <p:spPr>
+          <a:xfrm>
+            <a:off x="813816" y="502920"/>
+            <a:ext cx="10634472" cy="685800"/>
+          </a:xfrm>
+          <a:prstGeom prst="rect">
+            <a:avLst/>
+          </a:prstGeom>
+          <a:noFill/>
+        </p:spPr>
+        <p:txBody>
+          <a:bodyPr wrap="square">
+            <a:spAutoFit/>
+          </a:bodyPr>
+          <a:lstStyle/>
+          <a:p>
+            <a:pPr algn="l"/>
+            <a:r>
+              <a:rPr sz="2400" b="1" i="0">
+                <a:solidFill>
+                  <a:srgbClr val="1F2C56"/>
+                </a:solidFill>
+                <a:latin typeface="Source Serif 4"/>
+              </a:rPr>
+              <a:t>Format 2: Empfehlungen geben, bevor man welche bekommt</a:t>
+            </a:r>
+          </a:p>
+        </p:txBody>
+      </p:sp>
+      <p:sp>
+        <p:nvSpPr>
           <p:cNvPr id="8" name="TextBox 7"/>
           <p:cNvSpPr txBox="1"/>
           <p:nvPr/>
         </p:nvSpPr>
         <p:spPr>
           <a:xfrm>
-            <a:off x="609600" y="2851150"/>
-            <a:ext cx="10972800" cy="3448050"/>
+            <a:off x="685800" y="1417320"/>
+            <a:ext cx="10817352" cy="5029200"/>
           </a:xfrm>
           <a:prstGeom prst="rect">
             <a:avLst/>
@@ -7130,83 +9059,104 @@
         </p:spPr>
         <p:txBody>
           <a:bodyPr wrap="square">
-            <a:normAutofit/>
+            <a:spAutoFit/>
           </a:bodyPr>
           <a:lstStyle/>
           <a:p>
             <a:pPr>
               <a:spcBef>
-                <a:spcPts val="600"/>
+                <a:spcPts val="400"/>
               </a:spcBef>
               <a:spcAft>
-                <a:spcPts val="600"/>
+                <a:spcPts val="200"/>
               </a:spcAft>
             </a:pPr>
             <a:r>
-              <a:rPr sz="1400">
-                <a:solidFill>
-                  <a:srgbClr val="191D2E"/>
-                </a:solidFill>
-                <a:latin typeface="Georgia"/>
-              </a:rPr>
-              <a:t>–  Monat 1: Netzwerkanalyse + fünf Stärkungsgespräche</a:t>
-            </a:r>
-          </a:p>
-          <a:p>
-            <a:pPr>
-              <a:spcBef>
-                <a:spcPts val="600"/>
-              </a:spcBef>
-              <a:spcAft>
-                <a:spcPts val="600"/>
-              </a:spcAft>
-            </a:pPr>
-            <a:r>
-              <a:rPr sz="1400">
-                <a:solidFill>
-                  <a:srgbClr val="191D2E"/>
-                </a:solidFill>
-                <a:latin typeface="Georgia"/>
-              </a:rPr>
-              <a:t>–  Monat 2: Zwei neue Kooperationspartner ansprechen</a:t>
-            </a:r>
-          </a:p>
-          <a:p>
-            <a:pPr>
-              <a:spcBef>
-                <a:spcPts val="600"/>
-              </a:spcBef>
-              <a:spcAft>
-                <a:spcPts val="600"/>
-              </a:spcAft>
-            </a:pPr>
-            <a:r>
-              <a:rPr sz="1400">
-                <a:solidFill>
-                  <a:srgbClr val="191D2E"/>
-                </a:solidFill>
-                <a:latin typeface="Georgia"/>
-              </a:rPr>
-              <a:t>–  Monat 3: Einen LinkedIn-Beitrag veröffentlichen oder Vortrag halten</a:t>
-            </a:r>
-          </a:p>
-          <a:p>
-            <a:pPr>
-              <a:spcBef>
-                <a:spcPts val="600"/>
-              </a:spcBef>
-              <a:spcAft>
-                <a:spcPts val="600"/>
-              </a:spcAft>
-            </a:pPr>
-            <a:r>
-              <a:rPr sz="1400">
-                <a:solidFill>
-                  <a:srgbClr val="191D2E"/>
-                </a:solidFill>
-                <a:latin typeface="Georgia"/>
-              </a:rPr>
-              <a:t>–  Messbar: Wie viele qualifizierte Empfehlungen im Quartal?</a:t>
+              <a:rPr sz="1200">
+                <a:solidFill>
+                  <a:srgbClr val="3D5466"/>
+                </a:solidFill>
+                <a:latin typeface="Arial"/>
+              </a:rPr>
+              <a:t>Praxisregel: „Ein guter Netzwerkpartner merkt, dass er zu mir gehört, bevor er das erste Mal mit mir gearbeitet hat."</a:t>
+            </a:r>
+          </a:p>
+        </p:txBody>
+      </p:sp>
+      <p:sp>
+        <p:nvSpPr>
+          <p:cNvPr id="9" name="Rectangle 8"/>
+          <p:cNvSpPr/>
+          <p:nvPr/>
+        </p:nvSpPr>
+        <p:spPr>
+          <a:xfrm>
+            <a:off x="0" y="6510528"/>
+            <a:ext cx="12188952" cy="347472"/>
+          </a:xfrm>
+          <a:prstGeom prst="rect">
+            <a:avLst/>
+          </a:prstGeom>
+          <a:solidFill>
+            <a:srgbClr val="0A1937"/>
+          </a:solidFill>
+          <a:ln>
+            <a:noFill/>
+          </a:ln>
+        </p:spPr>
+        <p:style>
+          <a:lnRef idx="1">
+            <a:schemeClr val="accent1"/>
+          </a:lnRef>
+          <a:fillRef idx="3">
+            <a:schemeClr val="accent1"/>
+          </a:fillRef>
+          <a:effectRef idx="2">
+            <a:schemeClr val="accent1"/>
+          </a:effectRef>
+          <a:fontRef idx="minor">
+            <a:schemeClr val="lt1"/>
+          </a:fontRef>
+        </p:style>
+        <p:txBody>
+          <a:bodyPr rtlCol="0" anchor="ctr"/>
+          <a:lstStyle/>
+          <a:p>
+            <a:pPr algn="ctr"/>
+          </a:p>
+        </p:txBody>
+      </p:sp>
+      <p:sp>
+        <p:nvSpPr>
+          <p:cNvPr id="10" name="TextBox 9"/>
+          <p:cNvSpPr txBox="1"/>
+          <p:nvPr/>
+        </p:nvSpPr>
+        <p:spPr>
+          <a:xfrm>
+            <a:off x="685800" y="6583680"/>
+            <a:ext cx="6490411" cy="256032"/>
+          </a:xfrm>
+          <a:prstGeom prst="rect">
+            <a:avLst/>
+          </a:prstGeom>
+          <a:noFill/>
+        </p:spPr>
+        <p:txBody>
+          <a:bodyPr wrap="none">
+            <a:spAutoFit/>
+          </a:bodyPr>
+          <a:lstStyle/>
+          <a:p>
+            <a:pPr algn="l"/>
+            <a:r>
+              <a:rPr sz="700">
+                <a:solidFill>
+                  <a:srgbClr val="A0B4D2"/>
+                </a:solidFill>
+                <a:latin typeface="JetBrains Mono"/>
+              </a:rPr>
+              <a:t>Benedikt Zoller Coaching  ·  FKB Campus  ·  M20</a:t>
             </a:r>
           </a:p>
         </p:txBody>

--- a/public/downloads/praesentation/M20.pptx
+++ b/public/downloads/praesentation/M20.pptx
@@ -3259,7 +3259,42 @@
       </p:sp>
       <p:sp>
         <p:nvSpPr>
-          <p:cNvPr id="6" name="Rectangle 5"/>
+          <p:cNvPr id="6" name="TextBox 5"/>
+          <p:cNvSpPr txBox="1"/>
+          <p:nvPr/>
+        </p:nvSpPr>
+        <p:spPr>
+          <a:xfrm>
+            <a:off x="685800" y="3977639"/>
+            <a:ext cx="10817352" cy="731520"/>
+          </a:xfrm>
+          <a:prstGeom prst="rect">
+            <a:avLst/>
+          </a:prstGeom>
+          <a:noFill/>
+        </p:spPr>
+        <p:txBody>
+          <a:bodyPr wrap="square">
+            <a:spAutoFit/>
+          </a:bodyPr>
+          <a:lstStyle/>
+          <a:p>
+            <a:pPr algn="l"/>
+            <a:r>
+              <a:rPr sz="1900" b="0" i="1">
+                <a:solidFill>
+                  <a:srgbClr val="BECDE6"/>
+                </a:solidFill>
+                <a:latin typeface="Source Serif 4"/>
+              </a:rPr>
+              <a:t>Strategisches Beziehungskapital aufbauen und Fachexpertise im Markt positionieren</a:t>
+            </a:r>
+          </a:p>
+        </p:txBody>
+      </p:sp>
+      <p:sp>
+        <p:nvSpPr>
+          <p:cNvPr id="7" name="Rectangle 6"/>
           <p:cNvSpPr/>
           <p:nvPr/>
         </p:nvSpPr>
@@ -3302,14 +3337,14 @@
       </p:sp>
       <p:sp>
         <p:nvSpPr>
-          <p:cNvPr id="7" name="TextBox 6"/>
+          <p:cNvPr id="8" name="TextBox 7"/>
           <p:cNvSpPr txBox="1"/>
           <p:nvPr/>
         </p:nvSpPr>
         <p:spPr>
           <a:xfrm>
             <a:off x="685800" y="5193792"/>
-            <a:ext cx="5408676" cy="201168"/>
+            <a:ext cx="3605784" cy="201168"/>
           </a:xfrm>
           <a:prstGeom prst="rect">
             <a:avLst/>
@@ -3330,21 +3365,21 @@
                 </a:solidFill>
                 <a:latin typeface="JetBrains Mono"/>
               </a:rPr>
-              <a:t>KOMPETENZSTUFE</a:t>
-            </a:r>
-          </a:p>
-        </p:txBody>
-      </p:sp>
-      <p:sp>
-        <p:nvSpPr>
-          <p:cNvPr id="8" name="TextBox 7"/>
+              <a:t>KOMPETENZFELD</a:t>
+            </a:r>
+          </a:p>
+        </p:txBody>
+      </p:sp>
+      <p:sp>
+        <p:nvSpPr>
+          <p:cNvPr id="9" name="TextBox 8"/>
           <p:cNvSpPr txBox="1"/>
           <p:nvPr/>
         </p:nvSpPr>
         <p:spPr>
           <a:xfrm>
             <a:off x="685800" y="5394960"/>
-            <a:ext cx="5408676" cy="320040"/>
+            <a:ext cx="3605784" cy="320040"/>
           </a:xfrm>
           <a:prstGeom prst="rect">
             <a:avLst/>
@@ -3365,21 +3400,21 @@
                 </a:solidFill>
                 <a:latin typeface="Arial"/>
               </a:rPr>
-              <a:t>Stratege</a:t>
-            </a:r>
-          </a:p>
-        </p:txBody>
-      </p:sp>
-      <p:sp>
-        <p:nvSpPr>
-          <p:cNvPr id="9" name="TextBox 8"/>
+              <a:t>K-06 Führung &amp; Entwicklung</a:t>
+            </a:r>
+          </a:p>
+        </p:txBody>
+      </p:sp>
+      <p:sp>
+        <p:nvSpPr>
+          <p:cNvPr id="10" name="TextBox 9"/>
           <p:cNvSpPr txBox="1"/>
           <p:nvPr/>
         </p:nvSpPr>
         <p:spPr>
           <a:xfrm>
-            <a:off x="6094476" y="5193792"/>
-            <a:ext cx="5408676" cy="201168"/>
+            <a:off x="4291584" y="5193792"/>
+            <a:ext cx="3605784" cy="201168"/>
           </a:xfrm>
           <a:prstGeom prst="rect">
             <a:avLst/>
@@ -3400,21 +3435,21 @@
                 </a:solidFill>
                 <a:latin typeface="JetBrains Mono"/>
               </a:rPr>
-              <a:t>VERSION</a:t>
-            </a:r>
-          </a:p>
-        </p:txBody>
-      </p:sp>
-      <p:sp>
-        <p:nvSpPr>
-          <p:cNvPr id="10" name="TextBox 9"/>
+              <a:t>KOMPETENZSTUFE</a:t>
+            </a:r>
+          </a:p>
+        </p:txBody>
+      </p:sp>
+      <p:sp>
+        <p:nvSpPr>
+          <p:cNvPr id="11" name="TextBox 10"/>
           <p:cNvSpPr txBox="1"/>
           <p:nvPr/>
         </p:nvSpPr>
         <p:spPr>
           <a:xfrm>
-            <a:off x="6094476" y="5394960"/>
-            <a:ext cx="5408676" cy="320040"/>
+            <a:off x="4291584" y="5394960"/>
+            <a:ext cx="3605784" cy="320040"/>
           </a:xfrm>
           <a:prstGeom prst="rect">
             <a:avLst/>
@@ -3435,6 +3470,76 @@
                 </a:solidFill>
                 <a:latin typeface="Arial"/>
               </a:rPr>
+              <a:t>Stratege</a:t>
+            </a:r>
+          </a:p>
+        </p:txBody>
+      </p:sp>
+      <p:sp>
+        <p:nvSpPr>
+          <p:cNvPr id="12" name="TextBox 11"/>
+          <p:cNvSpPr txBox="1"/>
+          <p:nvPr/>
+        </p:nvSpPr>
+        <p:spPr>
+          <a:xfrm>
+            <a:off x="7897368" y="5193792"/>
+            <a:ext cx="3605784" cy="201168"/>
+          </a:xfrm>
+          <a:prstGeom prst="rect">
+            <a:avLst/>
+          </a:prstGeom>
+          <a:noFill/>
+        </p:spPr>
+        <p:txBody>
+          <a:bodyPr wrap="none">
+            <a:spAutoFit/>
+          </a:bodyPr>
+          <a:lstStyle/>
+          <a:p>
+            <a:pPr algn="l"/>
+            <a:r>
+              <a:rPr sz="700">
+                <a:solidFill>
+                  <a:srgbClr val="A0B4D2"/>
+                </a:solidFill>
+                <a:latin typeface="JetBrains Mono"/>
+              </a:rPr>
+              <a:t>VERSION</a:t>
+            </a:r>
+          </a:p>
+        </p:txBody>
+      </p:sp>
+      <p:sp>
+        <p:nvSpPr>
+          <p:cNvPr id="13" name="TextBox 12"/>
+          <p:cNvSpPr txBox="1"/>
+          <p:nvPr/>
+        </p:nvSpPr>
+        <p:spPr>
+          <a:xfrm>
+            <a:off x="7897368" y="5394960"/>
+            <a:ext cx="3605784" cy="320040"/>
+          </a:xfrm>
+          <a:prstGeom prst="rect">
+            <a:avLst/>
+          </a:prstGeom>
+          <a:noFill/>
+        </p:spPr>
+        <p:txBody>
+          <a:bodyPr wrap="square">
+            <a:spAutoFit/>
+          </a:bodyPr>
+          <a:lstStyle/>
+          <a:p>
+            <a:pPr algn="l"/>
+            <a:r>
+              <a:rPr sz="1100" b="0" i="0">
+                <a:solidFill>
+                  <a:srgbClr val="FFFFFF"/>
+                </a:solidFill>
+                <a:latin typeface="Arial"/>
+              </a:rPr>
               <a:t>v0.4</a:t>
             </a:r>
           </a:p>
@@ -3442,7 +3547,7 @@
       </p:sp>
       <p:sp>
         <p:nvSpPr>
-          <p:cNvPr id="11" name="Rectangle 10"/>
+          <p:cNvPr id="14" name="Rectangle 13"/>
           <p:cNvSpPr/>
           <p:nvPr/>
         </p:nvSpPr>
@@ -3485,7 +3590,7 @@
       </p:sp>
       <p:sp>
         <p:nvSpPr>
-          <p:cNvPr id="12" name="TextBox 11"/>
+          <p:cNvPr id="15" name="TextBox 14"/>
           <p:cNvSpPr txBox="1"/>
           <p:nvPr/>
         </p:nvSpPr>
@@ -3520,7 +3625,7 @@
       </p:sp>
       <p:sp>
         <p:nvSpPr>
-          <p:cNvPr id="13" name="TextBox 12"/>
+          <p:cNvPr id="16" name="TextBox 15"/>
           <p:cNvSpPr txBox="1"/>
           <p:nvPr/>
         </p:nvSpPr>
